--- a/20242-NLP-LLM/lecture notes/Part 1 - Introduction to NLP/1-introduction to NLP.pptx
+++ b/20242-NLP-LLM/lecture notes/Part 1 - Introduction to NLP/1-introduction to NLP.pptx
@@ -5,7 +5,7 @@
     <p:sldMasterId id="2147483648" r:id="rId1"/>
   </p:sldMasterIdLst>
   <p:notesMasterIdLst>
-    <p:notesMasterId r:id="rId32"/>
+    <p:notesMasterId r:id="rId35"/>
   </p:notesMasterIdLst>
   <p:sldIdLst>
     <p:sldId id="455" r:id="rId2"/>
@@ -37,7 +37,10 @@
     <p:sldId id="555" r:id="rId28"/>
     <p:sldId id="549" r:id="rId29"/>
     <p:sldId id="547" r:id="rId30"/>
-    <p:sldId id="548" r:id="rId31"/>
+    <p:sldId id="557" r:id="rId31"/>
+    <p:sldId id="548" r:id="rId32"/>
+    <p:sldId id="556" r:id="rId33"/>
+    <p:sldId id="558" r:id="rId34"/>
   </p:sldIdLst>
   <p:sldSz cx="12192000" cy="6858000"/>
   <p:notesSz cx="6858000" cy="9144000"/>
@@ -154,7 +157,7 @@
 <p1510:revInfo xmlns:a="http://schemas.openxmlformats.org/drawingml/2006/main" xmlns:r="http://schemas.openxmlformats.org/officeDocument/2006/relationships" xmlns:p1510="http://schemas.microsoft.com/office/powerpoint/2015/10/main">
   <p1510:revLst>
     <p1510:client id="{1BAE7373-BC78-49F1-9262-209B991CDE28}" v="31" dt="2025-03-15T11:49:33.004"/>
-    <p1510:client id="{534F862C-5423-415F-8625-CCE86B4944CE}" v="38" dt="2025-03-15T15:11:24.982"/>
+    <p1510:client id="{534F862C-5423-415F-8625-CCE86B4944CE}" v="42" dt="2025-03-15T15:46:18.147"/>
   </p1510:revLst>
 </p1510:revInfo>
 </file>
@@ -1624,7 +1627,7 @@
   <pc:docChgLst>
     <pc:chgData name="Mohammed Fasha" userId="cc64f42d-a1a6-4f08-b97b-0c37f877119f" providerId="ADAL" clId="{534F862C-5423-415F-8625-CCE86B4944CE}"/>
     <pc:docChg chg="undo redo custSel addSld delSld modSld sldOrd">
-      <pc:chgData name="Mohammed Fasha" userId="cc64f42d-a1a6-4f08-b97b-0c37f877119f" providerId="ADAL" clId="{534F862C-5423-415F-8625-CCE86B4944CE}" dt="2025-03-15T15:25:49.352" v="1061" actId="20577"/>
+      <pc:chgData name="Mohammed Fasha" userId="cc64f42d-a1a6-4f08-b97b-0c37f877119f" providerId="ADAL" clId="{534F862C-5423-415F-8625-CCE86B4944CE}" dt="2025-03-15T15:46:18.147" v="1203"/>
       <pc:docMkLst>
         <pc:docMk/>
       </pc:docMkLst>
@@ -2352,13 +2355,13 @@
         </pc:spChg>
       </pc:sldChg>
       <pc:sldChg chg="modSp add mod">
-        <pc:chgData name="Mohammed Fasha" userId="cc64f42d-a1a6-4f08-b97b-0c37f877119f" providerId="ADAL" clId="{534F862C-5423-415F-8625-CCE86B4944CE}" dt="2025-03-15T14:56:50.704" v="775" actId="5793"/>
+        <pc:chgData name="Mohammed Fasha" userId="cc64f42d-a1a6-4f08-b97b-0c37f877119f" providerId="ADAL" clId="{534F862C-5423-415F-8625-CCE86B4944CE}" dt="2025-03-15T15:37:47.199" v="1107" actId="20577"/>
         <pc:sldMkLst>
           <pc:docMk/>
           <pc:sldMk cId="184126415" sldId="547"/>
         </pc:sldMkLst>
         <pc:spChg chg="mod">
-          <ac:chgData name="Mohammed Fasha" userId="cc64f42d-a1a6-4f08-b97b-0c37f877119f" providerId="ADAL" clId="{534F862C-5423-415F-8625-CCE86B4944CE}" dt="2025-03-15T14:56:01.910" v="747"/>
+          <ac:chgData name="Mohammed Fasha" userId="cc64f42d-a1a6-4f08-b97b-0c37f877119f" providerId="ADAL" clId="{534F862C-5423-415F-8625-CCE86B4944CE}" dt="2025-03-15T15:37:32.307" v="1099" actId="21"/>
           <ac:spMkLst>
             <pc:docMk/>
             <pc:sldMk cId="184126415" sldId="547"/>
@@ -2366,7 +2369,7 @@
           </ac:spMkLst>
         </pc:spChg>
         <pc:spChg chg="mod">
-          <ac:chgData name="Mohammed Fasha" userId="cc64f42d-a1a6-4f08-b97b-0c37f877119f" providerId="ADAL" clId="{534F862C-5423-415F-8625-CCE86B4944CE}" dt="2025-03-15T14:56:50.704" v="775" actId="5793"/>
+          <ac:chgData name="Mohammed Fasha" userId="cc64f42d-a1a6-4f08-b97b-0c37f877119f" providerId="ADAL" clId="{534F862C-5423-415F-8625-CCE86B4944CE}" dt="2025-03-15T15:37:47.199" v="1107" actId="20577"/>
           <ac:spMkLst>
             <pc:docMk/>
             <pc:sldMk cId="184126415" sldId="547"/>
@@ -2444,7 +2447,7 @@
         </pc:spChg>
       </pc:sldChg>
       <pc:sldChg chg="addSp modSp new mod">
-        <pc:chgData name="Mohammed Fasha" userId="cc64f42d-a1a6-4f08-b97b-0c37f877119f" providerId="ADAL" clId="{534F862C-5423-415F-8625-CCE86B4944CE}" dt="2025-03-15T15:07:03.442" v="895" actId="15"/>
+        <pc:chgData name="Mohammed Fasha" userId="cc64f42d-a1a6-4f08-b97b-0c37f877119f" providerId="ADAL" clId="{534F862C-5423-415F-8625-CCE86B4944CE}" dt="2025-03-15T15:46:18.147" v="1203"/>
         <pc:sldMkLst>
           <pc:docMk/>
           <pc:sldMk cId="51728829" sldId="550"/>
@@ -2458,7 +2461,7 @@
           </ac:spMkLst>
         </pc:spChg>
         <pc:spChg chg="mod">
-          <ac:chgData name="Mohammed Fasha" userId="cc64f42d-a1a6-4f08-b97b-0c37f877119f" providerId="ADAL" clId="{534F862C-5423-415F-8625-CCE86B4944CE}" dt="2025-03-15T15:07:03.442" v="895" actId="15"/>
+          <ac:chgData name="Mohammed Fasha" userId="cc64f42d-a1a6-4f08-b97b-0c37f877119f" providerId="ADAL" clId="{534F862C-5423-415F-8625-CCE86B4944CE}" dt="2025-03-15T15:41:10.824" v="1163" actId="1076"/>
           <ac:spMkLst>
             <pc:docMk/>
             <pc:sldMk cId="51728829" sldId="550"/>
@@ -2473,6 +2476,22 @@
             <ac:spMk id="4" creationId="{FDD15BE4-049C-3B76-CA33-46995EADA93B}"/>
           </ac:spMkLst>
         </pc:spChg>
+        <pc:spChg chg="add mod">
+          <ac:chgData name="Mohammed Fasha" userId="cc64f42d-a1a6-4f08-b97b-0c37f877119f" providerId="ADAL" clId="{534F862C-5423-415F-8625-CCE86B4944CE}" dt="2025-03-15T15:43:27.748" v="1202" actId="1076"/>
+          <ac:spMkLst>
+            <pc:docMk/>
+            <pc:sldMk cId="51728829" sldId="550"/>
+            <ac:spMk id="5" creationId="{E4B45F60-6A90-D73F-5226-35583B598BAF}"/>
+          </ac:spMkLst>
+        </pc:spChg>
+        <pc:picChg chg="add mod">
+          <ac:chgData name="Mohammed Fasha" userId="cc64f42d-a1a6-4f08-b97b-0c37f877119f" providerId="ADAL" clId="{534F862C-5423-415F-8625-CCE86B4944CE}" dt="2025-03-15T15:46:18.147" v="1203"/>
+          <ac:picMkLst>
+            <pc:docMk/>
+            <pc:sldMk cId="51728829" sldId="550"/>
+            <ac:picMk id="7" creationId="{4E45092A-0334-B657-140F-ACD092334510}"/>
+          </ac:picMkLst>
+        </pc:picChg>
       </pc:sldChg>
       <pc:sldChg chg="addSp delSp modSp new mod modClrScheme chgLayout">
         <pc:chgData name="Mohammed Fasha" userId="cc64f42d-a1a6-4f08-b97b-0c37f877119f" providerId="ADAL" clId="{534F862C-5423-415F-8625-CCE86B4944CE}" dt="2025-03-15T15:03:53.820" v="869"/>
@@ -2618,6 +2637,75 @@
             <pc:docMk/>
             <pc:sldMk cId="1685077969" sldId="555"/>
             <ac:spMk id="5" creationId="{B46EFC3A-E068-E521-28EF-F622AF72DE4A}"/>
+          </ac:spMkLst>
+        </pc:spChg>
+      </pc:sldChg>
+      <pc:sldChg chg="modSp new mod ord">
+        <pc:chgData name="Mohammed Fasha" userId="cc64f42d-a1a6-4f08-b97b-0c37f877119f" providerId="ADAL" clId="{534F862C-5423-415F-8625-CCE86B4944CE}" dt="2025-03-15T15:38:28.503" v="1122"/>
+        <pc:sldMkLst>
+          <pc:docMk/>
+          <pc:sldMk cId="2953760213" sldId="556"/>
+        </pc:sldMkLst>
+        <pc:spChg chg="mod">
+          <ac:chgData name="Mohammed Fasha" userId="cc64f42d-a1a6-4f08-b97b-0c37f877119f" providerId="ADAL" clId="{534F862C-5423-415F-8625-CCE86B4944CE}" dt="2025-03-15T15:35:34.357" v="1071" actId="27636"/>
+          <ac:spMkLst>
+            <pc:docMk/>
+            <pc:sldMk cId="2953760213" sldId="556"/>
+            <ac:spMk id="2" creationId="{AAE809B9-C541-93EC-3335-246077D074AB}"/>
+          </ac:spMkLst>
+        </pc:spChg>
+        <pc:spChg chg="mod">
+          <ac:chgData name="Mohammed Fasha" userId="cc64f42d-a1a6-4f08-b97b-0c37f877119f" providerId="ADAL" clId="{534F862C-5423-415F-8625-CCE86B4944CE}" dt="2025-03-15T15:35:56.072" v="1095" actId="12"/>
+          <ac:spMkLst>
+            <pc:docMk/>
+            <pc:sldMk cId="2953760213" sldId="556"/>
+            <ac:spMk id="3" creationId="{69D30B70-3D40-0B59-B5B7-CE324493CD2A}"/>
+          </ac:spMkLst>
+        </pc:spChg>
+      </pc:sldChg>
+      <pc:sldChg chg="modSp new mod">
+        <pc:chgData name="Mohammed Fasha" userId="cc64f42d-a1a6-4f08-b97b-0c37f877119f" providerId="ADAL" clId="{534F862C-5423-415F-8625-CCE86B4944CE}" dt="2025-03-15T15:38:18.785" v="1118" actId="12"/>
+        <pc:sldMkLst>
+          <pc:docMk/>
+          <pc:sldMk cId="47443413" sldId="557"/>
+        </pc:sldMkLst>
+        <pc:spChg chg="mod">
+          <ac:chgData name="Mohammed Fasha" userId="cc64f42d-a1a6-4f08-b97b-0c37f877119f" providerId="ADAL" clId="{534F862C-5423-415F-8625-CCE86B4944CE}" dt="2025-03-15T15:38:07.870" v="1116" actId="27636"/>
+          <ac:spMkLst>
+            <pc:docMk/>
+            <pc:sldMk cId="47443413" sldId="557"/>
+            <ac:spMk id="2" creationId="{67BDB5D0-D88F-6743-CED4-6F576F09C5F4}"/>
+          </ac:spMkLst>
+        </pc:spChg>
+        <pc:spChg chg="mod">
+          <ac:chgData name="Mohammed Fasha" userId="cc64f42d-a1a6-4f08-b97b-0c37f877119f" providerId="ADAL" clId="{534F862C-5423-415F-8625-CCE86B4944CE}" dt="2025-03-15T15:38:18.785" v="1118" actId="12"/>
+          <ac:spMkLst>
+            <pc:docMk/>
+            <pc:sldMk cId="47443413" sldId="557"/>
+            <ac:spMk id="3" creationId="{F7989134-F312-1A22-436B-CB5CF1A8549A}"/>
+          </ac:spMkLst>
+        </pc:spChg>
+      </pc:sldChg>
+      <pc:sldChg chg="modSp new mod">
+        <pc:chgData name="Mohammed Fasha" userId="cc64f42d-a1a6-4f08-b97b-0c37f877119f" providerId="ADAL" clId="{534F862C-5423-415F-8625-CCE86B4944CE}" dt="2025-03-15T15:40:29.246" v="1136" actId="20577"/>
+        <pc:sldMkLst>
+          <pc:docMk/>
+          <pc:sldMk cId="421367154" sldId="558"/>
+        </pc:sldMkLst>
+        <pc:spChg chg="mod">
+          <ac:chgData name="Mohammed Fasha" userId="cc64f42d-a1a6-4f08-b97b-0c37f877119f" providerId="ADAL" clId="{534F862C-5423-415F-8625-CCE86B4944CE}" dt="2025-03-15T15:40:29.246" v="1136" actId="20577"/>
+          <ac:spMkLst>
+            <pc:docMk/>
+            <pc:sldMk cId="421367154" sldId="558"/>
+            <ac:spMk id="2" creationId="{B21FD281-A534-66DD-A1FD-4A9DBA92E8BE}"/>
+          </ac:spMkLst>
+        </pc:spChg>
+        <pc:spChg chg="mod">
+          <ac:chgData name="Mohammed Fasha" userId="cc64f42d-a1a6-4f08-b97b-0c37f877119f" providerId="ADAL" clId="{534F862C-5423-415F-8625-CCE86B4944CE}" dt="2025-03-15T15:40:25.174" v="1126" actId="21"/>
+          <ac:spMkLst>
+            <pc:docMk/>
+            <pc:sldMk cId="421367154" sldId="558"/>
+            <ac:spMk id="3" creationId="{13B04378-246B-4FE4-2C64-C63653A45260}"/>
           </ac:spMkLst>
         </pc:spChg>
       </pc:sldChg>
@@ -6433,22 +6521,18 @@
               <a:t>307307</a:t>
             </a:r>
             <a:br>
-              <a:rPr lang="en-US" sz="3600"/>
+              <a:rPr lang="en-US" sz="3600" dirty="0"/>
             </a:br>
             <a:r>
-              <a:rPr lang="en-US" sz="3600"/>
+              <a:rPr lang="en-US" sz="3600" dirty="0"/>
               <a:t>Introduction to Text Mining and </a:t>
             </a:r>
             <a:br>
-              <a:rPr lang="en-US" sz="3600"/>
+              <a:rPr lang="en-US" sz="3600" dirty="0"/>
             </a:br>
             <a:r>
-              <a:rPr lang="en-US" sz="3600"/>
-              <a:t>Natural </a:t>
-            </a:r>
-            <a:r>
               <a:rPr lang="en-US" sz="3600" dirty="0"/>
-              <a:t>Language Processing</a:t>
+              <a:t>Natural Language Processing</a:t>
             </a:r>
           </a:p>
         </p:txBody>
@@ -10970,7 +11054,12 @@
             <p:ph idx="1"/>
           </p:nvPr>
         </p:nvSpPr>
-        <p:spPr/>
+        <p:spPr>
+          <a:xfrm>
+            <a:off x="838200" y="1706008"/>
+            <a:ext cx="10515600" cy="3009684"/>
+          </a:xfrm>
+        </p:spPr>
         <p:txBody>
           <a:bodyPr/>
           <a:lstStyle/>
@@ -11017,6 +11106,245 @@
           </a:p>
         </p:txBody>
       </p:sp>
+      <p:sp>
+        <p:nvSpPr>
+          <p:cNvPr id="5" name="Content Placeholder 2">
+            <a:extLst>
+              <a:ext uri="{FF2B5EF4-FFF2-40B4-BE49-F238E27FC236}">
+                <a16:creationId xmlns:a16="http://schemas.microsoft.com/office/drawing/2014/main" id="{E4B45F60-6A90-D73F-5226-35583B598BAF}"/>
+              </a:ext>
+            </a:extLst>
+          </p:cNvPr>
+          <p:cNvSpPr txBox="1">
+            <a:spLocks/>
+          </p:cNvSpPr>
+          <p:nvPr/>
+        </p:nvSpPr>
+        <p:spPr>
+          <a:xfrm>
+            <a:off x="3503025" y="5256704"/>
+            <a:ext cx="2114006" cy="399925"/>
+          </a:xfrm>
+          <a:prstGeom prst="rect">
+            <a:avLst/>
+          </a:prstGeom>
+        </p:spPr>
+        <p:txBody>
+          <a:bodyPr vert="horz" lIns="91440" tIns="45720" rIns="91440" bIns="45720" rtlCol="0">
+            <a:normAutofit fontScale="92500"/>
+          </a:bodyPr>
+          <a:lstStyle>
+            <a:lvl1pPr marL="228600" indent="-228600" algn="l" defTabSz="914400" rtl="0" eaLnBrk="1" latinLnBrk="0" hangingPunct="1">
+              <a:lnSpc>
+                <a:spcPct val="90000"/>
+              </a:lnSpc>
+              <a:spcBef>
+                <a:spcPts val="1000"/>
+              </a:spcBef>
+              <a:buFont typeface="Arial" panose="020B0604020202020204" pitchFamily="34" charset="0"/>
+              <a:buChar char="•"/>
+              <a:defRPr sz="2400" kern="1200">
+                <a:solidFill>
+                  <a:schemeClr val="tx1"/>
+                </a:solidFill>
+                <a:latin typeface="+mn-lt"/>
+                <a:ea typeface="+mn-ea"/>
+                <a:cs typeface="+mn-cs"/>
+              </a:defRPr>
+            </a:lvl1pPr>
+            <a:lvl2pPr marL="685800" indent="-228600" algn="l" defTabSz="914400" rtl="0" eaLnBrk="1" latinLnBrk="0" hangingPunct="1">
+              <a:lnSpc>
+                <a:spcPct val="90000"/>
+              </a:lnSpc>
+              <a:spcBef>
+                <a:spcPts val="500"/>
+              </a:spcBef>
+              <a:buFont typeface="Arial" panose="020B0604020202020204" pitchFamily="34" charset="0"/>
+              <a:buChar char="•"/>
+              <a:defRPr sz="2000" kern="1200">
+                <a:solidFill>
+                  <a:schemeClr val="tx1"/>
+                </a:solidFill>
+                <a:latin typeface="+mn-lt"/>
+                <a:ea typeface="+mn-ea"/>
+                <a:cs typeface="+mn-cs"/>
+              </a:defRPr>
+            </a:lvl2pPr>
+            <a:lvl3pPr marL="1143000" indent="-228600" algn="l" defTabSz="914400" rtl="0" eaLnBrk="1" latinLnBrk="0" hangingPunct="1">
+              <a:lnSpc>
+                <a:spcPct val="90000"/>
+              </a:lnSpc>
+              <a:spcBef>
+                <a:spcPts val="500"/>
+              </a:spcBef>
+              <a:buFont typeface="Arial" panose="020B0604020202020204" pitchFamily="34" charset="0"/>
+              <a:buChar char="•"/>
+              <a:defRPr sz="1800" kern="1200">
+                <a:solidFill>
+                  <a:schemeClr val="tx1"/>
+                </a:solidFill>
+                <a:latin typeface="+mn-lt"/>
+                <a:ea typeface="+mn-ea"/>
+                <a:cs typeface="+mn-cs"/>
+              </a:defRPr>
+            </a:lvl3pPr>
+            <a:lvl4pPr marL="1600200" indent="-228600" algn="l" defTabSz="914400" rtl="0" eaLnBrk="1" latinLnBrk="0" hangingPunct="1">
+              <a:lnSpc>
+                <a:spcPct val="90000"/>
+              </a:lnSpc>
+              <a:spcBef>
+                <a:spcPts val="500"/>
+              </a:spcBef>
+              <a:buFont typeface="Arial" panose="020B0604020202020204" pitchFamily="34" charset="0"/>
+              <a:buChar char="•"/>
+              <a:defRPr sz="1600" kern="1200">
+                <a:solidFill>
+                  <a:schemeClr val="tx1"/>
+                </a:solidFill>
+                <a:latin typeface="+mn-lt"/>
+                <a:ea typeface="+mn-ea"/>
+                <a:cs typeface="+mn-cs"/>
+              </a:defRPr>
+            </a:lvl4pPr>
+            <a:lvl5pPr marL="2057400" indent="-228600" algn="l" defTabSz="914400" rtl="0" eaLnBrk="1" latinLnBrk="0" hangingPunct="1">
+              <a:lnSpc>
+                <a:spcPct val="90000"/>
+              </a:lnSpc>
+              <a:spcBef>
+                <a:spcPts val="500"/>
+              </a:spcBef>
+              <a:buFont typeface="Arial" panose="020B0604020202020204" pitchFamily="34" charset="0"/>
+              <a:buChar char="•"/>
+              <a:defRPr sz="1600" kern="1200">
+                <a:solidFill>
+                  <a:schemeClr val="tx1"/>
+                </a:solidFill>
+                <a:latin typeface="+mn-lt"/>
+                <a:ea typeface="+mn-ea"/>
+                <a:cs typeface="+mn-cs"/>
+              </a:defRPr>
+            </a:lvl5pPr>
+            <a:lvl6pPr marL="2514600" indent="-228600" algn="l" defTabSz="914400" rtl="0" eaLnBrk="1" latinLnBrk="0" hangingPunct="1">
+              <a:lnSpc>
+                <a:spcPct val="90000"/>
+              </a:lnSpc>
+              <a:spcBef>
+                <a:spcPts val="500"/>
+              </a:spcBef>
+              <a:buFont typeface="Arial" panose="020B0604020202020204" pitchFamily="34" charset="0"/>
+              <a:buChar char="•"/>
+              <a:defRPr sz="1800" kern="1200">
+                <a:solidFill>
+                  <a:schemeClr val="tx1"/>
+                </a:solidFill>
+                <a:latin typeface="+mn-lt"/>
+                <a:ea typeface="+mn-ea"/>
+                <a:cs typeface="+mn-cs"/>
+              </a:defRPr>
+            </a:lvl6pPr>
+            <a:lvl7pPr marL="2971800" indent="-228600" algn="l" defTabSz="914400" rtl="0" eaLnBrk="1" latinLnBrk="0" hangingPunct="1">
+              <a:lnSpc>
+                <a:spcPct val="90000"/>
+              </a:lnSpc>
+              <a:spcBef>
+                <a:spcPts val="500"/>
+              </a:spcBef>
+              <a:buFont typeface="Arial" panose="020B0604020202020204" pitchFamily="34" charset="0"/>
+              <a:buChar char="•"/>
+              <a:defRPr sz="1800" kern="1200">
+                <a:solidFill>
+                  <a:schemeClr val="tx1"/>
+                </a:solidFill>
+                <a:latin typeface="+mn-lt"/>
+                <a:ea typeface="+mn-ea"/>
+                <a:cs typeface="+mn-cs"/>
+              </a:defRPr>
+            </a:lvl7pPr>
+            <a:lvl8pPr marL="3429000" indent="-228600" algn="l" defTabSz="914400" rtl="0" eaLnBrk="1" latinLnBrk="0" hangingPunct="1">
+              <a:lnSpc>
+                <a:spcPct val="90000"/>
+              </a:lnSpc>
+              <a:spcBef>
+                <a:spcPts val="500"/>
+              </a:spcBef>
+              <a:buFont typeface="Arial" panose="020B0604020202020204" pitchFamily="34" charset="0"/>
+              <a:buChar char="•"/>
+              <a:defRPr sz="1800" kern="1200">
+                <a:solidFill>
+                  <a:schemeClr val="tx1"/>
+                </a:solidFill>
+                <a:latin typeface="+mn-lt"/>
+                <a:ea typeface="+mn-ea"/>
+                <a:cs typeface="+mn-cs"/>
+              </a:defRPr>
+            </a:lvl8pPr>
+            <a:lvl9pPr marL="3886200" indent="-228600" algn="l" defTabSz="914400" rtl="0" eaLnBrk="1" latinLnBrk="0" hangingPunct="1">
+              <a:lnSpc>
+                <a:spcPct val="90000"/>
+              </a:lnSpc>
+              <a:spcBef>
+                <a:spcPts val="500"/>
+              </a:spcBef>
+              <a:buFont typeface="Arial" panose="020B0604020202020204" pitchFamily="34" charset="0"/>
+              <a:buChar char="•"/>
+              <a:defRPr sz="1800" kern="1200">
+                <a:solidFill>
+                  <a:schemeClr val="tx1"/>
+                </a:solidFill>
+                <a:latin typeface="+mn-lt"/>
+                <a:ea typeface="+mn-ea"/>
+                <a:cs typeface="+mn-cs"/>
+              </a:defRPr>
+            </a:lvl9pPr>
+          </a:lstStyle>
+          <a:p>
+            <a:pPr marL="0" indent="0">
+              <a:buNone/>
+            </a:pPr>
+            <a:r>
+              <a:rPr lang="en-US" dirty="0"/>
+              <a:t>Click to code file</a:t>
+            </a:r>
+          </a:p>
+        </p:txBody>
+      </p:sp>
+      <p:pic>
+        <p:nvPicPr>
+          <p:cNvPr id="7" name="Graphic 6">
+            <a:hlinkClick r:id="rId2"/>
+            <a:extLst>
+              <a:ext uri="{FF2B5EF4-FFF2-40B4-BE49-F238E27FC236}">
+                <a16:creationId xmlns:a16="http://schemas.microsoft.com/office/drawing/2014/main" id="{4E45092A-0334-B657-140F-ACD092334510}"/>
+              </a:ext>
+            </a:extLst>
+          </p:cNvPr>
+          <p:cNvPicPr>
+            <a:picLocks noChangeAspect="1"/>
+          </p:cNvPicPr>
+          <p:nvPr/>
+        </p:nvPicPr>
+        <p:blipFill>
+          <a:blip r:embed="rId3">
+            <a:extLst>
+              <a:ext uri="{96DAC541-7B7A-43D3-8B79-37D633B846F1}">
+                <asvg:svgBlip xmlns:asvg="http://schemas.microsoft.com/office/drawing/2016/SVG/main" r:embed="rId4"/>
+              </a:ext>
+            </a:extLst>
+          </a:blip>
+          <a:stretch>
+            <a:fillRect/>
+          </a:stretch>
+        </p:blipFill>
+        <p:spPr>
+          <a:xfrm>
+            <a:off x="5780450" y="5361417"/>
+            <a:ext cx="1114425" cy="190500"/>
+          </a:xfrm>
+          <a:prstGeom prst="rect">
+            <a:avLst/>
+          </a:prstGeom>
+        </p:spPr>
+      </p:pic>
     </p:spTree>
     <p:extLst>
       <p:ext uri="{BB962C8B-B14F-4D97-AF65-F5344CB8AC3E}">
@@ -19280,7 +19608,7 @@
           <a:p>
             <a:r>
               <a:rPr lang="en-US" dirty="0"/>
-              <a:t>Classical Language Models: N-grams</a:t>
+              <a:t>Language Models: N-grams</a:t>
             </a:r>
           </a:p>
         </p:txBody>
@@ -19304,53 +19632,191 @@
         <p:spPr/>
         <p:txBody>
           <a:bodyPr>
-            <a:normAutofit/>
+            <a:normAutofit fontScale="77500" lnSpcReduction="20000"/>
           </a:bodyPr>
           <a:lstStyle/>
           <a:p>
+            <a:pPr marL="0" indent="0">
+              <a:buNone/>
+            </a:pPr>
             <a:r>
               <a:rPr lang="en-US" dirty="0"/>
-              <a:t>N-gram models were among the earliest statistical language models, predicting the probability of a sequence of words by analyzing patterns in training data.</a:t>
-            </a:r>
-          </a:p>
-          <a:p>
+              <a:t>Language models are statistical or neural models that capture the probability distribution of words or tokens in a language. </a:t>
+            </a:r>
+          </a:p>
+          <a:p>
+            <a:pPr marL="0" indent="0">
+              <a:buNone/>
+            </a:pPr>
             <a:r>
               <a:rPr lang="en-US" dirty="0"/>
-              <a:t>What are N-grams?</a:t>
-            </a:r>
-          </a:p>
-          <a:p>
+              <a:t>They predict the likelihood of a sequence of words occurring together, enabling machines to understand and generate human language.</a:t>
+            </a:r>
+          </a:p>
+          <a:p>
+            <a:pPr>
+              <a:buNone/>
+            </a:pPr>
+            <a:r>
+              <a:rPr lang="en-US" b="1" dirty="0"/>
+              <a:t>Types of Language Models</a:t>
+            </a:r>
+          </a:p>
+          <a:p>
+            <a:pPr>
+              <a:buNone/>
+            </a:pPr>
+            <a:r>
+              <a:rPr lang="en-US" b="1" dirty="0"/>
+              <a:t>1) Statistical Language Models</a:t>
+            </a:r>
+          </a:p>
+          <a:p>
+            <a:pPr>
+              <a:buFont typeface="Arial" panose="020B0604020202020204" pitchFamily="34" charset="0"/>
+              <a:buChar char="•"/>
+            </a:pPr>
+            <a:r>
+              <a:rPr lang="en-US" b="1" dirty="0"/>
+              <a:t>N-gram Models</a:t>
+            </a:r>
             <a:r>
               <a:rPr lang="en-US" dirty="0"/>
-              <a:t>N-grams are contiguous sequences of n items (words, characters, etc.) from a text:</a:t>
-            </a:r>
-          </a:p>
-          <a:p>
-            <a:pPr lvl="1"/>
+              <a:t>: Predict the next word based on the previous N-1 words </a:t>
+            </a:r>
+          </a:p>
+          <a:p>
+            <a:pPr marL="742950" lvl="1" indent="-285750">
+              <a:buFont typeface="Arial" panose="020B0604020202020204" pitchFamily="34" charset="0"/>
+              <a:buChar char="•"/>
+            </a:pPr>
             <a:r>
               <a:rPr lang="en-US" dirty="0"/>
-              <a:t>Unigrams: Single words (e.g., "language")</a:t>
-            </a:r>
-          </a:p>
-          <a:p>
-            <a:pPr lvl="1"/>
+              <a:t>Unigram: P(word) - individual word probabilities</a:t>
+            </a:r>
+          </a:p>
+          <a:p>
+            <a:pPr marL="742950" lvl="1" indent="-285750">
+              <a:buFont typeface="Arial" panose="020B0604020202020204" pitchFamily="34" charset="0"/>
+              <a:buChar char="•"/>
+            </a:pPr>
             <a:r>
               <a:rPr lang="en-US" dirty="0"/>
-              <a:t>Bigrams: Two consecutive words (e.g., "language models")</a:t>
-            </a:r>
-          </a:p>
-          <a:p>
-            <a:pPr lvl="1"/>
+              <a:t>Bigram: P(word₂|word₁) - probability of word₂ given word₁</a:t>
+            </a:r>
+          </a:p>
+          <a:p>
+            <a:pPr marL="742950" lvl="1" indent="-285750">
+              <a:buFont typeface="Arial" panose="020B0604020202020204" pitchFamily="34" charset="0"/>
+              <a:buChar char="•"/>
+            </a:pPr>
             <a:r>
               <a:rPr lang="en-US" dirty="0"/>
-              <a:t>Trigrams: Three consecutive words (e.g., "large language models")</a:t>
-            </a:r>
-          </a:p>
-          <a:p>
-            <a:pPr marL="0" indent="0">
-              <a:buNone/>
-            </a:pPr>
-            <a:endParaRPr lang="en-US" dirty="0"/>
+              <a:t>Trigram: P(word₃|</a:t>
+            </a:r>
+            <a:r>
+              <a:rPr lang="en-US" dirty="0" err="1"/>
+              <a:t>word₁,word</a:t>
+            </a:r>
+            <a:r>
+              <a:rPr lang="en-US" dirty="0"/>
+              <a:t>₂) - probability of word₃ given word₁ and word₂</a:t>
+            </a:r>
+          </a:p>
+          <a:p>
+            <a:pPr>
+              <a:buNone/>
+            </a:pPr>
+            <a:r>
+              <a:rPr lang="en-US" b="1" dirty="0"/>
+              <a:t>2) Neural Language Models</a:t>
+            </a:r>
+          </a:p>
+          <a:p>
+            <a:pPr>
+              <a:buFont typeface="Arial" panose="020B0604020202020204" pitchFamily="34" charset="0"/>
+              <a:buChar char="•"/>
+            </a:pPr>
+            <a:r>
+              <a:rPr lang="en-US" b="1" dirty="0"/>
+              <a:t>RNN/LSTM-based</a:t>
+            </a:r>
+            <a:r>
+              <a:rPr lang="en-US" dirty="0"/>
+              <a:t>: Process sequences by maintaining hidden states </a:t>
+            </a:r>
+          </a:p>
+          <a:p>
+            <a:pPr marL="742950" lvl="1" indent="-285750">
+              <a:buFont typeface="Arial" panose="020B0604020202020204" pitchFamily="34" charset="0"/>
+              <a:buChar char="•"/>
+            </a:pPr>
+            <a:r>
+              <a:rPr lang="en-US" dirty="0"/>
+              <a:t>Better at capturing long-range dependencies than n-grams</a:t>
+            </a:r>
+          </a:p>
+          <a:p>
+            <a:pPr marL="742950" lvl="1" indent="-285750">
+              <a:buFont typeface="Arial" panose="020B0604020202020204" pitchFamily="34" charset="0"/>
+              <a:buChar char="•"/>
+            </a:pPr>
+            <a:r>
+              <a:rPr lang="en-US" dirty="0"/>
+              <a:t>Examples: Early versions of Google Translate</a:t>
+            </a:r>
+          </a:p>
+          <a:p>
+            <a:pPr>
+              <a:buFont typeface="Arial" panose="020B0604020202020204" pitchFamily="34" charset="0"/>
+              <a:buChar char="•"/>
+            </a:pPr>
+            <a:r>
+              <a:rPr lang="en-US" b="1" dirty="0"/>
+              <a:t>Transformer-based</a:t>
+            </a:r>
+            <a:r>
+              <a:rPr lang="en-US" dirty="0"/>
+              <a:t>: Use attention mechanisms to process entire sequences </a:t>
+            </a:r>
+          </a:p>
+          <a:p>
+            <a:pPr marL="742950" lvl="1" indent="-285750">
+              <a:buFont typeface="Arial" panose="020B0604020202020204" pitchFamily="34" charset="0"/>
+              <a:buChar char="•"/>
+            </a:pPr>
+            <a:r>
+              <a:rPr lang="en-US" dirty="0"/>
+              <a:t>BERT: Bidirectional, focuses on understanding context</a:t>
+            </a:r>
+          </a:p>
+          <a:p>
+            <a:pPr marL="742950" lvl="1" indent="-285750">
+              <a:buFont typeface="Arial" panose="020B0604020202020204" pitchFamily="34" charset="0"/>
+              <a:buChar char="•"/>
+            </a:pPr>
+            <a:r>
+              <a:rPr lang="en-US" dirty="0"/>
+              <a:t>GPT: Autoregressive, focuses on text generation</a:t>
+            </a:r>
+          </a:p>
+          <a:p>
+            <a:pPr marL="742950" lvl="1" indent="-285750">
+              <a:buFont typeface="Arial" panose="020B0604020202020204" pitchFamily="34" charset="0"/>
+              <a:buChar char="•"/>
+            </a:pPr>
+            <a:r>
+              <a:rPr lang="en-US" dirty="0"/>
+              <a:t>T5, </a:t>
+            </a:r>
+            <a:r>
+              <a:rPr lang="en-US" dirty="0" err="1"/>
+              <a:t>RoBERTa</a:t>
+            </a:r>
+            <a:r>
+              <a:rPr lang="en-US" dirty="0"/>
+              <a:t>, ELECTRA: Refinements of transformer architecture</a:t>
+            </a:r>
           </a:p>
         </p:txBody>
       </p:sp>
@@ -19592,6 +20058,280 @@
   <p:cSld>
     <p:spTree>
       <p:nvGrpSpPr>
+        <p:cNvPr id="1" name=""/>
+        <p:cNvGrpSpPr/>
+        <p:nvPr/>
+      </p:nvGrpSpPr>
+      <p:grpSpPr>
+        <a:xfrm>
+          <a:off x="0" y="0"/>
+          <a:ext cx="0" cy="0"/>
+          <a:chOff x="0" y="0"/>
+          <a:chExt cx="0" cy="0"/>
+        </a:xfrm>
+      </p:grpSpPr>
+      <p:sp>
+        <p:nvSpPr>
+          <p:cNvPr id="2" name="Title 1">
+            <a:extLst>
+              <a:ext uri="{FF2B5EF4-FFF2-40B4-BE49-F238E27FC236}">
+                <a16:creationId xmlns:a16="http://schemas.microsoft.com/office/drawing/2014/main" id="{67BDB5D0-D88F-6743-CED4-6F576F09C5F4}"/>
+              </a:ext>
+            </a:extLst>
+          </p:cNvPr>
+          <p:cNvSpPr>
+            <a:spLocks noGrp="1"/>
+          </p:cNvSpPr>
+          <p:nvPr>
+            <p:ph type="title"/>
+          </p:nvPr>
+        </p:nvSpPr>
+        <p:spPr/>
+        <p:txBody>
+          <a:bodyPr>
+            <a:normAutofit/>
+          </a:bodyPr>
+          <a:lstStyle/>
+          <a:p>
+            <a:r>
+              <a:rPr lang="en-US" b="1" dirty="0"/>
+              <a:t>Core Concepts</a:t>
+            </a:r>
+            <a:endParaRPr lang="en-US" dirty="0"/>
+          </a:p>
+        </p:txBody>
+      </p:sp>
+      <p:sp>
+        <p:nvSpPr>
+          <p:cNvPr id="3" name="Content Placeholder 2">
+            <a:extLst>
+              <a:ext uri="{FF2B5EF4-FFF2-40B4-BE49-F238E27FC236}">
+                <a16:creationId xmlns:a16="http://schemas.microsoft.com/office/drawing/2014/main" id="{F7989134-F312-1A22-436B-CB5CF1A8549A}"/>
+              </a:ext>
+            </a:extLst>
+          </p:cNvPr>
+          <p:cNvSpPr>
+            <a:spLocks noGrp="1"/>
+          </p:cNvSpPr>
+          <p:nvPr>
+            <p:ph idx="1"/>
+          </p:nvPr>
+        </p:nvSpPr>
+        <p:spPr/>
+        <p:txBody>
+          <a:bodyPr>
+            <a:normAutofit fontScale="92500" lnSpcReduction="20000"/>
+          </a:bodyPr>
+          <a:lstStyle/>
+          <a:p>
+            <a:pPr>
+              <a:buFont typeface="+mj-lt"/>
+              <a:buAutoNum type="arabicPeriod"/>
+            </a:pPr>
+            <a:r>
+              <a:rPr lang="en-US" b="1" dirty="0"/>
+              <a:t>Tokenization</a:t>
+            </a:r>
+            <a:r>
+              <a:rPr lang="en-US" dirty="0"/>
+              <a:t>: Breaking text into tokens (words, </a:t>
+            </a:r>
+            <a:r>
+              <a:rPr lang="en-US" dirty="0" err="1"/>
+              <a:t>subwords</a:t>
+            </a:r>
+            <a:r>
+              <a:rPr lang="en-US" dirty="0"/>
+              <a:t>, or characters)</a:t>
+            </a:r>
+          </a:p>
+          <a:p>
+            <a:pPr>
+              <a:buFont typeface="+mj-lt"/>
+              <a:buAutoNum type="arabicPeriod"/>
+            </a:pPr>
+            <a:r>
+              <a:rPr lang="en-US" b="1" dirty="0"/>
+              <a:t>Embeddings</a:t>
+            </a:r>
+            <a:r>
+              <a:rPr lang="en-US" dirty="0"/>
+              <a:t>: Dense vector representations of words/tokens </a:t>
+            </a:r>
+          </a:p>
+          <a:p>
+            <a:pPr lvl="1"/>
+            <a:r>
+              <a:rPr lang="en-US" dirty="0"/>
+              <a:t>Word2Vec, </a:t>
+            </a:r>
+            <a:r>
+              <a:rPr lang="en-US" dirty="0" err="1"/>
+              <a:t>GloVe</a:t>
+            </a:r>
+            <a:r>
+              <a:rPr lang="en-US" dirty="0"/>
+              <a:t>: Context-independent embeddings</a:t>
+            </a:r>
+          </a:p>
+          <a:p>
+            <a:pPr lvl="1"/>
+            <a:r>
+              <a:rPr lang="en-US" dirty="0"/>
+              <a:t>Contextual embeddings: Different representations based on context</a:t>
+            </a:r>
+          </a:p>
+          <a:p>
+            <a:pPr>
+              <a:buFont typeface="+mj-lt"/>
+              <a:buAutoNum type="arabicPeriod"/>
+            </a:pPr>
+            <a:r>
+              <a:rPr lang="en-US" b="1" dirty="0"/>
+              <a:t>Perplexity</a:t>
+            </a:r>
+            <a:r>
+              <a:rPr lang="en-US" dirty="0"/>
+              <a:t>: Evaluation metric measuring how well a model predicts a sample </a:t>
+            </a:r>
+          </a:p>
+          <a:p>
+            <a:pPr lvl="1"/>
+            <a:r>
+              <a:rPr lang="en-US" dirty="0"/>
+              <a:t>Lower perplexity = better prediction</a:t>
+            </a:r>
+          </a:p>
+          <a:p>
+            <a:pPr>
+              <a:buFont typeface="+mj-lt"/>
+              <a:buAutoNum type="arabicPeriod"/>
+            </a:pPr>
+            <a:r>
+              <a:rPr lang="en-US" b="1" dirty="0"/>
+              <a:t>Fine-tuning</a:t>
+            </a:r>
+            <a:r>
+              <a:rPr lang="en-US" dirty="0"/>
+              <a:t>: Adapting pre-trained models to specific tasks</a:t>
+            </a:r>
+          </a:p>
+          <a:p>
+            <a:pPr>
+              <a:buNone/>
+            </a:pPr>
+            <a:r>
+              <a:rPr lang="en-US" b="1" dirty="0"/>
+              <a:t>Applications</a:t>
+            </a:r>
+          </a:p>
+          <a:p>
+            <a:pPr>
+              <a:buFont typeface="Arial" panose="020B0604020202020204" pitchFamily="34" charset="0"/>
+              <a:buChar char="•"/>
+            </a:pPr>
+            <a:r>
+              <a:rPr lang="en-US" b="1" dirty="0"/>
+              <a:t>Text Generation</a:t>
+            </a:r>
+            <a:r>
+              <a:rPr lang="en-US" dirty="0"/>
+              <a:t>: Writing assistance, content creation</a:t>
+            </a:r>
+          </a:p>
+          <a:p>
+            <a:pPr>
+              <a:buFont typeface="Arial" panose="020B0604020202020204" pitchFamily="34" charset="0"/>
+              <a:buChar char="•"/>
+            </a:pPr>
+            <a:r>
+              <a:rPr lang="en-US" b="1" dirty="0"/>
+              <a:t>Machine Translation</a:t>
+            </a:r>
+            <a:r>
+              <a:rPr lang="en-US" dirty="0"/>
+              <a:t>: Converting text between languages</a:t>
+            </a:r>
+          </a:p>
+          <a:p>
+            <a:pPr>
+              <a:buFont typeface="Arial" panose="020B0604020202020204" pitchFamily="34" charset="0"/>
+              <a:buChar char="•"/>
+            </a:pPr>
+            <a:r>
+              <a:rPr lang="en-US" b="1" dirty="0"/>
+              <a:t>Summarization</a:t>
+            </a:r>
+            <a:r>
+              <a:rPr lang="en-US" dirty="0"/>
+              <a:t>: Condensing documents while preserving meaning</a:t>
+            </a:r>
+          </a:p>
+          <a:p>
+            <a:pPr>
+              <a:buFont typeface="Arial" panose="020B0604020202020204" pitchFamily="34" charset="0"/>
+              <a:buChar char="•"/>
+            </a:pPr>
+            <a:r>
+              <a:rPr lang="en-US" b="1" dirty="0"/>
+              <a:t>Question Answering</a:t>
+            </a:r>
+            <a:r>
+              <a:rPr lang="en-US" dirty="0"/>
+              <a:t>: Understanding and responding to queries</a:t>
+            </a:r>
+          </a:p>
+          <a:p>
+            <a:pPr>
+              <a:buFont typeface="Arial" panose="020B0604020202020204" pitchFamily="34" charset="0"/>
+              <a:buChar char="•"/>
+            </a:pPr>
+            <a:r>
+              <a:rPr lang="en-US" b="1" dirty="0"/>
+              <a:t>Text Classification</a:t>
+            </a:r>
+            <a:r>
+              <a:rPr lang="en-US" dirty="0"/>
+              <a:t>: Sentiment analysis, topic categorization</a:t>
+            </a:r>
+          </a:p>
+          <a:p>
+            <a:pPr>
+              <a:buFont typeface="Arial" panose="020B0604020202020204" pitchFamily="34" charset="0"/>
+              <a:buChar char="•"/>
+            </a:pPr>
+            <a:r>
+              <a:rPr lang="en-US" b="1" dirty="0"/>
+              <a:t>Dialogue Systems</a:t>
+            </a:r>
+            <a:r>
+              <a:rPr lang="en-US" dirty="0"/>
+              <a:t>: Conversational agents and chatbots</a:t>
+            </a:r>
+          </a:p>
+          <a:p>
+            <a:endParaRPr lang="en-US" dirty="0"/>
+          </a:p>
+        </p:txBody>
+      </p:sp>
+    </p:spTree>
+    <p:extLst>
+      <p:ext uri="{BB962C8B-B14F-4D97-AF65-F5344CB8AC3E}">
+        <p14:creationId xmlns:p14="http://schemas.microsoft.com/office/powerpoint/2010/main" val="47443413"/>
+      </p:ext>
+    </p:extLst>
+  </p:cSld>
+  <p:clrMapOvr>
+    <a:masterClrMapping/>
+  </p:clrMapOvr>
+</p:sld>
+</file>
+
+<file path=ppt/slides/slide31.xml><?xml version="1.0" encoding="utf-8"?>
+<p:sld xmlns:a="http://schemas.openxmlformats.org/drawingml/2006/main" xmlns:r="http://schemas.openxmlformats.org/officeDocument/2006/relationships" xmlns:p="http://schemas.openxmlformats.org/presentationml/2006/main">
+  <p:cSld>
+    <p:spTree>
+      <p:nvGrpSpPr>
         <p:cNvPr id="1" name="">
           <a:extLst>
             <a:ext uri="{FF2B5EF4-FFF2-40B4-BE49-F238E27FC236}">
@@ -21729,6 +22469,368 @@
     <p:extLst>
       <p:ext uri="{BB962C8B-B14F-4D97-AF65-F5344CB8AC3E}">
         <p14:creationId xmlns:p14="http://schemas.microsoft.com/office/powerpoint/2010/main" val="1532144506"/>
+      </p:ext>
+    </p:extLst>
+  </p:cSld>
+  <p:clrMapOvr>
+    <a:masterClrMapping/>
+  </p:clrMapOvr>
+</p:sld>
+</file>
+
+<file path=ppt/slides/slide32.xml><?xml version="1.0" encoding="utf-8"?>
+<p:sld xmlns:a="http://schemas.openxmlformats.org/drawingml/2006/main" xmlns:r="http://schemas.openxmlformats.org/officeDocument/2006/relationships" xmlns:p="http://schemas.openxmlformats.org/presentationml/2006/main">
+  <p:cSld>
+    <p:spTree>
+      <p:nvGrpSpPr>
+        <p:cNvPr id="1" name=""/>
+        <p:cNvGrpSpPr/>
+        <p:nvPr/>
+      </p:nvGrpSpPr>
+      <p:grpSpPr>
+        <a:xfrm>
+          <a:off x="0" y="0"/>
+          <a:ext cx="0" cy="0"/>
+          <a:chOff x="0" y="0"/>
+          <a:chExt cx="0" cy="0"/>
+        </a:xfrm>
+      </p:grpSpPr>
+      <p:sp>
+        <p:nvSpPr>
+          <p:cNvPr id="2" name="Title 1">
+            <a:extLst>
+              <a:ext uri="{FF2B5EF4-FFF2-40B4-BE49-F238E27FC236}">
+                <a16:creationId xmlns:a16="http://schemas.microsoft.com/office/drawing/2014/main" id="{AAE809B9-C541-93EC-3335-246077D074AB}"/>
+              </a:ext>
+            </a:extLst>
+          </p:cNvPr>
+          <p:cNvSpPr>
+            <a:spLocks noGrp="1"/>
+          </p:cNvSpPr>
+          <p:nvPr>
+            <p:ph type="title"/>
+          </p:nvPr>
+        </p:nvSpPr>
+        <p:spPr/>
+        <p:txBody>
+          <a:bodyPr>
+            <a:normAutofit/>
+          </a:bodyPr>
+          <a:lstStyle/>
+          <a:p>
+            <a:r>
+              <a:rPr lang="en-US" dirty="0"/>
+              <a:t>Limitations of N-gram Models</a:t>
+            </a:r>
+          </a:p>
+        </p:txBody>
+      </p:sp>
+      <p:sp>
+        <p:nvSpPr>
+          <p:cNvPr id="3" name="Content Placeholder 2">
+            <a:extLst>
+              <a:ext uri="{FF2B5EF4-FFF2-40B4-BE49-F238E27FC236}">
+                <a16:creationId xmlns:a16="http://schemas.microsoft.com/office/drawing/2014/main" id="{69D30B70-3D40-0B59-B5B7-CE324493CD2A}"/>
+              </a:ext>
+            </a:extLst>
+          </p:cNvPr>
+          <p:cNvSpPr>
+            <a:spLocks noGrp="1"/>
+          </p:cNvSpPr>
+          <p:nvPr>
+            <p:ph idx="1"/>
+          </p:nvPr>
+        </p:nvSpPr>
+        <p:spPr/>
+        <p:txBody>
+          <a:bodyPr/>
+          <a:lstStyle/>
+          <a:p>
+            <a:r>
+              <a:rPr lang="en-US" dirty="0"/>
+              <a:t>Limited context: Only consider a fixed number of previous words</a:t>
+            </a:r>
+          </a:p>
+          <a:p>
+            <a:r>
+              <a:rPr lang="en-US" dirty="0"/>
+              <a:t>Data sparsity: Many valid word combinations don't appear in training data</a:t>
+            </a:r>
+          </a:p>
+          <a:p>
+            <a:r>
+              <a:rPr lang="en-US" dirty="0"/>
+              <a:t>No semantic understanding: Model captures statistical patterns but not meaning</a:t>
+            </a:r>
+          </a:p>
+          <a:p>
+            <a:r>
+              <a:rPr lang="en-US" dirty="0"/>
+              <a:t>Memory intensive: Storing all possible n-grams requires significant space</a:t>
+            </a:r>
+          </a:p>
+          <a:p>
+            <a:r>
+              <a:rPr lang="en-US" dirty="0"/>
+              <a:t>No long-range dependencies: Cannot capture relationships between distant words</a:t>
+            </a:r>
+          </a:p>
+        </p:txBody>
+      </p:sp>
+    </p:spTree>
+    <p:extLst>
+      <p:ext uri="{BB962C8B-B14F-4D97-AF65-F5344CB8AC3E}">
+        <p14:creationId xmlns:p14="http://schemas.microsoft.com/office/powerpoint/2010/main" val="2953760213"/>
+      </p:ext>
+    </p:extLst>
+  </p:cSld>
+  <p:clrMapOvr>
+    <a:masterClrMapping/>
+  </p:clrMapOvr>
+</p:sld>
+</file>
+
+<file path=ppt/slides/slide33.xml><?xml version="1.0" encoding="utf-8"?>
+<p:sld xmlns:a="http://schemas.openxmlformats.org/drawingml/2006/main" xmlns:r="http://schemas.openxmlformats.org/officeDocument/2006/relationships" xmlns:p="http://schemas.openxmlformats.org/presentationml/2006/main">
+  <p:cSld>
+    <p:spTree>
+      <p:nvGrpSpPr>
+        <p:cNvPr id="1" name=""/>
+        <p:cNvGrpSpPr/>
+        <p:nvPr/>
+      </p:nvGrpSpPr>
+      <p:grpSpPr>
+        <a:xfrm>
+          <a:off x="0" y="0"/>
+          <a:ext cx="0" cy="0"/>
+          <a:chOff x="0" y="0"/>
+          <a:chExt cx="0" cy="0"/>
+        </a:xfrm>
+      </p:grpSpPr>
+      <p:sp>
+        <p:nvSpPr>
+          <p:cNvPr id="2" name="Title 1">
+            <a:extLst>
+              <a:ext uri="{FF2B5EF4-FFF2-40B4-BE49-F238E27FC236}">
+                <a16:creationId xmlns:a16="http://schemas.microsoft.com/office/drawing/2014/main" id="{B21FD281-A534-66DD-A1FD-4A9DBA92E8BE}"/>
+              </a:ext>
+            </a:extLst>
+          </p:cNvPr>
+          <p:cNvSpPr>
+            <a:spLocks noGrp="1"/>
+          </p:cNvSpPr>
+          <p:nvPr>
+            <p:ph type="title"/>
+          </p:nvPr>
+        </p:nvSpPr>
+        <p:spPr/>
+        <p:txBody>
+          <a:bodyPr/>
+          <a:lstStyle/>
+          <a:p>
+            <a:r>
+              <a:rPr lang="en-US" dirty="0"/>
+              <a:t>Perplexity</a:t>
+            </a:r>
+          </a:p>
+        </p:txBody>
+      </p:sp>
+      <p:sp>
+        <p:nvSpPr>
+          <p:cNvPr id="3" name="Content Placeholder 2">
+            <a:extLst>
+              <a:ext uri="{FF2B5EF4-FFF2-40B4-BE49-F238E27FC236}">
+                <a16:creationId xmlns:a16="http://schemas.microsoft.com/office/drawing/2014/main" id="{13B04378-246B-4FE4-2C64-C63653A45260}"/>
+              </a:ext>
+            </a:extLst>
+          </p:cNvPr>
+          <p:cNvSpPr>
+            <a:spLocks noGrp="1"/>
+          </p:cNvSpPr>
+          <p:nvPr>
+            <p:ph idx="1"/>
+          </p:nvPr>
+        </p:nvSpPr>
+        <p:spPr/>
+        <p:txBody>
+          <a:bodyPr>
+            <a:normAutofit fontScale="55000" lnSpcReduction="20000"/>
+          </a:bodyPr>
+          <a:lstStyle/>
+          <a:p>
+            <a:pPr>
+              <a:buNone/>
+            </a:pPr>
+            <a:r>
+              <a:rPr lang="en-US" dirty="0"/>
+              <a:t>Perplexity measures how confused a language model is when predicting text.</a:t>
+            </a:r>
+          </a:p>
+          <a:p>
+            <a:pPr>
+              <a:buNone/>
+            </a:pPr>
+            <a:r>
+              <a:rPr lang="en-US" b="1" dirty="0"/>
+              <a:t>What It Means</a:t>
+            </a:r>
+          </a:p>
+          <a:p>
+            <a:pPr>
+              <a:buFont typeface="Arial" panose="020B0604020202020204" pitchFamily="34" charset="0"/>
+              <a:buChar char="•"/>
+            </a:pPr>
+            <a:r>
+              <a:rPr lang="en-US" b="1" dirty="0"/>
+              <a:t>Lower perplexity</a:t>
+            </a:r>
+            <a:r>
+              <a:rPr lang="en-US" dirty="0"/>
+              <a:t> = Model is more confident and accurate</a:t>
+            </a:r>
+          </a:p>
+          <a:p>
+            <a:pPr>
+              <a:buFont typeface="Arial" panose="020B0604020202020204" pitchFamily="34" charset="0"/>
+              <a:buChar char="•"/>
+            </a:pPr>
+            <a:r>
+              <a:rPr lang="en-US" b="1" dirty="0"/>
+              <a:t>Higher perplexity</a:t>
+            </a:r>
+            <a:r>
+              <a:rPr lang="en-US" dirty="0"/>
+              <a:t> = Model is more uncertain and confused</a:t>
+            </a:r>
+          </a:p>
+          <a:p>
+            <a:pPr>
+              <a:buNone/>
+            </a:pPr>
+            <a:r>
+              <a:rPr lang="en-US" b="1" dirty="0"/>
+              <a:t>Simple Example</a:t>
+            </a:r>
+          </a:p>
+          <a:p>
+            <a:pPr>
+              <a:buNone/>
+            </a:pPr>
+            <a:r>
+              <a:rPr lang="en-US" dirty="0"/>
+              <a:t>Imagine you're trying to predict the next word in: "I went to the _____"</a:t>
+            </a:r>
+          </a:p>
+          <a:p>
+            <a:pPr>
+              <a:buFont typeface="Arial" panose="020B0604020202020204" pitchFamily="34" charset="0"/>
+              <a:buChar char="•"/>
+            </a:pPr>
+            <a:r>
+              <a:rPr lang="en-US" dirty="0"/>
+              <a:t>A good model might assign high probability to words like "store," "park," "beach"</a:t>
+            </a:r>
+          </a:p>
+          <a:p>
+            <a:pPr>
+              <a:buFont typeface="Arial" panose="020B0604020202020204" pitchFamily="34" charset="0"/>
+              <a:buChar char="•"/>
+            </a:pPr>
+            <a:r>
+              <a:rPr lang="en-US" dirty="0"/>
+              <a:t>A confused model might spread probabilities evenly across thousands of words</a:t>
+            </a:r>
+          </a:p>
+          <a:p>
+            <a:pPr>
+              <a:buNone/>
+            </a:pPr>
+            <a:r>
+              <a:rPr lang="en-US" dirty="0"/>
+              <a:t>Perplexity essentially counts how many reasonable options the model is considering. If the model has a perplexity of 10, it's like the model is equally confused between 10 possible words.</a:t>
+            </a:r>
+          </a:p>
+          <a:p>
+            <a:pPr>
+              <a:buNone/>
+            </a:pPr>
+            <a:r>
+              <a:rPr lang="en-US" b="1" dirty="0"/>
+              <a:t>Real-World Comparison</a:t>
+            </a:r>
+          </a:p>
+          <a:p>
+            <a:pPr>
+              <a:buNone/>
+            </a:pPr>
+            <a:r>
+              <a:rPr lang="en-US" dirty="0"/>
+              <a:t>If your phone keyboard suggests 3 very likely next words, it has low perplexity. If it suggests random unrelated words, it has high perplexity.</a:t>
+            </a:r>
+          </a:p>
+          <a:p>
+            <a:pPr>
+              <a:buNone/>
+            </a:pPr>
+            <a:r>
+              <a:rPr lang="en-US" b="1" dirty="0"/>
+              <a:t>Why It Matters</a:t>
+            </a:r>
+          </a:p>
+          <a:p>
+            <a:pPr>
+              <a:buNone/>
+            </a:pPr>
+            <a:r>
+              <a:rPr lang="en-US" dirty="0"/>
+              <a:t>Think of perplexity as a "confusion score" that helps researchers:</a:t>
+            </a:r>
+          </a:p>
+          <a:p>
+            <a:pPr>
+              <a:buFont typeface="Arial" panose="020B0604020202020204" pitchFamily="34" charset="0"/>
+              <a:buChar char="•"/>
+            </a:pPr>
+            <a:r>
+              <a:rPr lang="en-US" dirty="0"/>
+              <a:t>Compare different language models</a:t>
+            </a:r>
+          </a:p>
+          <a:p>
+            <a:pPr>
+              <a:buFont typeface="Arial" panose="020B0604020202020204" pitchFamily="34" charset="0"/>
+              <a:buChar char="•"/>
+            </a:pPr>
+            <a:r>
+              <a:rPr lang="en-US" dirty="0"/>
+              <a:t>Check if a model is improving during training</a:t>
+            </a:r>
+          </a:p>
+          <a:p>
+            <a:pPr>
+              <a:buFont typeface="Arial" panose="020B0604020202020204" pitchFamily="34" charset="0"/>
+              <a:buChar char="•"/>
+            </a:pPr>
+            <a:r>
+              <a:rPr lang="en-US" dirty="0"/>
+              <a:t>Identify when a model works better for certain types of text</a:t>
+            </a:r>
+          </a:p>
+          <a:p>
+            <a:r>
+              <a:rPr lang="en-US" dirty="0"/>
+              <a:t>The best language models today have much lower perplexity than older models, which is why they produce more natural-sounding text.</a:t>
+            </a:r>
+          </a:p>
+          <a:p>
+            <a:endParaRPr lang="en-US" dirty="0"/>
+          </a:p>
+        </p:txBody>
+      </p:sp>
+    </p:spTree>
+    <p:extLst>
+      <p:ext uri="{BB962C8B-B14F-4D97-AF65-F5344CB8AC3E}">
+        <p14:creationId xmlns:p14="http://schemas.microsoft.com/office/powerpoint/2010/main" val="421367154"/>
       </p:ext>
     </p:extLst>
   </p:cSld>

--- a/20242-NLP-LLM/lecture notes/Part 1 - Introduction to NLP/1-introduction to NLP.pptx
+++ b/20242-NLP-LLM/lecture notes/Part 1 - Introduction to NLP/1-introduction to NLP.pptx
@@ -5,7 +5,7 @@
     <p:sldMasterId id="2147483648" r:id="rId1"/>
   </p:sldMasterIdLst>
   <p:notesMasterIdLst>
-    <p:notesMasterId r:id="rId35"/>
+    <p:notesMasterId r:id="rId36"/>
   </p:notesMasterIdLst>
   <p:sldIdLst>
     <p:sldId id="455" r:id="rId2"/>
@@ -22,25 +22,26 @@
     <p:sldId id="536" r:id="rId13"/>
     <p:sldId id="537" r:id="rId14"/>
     <p:sldId id="538" r:id="rId15"/>
-    <p:sldId id="539" r:id="rId16"/>
-    <p:sldId id="542" r:id="rId17"/>
-    <p:sldId id="540" r:id="rId18"/>
-    <p:sldId id="543" r:id="rId19"/>
-    <p:sldId id="544" r:id="rId20"/>
-    <p:sldId id="545" r:id="rId21"/>
-    <p:sldId id="546" r:id="rId22"/>
-    <p:sldId id="551" r:id="rId23"/>
-    <p:sldId id="550" r:id="rId24"/>
-    <p:sldId id="552" r:id="rId25"/>
-    <p:sldId id="553" r:id="rId26"/>
-    <p:sldId id="554" r:id="rId27"/>
-    <p:sldId id="555" r:id="rId28"/>
-    <p:sldId id="549" r:id="rId29"/>
-    <p:sldId id="547" r:id="rId30"/>
-    <p:sldId id="557" r:id="rId31"/>
-    <p:sldId id="548" r:id="rId32"/>
-    <p:sldId id="556" r:id="rId33"/>
-    <p:sldId id="558" r:id="rId34"/>
+    <p:sldId id="559" r:id="rId16"/>
+    <p:sldId id="539" r:id="rId17"/>
+    <p:sldId id="542" r:id="rId18"/>
+    <p:sldId id="540" r:id="rId19"/>
+    <p:sldId id="543" r:id="rId20"/>
+    <p:sldId id="544" r:id="rId21"/>
+    <p:sldId id="545" r:id="rId22"/>
+    <p:sldId id="546" r:id="rId23"/>
+    <p:sldId id="551" r:id="rId24"/>
+    <p:sldId id="550" r:id="rId25"/>
+    <p:sldId id="552" r:id="rId26"/>
+    <p:sldId id="553" r:id="rId27"/>
+    <p:sldId id="554" r:id="rId28"/>
+    <p:sldId id="555" r:id="rId29"/>
+    <p:sldId id="549" r:id="rId30"/>
+    <p:sldId id="547" r:id="rId31"/>
+    <p:sldId id="557" r:id="rId32"/>
+    <p:sldId id="548" r:id="rId33"/>
+    <p:sldId id="556" r:id="rId34"/>
+    <p:sldId id="558" r:id="rId35"/>
   </p:sldIdLst>
   <p:sldSz cx="12192000" cy="6858000"/>
   <p:notesSz cx="6858000" cy="9144000"/>
@@ -166,19 +167,6 @@
 <pc:chgInfo xmlns:a="http://schemas.openxmlformats.org/drawingml/2006/main" xmlns:r="http://schemas.openxmlformats.org/officeDocument/2006/relationships" xmlns:ac="http://schemas.microsoft.com/office/drawing/2013/main/command" xmlns:pc="http://schemas.microsoft.com/office/powerpoint/2013/main/command">
   <pc:docChgLst>
     <pc:chgData name="Mohammed Fasha" userId="cc64f42d-a1a6-4f08-b97b-0c37f877119f" providerId="ADAL" clId="{5980B3BB-4EB6-4E37-92BF-3A2A8F4B2C7A}"/>
-    <pc:docChg chg="custSel modSld">
-      <pc:chgData name="Mohammed Fasha" userId="cc64f42d-a1a6-4f08-b97b-0c37f877119f" providerId="ADAL" clId="{5980B3BB-4EB6-4E37-92BF-3A2A8F4B2C7A}" dt="2024-10-15T02:28:13.535" v="0" actId="478"/>
-      <pc:docMkLst>
-        <pc:docMk/>
-      </pc:docMkLst>
-      <pc:sldChg chg="delSp mod">
-        <pc:chgData name="Mohammed Fasha" userId="cc64f42d-a1a6-4f08-b97b-0c37f877119f" providerId="ADAL" clId="{5980B3BB-4EB6-4E37-92BF-3A2A8F4B2C7A}" dt="2024-10-15T02:28:13.535" v="0" actId="478"/>
-        <pc:sldMkLst>
-          <pc:docMk/>
-          <pc:sldMk cId="2297456757" sldId="483"/>
-        </pc:sldMkLst>
-      </pc:sldChg>
-    </pc:docChg>
   </pc:docChgLst>
   <pc:docChgLst>
     <pc:chgData name="Mohammed Fasha" userId="cc64f42d-a1a6-4f08-b97b-0c37f877119f" providerId="ADAL" clId="{4C71ED24-115E-432D-933D-C801DA3E52F1}"/>
@@ -187,27 +175,6 @@
       <pc:docMkLst>
         <pc:docMk/>
       </pc:docMkLst>
-      <pc:sldChg chg="del">
-        <pc:chgData name="Mohammed Fasha" userId="cc64f42d-a1a6-4f08-b97b-0c37f877119f" providerId="ADAL" clId="{4C71ED24-115E-432D-933D-C801DA3E52F1}" dt="2024-12-29T03:12:48.360" v="0" actId="47"/>
-        <pc:sldMkLst>
-          <pc:docMk/>
-          <pc:sldMk cId="2341000601" sldId="701"/>
-        </pc:sldMkLst>
-      </pc:sldChg>
-      <pc:sldChg chg="del">
-        <pc:chgData name="Mohammed Fasha" userId="cc64f42d-a1a6-4f08-b97b-0c37f877119f" providerId="ADAL" clId="{4C71ED24-115E-432D-933D-C801DA3E52F1}" dt="2024-12-29T03:12:49.133" v="1" actId="47"/>
-        <pc:sldMkLst>
-          <pc:docMk/>
-          <pc:sldMk cId="3519698944" sldId="702"/>
-        </pc:sldMkLst>
-      </pc:sldChg>
-      <pc:sldChg chg="del">
-        <pc:chgData name="Mohammed Fasha" userId="cc64f42d-a1a6-4f08-b97b-0c37f877119f" providerId="ADAL" clId="{4C71ED24-115E-432D-933D-C801DA3E52F1}" dt="2024-12-29T03:12:49.974" v="2" actId="47"/>
-        <pc:sldMkLst>
-          <pc:docMk/>
-          <pc:sldMk cId="3934257344" sldId="703"/>
-        </pc:sldMkLst>
-      </pc:sldChg>
     </pc:docChg>
   </pc:docChgLst>
   <pc:docChgLst>
@@ -217,265 +184,6 @@
       <pc:docMkLst>
         <pc:docMk/>
       </pc:docMkLst>
-      <pc:sldChg chg="modSp mod">
-        <pc:chgData name="Mohammed Fasha" userId="cc64f42d-a1a6-4f08-b97b-0c37f877119f" providerId="ADAL" clId="{BECD4A7F-C1AF-4585-8C31-FE7D4FE3ED16}" dt="2024-12-30T18:47:27.683" v="988" actId="20577"/>
-        <pc:sldMkLst>
-          <pc:docMk/>
-          <pc:sldMk cId="2281221656" sldId="527"/>
-        </pc:sldMkLst>
-      </pc:sldChg>
-      <pc:sldChg chg="modSp mod">
-        <pc:chgData name="Mohammed Fasha" userId="cc64f42d-a1a6-4f08-b97b-0c37f877119f" providerId="ADAL" clId="{BECD4A7F-C1AF-4585-8C31-FE7D4FE3ED16}" dt="2024-12-27T13:59:26.893" v="366" actId="20577"/>
-        <pc:sldMkLst>
-          <pc:docMk/>
-          <pc:sldMk cId="3474268344" sldId="596"/>
-        </pc:sldMkLst>
-      </pc:sldChg>
-      <pc:sldChg chg="modSp mod">
-        <pc:chgData name="Mohammed Fasha" userId="cc64f42d-a1a6-4f08-b97b-0c37f877119f" providerId="ADAL" clId="{BECD4A7F-C1AF-4585-8C31-FE7D4FE3ED16}" dt="2024-12-30T18:44:34.649" v="884" actId="20577"/>
-        <pc:sldMkLst>
-          <pc:docMk/>
-          <pc:sldMk cId="916802035" sldId="651"/>
-        </pc:sldMkLst>
-      </pc:sldChg>
-      <pc:sldChg chg="del">
-        <pc:chgData name="Mohammed Fasha" userId="cc64f42d-a1a6-4f08-b97b-0c37f877119f" providerId="ADAL" clId="{BECD4A7F-C1AF-4585-8C31-FE7D4FE3ED16}" dt="2025-01-05T14:42:38.675" v="989" actId="2696"/>
-        <pc:sldMkLst>
-          <pc:docMk/>
-          <pc:sldMk cId="426516858" sldId="662"/>
-        </pc:sldMkLst>
-      </pc:sldChg>
-      <pc:sldChg chg="modSp add del mod">
-        <pc:chgData name="Mohammed Fasha" userId="cc64f42d-a1a6-4f08-b97b-0c37f877119f" providerId="ADAL" clId="{BECD4A7F-C1AF-4585-8C31-FE7D4FE3ED16}" dt="2025-01-05T16:34:59.233" v="1926" actId="20577"/>
-        <pc:sldMkLst>
-          <pc:docMk/>
-          <pc:sldMk cId="691538069" sldId="662"/>
-        </pc:sldMkLst>
-      </pc:sldChg>
-      <pc:sldChg chg="del">
-        <pc:chgData name="Mohammed Fasha" userId="cc64f42d-a1a6-4f08-b97b-0c37f877119f" providerId="ADAL" clId="{BECD4A7F-C1AF-4585-8C31-FE7D4FE3ED16}" dt="2025-01-05T14:42:38.675" v="989" actId="2696"/>
-        <pc:sldMkLst>
-          <pc:docMk/>
-          <pc:sldMk cId="895445062" sldId="663"/>
-        </pc:sldMkLst>
-      </pc:sldChg>
-      <pc:sldChg chg="add del">
-        <pc:chgData name="Mohammed Fasha" userId="cc64f42d-a1a6-4f08-b97b-0c37f877119f" providerId="ADAL" clId="{BECD4A7F-C1AF-4585-8C31-FE7D4FE3ED16}" dt="2025-01-05T14:43:16.100" v="993" actId="2696"/>
-        <pc:sldMkLst>
-          <pc:docMk/>
-          <pc:sldMk cId="3980180774" sldId="663"/>
-        </pc:sldMkLst>
-      </pc:sldChg>
-      <pc:sldChg chg="add del">
-        <pc:chgData name="Mohammed Fasha" userId="cc64f42d-a1a6-4f08-b97b-0c37f877119f" providerId="ADAL" clId="{BECD4A7F-C1AF-4585-8C31-FE7D4FE3ED16}" dt="2025-01-05T14:43:16.100" v="993" actId="2696"/>
-        <pc:sldMkLst>
-          <pc:docMk/>
-          <pc:sldMk cId="1728680596" sldId="664"/>
-        </pc:sldMkLst>
-      </pc:sldChg>
-      <pc:sldChg chg="del">
-        <pc:chgData name="Mohammed Fasha" userId="cc64f42d-a1a6-4f08-b97b-0c37f877119f" providerId="ADAL" clId="{BECD4A7F-C1AF-4585-8C31-FE7D4FE3ED16}" dt="2025-01-05T14:42:38.675" v="989" actId="2696"/>
-        <pc:sldMkLst>
-          <pc:docMk/>
-          <pc:sldMk cId="3900588277" sldId="664"/>
-        </pc:sldMkLst>
-      </pc:sldChg>
-      <pc:sldChg chg="del">
-        <pc:chgData name="Mohammed Fasha" userId="cc64f42d-a1a6-4f08-b97b-0c37f877119f" providerId="ADAL" clId="{BECD4A7F-C1AF-4585-8C31-FE7D4FE3ED16}" dt="2025-01-05T14:42:38.675" v="989" actId="2696"/>
-        <pc:sldMkLst>
-          <pc:docMk/>
-          <pc:sldMk cId="123002105" sldId="665"/>
-        </pc:sldMkLst>
-      </pc:sldChg>
-      <pc:sldChg chg="modSp add del mod">
-        <pc:chgData name="Mohammed Fasha" userId="cc64f42d-a1a6-4f08-b97b-0c37f877119f" providerId="ADAL" clId="{BECD4A7F-C1AF-4585-8C31-FE7D4FE3ED16}" dt="2025-01-05T15:05:12.729" v="1226" actId="21"/>
-        <pc:sldMkLst>
-          <pc:docMk/>
-          <pc:sldMk cId="148099094" sldId="665"/>
-        </pc:sldMkLst>
-      </pc:sldChg>
-      <pc:sldChg chg="del">
-        <pc:chgData name="Mohammed Fasha" userId="cc64f42d-a1a6-4f08-b97b-0c37f877119f" providerId="ADAL" clId="{BECD4A7F-C1AF-4585-8C31-FE7D4FE3ED16}" dt="2025-01-05T14:42:38.675" v="989" actId="2696"/>
-        <pc:sldMkLst>
-          <pc:docMk/>
-          <pc:sldMk cId="659863378" sldId="676"/>
-        </pc:sldMkLst>
-      </pc:sldChg>
-      <pc:sldChg chg="modSp add del mod">
-        <pc:chgData name="Mohammed Fasha" userId="cc64f42d-a1a6-4f08-b97b-0c37f877119f" providerId="ADAL" clId="{BECD4A7F-C1AF-4585-8C31-FE7D4FE3ED16}" dt="2025-01-05T14:55:27.595" v="1130" actId="255"/>
-        <pc:sldMkLst>
-          <pc:docMk/>
-          <pc:sldMk cId="1577854815" sldId="676"/>
-        </pc:sldMkLst>
-      </pc:sldChg>
-      <pc:sldChg chg="modSp add del mod">
-        <pc:chgData name="Mohammed Fasha" userId="cc64f42d-a1a6-4f08-b97b-0c37f877119f" providerId="ADAL" clId="{BECD4A7F-C1AF-4585-8C31-FE7D4FE3ED16}" dt="2025-01-05T14:55:43.754" v="1132" actId="1076"/>
-        <pc:sldMkLst>
-          <pc:docMk/>
-          <pc:sldMk cId="139882925" sldId="677"/>
-        </pc:sldMkLst>
-      </pc:sldChg>
-      <pc:sldChg chg="del">
-        <pc:chgData name="Mohammed Fasha" userId="cc64f42d-a1a6-4f08-b97b-0c37f877119f" providerId="ADAL" clId="{BECD4A7F-C1AF-4585-8C31-FE7D4FE3ED16}" dt="2025-01-05T14:42:38.675" v="989" actId="2696"/>
-        <pc:sldMkLst>
-          <pc:docMk/>
-          <pc:sldMk cId="2736863534" sldId="677"/>
-        </pc:sldMkLst>
-      </pc:sldChg>
-      <pc:sldChg chg="add del">
-        <pc:chgData name="Mohammed Fasha" userId="cc64f42d-a1a6-4f08-b97b-0c37f877119f" providerId="ADAL" clId="{BECD4A7F-C1AF-4585-8C31-FE7D4FE3ED16}" dt="2025-01-05T14:43:16.100" v="993" actId="2696"/>
-        <pc:sldMkLst>
-          <pc:docMk/>
-          <pc:sldMk cId="4146654093" sldId="678"/>
-        </pc:sldMkLst>
-      </pc:sldChg>
-      <pc:sldChg chg="del">
-        <pc:chgData name="Mohammed Fasha" userId="cc64f42d-a1a6-4f08-b97b-0c37f877119f" providerId="ADAL" clId="{BECD4A7F-C1AF-4585-8C31-FE7D4FE3ED16}" dt="2025-01-05T14:42:38.675" v="989" actId="2696"/>
-        <pc:sldMkLst>
-          <pc:docMk/>
-          <pc:sldMk cId="4228312762" sldId="678"/>
-        </pc:sldMkLst>
-      </pc:sldChg>
-      <pc:sldChg chg="del">
-        <pc:chgData name="Mohammed Fasha" userId="cc64f42d-a1a6-4f08-b97b-0c37f877119f" providerId="ADAL" clId="{BECD4A7F-C1AF-4585-8C31-FE7D4FE3ED16}" dt="2025-01-05T14:42:38.675" v="989" actId="2696"/>
-        <pc:sldMkLst>
-          <pc:docMk/>
-          <pc:sldMk cId="581717462" sldId="679"/>
-        </pc:sldMkLst>
-      </pc:sldChg>
-      <pc:sldChg chg="addSp delSp modSp add del mod chgLayout">
-        <pc:chgData name="Mohammed Fasha" userId="cc64f42d-a1a6-4f08-b97b-0c37f877119f" providerId="ADAL" clId="{BECD4A7F-C1AF-4585-8C31-FE7D4FE3ED16}" dt="2025-01-05T16:36:16.605" v="1945" actId="1076"/>
-        <pc:sldMkLst>
-          <pc:docMk/>
-          <pc:sldMk cId="3454522070" sldId="679"/>
-        </pc:sldMkLst>
-      </pc:sldChg>
-      <pc:sldChg chg="add del">
-        <pc:chgData name="Mohammed Fasha" userId="cc64f42d-a1a6-4f08-b97b-0c37f877119f" providerId="ADAL" clId="{BECD4A7F-C1AF-4585-8C31-FE7D4FE3ED16}" dt="2025-01-05T14:43:16.100" v="993" actId="2696"/>
-        <pc:sldMkLst>
-          <pc:docMk/>
-          <pc:sldMk cId="2856814121" sldId="681"/>
-        </pc:sldMkLst>
-      </pc:sldChg>
-      <pc:sldChg chg="del">
-        <pc:chgData name="Mohammed Fasha" userId="cc64f42d-a1a6-4f08-b97b-0c37f877119f" providerId="ADAL" clId="{BECD4A7F-C1AF-4585-8C31-FE7D4FE3ED16}" dt="2025-01-05T14:42:38.675" v="989" actId="2696"/>
-        <pc:sldMkLst>
-          <pc:docMk/>
-          <pc:sldMk cId="3083966018" sldId="681"/>
-        </pc:sldMkLst>
-      </pc:sldChg>
-      <pc:sldChg chg="modSp mod">
-        <pc:chgData name="Mohammed Fasha" userId="cc64f42d-a1a6-4f08-b97b-0c37f877119f" providerId="ADAL" clId="{BECD4A7F-C1AF-4585-8C31-FE7D4FE3ED16}" dt="2025-01-05T14:42:50.596" v="990" actId="14100"/>
-        <pc:sldMkLst>
-          <pc:docMk/>
-          <pc:sldMk cId="1697141369" sldId="695"/>
-        </pc:sldMkLst>
-      </pc:sldChg>
-      <pc:sldChg chg="addSp delSp modSp add del mod">
-        <pc:chgData name="Mohammed Fasha" userId="cc64f42d-a1a6-4f08-b97b-0c37f877119f" providerId="ADAL" clId="{BECD4A7F-C1AF-4585-8C31-FE7D4FE3ED16}" dt="2025-01-05T14:54:31.375" v="1125" actId="14100"/>
-        <pc:sldMkLst>
-          <pc:docMk/>
-          <pc:sldMk cId="265576630" sldId="698"/>
-        </pc:sldMkLst>
-      </pc:sldChg>
-      <pc:sldChg chg="del">
-        <pc:chgData name="Mohammed Fasha" userId="cc64f42d-a1a6-4f08-b97b-0c37f877119f" providerId="ADAL" clId="{BECD4A7F-C1AF-4585-8C31-FE7D4FE3ED16}" dt="2025-01-05T14:42:38.675" v="989" actId="2696"/>
-        <pc:sldMkLst>
-          <pc:docMk/>
-          <pc:sldMk cId="991725834" sldId="698"/>
-        </pc:sldMkLst>
-      </pc:sldChg>
-      <pc:sldChg chg="del">
-        <pc:chgData name="Mohammed Fasha" userId="cc64f42d-a1a6-4f08-b97b-0c37f877119f" providerId="ADAL" clId="{BECD4A7F-C1AF-4585-8C31-FE7D4FE3ED16}" dt="2025-01-05T14:42:38.675" v="989" actId="2696"/>
-        <pc:sldMkLst>
-          <pc:docMk/>
-          <pc:sldMk cId="3109561867" sldId="700"/>
-        </pc:sldMkLst>
-      </pc:sldChg>
-      <pc:sldChg chg="addSp delSp modSp add del mod">
-        <pc:chgData name="Mohammed Fasha" userId="cc64f42d-a1a6-4f08-b97b-0c37f877119f" providerId="ADAL" clId="{BECD4A7F-C1AF-4585-8C31-FE7D4FE3ED16}" dt="2025-01-05T16:00:05.564" v="1529" actId="20577"/>
-        <pc:sldMkLst>
-          <pc:docMk/>
-          <pc:sldMk cId="4247717824" sldId="700"/>
-        </pc:sldMkLst>
-      </pc:sldChg>
-      <pc:sldChg chg="addSp delSp modSp add mod">
-        <pc:chgData name="Mohammed Fasha" userId="cc64f42d-a1a6-4f08-b97b-0c37f877119f" providerId="ADAL" clId="{BECD4A7F-C1AF-4585-8C31-FE7D4FE3ED16}" dt="2025-01-05T14:53:29.185" v="1101" actId="21"/>
-        <pc:sldMkLst>
-          <pc:docMk/>
-          <pc:sldMk cId="67871309" sldId="709"/>
-        </pc:sldMkLst>
-      </pc:sldChg>
-      <pc:sldChg chg="modSp add mod">
-        <pc:chgData name="Mohammed Fasha" userId="cc64f42d-a1a6-4f08-b97b-0c37f877119f" providerId="ADAL" clId="{BECD4A7F-C1AF-4585-8C31-FE7D4FE3ED16}" dt="2025-01-05T15:31:09.113" v="1385" actId="6549"/>
-        <pc:sldMkLst>
-          <pc:docMk/>
-          <pc:sldMk cId="4114896152" sldId="710"/>
-        </pc:sldMkLst>
-      </pc:sldChg>
-      <pc:sldChg chg="addSp modSp add mod">
-        <pc:chgData name="Mohammed Fasha" userId="cc64f42d-a1a6-4f08-b97b-0c37f877119f" providerId="ADAL" clId="{BECD4A7F-C1AF-4585-8C31-FE7D4FE3ED16}" dt="2025-01-05T15:27:36.027" v="1348" actId="20577"/>
-        <pc:sldMkLst>
-          <pc:docMk/>
-          <pc:sldMk cId="3794385322" sldId="711"/>
-        </pc:sldMkLst>
-      </pc:sldChg>
-      <pc:sldChg chg="add del">
-        <pc:chgData name="Mohammed Fasha" userId="cc64f42d-a1a6-4f08-b97b-0c37f877119f" providerId="ADAL" clId="{BECD4A7F-C1AF-4585-8C31-FE7D4FE3ED16}" dt="2025-01-05T14:57:43.613" v="1146" actId="2696"/>
-        <pc:sldMkLst>
-          <pc:docMk/>
-          <pc:sldMk cId="501127302" sldId="712"/>
-        </pc:sldMkLst>
-      </pc:sldChg>
-      <pc:sldChg chg="modSp add mod">
-        <pc:chgData name="Mohammed Fasha" userId="cc64f42d-a1a6-4f08-b97b-0c37f877119f" providerId="ADAL" clId="{BECD4A7F-C1AF-4585-8C31-FE7D4FE3ED16}" dt="2025-01-05T15:32:23.870" v="1388"/>
-        <pc:sldMkLst>
-          <pc:docMk/>
-          <pc:sldMk cId="3701206727" sldId="712"/>
-        </pc:sldMkLst>
-      </pc:sldChg>
-      <pc:sldChg chg="addSp modSp add mod">
-        <pc:chgData name="Mohammed Fasha" userId="cc64f42d-a1a6-4f08-b97b-0c37f877119f" providerId="ADAL" clId="{BECD4A7F-C1AF-4585-8C31-FE7D4FE3ED16}" dt="2025-01-05T16:06:36.028" v="1538" actId="1076"/>
-        <pc:sldMkLst>
-          <pc:docMk/>
-          <pc:sldMk cId="1499972066" sldId="713"/>
-        </pc:sldMkLst>
-      </pc:sldChg>
-      <pc:sldChg chg="addSp delSp modSp add mod">
-        <pc:chgData name="Mohammed Fasha" userId="cc64f42d-a1a6-4f08-b97b-0c37f877119f" providerId="ADAL" clId="{BECD4A7F-C1AF-4585-8C31-FE7D4FE3ED16}" dt="2025-01-05T16:19:08.436" v="1705" actId="1036"/>
-        <pc:sldMkLst>
-          <pc:docMk/>
-          <pc:sldMk cId="1270641495" sldId="714"/>
-        </pc:sldMkLst>
-      </pc:sldChg>
-      <pc:sldChg chg="addSp modSp new mod">
-        <pc:chgData name="Mohammed Fasha" userId="cc64f42d-a1a6-4f08-b97b-0c37f877119f" providerId="ADAL" clId="{BECD4A7F-C1AF-4585-8C31-FE7D4FE3ED16}" dt="2025-01-05T16:23:44.632" v="1736" actId="12"/>
-        <pc:sldMkLst>
-          <pc:docMk/>
-          <pc:sldMk cId="1096386322" sldId="715"/>
-        </pc:sldMkLst>
-      </pc:sldChg>
-      <pc:sldChg chg="modSp new mod">
-        <pc:chgData name="Mohammed Fasha" userId="cc64f42d-a1a6-4f08-b97b-0c37f877119f" providerId="ADAL" clId="{BECD4A7F-C1AF-4585-8C31-FE7D4FE3ED16}" dt="2025-01-05T16:34:02.360" v="1902" actId="27636"/>
-        <pc:sldMkLst>
-          <pc:docMk/>
-          <pc:sldMk cId="1784058309" sldId="716"/>
-        </pc:sldMkLst>
-      </pc:sldChg>
-      <pc:sldChg chg="modSp add mod ord">
-        <pc:chgData name="Mohammed Fasha" userId="cc64f42d-a1a6-4f08-b97b-0c37f877119f" providerId="ADAL" clId="{BECD4A7F-C1AF-4585-8C31-FE7D4FE3ED16}" dt="2025-01-05T16:27:20.520" v="1803"/>
-        <pc:sldMkLst>
-          <pc:docMk/>
-          <pc:sldMk cId="3139017106" sldId="717"/>
-        </pc:sldMkLst>
-      </pc:sldChg>
-      <pc:sldChg chg="addSp delSp modSp new mod">
-        <pc:chgData name="Mohammed Fasha" userId="cc64f42d-a1a6-4f08-b97b-0c37f877119f" providerId="ADAL" clId="{BECD4A7F-C1AF-4585-8C31-FE7D4FE3ED16}" dt="2025-01-05T16:32:45.446" v="1897" actId="20577"/>
-        <pc:sldMkLst>
-          <pc:docMk/>
-          <pc:sldMk cId="3043812923" sldId="718"/>
-        </pc:sldMkLst>
-      </pc:sldChg>
     </pc:docChg>
   </pc:docChgLst>
   <pc:docChgLst>
@@ -485,356 +193,6 @@
       <pc:docMkLst>
         <pc:docMk/>
       </pc:docMkLst>
-      <pc:sldChg chg="del">
-        <pc:chgData name="Mohammed Fasha" userId="cc64f42d-a1a6-4f08-b97b-0c37f877119f" providerId="ADAL" clId="{1BAE7373-BC78-49F1-9262-209B991CDE28}" dt="2025-03-13T04:04:55.107" v="2" actId="47"/>
-        <pc:sldMkLst>
-          <pc:docMk/>
-          <pc:sldMk cId="89912501" sldId="274"/>
-        </pc:sldMkLst>
-      </pc:sldChg>
-      <pc:sldChg chg="del">
-        <pc:chgData name="Mohammed Fasha" userId="cc64f42d-a1a6-4f08-b97b-0c37f877119f" providerId="ADAL" clId="{1BAE7373-BC78-49F1-9262-209B991CDE28}" dt="2025-03-13T04:04:55.107" v="2" actId="47"/>
-        <pc:sldMkLst>
-          <pc:docMk/>
-          <pc:sldMk cId="1847087325" sldId="283"/>
-        </pc:sldMkLst>
-      </pc:sldChg>
-      <pc:sldChg chg="del">
-        <pc:chgData name="Mohammed Fasha" userId="cc64f42d-a1a6-4f08-b97b-0c37f877119f" providerId="ADAL" clId="{1BAE7373-BC78-49F1-9262-209B991CDE28}" dt="2025-03-13T04:04:55.107" v="2" actId="47"/>
-        <pc:sldMkLst>
-          <pc:docMk/>
-          <pc:sldMk cId="771290671" sldId="284"/>
-        </pc:sldMkLst>
-      </pc:sldChg>
-      <pc:sldChg chg="del">
-        <pc:chgData name="Mohammed Fasha" userId="cc64f42d-a1a6-4f08-b97b-0c37f877119f" providerId="ADAL" clId="{1BAE7373-BC78-49F1-9262-209B991CDE28}" dt="2025-03-13T04:04:55.107" v="2" actId="47"/>
-        <pc:sldMkLst>
-          <pc:docMk/>
-          <pc:sldMk cId="1234327519" sldId="287"/>
-        </pc:sldMkLst>
-      </pc:sldChg>
-      <pc:sldChg chg="del">
-        <pc:chgData name="Mohammed Fasha" userId="cc64f42d-a1a6-4f08-b97b-0c37f877119f" providerId="ADAL" clId="{1BAE7373-BC78-49F1-9262-209B991CDE28}" dt="2025-03-13T04:04:55.107" v="2" actId="47"/>
-        <pc:sldMkLst>
-          <pc:docMk/>
-          <pc:sldMk cId="3304405524" sldId="292"/>
-        </pc:sldMkLst>
-      </pc:sldChg>
-      <pc:sldChg chg="del">
-        <pc:chgData name="Mohammed Fasha" userId="cc64f42d-a1a6-4f08-b97b-0c37f877119f" providerId="ADAL" clId="{1BAE7373-BC78-49F1-9262-209B991CDE28}" dt="2025-03-13T04:04:55.107" v="2" actId="47"/>
-        <pc:sldMkLst>
-          <pc:docMk/>
-          <pc:sldMk cId="1217643332" sldId="294"/>
-        </pc:sldMkLst>
-      </pc:sldChg>
-      <pc:sldChg chg="del">
-        <pc:chgData name="Mohammed Fasha" userId="cc64f42d-a1a6-4f08-b97b-0c37f877119f" providerId="ADAL" clId="{1BAE7373-BC78-49F1-9262-209B991CDE28}" dt="2025-03-13T04:04:55.107" v="2" actId="47"/>
-        <pc:sldMkLst>
-          <pc:docMk/>
-          <pc:sldMk cId="3526654973" sldId="295"/>
-        </pc:sldMkLst>
-      </pc:sldChg>
-      <pc:sldChg chg="del">
-        <pc:chgData name="Mohammed Fasha" userId="cc64f42d-a1a6-4f08-b97b-0c37f877119f" providerId="ADAL" clId="{1BAE7373-BC78-49F1-9262-209B991CDE28}" dt="2025-03-13T04:04:55.107" v="2" actId="47"/>
-        <pc:sldMkLst>
-          <pc:docMk/>
-          <pc:sldMk cId="0" sldId="300"/>
-        </pc:sldMkLst>
-      </pc:sldChg>
-      <pc:sldChg chg="del">
-        <pc:chgData name="Mohammed Fasha" userId="cc64f42d-a1a6-4f08-b97b-0c37f877119f" providerId="ADAL" clId="{1BAE7373-BC78-49F1-9262-209B991CDE28}" dt="2025-03-13T04:04:55.107" v="2" actId="47"/>
-        <pc:sldMkLst>
-          <pc:docMk/>
-          <pc:sldMk cId="0" sldId="301"/>
-        </pc:sldMkLst>
-      </pc:sldChg>
-      <pc:sldChg chg="del">
-        <pc:chgData name="Mohammed Fasha" userId="cc64f42d-a1a6-4f08-b97b-0c37f877119f" providerId="ADAL" clId="{1BAE7373-BC78-49F1-9262-209B991CDE28}" dt="2025-03-13T04:04:55.107" v="2" actId="47"/>
-        <pc:sldMkLst>
-          <pc:docMk/>
-          <pc:sldMk cId="0" sldId="304"/>
-        </pc:sldMkLst>
-      </pc:sldChg>
-      <pc:sldChg chg="del">
-        <pc:chgData name="Mohammed Fasha" userId="cc64f42d-a1a6-4f08-b97b-0c37f877119f" providerId="ADAL" clId="{1BAE7373-BC78-49F1-9262-209B991CDE28}" dt="2025-03-13T04:04:55.107" v="2" actId="47"/>
-        <pc:sldMkLst>
-          <pc:docMk/>
-          <pc:sldMk cId="0" sldId="314"/>
-        </pc:sldMkLst>
-      </pc:sldChg>
-      <pc:sldChg chg="del">
-        <pc:chgData name="Mohammed Fasha" userId="cc64f42d-a1a6-4f08-b97b-0c37f877119f" providerId="ADAL" clId="{1BAE7373-BC78-49F1-9262-209B991CDE28}" dt="2025-03-13T04:04:55.107" v="2" actId="47"/>
-        <pc:sldMkLst>
-          <pc:docMk/>
-          <pc:sldMk cId="2362708721" sldId="321"/>
-        </pc:sldMkLst>
-      </pc:sldChg>
-      <pc:sldChg chg="del">
-        <pc:chgData name="Mohammed Fasha" userId="cc64f42d-a1a6-4f08-b97b-0c37f877119f" providerId="ADAL" clId="{1BAE7373-BC78-49F1-9262-209B991CDE28}" dt="2025-03-13T04:04:55.107" v="2" actId="47"/>
-        <pc:sldMkLst>
-          <pc:docMk/>
-          <pc:sldMk cId="1477953107" sldId="324"/>
-        </pc:sldMkLst>
-      </pc:sldChg>
-      <pc:sldChg chg="del">
-        <pc:chgData name="Mohammed Fasha" userId="cc64f42d-a1a6-4f08-b97b-0c37f877119f" providerId="ADAL" clId="{1BAE7373-BC78-49F1-9262-209B991CDE28}" dt="2025-03-13T04:04:55.107" v="2" actId="47"/>
-        <pc:sldMkLst>
-          <pc:docMk/>
-          <pc:sldMk cId="1624740157" sldId="346"/>
-        </pc:sldMkLst>
-      </pc:sldChg>
-      <pc:sldChg chg="del">
-        <pc:chgData name="Mohammed Fasha" userId="cc64f42d-a1a6-4f08-b97b-0c37f877119f" providerId="ADAL" clId="{1BAE7373-BC78-49F1-9262-209B991CDE28}" dt="2025-03-13T04:04:55.107" v="2" actId="47"/>
-        <pc:sldMkLst>
-          <pc:docMk/>
-          <pc:sldMk cId="1093295885" sldId="365"/>
-        </pc:sldMkLst>
-      </pc:sldChg>
-      <pc:sldChg chg="del">
-        <pc:chgData name="Mohammed Fasha" userId="cc64f42d-a1a6-4f08-b97b-0c37f877119f" providerId="ADAL" clId="{1BAE7373-BC78-49F1-9262-209B991CDE28}" dt="2025-03-13T04:04:55.107" v="2" actId="47"/>
-        <pc:sldMkLst>
-          <pc:docMk/>
-          <pc:sldMk cId="3638528156" sldId="366"/>
-        </pc:sldMkLst>
-      </pc:sldChg>
-      <pc:sldChg chg="del">
-        <pc:chgData name="Mohammed Fasha" userId="cc64f42d-a1a6-4f08-b97b-0c37f877119f" providerId="ADAL" clId="{1BAE7373-BC78-49F1-9262-209B991CDE28}" dt="2025-03-13T04:04:55.107" v="2" actId="47"/>
-        <pc:sldMkLst>
-          <pc:docMk/>
-          <pc:sldMk cId="2714000580" sldId="367"/>
-        </pc:sldMkLst>
-      </pc:sldChg>
-      <pc:sldChg chg="del">
-        <pc:chgData name="Mohammed Fasha" userId="cc64f42d-a1a6-4f08-b97b-0c37f877119f" providerId="ADAL" clId="{1BAE7373-BC78-49F1-9262-209B991CDE28}" dt="2025-03-13T04:04:55.107" v="2" actId="47"/>
-        <pc:sldMkLst>
-          <pc:docMk/>
-          <pc:sldMk cId="4103125789" sldId="368"/>
-        </pc:sldMkLst>
-      </pc:sldChg>
-      <pc:sldChg chg="del">
-        <pc:chgData name="Mohammed Fasha" userId="cc64f42d-a1a6-4f08-b97b-0c37f877119f" providerId="ADAL" clId="{1BAE7373-BC78-49F1-9262-209B991CDE28}" dt="2025-03-13T04:04:55.107" v="2" actId="47"/>
-        <pc:sldMkLst>
-          <pc:docMk/>
-          <pc:sldMk cId="3243173744" sldId="369"/>
-        </pc:sldMkLst>
-      </pc:sldChg>
-      <pc:sldChg chg="del">
-        <pc:chgData name="Mohammed Fasha" userId="cc64f42d-a1a6-4f08-b97b-0c37f877119f" providerId="ADAL" clId="{1BAE7373-BC78-49F1-9262-209B991CDE28}" dt="2025-03-13T04:04:55.107" v="2" actId="47"/>
-        <pc:sldMkLst>
-          <pc:docMk/>
-          <pc:sldMk cId="533099717" sldId="370"/>
-        </pc:sldMkLst>
-      </pc:sldChg>
-      <pc:sldChg chg="del">
-        <pc:chgData name="Mohammed Fasha" userId="cc64f42d-a1a6-4f08-b97b-0c37f877119f" providerId="ADAL" clId="{1BAE7373-BC78-49F1-9262-209B991CDE28}" dt="2025-03-13T04:04:55.107" v="2" actId="47"/>
-        <pc:sldMkLst>
-          <pc:docMk/>
-          <pc:sldMk cId="403304745" sldId="371"/>
-        </pc:sldMkLst>
-      </pc:sldChg>
-      <pc:sldChg chg="del">
-        <pc:chgData name="Mohammed Fasha" userId="cc64f42d-a1a6-4f08-b97b-0c37f877119f" providerId="ADAL" clId="{1BAE7373-BC78-49F1-9262-209B991CDE28}" dt="2025-03-13T04:04:55.107" v="2" actId="47"/>
-        <pc:sldMkLst>
-          <pc:docMk/>
-          <pc:sldMk cId="1274929313" sldId="372"/>
-        </pc:sldMkLst>
-      </pc:sldChg>
-      <pc:sldChg chg="del">
-        <pc:chgData name="Mohammed Fasha" userId="cc64f42d-a1a6-4f08-b97b-0c37f877119f" providerId="ADAL" clId="{1BAE7373-BC78-49F1-9262-209B991CDE28}" dt="2025-03-13T04:04:55.107" v="2" actId="47"/>
-        <pc:sldMkLst>
-          <pc:docMk/>
-          <pc:sldMk cId="3412111298" sldId="376"/>
-        </pc:sldMkLst>
-      </pc:sldChg>
-      <pc:sldChg chg="del">
-        <pc:chgData name="Mohammed Fasha" userId="cc64f42d-a1a6-4f08-b97b-0c37f877119f" providerId="ADAL" clId="{1BAE7373-BC78-49F1-9262-209B991CDE28}" dt="2025-03-13T04:04:55.107" v="2" actId="47"/>
-        <pc:sldMkLst>
-          <pc:docMk/>
-          <pc:sldMk cId="3601872685" sldId="382"/>
-        </pc:sldMkLst>
-      </pc:sldChg>
-      <pc:sldChg chg="del">
-        <pc:chgData name="Mohammed Fasha" userId="cc64f42d-a1a6-4f08-b97b-0c37f877119f" providerId="ADAL" clId="{1BAE7373-BC78-49F1-9262-209B991CDE28}" dt="2025-03-13T04:04:55.107" v="2" actId="47"/>
-        <pc:sldMkLst>
-          <pc:docMk/>
-          <pc:sldMk cId="215899539" sldId="384"/>
-        </pc:sldMkLst>
-      </pc:sldChg>
-      <pc:sldChg chg="del">
-        <pc:chgData name="Mohammed Fasha" userId="cc64f42d-a1a6-4f08-b97b-0c37f877119f" providerId="ADAL" clId="{1BAE7373-BC78-49F1-9262-209B991CDE28}" dt="2025-03-13T04:04:55.107" v="2" actId="47"/>
-        <pc:sldMkLst>
-          <pc:docMk/>
-          <pc:sldMk cId="2001631854" sldId="390"/>
-        </pc:sldMkLst>
-      </pc:sldChg>
-      <pc:sldChg chg="del">
-        <pc:chgData name="Mohammed Fasha" userId="cc64f42d-a1a6-4f08-b97b-0c37f877119f" providerId="ADAL" clId="{1BAE7373-BC78-49F1-9262-209B991CDE28}" dt="2025-03-13T04:04:55.107" v="2" actId="47"/>
-        <pc:sldMkLst>
-          <pc:docMk/>
-          <pc:sldMk cId="2976191511" sldId="393"/>
-        </pc:sldMkLst>
-      </pc:sldChg>
-      <pc:sldChg chg="del">
-        <pc:chgData name="Mohammed Fasha" userId="cc64f42d-a1a6-4f08-b97b-0c37f877119f" providerId="ADAL" clId="{1BAE7373-BC78-49F1-9262-209B991CDE28}" dt="2025-03-13T04:04:55.107" v="2" actId="47"/>
-        <pc:sldMkLst>
-          <pc:docMk/>
-          <pc:sldMk cId="3942416368" sldId="394"/>
-        </pc:sldMkLst>
-      </pc:sldChg>
-      <pc:sldChg chg="del">
-        <pc:chgData name="Mohammed Fasha" userId="cc64f42d-a1a6-4f08-b97b-0c37f877119f" providerId="ADAL" clId="{1BAE7373-BC78-49F1-9262-209B991CDE28}" dt="2025-03-13T04:04:55.107" v="2" actId="47"/>
-        <pc:sldMkLst>
-          <pc:docMk/>
-          <pc:sldMk cId="2455239288" sldId="398"/>
-        </pc:sldMkLst>
-      </pc:sldChg>
-      <pc:sldChg chg="del">
-        <pc:chgData name="Mohammed Fasha" userId="cc64f42d-a1a6-4f08-b97b-0c37f877119f" providerId="ADAL" clId="{1BAE7373-BC78-49F1-9262-209B991CDE28}" dt="2025-03-13T04:04:55.107" v="2" actId="47"/>
-        <pc:sldMkLst>
-          <pc:docMk/>
-          <pc:sldMk cId="322630100" sldId="401"/>
-        </pc:sldMkLst>
-      </pc:sldChg>
-      <pc:sldChg chg="del">
-        <pc:chgData name="Mohammed Fasha" userId="cc64f42d-a1a6-4f08-b97b-0c37f877119f" providerId="ADAL" clId="{1BAE7373-BC78-49F1-9262-209B991CDE28}" dt="2025-03-13T04:04:55.107" v="2" actId="47"/>
-        <pc:sldMkLst>
-          <pc:docMk/>
-          <pc:sldMk cId="2446723419" sldId="402"/>
-        </pc:sldMkLst>
-      </pc:sldChg>
-      <pc:sldChg chg="del">
-        <pc:chgData name="Mohammed Fasha" userId="cc64f42d-a1a6-4f08-b97b-0c37f877119f" providerId="ADAL" clId="{1BAE7373-BC78-49F1-9262-209B991CDE28}" dt="2025-03-13T04:04:55.107" v="2" actId="47"/>
-        <pc:sldMkLst>
-          <pc:docMk/>
-          <pc:sldMk cId="2708838154" sldId="405"/>
-        </pc:sldMkLst>
-      </pc:sldChg>
-      <pc:sldChg chg="del">
-        <pc:chgData name="Mohammed Fasha" userId="cc64f42d-a1a6-4f08-b97b-0c37f877119f" providerId="ADAL" clId="{1BAE7373-BC78-49F1-9262-209B991CDE28}" dt="2025-03-13T04:04:55.107" v="2" actId="47"/>
-        <pc:sldMkLst>
-          <pc:docMk/>
-          <pc:sldMk cId="711859222" sldId="406"/>
-        </pc:sldMkLst>
-      </pc:sldChg>
-      <pc:sldChg chg="del">
-        <pc:chgData name="Mohammed Fasha" userId="cc64f42d-a1a6-4f08-b97b-0c37f877119f" providerId="ADAL" clId="{1BAE7373-BC78-49F1-9262-209B991CDE28}" dt="2025-03-13T04:04:55.107" v="2" actId="47"/>
-        <pc:sldMkLst>
-          <pc:docMk/>
-          <pc:sldMk cId="430192280" sldId="409"/>
-        </pc:sldMkLst>
-      </pc:sldChg>
-      <pc:sldChg chg="del">
-        <pc:chgData name="Mohammed Fasha" userId="cc64f42d-a1a6-4f08-b97b-0c37f877119f" providerId="ADAL" clId="{1BAE7373-BC78-49F1-9262-209B991CDE28}" dt="2025-03-13T04:04:55.107" v="2" actId="47"/>
-        <pc:sldMkLst>
-          <pc:docMk/>
-          <pc:sldMk cId="1261728788" sldId="410"/>
-        </pc:sldMkLst>
-      </pc:sldChg>
-      <pc:sldChg chg="del">
-        <pc:chgData name="Mohammed Fasha" userId="cc64f42d-a1a6-4f08-b97b-0c37f877119f" providerId="ADAL" clId="{1BAE7373-BC78-49F1-9262-209B991CDE28}" dt="2025-03-13T04:04:55.107" v="2" actId="47"/>
-        <pc:sldMkLst>
-          <pc:docMk/>
-          <pc:sldMk cId="465427976" sldId="414"/>
-        </pc:sldMkLst>
-      </pc:sldChg>
-      <pc:sldChg chg="del">
-        <pc:chgData name="Mohammed Fasha" userId="cc64f42d-a1a6-4f08-b97b-0c37f877119f" providerId="ADAL" clId="{1BAE7373-BC78-49F1-9262-209B991CDE28}" dt="2025-03-13T04:04:55.107" v="2" actId="47"/>
-        <pc:sldMkLst>
-          <pc:docMk/>
-          <pc:sldMk cId="4222832899" sldId="419"/>
-        </pc:sldMkLst>
-      </pc:sldChg>
-      <pc:sldChg chg="del">
-        <pc:chgData name="Mohammed Fasha" userId="cc64f42d-a1a6-4f08-b97b-0c37f877119f" providerId="ADAL" clId="{1BAE7373-BC78-49F1-9262-209B991CDE28}" dt="2025-03-13T04:04:55.107" v="2" actId="47"/>
-        <pc:sldMkLst>
-          <pc:docMk/>
-          <pc:sldMk cId="3168225218" sldId="422"/>
-        </pc:sldMkLst>
-      </pc:sldChg>
-      <pc:sldChg chg="del">
-        <pc:chgData name="Mohammed Fasha" userId="cc64f42d-a1a6-4f08-b97b-0c37f877119f" providerId="ADAL" clId="{1BAE7373-BC78-49F1-9262-209B991CDE28}" dt="2025-03-13T04:04:55.107" v="2" actId="47"/>
-        <pc:sldMkLst>
-          <pc:docMk/>
-          <pc:sldMk cId="2310344807" sldId="423"/>
-        </pc:sldMkLst>
-      </pc:sldChg>
-      <pc:sldChg chg="del">
-        <pc:chgData name="Mohammed Fasha" userId="cc64f42d-a1a6-4f08-b97b-0c37f877119f" providerId="ADAL" clId="{1BAE7373-BC78-49F1-9262-209B991CDE28}" dt="2025-03-13T04:04:55.107" v="2" actId="47"/>
-        <pc:sldMkLst>
-          <pc:docMk/>
-          <pc:sldMk cId="707737036" sldId="425"/>
-        </pc:sldMkLst>
-      </pc:sldChg>
-      <pc:sldChg chg="del">
-        <pc:chgData name="Mohammed Fasha" userId="cc64f42d-a1a6-4f08-b97b-0c37f877119f" providerId="ADAL" clId="{1BAE7373-BC78-49F1-9262-209B991CDE28}" dt="2025-03-13T04:04:55.107" v="2" actId="47"/>
-        <pc:sldMkLst>
-          <pc:docMk/>
-          <pc:sldMk cId="232656594" sldId="429"/>
-        </pc:sldMkLst>
-      </pc:sldChg>
-      <pc:sldChg chg="del">
-        <pc:chgData name="Mohammed Fasha" userId="cc64f42d-a1a6-4f08-b97b-0c37f877119f" providerId="ADAL" clId="{1BAE7373-BC78-49F1-9262-209B991CDE28}" dt="2025-03-13T04:04:55.107" v="2" actId="47"/>
-        <pc:sldMkLst>
-          <pc:docMk/>
-          <pc:sldMk cId="404333880" sldId="433"/>
-        </pc:sldMkLst>
-      </pc:sldChg>
-      <pc:sldChg chg="del">
-        <pc:chgData name="Mohammed Fasha" userId="cc64f42d-a1a6-4f08-b97b-0c37f877119f" providerId="ADAL" clId="{1BAE7373-BC78-49F1-9262-209B991CDE28}" dt="2025-03-13T04:04:55.107" v="2" actId="47"/>
-        <pc:sldMkLst>
-          <pc:docMk/>
-          <pc:sldMk cId="2523349106" sldId="442"/>
-        </pc:sldMkLst>
-      </pc:sldChg>
-      <pc:sldChg chg="del">
-        <pc:chgData name="Mohammed Fasha" userId="cc64f42d-a1a6-4f08-b97b-0c37f877119f" providerId="ADAL" clId="{1BAE7373-BC78-49F1-9262-209B991CDE28}" dt="2025-03-13T04:04:55.107" v="2" actId="47"/>
-        <pc:sldMkLst>
-          <pc:docMk/>
-          <pc:sldMk cId="2515022167" sldId="443"/>
-        </pc:sldMkLst>
-      </pc:sldChg>
-      <pc:sldChg chg="del">
-        <pc:chgData name="Mohammed Fasha" userId="cc64f42d-a1a6-4f08-b97b-0c37f877119f" providerId="ADAL" clId="{1BAE7373-BC78-49F1-9262-209B991CDE28}" dt="2025-03-13T04:04:55.107" v="2" actId="47"/>
-        <pc:sldMkLst>
-          <pc:docMk/>
-          <pc:sldMk cId="1977389857" sldId="445"/>
-        </pc:sldMkLst>
-      </pc:sldChg>
-      <pc:sldChg chg="del">
-        <pc:chgData name="Mohammed Fasha" userId="cc64f42d-a1a6-4f08-b97b-0c37f877119f" providerId="ADAL" clId="{1BAE7373-BC78-49F1-9262-209B991CDE28}" dt="2025-03-13T04:04:55.107" v="2" actId="47"/>
-        <pc:sldMkLst>
-          <pc:docMk/>
-          <pc:sldMk cId="2140515002" sldId="446"/>
-        </pc:sldMkLst>
-      </pc:sldChg>
-      <pc:sldChg chg="del">
-        <pc:chgData name="Mohammed Fasha" userId="cc64f42d-a1a6-4f08-b97b-0c37f877119f" providerId="ADAL" clId="{1BAE7373-BC78-49F1-9262-209B991CDE28}" dt="2025-03-13T04:04:55.107" v="2" actId="47"/>
-        <pc:sldMkLst>
-          <pc:docMk/>
-          <pc:sldMk cId="1932795151" sldId="448"/>
-        </pc:sldMkLst>
-      </pc:sldChg>
-      <pc:sldChg chg="del">
-        <pc:chgData name="Mohammed Fasha" userId="cc64f42d-a1a6-4f08-b97b-0c37f877119f" providerId="ADAL" clId="{1BAE7373-BC78-49F1-9262-209B991CDE28}" dt="2025-03-13T04:04:55.107" v="2" actId="47"/>
-        <pc:sldMkLst>
-          <pc:docMk/>
-          <pc:sldMk cId="1837964685" sldId="451"/>
-        </pc:sldMkLst>
-      </pc:sldChg>
-      <pc:sldChg chg="del">
-        <pc:chgData name="Mohammed Fasha" userId="cc64f42d-a1a6-4f08-b97b-0c37f877119f" providerId="ADAL" clId="{1BAE7373-BC78-49F1-9262-209B991CDE28}" dt="2025-03-13T04:04:55.107" v="2" actId="47"/>
-        <pc:sldMkLst>
-          <pc:docMk/>
-          <pc:sldMk cId="1229244997" sldId="452"/>
-        </pc:sldMkLst>
-      </pc:sldChg>
-      <pc:sldChg chg="del">
-        <pc:chgData name="Mohammed Fasha" userId="cc64f42d-a1a6-4f08-b97b-0c37f877119f" providerId="ADAL" clId="{1BAE7373-BC78-49F1-9262-209B991CDE28}" dt="2025-03-13T04:04:55.107" v="2" actId="47"/>
-        <pc:sldMkLst>
-          <pc:docMk/>
-          <pc:sldMk cId="1789205401" sldId="453"/>
-        </pc:sldMkLst>
-      </pc:sldChg>
       <pc:sldChg chg="modSp mod">
         <pc:chgData name="Mohammed Fasha" userId="cc64f42d-a1a6-4f08-b97b-0c37f877119f" providerId="ADAL" clId="{1BAE7373-BC78-49F1-9262-209B991CDE28}" dt="2025-03-13T04:05:10.584" v="53" actId="20577"/>
         <pc:sldMkLst>
@@ -849,195 +207,6 @@
             <ac:spMk id="8" creationId="{107CF054-390C-DCFC-C9A6-9E95C859A175}"/>
           </ac:spMkLst>
         </pc:spChg>
-      </pc:sldChg>
-      <pc:sldChg chg="del">
-        <pc:chgData name="Mohammed Fasha" userId="cc64f42d-a1a6-4f08-b97b-0c37f877119f" providerId="ADAL" clId="{1BAE7373-BC78-49F1-9262-209B991CDE28}" dt="2025-03-13T04:04:55.107" v="2" actId="47"/>
-        <pc:sldMkLst>
-          <pc:docMk/>
-          <pc:sldMk cId="2921402285" sldId="457"/>
-        </pc:sldMkLst>
-      </pc:sldChg>
-      <pc:sldChg chg="del">
-        <pc:chgData name="Mohammed Fasha" userId="cc64f42d-a1a6-4f08-b97b-0c37f877119f" providerId="ADAL" clId="{1BAE7373-BC78-49F1-9262-209B991CDE28}" dt="2025-03-13T04:04:55.107" v="2" actId="47"/>
-        <pc:sldMkLst>
-          <pc:docMk/>
-          <pc:sldMk cId="1912979039" sldId="458"/>
-        </pc:sldMkLst>
-      </pc:sldChg>
-      <pc:sldChg chg="del">
-        <pc:chgData name="Mohammed Fasha" userId="cc64f42d-a1a6-4f08-b97b-0c37f877119f" providerId="ADAL" clId="{1BAE7373-BC78-49F1-9262-209B991CDE28}" dt="2025-03-13T04:04:55.107" v="2" actId="47"/>
-        <pc:sldMkLst>
-          <pc:docMk/>
-          <pc:sldMk cId="484589733" sldId="459"/>
-        </pc:sldMkLst>
-      </pc:sldChg>
-      <pc:sldChg chg="del">
-        <pc:chgData name="Mohammed Fasha" userId="cc64f42d-a1a6-4f08-b97b-0c37f877119f" providerId="ADAL" clId="{1BAE7373-BC78-49F1-9262-209B991CDE28}" dt="2025-03-13T04:04:55.107" v="2" actId="47"/>
-        <pc:sldMkLst>
-          <pc:docMk/>
-          <pc:sldMk cId="1770736122" sldId="460"/>
-        </pc:sldMkLst>
-      </pc:sldChg>
-      <pc:sldChg chg="del">
-        <pc:chgData name="Mohammed Fasha" userId="cc64f42d-a1a6-4f08-b97b-0c37f877119f" providerId="ADAL" clId="{1BAE7373-BC78-49F1-9262-209B991CDE28}" dt="2025-03-13T04:04:55.107" v="2" actId="47"/>
-        <pc:sldMkLst>
-          <pc:docMk/>
-          <pc:sldMk cId="2965647848" sldId="463"/>
-        </pc:sldMkLst>
-      </pc:sldChg>
-      <pc:sldChg chg="del">
-        <pc:chgData name="Mohammed Fasha" userId="cc64f42d-a1a6-4f08-b97b-0c37f877119f" providerId="ADAL" clId="{1BAE7373-BC78-49F1-9262-209B991CDE28}" dt="2025-03-13T04:04:55.107" v="2" actId="47"/>
-        <pc:sldMkLst>
-          <pc:docMk/>
-          <pc:sldMk cId="109379533" sldId="464"/>
-        </pc:sldMkLst>
-      </pc:sldChg>
-      <pc:sldChg chg="del">
-        <pc:chgData name="Mohammed Fasha" userId="cc64f42d-a1a6-4f08-b97b-0c37f877119f" providerId="ADAL" clId="{1BAE7373-BC78-49F1-9262-209B991CDE28}" dt="2025-03-13T04:04:55.107" v="2" actId="47"/>
-        <pc:sldMkLst>
-          <pc:docMk/>
-          <pc:sldMk cId="719424402" sldId="467"/>
-        </pc:sldMkLst>
-      </pc:sldChg>
-      <pc:sldChg chg="del">
-        <pc:chgData name="Mohammed Fasha" userId="cc64f42d-a1a6-4f08-b97b-0c37f877119f" providerId="ADAL" clId="{1BAE7373-BC78-49F1-9262-209B991CDE28}" dt="2025-03-13T04:04:55.107" v="2" actId="47"/>
-        <pc:sldMkLst>
-          <pc:docMk/>
-          <pc:sldMk cId="3168600941" sldId="471"/>
-        </pc:sldMkLst>
-      </pc:sldChg>
-      <pc:sldChg chg="del">
-        <pc:chgData name="Mohammed Fasha" userId="cc64f42d-a1a6-4f08-b97b-0c37f877119f" providerId="ADAL" clId="{1BAE7373-BC78-49F1-9262-209B991CDE28}" dt="2025-03-13T04:04:55.107" v="2" actId="47"/>
-        <pc:sldMkLst>
-          <pc:docMk/>
-          <pc:sldMk cId="2302099845" sldId="472"/>
-        </pc:sldMkLst>
-      </pc:sldChg>
-      <pc:sldChg chg="del">
-        <pc:chgData name="Mohammed Fasha" userId="cc64f42d-a1a6-4f08-b97b-0c37f877119f" providerId="ADAL" clId="{1BAE7373-BC78-49F1-9262-209B991CDE28}" dt="2025-03-13T04:04:55.107" v="2" actId="47"/>
-        <pc:sldMkLst>
-          <pc:docMk/>
-          <pc:sldMk cId="118211851" sldId="473"/>
-        </pc:sldMkLst>
-      </pc:sldChg>
-      <pc:sldChg chg="del">
-        <pc:chgData name="Mohammed Fasha" userId="cc64f42d-a1a6-4f08-b97b-0c37f877119f" providerId="ADAL" clId="{1BAE7373-BC78-49F1-9262-209B991CDE28}" dt="2025-03-13T04:04:55.107" v="2" actId="47"/>
-        <pc:sldMkLst>
-          <pc:docMk/>
-          <pc:sldMk cId="1150689950" sldId="474"/>
-        </pc:sldMkLst>
-      </pc:sldChg>
-      <pc:sldChg chg="del">
-        <pc:chgData name="Mohammed Fasha" userId="cc64f42d-a1a6-4f08-b97b-0c37f877119f" providerId="ADAL" clId="{1BAE7373-BC78-49F1-9262-209B991CDE28}" dt="2025-03-13T04:04:55.107" v="2" actId="47"/>
-        <pc:sldMkLst>
-          <pc:docMk/>
-          <pc:sldMk cId="942593251" sldId="475"/>
-        </pc:sldMkLst>
-      </pc:sldChg>
-      <pc:sldChg chg="del">
-        <pc:chgData name="Mohammed Fasha" userId="cc64f42d-a1a6-4f08-b97b-0c37f877119f" providerId="ADAL" clId="{1BAE7373-BC78-49F1-9262-209B991CDE28}" dt="2025-03-13T04:04:55.107" v="2" actId="47"/>
-        <pc:sldMkLst>
-          <pc:docMk/>
-          <pc:sldMk cId="94366255" sldId="476"/>
-        </pc:sldMkLst>
-      </pc:sldChg>
-      <pc:sldChg chg="del">
-        <pc:chgData name="Mohammed Fasha" userId="cc64f42d-a1a6-4f08-b97b-0c37f877119f" providerId="ADAL" clId="{1BAE7373-BC78-49F1-9262-209B991CDE28}" dt="2025-03-13T04:04:55.107" v="2" actId="47"/>
-        <pc:sldMkLst>
-          <pc:docMk/>
-          <pc:sldMk cId="3109107256" sldId="477"/>
-        </pc:sldMkLst>
-      </pc:sldChg>
-      <pc:sldChg chg="del">
-        <pc:chgData name="Mohammed Fasha" userId="cc64f42d-a1a6-4f08-b97b-0c37f877119f" providerId="ADAL" clId="{1BAE7373-BC78-49F1-9262-209B991CDE28}" dt="2025-03-13T04:04:55.107" v="2" actId="47"/>
-        <pc:sldMkLst>
-          <pc:docMk/>
-          <pc:sldMk cId="408884363" sldId="483"/>
-        </pc:sldMkLst>
-      </pc:sldChg>
-      <pc:sldChg chg="del">
-        <pc:chgData name="Mohammed Fasha" userId="cc64f42d-a1a6-4f08-b97b-0c37f877119f" providerId="ADAL" clId="{1BAE7373-BC78-49F1-9262-209B991CDE28}" dt="2025-03-13T04:04:55.107" v="2" actId="47"/>
-        <pc:sldMkLst>
-          <pc:docMk/>
-          <pc:sldMk cId="994101439" sldId="484"/>
-        </pc:sldMkLst>
-      </pc:sldChg>
-      <pc:sldChg chg="del">
-        <pc:chgData name="Mohammed Fasha" userId="cc64f42d-a1a6-4f08-b97b-0c37f877119f" providerId="ADAL" clId="{1BAE7373-BC78-49F1-9262-209B991CDE28}" dt="2025-03-13T04:04:55.107" v="2" actId="47"/>
-        <pc:sldMkLst>
-          <pc:docMk/>
-          <pc:sldMk cId="1440183149" sldId="485"/>
-        </pc:sldMkLst>
-      </pc:sldChg>
-      <pc:sldChg chg="del">
-        <pc:chgData name="Mohammed Fasha" userId="cc64f42d-a1a6-4f08-b97b-0c37f877119f" providerId="ADAL" clId="{1BAE7373-BC78-49F1-9262-209B991CDE28}" dt="2025-03-13T04:04:55.107" v="2" actId="47"/>
-        <pc:sldMkLst>
-          <pc:docMk/>
-          <pc:sldMk cId="3841714060" sldId="486"/>
-        </pc:sldMkLst>
-      </pc:sldChg>
-      <pc:sldChg chg="del">
-        <pc:chgData name="Mohammed Fasha" userId="cc64f42d-a1a6-4f08-b97b-0c37f877119f" providerId="ADAL" clId="{1BAE7373-BC78-49F1-9262-209B991CDE28}" dt="2025-03-13T04:04:55.107" v="2" actId="47"/>
-        <pc:sldMkLst>
-          <pc:docMk/>
-          <pc:sldMk cId="833725597" sldId="488"/>
-        </pc:sldMkLst>
-      </pc:sldChg>
-      <pc:sldChg chg="del">
-        <pc:chgData name="Mohammed Fasha" userId="cc64f42d-a1a6-4f08-b97b-0c37f877119f" providerId="ADAL" clId="{1BAE7373-BC78-49F1-9262-209B991CDE28}" dt="2025-03-13T04:04:55.107" v="2" actId="47"/>
-        <pc:sldMkLst>
-          <pc:docMk/>
-          <pc:sldMk cId="4123470834" sldId="489"/>
-        </pc:sldMkLst>
-      </pc:sldChg>
-      <pc:sldChg chg="del">
-        <pc:chgData name="Mohammed Fasha" userId="cc64f42d-a1a6-4f08-b97b-0c37f877119f" providerId="ADAL" clId="{1BAE7373-BC78-49F1-9262-209B991CDE28}" dt="2025-03-13T04:04:55.107" v="2" actId="47"/>
-        <pc:sldMkLst>
-          <pc:docMk/>
-          <pc:sldMk cId="4022017735" sldId="490"/>
-        </pc:sldMkLst>
-      </pc:sldChg>
-      <pc:sldChg chg="del">
-        <pc:chgData name="Mohammed Fasha" userId="cc64f42d-a1a6-4f08-b97b-0c37f877119f" providerId="ADAL" clId="{1BAE7373-BC78-49F1-9262-209B991CDE28}" dt="2025-03-13T04:04:55.107" v="2" actId="47"/>
-        <pc:sldMkLst>
-          <pc:docMk/>
-          <pc:sldMk cId="2225061527" sldId="491"/>
-        </pc:sldMkLst>
-      </pc:sldChg>
-      <pc:sldChg chg="del">
-        <pc:chgData name="Mohammed Fasha" userId="cc64f42d-a1a6-4f08-b97b-0c37f877119f" providerId="ADAL" clId="{1BAE7373-BC78-49F1-9262-209B991CDE28}" dt="2025-03-13T04:04:55.107" v="2" actId="47"/>
-        <pc:sldMkLst>
-          <pc:docMk/>
-          <pc:sldMk cId="673932695" sldId="492"/>
-        </pc:sldMkLst>
-      </pc:sldChg>
-      <pc:sldChg chg="del">
-        <pc:chgData name="Mohammed Fasha" userId="cc64f42d-a1a6-4f08-b97b-0c37f877119f" providerId="ADAL" clId="{1BAE7373-BC78-49F1-9262-209B991CDE28}" dt="2025-03-13T04:04:55.107" v="2" actId="47"/>
-        <pc:sldMkLst>
-          <pc:docMk/>
-          <pc:sldMk cId="2512069021" sldId="493"/>
-        </pc:sldMkLst>
-      </pc:sldChg>
-      <pc:sldChg chg="del">
-        <pc:chgData name="Mohammed Fasha" userId="cc64f42d-a1a6-4f08-b97b-0c37f877119f" providerId="ADAL" clId="{1BAE7373-BC78-49F1-9262-209B991CDE28}" dt="2025-03-13T04:04:55.107" v="2" actId="47"/>
-        <pc:sldMkLst>
-          <pc:docMk/>
-          <pc:sldMk cId="3290660304" sldId="494"/>
-        </pc:sldMkLst>
-      </pc:sldChg>
-      <pc:sldChg chg="del">
-        <pc:chgData name="Mohammed Fasha" userId="cc64f42d-a1a6-4f08-b97b-0c37f877119f" providerId="ADAL" clId="{1BAE7373-BC78-49F1-9262-209B991CDE28}" dt="2025-03-13T04:04:55.107" v="2" actId="47"/>
-        <pc:sldMkLst>
-          <pc:docMk/>
-          <pc:sldMk cId="4079654275" sldId="495"/>
-        </pc:sldMkLst>
-      </pc:sldChg>
-      <pc:sldChg chg="del">
-        <pc:chgData name="Mohammed Fasha" userId="cc64f42d-a1a6-4f08-b97b-0c37f877119f" providerId="ADAL" clId="{1BAE7373-BC78-49F1-9262-209B991CDE28}" dt="2025-03-13T04:04:55.107" v="2" actId="47"/>
-        <pc:sldMkLst>
-          <pc:docMk/>
-          <pc:sldMk cId="1501311303" sldId="496"/>
-        </pc:sldMkLst>
       </pc:sldChg>
       <pc:sldChg chg="modSp new mod">
         <pc:chgData name="Mohammed Fasha" userId="cc64f42d-a1a6-4f08-b97b-0c37f877119f" providerId="ADAL" clId="{1BAE7373-BC78-49F1-9262-209B991CDE28}" dt="2025-03-13T04:10:14.044" v="122" actId="6549"/>
@@ -1061,13 +230,6 @@
             <ac:spMk id="3" creationId="{A5195869-3520-9DAA-D835-4CA6C4C9E68B}"/>
           </ac:spMkLst>
         </pc:spChg>
-      </pc:sldChg>
-      <pc:sldChg chg="del">
-        <pc:chgData name="Mohammed Fasha" userId="cc64f42d-a1a6-4f08-b97b-0c37f877119f" providerId="ADAL" clId="{1BAE7373-BC78-49F1-9262-209B991CDE28}" dt="2025-03-13T04:04:46.913" v="0" actId="47"/>
-        <pc:sldMkLst>
-          <pc:docMk/>
-          <pc:sldMk cId="2557217836" sldId="497"/>
-        </pc:sldMkLst>
       </pc:sldChg>
       <pc:sldChg chg="modSp add del mod modClrScheme chgLayout">
         <pc:chgData name="Mohammed Fasha" userId="cc64f42d-a1a6-4f08-b97b-0c37f877119f" providerId="ADAL" clId="{1BAE7373-BC78-49F1-9262-209B991CDE28}" dt="2025-03-15T11:51:52.430" v="903" actId="47"/>
@@ -1514,115 +676,10 @@
       <pc:docMkLst>
         <pc:docMk/>
       </pc:docMkLst>
-      <pc:sldChg chg="delSp">
-        <pc:chgData name="Mohammed Fasha" userId="cc64f42d-a1a6-4f08-b97b-0c37f877119f" providerId="ADAL" clId="{2E5FBF59-3168-4932-9518-582502FE1AD5}" dt="2024-11-19T07:40:47.121" v="208" actId="478"/>
-        <pc:sldMkLst>
-          <pc:docMk/>
-          <pc:sldMk cId="391491219" sldId="428"/>
-        </pc:sldMkLst>
-      </pc:sldChg>
-      <pc:sldChg chg="modSp">
-        <pc:chgData name="Mohammed Fasha" userId="cc64f42d-a1a6-4f08-b97b-0c37f877119f" providerId="ADAL" clId="{2E5FBF59-3168-4932-9518-582502FE1AD5}" dt="2024-12-03T07:43:58.007" v="456" actId="1076"/>
-        <pc:sldMkLst>
-          <pc:docMk/>
-          <pc:sldMk cId="3339445507" sldId="430"/>
-        </pc:sldMkLst>
-      </pc:sldChg>
-      <pc:sldChg chg="modSp">
-        <pc:chgData name="Mohammed Fasha" userId="cc64f42d-a1a6-4f08-b97b-0c37f877119f" providerId="ADAL" clId="{2E5FBF59-3168-4932-9518-582502FE1AD5}" dt="2024-12-03T07:45:08.136" v="474" actId="20577"/>
-        <pc:sldMkLst>
-          <pc:docMk/>
-          <pc:sldMk cId="3389046835" sldId="431"/>
-        </pc:sldMkLst>
-      </pc:sldChg>
-      <pc:sldChg chg="modSp">
-        <pc:chgData name="Mohammed Fasha" userId="cc64f42d-a1a6-4f08-b97b-0c37f877119f" providerId="ADAL" clId="{2E5FBF59-3168-4932-9518-582502FE1AD5}" dt="2024-11-10T06:33:09.727" v="37" actId="207"/>
-        <pc:sldMkLst>
-          <pc:docMk/>
-          <pc:sldMk cId="2726994946" sldId="479"/>
-        </pc:sldMkLst>
-      </pc:sldChg>
-      <pc:sldChg chg="modSp">
-        <pc:chgData name="Mohammed Fasha" userId="cc64f42d-a1a6-4f08-b97b-0c37f877119f" providerId="ADAL" clId="{2E5FBF59-3168-4932-9518-582502FE1AD5}" dt="2024-11-19T07:44:28.766" v="211" actId="20577"/>
-        <pc:sldMkLst>
-          <pc:docMk/>
-          <pc:sldMk cId="2297456757" sldId="483"/>
-        </pc:sldMkLst>
-      </pc:sldChg>
-      <pc:sldChg chg="modSp">
-        <pc:chgData name="Mohammed Fasha" userId="cc64f42d-a1a6-4f08-b97b-0c37f877119f" providerId="ADAL" clId="{2E5FBF59-3168-4932-9518-582502FE1AD5}" dt="2024-11-10T06:45:09.392" v="40" actId="20577"/>
-        <pc:sldMkLst>
-          <pc:docMk/>
-          <pc:sldMk cId="3474268344" sldId="596"/>
-        </pc:sldMkLst>
-      </pc:sldChg>
-      <pc:sldChg chg="modSp">
-        <pc:chgData name="Mohammed Fasha" userId="cc64f42d-a1a6-4f08-b97b-0c37f877119f" providerId="ADAL" clId="{2E5FBF59-3168-4932-9518-582502FE1AD5}" dt="2024-12-03T07:47:21.561" v="476" actId="6549"/>
-        <pc:sldMkLst>
-          <pc:docMk/>
-          <pc:sldMk cId="399592497" sldId="613"/>
-        </pc:sldMkLst>
-      </pc:sldChg>
-      <pc:sldChg chg="modSp">
-        <pc:chgData name="Mohammed Fasha" userId="cc64f42d-a1a6-4f08-b97b-0c37f877119f" providerId="ADAL" clId="{2E5FBF59-3168-4932-9518-582502FE1AD5}" dt="2024-12-03T07:49:02.980" v="478" actId="207"/>
-        <pc:sldMkLst>
-          <pc:docMk/>
-          <pc:sldMk cId="3329135496" sldId="617"/>
-        </pc:sldMkLst>
-      </pc:sldChg>
-      <pc:sldChg chg="modSp">
-        <pc:chgData name="Mohammed Fasha" userId="cc64f42d-a1a6-4f08-b97b-0c37f877119f" providerId="ADAL" clId="{2E5FBF59-3168-4932-9518-582502FE1AD5}" dt="2024-12-24T08:05:16.608" v="482" actId="403"/>
-        <pc:sldMkLst>
-          <pc:docMk/>
-          <pc:sldMk cId="2990045589" sldId="659"/>
-        </pc:sldMkLst>
-      </pc:sldChg>
-      <pc:sldChg chg="modSp">
-        <pc:chgData name="Mohammed Fasha" userId="cc64f42d-a1a6-4f08-b97b-0c37f877119f" providerId="ADAL" clId="{2E5FBF59-3168-4932-9518-582502FE1AD5}" dt="2024-12-24T08:08:19.987" v="550" actId="20577"/>
-        <pc:sldMkLst>
-          <pc:docMk/>
-          <pc:sldMk cId="2680231355" sldId="669"/>
-        </pc:sldMkLst>
-      </pc:sldChg>
-      <pc:sldChg chg="addSp modSp">
-        <pc:chgData name="Mohammed Fasha" userId="cc64f42d-a1a6-4f08-b97b-0c37f877119f" providerId="ADAL" clId="{2E5FBF59-3168-4932-9518-582502FE1AD5}" dt="2024-12-24T08:05:52.910" v="488" actId="1076"/>
-        <pc:sldMkLst>
-          <pc:docMk/>
-          <pc:sldMk cId="916102856" sldId="685"/>
-        </pc:sldMkLst>
-      </pc:sldChg>
-      <pc:sldChg chg="modSp">
-        <pc:chgData name="Mohammed Fasha" userId="cc64f42d-a1a6-4f08-b97b-0c37f877119f" providerId="ADAL" clId="{2E5FBF59-3168-4932-9518-582502FE1AD5}" dt="2024-11-19T07:03:29.557" v="206" actId="207"/>
-        <pc:sldMkLst>
-          <pc:docMk/>
-          <pc:sldMk cId="32004852" sldId="708"/>
-        </pc:sldMkLst>
-      </pc:sldChg>
     </pc:docChg>
   </pc:docChgLst>
   <pc:docChgLst>
     <pc:chgData name="Mohammed Fasha" userId="cc64f42d-a1a6-4f08-b97b-0c37f877119f" providerId="ADAL" clId="{6804A8E6-8D7F-46E3-B091-66A8F6B926BF}"/>
-    <pc:docChg chg="custSel modMainMaster">
-      <pc:chgData name="Mohammed Fasha" userId="cc64f42d-a1a6-4f08-b97b-0c37f877119f" providerId="ADAL" clId="{6804A8E6-8D7F-46E3-B091-66A8F6B926BF}" dt="2024-11-09T05:15:35.019" v="2" actId="1076"/>
-      <pc:docMkLst>
-        <pc:docMk/>
-      </pc:docMkLst>
-      <pc:sldMasterChg chg="delSp mod modSldLayout">
-        <pc:chgData name="Mohammed Fasha" userId="cc64f42d-a1a6-4f08-b97b-0c37f877119f" providerId="ADAL" clId="{6804A8E6-8D7F-46E3-B091-66A8F6B926BF}" dt="2024-11-09T05:15:35.019" v="2" actId="1076"/>
-        <pc:sldMasterMkLst>
-          <pc:docMk/>
-          <pc:sldMasterMk cId="742811419" sldId="2147483648"/>
-        </pc:sldMasterMkLst>
-        <pc:sldLayoutChg chg="addSp modSp mod">
-          <pc:chgData name="Mohammed Fasha" userId="cc64f42d-a1a6-4f08-b97b-0c37f877119f" providerId="ADAL" clId="{6804A8E6-8D7F-46E3-B091-66A8F6B926BF}" dt="2024-11-09T05:15:35.019" v="2" actId="1076"/>
-          <pc:sldLayoutMkLst>
-            <pc:docMk/>
-            <pc:sldMasterMk cId="742811419" sldId="2147483648"/>
-            <pc:sldLayoutMk cId="4063788262" sldId="2147483649"/>
-          </pc:sldLayoutMkLst>
-        </pc:sldLayoutChg>
-      </pc:sldMasterChg>
-    </pc:docChg>
   </pc:docChgLst>
   <pc:docChgLst>
     <pc:chgData name="Mohammed Fasha" userId="cc64f42d-a1a6-4f08-b97b-0c37f877119f" providerId="ADAL" clId="{534F862C-5423-415F-8625-CCE86B4944CE}"/>
@@ -2711,6 +1768,184 @@
       </pc:sldChg>
     </pc:docChg>
   </pc:docChgLst>
+  <pc:docChgLst>
+    <pc:chgData name="Mohammed Fasha" userId="cc64f42d-a1a6-4f08-b97b-0c37f877119f" providerId="ADAL" clId="{C411E271-76BA-4F65-AAC3-462D3CC4567C}"/>
+    <pc:docChg chg="undo custSel addSld modSld">
+      <pc:chgData name="Mohammed Fasha" userId="cc64f42d-a1a6-4f08-b97b-0c37f877119f" providerId="ADAL" clId="{C411E271-76BA-4F65-AAC3-462D3CC4567C}" dt="2025-03-16T06:42:54.392" v="163" actId="12"/>
+      <pc:docMkLst>
+        <pc:docMk/>
+      </pc:docMkLst>
+      <pc:sldChg chg="addSp modSp">
+        <pc:chgData name="Mohammed Fasha" userId="cc64f42d-a1a6-4f08-b97b-0c37f877119f" providerId="ADAL" clId="{C411E271-76BA-4F65-AAC3-462D3CC4567C}" dt="2025-03-16T06:34:53.182" v="34" actId="1076"/>
+        <pc:sldMkLst>
+          <pc:docMk/>
+          <pc:sldMk cId="3162735116" sldId="532"/>
+        </pc:sldMkLst>
+        <pc:spChg chg="add mod">
+          <ac:chgData name="Mohammed Fasha" userId="cc64f42d-a1a6-4f08-b97b-0c37f877119f" providerId="ADAL" clId="{C411E271-76BA-4F65-AAC3-462D3CC4567C}" dt="2025-03-16T06:34:53.182" v="34" actId="1076"/>
+          <ac:spMkLst>
+            <pc:docMk/>
+            <pc:sldMk cId="3162735116" sldId="532"/>
+            <ac:spMk id="5" creationId="{276D0FCF-4391-4D56-854A-F184802E65F6}"/>
+          </ac:spMkLst>
+        </pc:spChg>
+        <pc:picChg chg="add mod">
+          <ac:chgData name="Mohammed Fasha" userId="cc64f42d-a1a6-4f08-b97b-0c37f877119f" providerId="ADAL" clId="{C411E271-76BA-4F65-AAC3-462D3CC4567C}" dt="2025-03-16T06:34:16.367" v="14" actId="1076"/>
+          <ac:picMkLst>
+            <pc:docMk/>
+            <pc:sldMk cId="3162735116" sldId="532"/>
+            <ac:picMk id="7" creationId="{DC2CF0F7-2D5E-4690-AF02-D9A372D347F3}"/>
+          </ac:picMkLst>
+        </pc:picChg>
+      </pc:sldChg>
+      <pc:sldChg chg="addSp delSp modSp">
+        <pc:chgData name="Mohammed Fasha" userId="cc64f42d-a1a6-4f08-b97b-0c37f877119f" providerId="ADAL" clId="{C411E271-76BA-4F65-AAC3-462D3CC4567C}" dt="2025-03-16T06:39:34.453" v="68" actId="12"/>
+        <pc:sldMkLst>
+          <pc:docMk/>
+          <pc:sldMk cId="601496234" sldId="533"/>
+        </pc:sldMkLst>
+        <pc:spChg chg="add del mod">
+          <ac:chgData name="Mohammed Fasha" userId="cc64f42d-a1a6-4f08-b97b-0c37f877119f" providerId="ADAL" clId="{C411E271-76BA-4F65-AAC3-462D3CC4567C}" dt="2025-03-16T06:38:37.457" v="55"/>
+          <ac:spMkLst>
+            <pc:docMk/>
+            <pc:sldMk cId="601496234" sldId="533"/>
+            <ac:spMk id="5" creationId="{4B36095E-A4BA-44E7-8F69-A775646D0956}"/>
+          </ac:spMkLst>
+        </pc:spChg>
+        <pc:spChg chg="add del">
+          <ac:chgData name="Mohammed Fasha" userId="cc64f42d-a1a6-4f08-b97b-0c37f877119f" providerId="ADAL" clId="{C411E271-76BA-4F65-AAC3-462D3CC4567C}" dt="2025-03-16T06:38:34.922" v="54"/>
+          <ac:spMkLst>
+            <pc:docMk/>
+            <pc:sldMk cId="601496234" sldId="533"/>
+            <ac:spMk id="6" creationId="{07137515-EE97-4896-8B5A-41231EAF77F7}"/>
+          </ac:spMkLst>
+        </pc:spChg>
+        <pc:spChg chg="add del mod">
+          <ac:chgData name="Mohammed Fasha" userId="cc64f42d-a1a6-4f08-b97b-0c37f877119f" providerId="ADAL" clId="{C411E271-76BA-4F65-AAC3-462D3CC4567C}" dt="2025-03-16T06:37:45.884" v="42"/>
+          <ac:spMkLst>
+            <pc:docMk/>
+            <pc:sldMk cId="601496234" sldId="533"/>
+            <ac:spMk id="7" creationId="{01B05A74-6BBD-41F5-92E5-4F4C2B1A9DBE}"/>
+          </ac:spMkLst>
+        </pc:spChg>
+        <pc:spChg chg="add mod">
+          <ac:chgData name="Mohammed Fasha" userId="cc64f42d-a1a6-4f08-b97b-0c37f877119f" providerId="ADAL" clId="{C411E271-76BA-4F65-AAC3-462D3CC4567C}" dt="2025-03-16T06:39:34.453" v="68" actId="12"/>
+          <ac:spMkLst>
+            <pc:docMk/>
+            <pc:sldMk cId="601496234" sldId="533"/>
+            <ac:spMk id="8" creationId="{A4BECA11-0014-431F-A8D8-3FFAF66D6978}"/>
+          </ac:spMkLst>
+        </pc:spChg>
+        <pc:spChg chg="mod">
+          <ac:chgData name="Mohammed Fasha" userId="cc64f42d-a1a6-4f08-b97b-0c37f877119f" providerId="ADAL" clId="{C411E271-76BA-4F65-AAC3-462D3CC4567C}" dt="2025-03-16T06:39:23.803" v="65" actId="14100"/>
+          <ac:spMkLst>
+            <pc:docMk/>
+            <pc:sldMk cId="601496234" sldId="533"/>
+            <ac:spMk id="1044" creationId="{75470B80-147E-475F-A4A3-BAFF5796EB38}"/>
+          </ac:spMkLst>
+        </pc:spChg>
+      </pc:sldChg>
+      <pc:sldChg chg="modSp">
+        <pc:chgData name="Mohammed Fasha" userId="cc64f42d-a1a6-4f08-b97b-0c37f877119f" providerId="ADAL" clId="{C411E271-76BA-4F65-AAC3-462D3CC4567C}" dt="2025-03-16T06:40:23.281" v="69" actId="1076"/>
+        <pc:sldMkLst>
+          <pc:docMk/>
+          <pc:sldMk cId="514683601" sldId="538"/>
+        </pc:sldMkLst>
+        <pc:spChg chg="mod">
+          <ac:chgData name="Mohammed Fasha" userId="cc64f42d-a1a6-4f08-b97b-0c37f877119f" providerId="ADAL" clId="{C411E271-76BA-4F65-AAC3-462D3CC4567C}" dt="2025-03-16T06:40:23.281" v="69" actId="1076"/>
+          <ac:spMkLst>
+            <pc:docMk/>
+            <pc:sldMk cId="514683601" sldId="538"/>
+            <ac:spMk id="9" creationId="{75B9AF69-3646-8E91-9453-C8E6CB2B3637}"/>
+          </ac:spMkLst>
+        </pc:spChg>
+      </pc:sldChg>
+      <pc:sldChg chg="modSp">
+        <pc:chgData name="Mohammed Fasha" userId="cc64f42d-a1a6-4f08-b97b-0c37f877119f" providerId="ADAL" clId="{C411E271-76BA-4F65-AAC3-462D3CC4567C}" dt="2025-03-16T06:41:36.036" v="156" actId="113"/>
+        <pc:sldMkLst>
+          <pc:docMk/>
+          <pc:sldMk cId="2711506933" sldId="539"/>
+        </pc:sldMkLst>
+        <pc:spChg chg="mod">
+          <ac:chgData name="Mohammed Fasha" userId="cc64f42d-a1a6-4f08-b97b-0c37f877119f" providerId="ADAL" clId="{C411E271-76BA-4F65-AAC3-462D3CC4567C}" dt="2025-03-16T06:40:45.011" v="74" actId="27636"/>
+          <ac:spMkLst>
+            <pc:docMk/>
+            <pc:sldMk cId="2711506933" sldId="539"/>
+            <ac:spMk id="4" creationId="{F25A1EB7-D40C-B625-AFB4-8394BE551BEA}"/>
+          </ac:spMkLst>
+        </pc:spChg>
+        <pc:spChg chg="mod">
+          <ac:chgData name="Mohammed Fasha" userId="cc64f42d-a1a6-4f08-b97b-0c37f877119f" providerId="ADAL" clId="{C411E271-76BA-4F65-AAC3-462D3CC4567C}" dt="2025-03-16T06:41:36.036" v="156" actId="113"/>
+          <ac:spMkLst>
+            <pc:docMk/>
+            <pc:sldMk cId="2711506933" sldId="539"/>
+            <ac:spMk id="5" creationId="{2FB81DB4-B6A3-092F-D836-C7A4C6021F60}"/>
+          </ac:spMkLst>
+        </pc:spChg>
+      </pc:sldChg>
+      <pc:sldChg chg="modSp">
+        <pc:chgData name="Mohammed Fasha" userId="cc64f42d-a1a6-4f08-b97b-0c37f877119f" providerId="ADAL" clId="{C411E271-76BA-4F65-AAC3-462D3CC4567C}" dt="2025-03-16T06:42:32.733" v="160" actId="6549"/>
+        <pc:sldMkLst>
+          <pc:docMk/>
+          <pc:sldMk cId="3088397267" sldId="543"/>
+        </pc:sldMkLst>
+        <pc:spChg chg="mod">
+          <ac:chgData name="Mohammed Fasha" userId="cc64f42d-a1a6-4f08-b97b-0c37f877119f" providerId="ADAL" clId="{C411E271-76BA-4F65-AAC3-462D3CC4567C}" dt="2025-03-16T06:42:32.733" v="160" actId="6549"/>
+          <ac:spMkLst>
+            <pc:docMk/>
+            <pc:sldMk cId="3088397267" sldId="543"/>
+            <ac:spMk id="2" creationId="{E9C280EE-865C-D7D4-DFE1-0BC32081155C}"/>
+          </ac:spMkLst>
+        </pc:spChg>
+      </pc:sldChg>
+      <pc:sldChg chg="modSp">
+        <pc:chgData name="Mohammed Fasha" userId="cc64f42d-a1a6-4f08-b97b-0c37f877119f" providerId="ADAL" clId="{C411E271-76BA-4F65-AAC3-462D3CC4567C}" dt="2025-03-16T06:34:03.041" v="12" actId="1076"/>
+        <pc:sldMkLst>
+          <pc:docMk/>
+          <pc:sldMk cId="51728829" sldId="550"/>
+        </pc:sldMkLst>
+        <pc:spChg chg="mod">
+          <ac:chgData name="Mohammed Fasha" userId="cc64f42d-a1a6-4f08-b97b-0c37f877119f" providerId="ADAL" clId="{C411E271-76BA-4F65-AAC3-462D3CC4567C}" dt="2025-03-16T06:34:03.041" v="12" actId="1076"/>
+          <ac:spMkLst>
+            <pc:docMk/>
+            <pc:sldMk cId="51728829" sldId="550"/>
+            <ac:spMk id="5" creationId="{E4B45F60-6A90-D73F-5226-35583B598BAF}"/>
+          </ac:spMkLst>
+        </pc:spChg>
+        <pc:picChg chg="mod">
+          <ac:chgData name="Mohammed Fasha" userId="cc64f42d-a1a6-4f08-b97b-0c37f877119f" providerId="ADAL" clId="{C411E271-76BA-4F65-AAC3-462D3CC4567C}" dt="2025-03-16T06:33:51.803" v="10" actId="1076"/>
+          <ac:picMkLst>
+            <pc:docMk/>
+            <pc:sldMk cId="51728829" sldId="550"/>
+            <ac:picMk id="7" creationId="{4E45092A-0334-B657-140F-ACD092334510}"/>
+          </ac:picMkLst>
+        </pc:picChg>
+      </pc:sldChg>
+      <pc:sldChg chg="addSp modSp add">
+        <pc:chgData name="Mohammed Fasha" userId="cc64f42d-a1a6-4f08-b97b-0c37f877119f" providerId="ADAL" clId="{C411E271-76BA-4F65-AAC3-462D3CC4567C}" dt="2025-03-16T06:42:54.392" v="163" actId="12"/>
+        <pc:sldMkLst>
+          <pc:docMk/>
+          <pc:sldMk cId="3239849650" sldId="559"/>
+        </pc:sldMkLst>
+        <pc:spChg chg="add mod">
+          <ac:chgData name="Mohammed Fasha" userId="cc64f42d-a1a6-4f08-b97b-0c37f877119f" providerId="ADAL" clId="{C411E271-76BA-4F65-AAC3-462D3CC4567C}" dt="2025-03-16T06:41:05.571" v="131" actId="20577"/>
+          <ac:spMkLst>
+            <pc:docMk/>
+            <pc:sldMk cId="3239849650" sldId="559"/>
+            <ac:spMk id="2" creationId="{887C57B6-3E6E-4198-898B-15902BBEF30D}"/>
+          </ac:spMkLst>
+        </pc:spChg>
+        <pc:spChg chg="add mod">
+          <ac:chgData name="Mohammed Fasha" userId="cc64f42d-a1a6-4f08-b97b-0c37f877119f" providerId="ADAL" clId="{C411E271-76BA-4F65-AAC3-462D3CC4567C}" dt="2025-03-16T06:42:54.392" v="163" actId="12"/>
+          <ac:spMkLst>
+            <pc:docMk/>
+            <pc:sldMk cId="3239849650" sldId="559"/>
+            <ac:spMk id="3" creationId="{FB5E93FF-24A9-43C1-B819-289CE164A1E4}"/>
+          </ac:spMkLst>
+        </pc:spChg>
+      </pc:sldChg>
+    </pc:docChg>
+  </pc:docChgLst>
 </pc:chgInfo>
 </file>
 
@@ -2796,7 +2031,7 @@
           <a:p>
             <a:fld id="{13BA03A4-B9F1-404C-8A74-B1AFD6480953}" type="datetimeFigureOut">
               <a:rPr lang="en-US" smtClean="0"/>
-              <a:t>3/15/2025</a:t>
+              <a:t>3/16/2025</a:t>
             </a:fld>
             <a:endParaRPr lang="en-US"/>
           </a:p>
@@ -3210,7 +2445,7 @@
           <a:p>
             <a:fld id="{0DB78E95-DE77-44D3-BDB9-E242948FB112}" type="datetimeFigureOut">
               <a:rPr lang="en-US" smtClean="0"/>
-              <a:t>3/15/2025</a:t>
+              <a:t>3/16/2025</a:t>
             </a:fld>
             <a:endParaRPr lang="en-US"/>
           </a:p>
@@ -3438,7 +2673,7 @@
           <a:p>
             <a:fld id="{0DB78E95-DE77-44D3-BDB9-E242948FB112}" type="datetimeFigureOut">
               <a:rPr lang="en-US" smtClean="0"/>
-              <a:t>3/15/2025</a:t>
+              <a:t>3/16/2025</a:t>
             </a:fld>
             <a:endParaRPr lang="en-US"/>
           </a:p>
@@ -3646,7 +2881,7 @@
           <a:p>
             <a:fld id="{0DB78E95-DE77-44D3-BDB9-E242948FB112}" type="datetimeFigureOut">
               <a:rPr lang="en-US" smtClean="0"/>
-              <a:t>3/15/2025</a:t>
+              <a:t>3/16/2025</a:t>
             </a:fld>
             <a:endParaRPr lang="en-US"/>
           </a:p>
@@ -4077,7 +3312,7 @@
           <a:p>
             <a:fld id="{0DB78E95-DE77-44D3-BDB9-E242948FB112}" type="datetimeFigureOut">
               <a:rPr lang="en-US" smtClean="0"/>
-              <a:t>3/15/2025</a:t>
+              <a:t>3/16/2025</a:t>
             </a:fld>
             <a:endParaRPr lang="en-US"/>
           </a:p>
@@ -4456,7 +3691,7 @@
           <a:p>
             <a:fld id="{0DB78E95-DE77-44D3-BDB9-E242948FB112}" type="datetimeFigureOut">
               <a:rPr lang="en-US" smtClean="0"/>
-              <a:t>3/15/2025</a:t>
+              <a:t>3/16/2025</a:t>
             </a:fld>
             <a:endParaRPr lang="en-US"/>
           </a:p>
@@ -4868,7 +4103,7 @@
           <a:p>
             <a:fld id="{0DB78E95-DE77-44D3-BDB9-E242948FB112}" type="datetimeFigureOut">
               <a:rPr lang="en-US" smtClean="0"/>
-              <a:t>3/15/2025</a:t>
+              <a:t>3/16/2025</a:t>
             </a:fld>
             <a:endParaRPr lang="en-US"/>
           </a:p>
@@ -5009,7 +4244,7 @@
           <a:p>
             <a:fld id="{0DB78E95-DE77-44D3-BDB9-E242948FB112}" type="datetimeFigureOut">
               <a:rPr lang="en-US" smtClean="0"/>
-              <a:t>3/15/2025</a:t>
+              <a:t>3/16/2025</a:t>
             </a:fld>
             <a:endParaRPr lang="en-US"/>
           </a:p>
@@ -5122,7 +4357,7 @@
           <a:p>
             <a:fld id="{0DB78E95-DE77-44D3-BDB9-E242948FB112}" type="datetimeFigureOut">
               <a:rPr lang="en-US" smtClean="0"/>
-              <a:t>3/15/2025</a:t>
+              <a:t>3/16/2025</a:t>
             </a:fld>
             <a:endParaRPr lang="en-US"/>
           </a:p>
@@ -5433,7 +4668,7 @@
           <a:p>
             <a:fld id="{0DB78E95-DE77-44D3-BDB9-E242948FB112}" type="datetimeFigureOut">
               <a:rPr lang="en-US" smtClean="0"/>
-              <a:t>3/15/2025</a:t>
+              <a:t>3/16/2025</a:t>
             </a:fld>
             <a:endParaRPr lang="en-US"/>
           </a:p>
@@ -5721,7 +4956,7 @@
           <a:p>
             <a:fld id="{0DB78E95-DE77-44D3-BDB9-E242948FB112}" type="datetimeFigureOut">
               <a:rPr lang="en-US" smtClean="0"/>
-              <a:t>3/15/2025</a:t>
+              <a:t>3/16/2025</a:t>
             </a:fld>
             <a:endParaRPr lang="en-US"/>
           </a:p>
@@ -5962,7 +5197,7 @@
           <a:p>
             <a:fld id="{0DB78E95-DE77-44D3-BDB9-E242948FB112}" type="datetimeFigureOut">
               <a:rPr lang="en-US" smtClean="0"/>
-              <a:t>3/15/2025</a:t>
+              <a:t>3/16/2025</a:t>
             </a:fld>
             <a:endParaRPr lang="en-US"/>
           </a:p>
@@ -8408,7 +7643,7 @@
         </p:nvSpPr>
         <p:spPr>
           <a:xfrm>
-            <a:off x="990600" y="3398170"/>
+            <a:off x="838200" y="3429000"/>
             <a:ext cx="10017034" cy="286360"/>
           </a:xfrm>
           <a:prstGeom prst="rect">
@@ -8452,6 +7687,109 @@
 </file>
 
 <file path=ppt/slides/slide15.xml><?xml version="1.0" encoding="utf-8"?>
+<p:sld xmlns:a="http://schemas.openxmlformats.org/drawingml/2006/main" xmlns:r="http://schemas.openxmlformats.org/officeDocument/2006/relationships" xmlns:p="http://schemas.openxmlformats.org/presentationml/2006/main">
+  <p:cSld>
+    <p:spTree>
+      <p:nvGrpSpPr>
+        <p:cNvPr id="1" name=""/>
+        <p:cNvGrpSpPr/>
+        <p:nvPr/>
+      </p:nvGrpSpPr>
+      <p:grpSpPr>
+        <a:xfrm>
+          <a:off x="0" y="0"/>
+          <a:ext cx="0" cy="0"/>
+          <a:chOff x="0" y="0"/>
+          <a:chExt cx="0" cy="0"/>
+        </a:xfrm>
+      </p:grpSpPr>
+      <p:sp>
+        <p:nvSpPr>
+          <p:cNvPr id="2" name="Title 1">
+            <a:extLst>
+              <a:ext uri="{FF2B5EF4-FFF2-40B4-BE49-F238E27FC236}">
+                <a16:creationId xmlns:a16="http://schemas.microsoft.com/office/drawing/2014/main" id="{887C57B6-3E6E-4198-898B-15902BBEF30D}"/>
+              </a:ext>
+            </a:extLst>
+          </p:cNvPr>
+          <p:cNvSpPr>
+            <a:spLocks noGrp="1"/>
+          </p:cNvSpPr>
+          <p:nvPr>
+            <p:ph type="title"/>
+          </p:nvPr>
+        </p:nvSpPr>
+        <p:spPr/>
+        <p:txBody>
+          <a:bodyPr/>
+          <a:lstStyle/>
+          <a:p>
+            <a:r>
+              <a:rPr lang="en-US" dirty="0"/>
+              <a:t>Representing Text – Converting Text into Numbers</a:t>
+            </a:r>
+          </a:p>
+        </p:txBody>
+      </p:sp>
+      <p:sp>
+        <p:nvSpPr>
+          <p:cNvPr id="3" name="Content Placeholder 2">
+            <a:extLst>
+              <a:ext uri="{FF2B5EF4-FFF2-40B4-BE49-F238E27FC236}">
+                <a16:creationId xmlns:a16="http://schemas.microsoft.com/office/drawing/2014/main" id="{FB5E93FF-24A9-43C1-B819-289CE164A1E4}"/>
+              </a:ext>
+            </a:extLst>
+          </p:cNvPr>
+          <p:cNvSpPr>
+            <a:spLocks noGrp="1"/>
+          </p:cNvSpPr>
+          <p:nvPr>
+            <p:ph idx="1"/>
+          </p:nvPr>
+        </p:nvSpPr>
+        <p:spPr/>
+        <p:txBody>
+          <a:bodyPr/>
+          <a:lstStyle/>
+          <a:p>
+            <a:pPr marL="457200" indent="-457200">
+              <a:buFont typeface="+mj-lt"/>
+              <a:buAutoNum type="arabicPeriod"/>
+            </a:pPr>
+            <a:r>
+              <a:rPr lang="en-US" dirty="0"/>
+              <a:t>Bag of Words Method.</a:t>
+            </a:r>
+          </a:p>
+          <a:p>
+            <a:pPr marL="457200" indent="-457200">
+              <a:buFont typeface="+mj-lt"/>
+              <a:buAutoNum type="arabicPeriod"/>
+            </a:pPr>
+            <a:r>
+              <a:rPr lang="en-US" dirty="0"/>
+              <a:t>TF-IDF (Term Frequency-Inverse Document Frequency)</a:t>
+            </a:r>
+          </a:p>
+          <a:p>
+            <a:endParaRPr lang="en-US" dirty="0"/>
+          </a:p>
+        </p:txBody>
+      </p:sp>
+    </p:spTree>
+    <p:extLst>
+      <p:ext uri="{BB962C8B-B14F-4D97-AF65-F5344CB8AC3E}">
+        <p14:creationId xmlns:p14="http://schemas.microsoft.com/office/powerpoint/2010/main" val="3239849650"/>
+      </p:ext>
+    </p:extLst>
+  </p:cSld>
+  <p:clrMapOvr>
+    <a:masterClrMapping/>
+  </p:clrMapOvr>
+</p:sld>
+</file>
+
+<file path=ppt/slides/slide16.xml><?xml version="1.0" encoding="utf-8"?>
 <p:sld xmlns:a="http://schemas.openxmlformats.org/drawingml/2006/main" xmlns:r="http://schemas.openxmlformats.org/officeDocument/2006/relationships" xmlns:p="http://schemas.openxmlformats.org/presentationml/2006/main">
   <p:cSld>
     <p:spTree>
@@ -8487,20 +7825,13 @@
         <p:spPr/>
         <p:txBody>
           <a:bodyPr>
-            <a:normAutofit fontScale="90000"/>
+            <a:normAutofit/>
           </a:bodyPr>
           <a:lstStyle/>
           <a:p>
             <a:r>
               <a:rPr lang="en-US" dirty="0"/>
-              <a:t>Representing Text</a:t>
-            </a:r>
-            <a:br>
-              <a:rPr lang="en-US" dirty="0"/>
-            </a:br>
-            <a:r>
-              <a:rPr lang="en-US" dirty="0"/>
-              <a:t>Bag of Words (</a:t>
+              <a:t>Representing Text - Bag of Words (</a:t>
             </a:r>
             <a:r>
               <a:rPr lang="en-US" dirty="0" err="1"/>
@@ -8532,18 +7863,24 @@
         <p:spPr/>
         <p:txBody>
           <a:bodyPr>
-            <a:normAutofit fontScale="92500" lnSpcReduction="10000"/>
+            <a:normAutofit fontScale="92500"/>
           </a:bodyPr>
           <a:lstStyle/>
           <a:p>
+            <a:pPr marL="0" indent="0">
+              <a:buNone/>
+            </a:pPr>
             <a:r>
               <a:rPr lang="en-US" dirty="0"/>
               <a:t>Bag of Words is a fundamental technique in Natural Language Processing (NLP) that represents text as a collection of word frequencies, disregarding grammar and word order.</a:t>
             </a:r>
           </a:p>
           <a:p>
-            <a:r>
-              <a:rPr lang="en-US" dirty="0"/>
+            <a:pPr marL="0" indent="0">
+              <a:buNone/>
+            </a:pPr>
+            <a:r>
+              <a:rPr lang="en-US" b="1" dirty="0"/>
               <a:t>Core Concept</a:t>
             </a:r>
           </a:p>
@@ -8637,7 +7974,7 @@
 </p:sld>
 </file>
 
-<file path=ppt/slides/slide16.xml><?xml version="1.0" encoding="utf-8"?>
+<file path=ppt/slides/slide17.xml><?xml version="1.0" encoding="utf-8"?>
 <p:sld xmlns:a="http://schemas.openxmlformats.org/drawingml/2006/main" xmlns:r="http://schemas.openxmlformats.org/officeDocument/2006/relationships" xmlns:p="http://schemas.openxmlformats.org/presentationml/2006/main">
   <p:cSld>
     <p:spTree>
@@ -8876,7 +8213,7 @@
 </p:sld>
 </file>
 
-<file path=ppt/slides/slide17.xml><?xml version="1.0" encoding="utf-8"?>
+<file path=ppt/slides/slide18.xml><?xml version="1.0" encoding="utf-8"?>
 <p:sld xmlns:a="http://schemas.openxmlformats.org/drawingml/2006/main" xmlns:r="http://schemas.openxmlformats.org/officeDocument/2006/relationships" xmlns:p="http://schemas.openxmlformats.org/presentationml/2006/main">
   <p:cSld>
     <p:spTree>
@@ -9468,7 +8805,7 @@
 </p:sld>
 </file>
 
-<file path=ppt/slides/slide18.xml><?xml version="1.0" encoding="utf-8"?>
+<file path=ppt/slides/slide19.xml><?xml version="1.0" encoding="utf-8"?>
 <p:sld xmlns:a="http://schemas.openxmlformats.org/drawingml/2006/main" xmlns:r="http://schemas.openxmlformats.org/officeDocument/2006/relationships" xmlns:p="http://schemas.openxmlformats.org/presentationml/2006/main">
   <p:cSld>
     <p:spTree>
@@ -9510,14 +8847,7 @@
           <a:p>
             <a:r>
               <a:rPr lang="en-US" dirty="0"/>
-              <a:t>Representing Text</a:t>
-            </a:r>
-            <a:br>
-              <a:rPr lang="en-US" dirty="0"/>
-            </a:br>
-            <a:r>
-              <a:rPr lang="en-US" dirty="0"/>
-              <a:t>TF-IDF (Term Frequency-Inverse Document Frequency)</a:t>
+              <a:t>Representing Text - TF-IDF (Term Frequency-Inverse Document Frequency)</a:t>
             </a:r>
           </a:p>
         </p:txBody>
@@ -9655,213 +8985,6 @@
     <p:extLst>
       <p:ext uri="{BB962C8B-B14F-4D97-AF65-F5344CB8AC3E}">
         <p14:creationId xmlns:p14="http://schemas.microsoft.com/office/powerpoint/2010/main" val="3088397267"/>
-      </p:ext>
-    </p:extLst>
-  </p:cSld>
-  <p:clrMapOvr>
-    <a:masterClrMapping/>
-  </p:clrMapOvr>
-</p:sld>
-</file>
-
-<file path=ppt/slides/slide19.xml><?xml version="1.0" encoding="utf-8"?>
-<p:sld xmlns:a="http://schemas.openxmlformats.org/drawingml/2006/main" xmlns:r="http://schemas.openxmlformats.org/officeDocument/2006/relationships" xmlns:p="http://schemas.openxmlformats.org/presentationml/2006/main">
-  <p:cSld>
-    <p:spTree>
-      <p:nvGrpSpPr>
-        <p:cNvPr id="1" name=""/>
-        <p:cNvGrpSpPr/>
-        <p:nvPr/>
-      </p:nvGrpSpPr>
-      <p:grpSpPr>
-        <a:xfrm>
-          <a:off x="0" y="0"/>
-          <a:ext cx="0" cy="0"/>
-          <a:chOff x="0" y="0"/>
-          <a:chExt cx="0" cy="0"/>
-        </a:xfrm>
-      </p:grpSpPr>
-      <p:sp>
-        <p:nvSpPr>
-          <p:cNvPr id="2" name="Title 1">
-            <a:extLst>
-              <a:ext uri="{FF2B5EF4-FFF2-40B4-BE49-F238E27FC236}">
-                <a16:creationId xmlns:a16="http://schemas.microsoft.com/office/drawing/2014/main" id="{6D6CD322-7C4B-DC57-D26A-F5E7F2BC26F0}"/>
-              </a:ext>
-            </a:extLst>
-          </p:cNvPr>
-          <p:cNvSpPr>
-            <a:spLocks noGrp="1"/>
-          </p:cNvSpPr>
-          <p:nvPr>
-            <p:ph type="title"/>
-          </p:nvPr>
-        </p:nvSpPr>
-        <p:spPr/>
-        <p:txBody>
-          <a:bodyPr/>
-          <a:lstStyle/>
-          <a:p>
-            <a:r>
-              <a:rPr lang="en-US" dirty="0"/>
-              <a:t>TF-IDF (Term Frequency-Inverse Document Frequency)</a:t>
-            </a:r>
-          </a:p>
-        </p:txBody>
-      </p:sp>
-      <p:sp>
-        <p:nvSpPr>
-          <p:cNvPr id="3" name="Content Placeholder 2">
-            <a:extLst>
-              <a:ext uri="{FF2B5EF4-FFF2-40B4-BE49-F238E27FC236}">
-                <a16:creationId xmlns:a16="http://schemas.microsoft.com/office/drawing/2014/main" id="{5DDC1007-FCCB-A791-C158-E92A75DD215B}"/>
-              </a:ext>
-            </a:extLst>
-          </p:cNvPr>
-          <p:cNvSpPr>
-            <a:spLocks noGrp="1"/>
-          </p:cNvSpPr>
-          <p:nvPr>
-            <p:ph idx="1"/>
-          </p:nvPr>
-        </p:nvSpPr>
-        <p:spPr/>
-        <p:txBody>
-          <a:bodyPr>
-            <a:normAutofit lnSpcReduction="10000"/>
-          </a:bodyPr>
-          <a:lstStyle/>
-          <a:p>
-            <a:pPr>
-              <a:buNone/>
-            </a:pPr>
-            <a:r>
-              <a:rPr lang="en-US" b="1" dirty="0"/>
-              <a:t>Example</a:t>
-            </a:r>
-          </a:p>
-          <a:p>
-            <a:pPr>
-              <a:buNone/>
-            </a:pPr>
-            <a:r>
-              <a:rPr lang="en-US" dirty="0"/>
-              <a:t>For documents:</a:t>
-            </a:r>
-          </a:p>
-          <a:p>
-            <a:pPr>
-              <a:buFont typeface="Arial" panose="020B0604020202020204" pitchFamily="34" charset="0"/>
-              <a:buChar char="•"/>
-            </a:pPr>
-            <a:r>
-              <a:rPr lang="en-US" dirty="0"/>
-              <a:t>Doc1: "I love machine learning"</a:t>
-            </a:r>
-          </a:p>
-          <a:p>
-            <a:pPr>
-              <a:buFont typeface="Arial" panose="020B0604020202020204" pitchFamily="34" charset="0"/>
-              <a:buChar char="•"/>
-            </a:pPr>
-            <a:r>
-              <a:rPr lang="en-US" dirty="0"/>
-              <a:t>Doc2: "I love natural language processing"</a:t>
-            </a:r>
-          </a:p>
-          <a:p>
-            <a:pPr>
-              <a:buFont typeface="Arial" panose="020B0604020202020204" pitchFamily="34" charset="0"/>
-              <a:buChar char="•"/>
-            </a:pPr>
-            <a:r>
-              <a:rPr lang="en-US" dirty="0"/>
-              <a:t>Doc3: "Machine learning models require data"</a:t>
-            </a:r>
-          </a:p>
-          <a:p>
-            <a:pPr marL="0" indent="0">
-              <a:buNone/>
-            </a:pPr>
-            <a:r>
-              <a:rPr lang="en-US" dirty="0"/>
-              <a:t>The word "love" appears in multiple documents, so its IDF value is lower. The word "processing" appears in only one document, giving it a higher IDF value.</a:t>
-            </a:r>
-          </a:p>
-          <a:p>
-            <a:pPr>
-              <a:buNone/>
-            </a:pPr>
-            <a:r>
-              <a:rPr lang="en-US" b="1" dirty="0"/>
-              <a:t>Applications</a:t>
-            </a:r>
-          </a:p>
-          <a:p>
-            <a:pPr>
-              <a:buFont typeface="Arial" panose="020B0604020202020204" pitchFamily="34" charset="0"/>
-              <a:buChar char="•"/>
-            </a:pPr>
-            <a:r>
-              <a:rPr lang="en-US" b="1" dirty="0"/>
-              <a:t>Document retrieval and search engines</a:t>
-            </a:r>
-            <a:r>
-              <a:rPr lang="en-US" dirty="0"/>
-              <a:t>: Ranking documents by relevance</a:t>
-            </a:r>
-          </a:p>
-          <a:p>
-            <a:pPr>
-              <a:buFont typeface="Arial" panose="020B0604020202020204" pitchFamily="34" charset="0"/>
-              <a:buChar char="•"/>
-            </a:pPr>
-            <a:r>
-              <a:rPr lang="en-US" b="1" dirty="0"/>
-              <a:t>Document classification</a:t>
-            </a:r>
-            <a:r>
-              <a:rPr lang="en-US" dirty="0"/>
-              <a:t>: Identifying distinguishing terms</a:t>
-            </a:r>
-          </a:p>
-          <a:p>
-            <a:pPr>
-              <a:buFont typeface="Arial" panose="020B0604020202020204" pitchFamily="34" charset="0"/>
-              <a:buChar char="•"/>
-            </a:pPr>
-            <a:r>
-              <a:rPr lang="en-US" b="1" dirty="0"/>
-              <a:t>Keyword extraction</a:t>
-            </a:r>
-            <a:r>
-              <a:rPr lang="en-US" dirty="0"/>
-              <a:t>: Finding important terms in documents</a:t>
-            </a:r>
-          </a:p>
-          <a:p>
-            <a:pPr>
-              <a:buFont typeface="Arial" panose="020B0604020202020204" pitchFamily="34" charset="0"/>
-              <a:buChar char="•"/>
-            </a:pPr>
-            <a:r>
-              <a:rPr lang="en-US" b="1" dirty="0"/>
-              <a:t>Text summarization</a:t>
-            </a:r>
-            <a:r>
-              <a:rPr lang="en-US" dirty="0"/>
-              <a:t>: Identifying key sentences</a:t>
-            </a:r>
-          </a:p>
-          <a:p>
-            <a:endParaRPr lang="en-US" dirty="0"/>
-          </a:p>
-        </p:txBody>
-      </p:sp>
-    </p:spTree>
-    <p:extLst>
-      <p:ext uri="{BB962C8B-B14F-4D97-AF65-F5344CB8AC3E}">
-        <p14:creationId xmlns:p14="http://schemas.microsoft.com/office/powerpoint/2010/main" val="3439562204"/>
       </p:ext>
     </p:extLst>
   </p:cSld>
@@ -10039,6 +9162,213 @@
   <p:cSld>
     <p:spTree>
       <p:nvGrpSpPr>
+        <p:cNvPr id="1" name=""/>
+        <p:cNvGrpSpPr/>
+        <p:nvPr/>
+      </p:nvGrpSpPr>
+      <p:grpSpPr>
+        <a:xfrm>
+          <a:off x="0" y="0"/>
+          <a:ext cx="0" cy="0"/>
+          <a:chOff x="0" y="0"/>
+          <a:chExt cx="0" cy="0"/>
+        </a:xfrm>
+      </p:grpSpPr>
+      <p:sp>
+        <p:nvSpPr>
+          <p:cNvPr id="2" name="Title 1">
+            <a:extLst>
+              <a:ext uri="{FF2B5EF4-FFF2-40B4-BE49-F238E27FC236}">
+                <a16:creationId xmlns:a16="http://schemas.microsoft.com/office/drawing/2014/main" id="{6D6CD322-7C4B-DC57-D26A-F5E7F2BC26F0}"/>
+              </a:ext>
+            </a:extLst>
+          </p:cNvPr>
+          <p:cNvSpPr>
+            <a:spLocks noGrp="1"/>
+          </p:cNvSpPr>
+          <p:nvPr>
+            <p:ph type="title"/>
+          </p:nvPr>
+        </p:nvSpPr>
+        <p:spPr/>
+        <p:txBody>
+          <a:bodyPr/>
+          <a:lstStyle/>
+          <a:p>
+            <a:r>
+              <a:rPr lang="en-US" dirty="0"/>
+              <a:t>TF-IDF (Term Frequency-Inverse Document Frequency)</a:t>
+            </a:r>
+          </a:p>
+        </p:txBody>
+      </p:sp>
+      <p:sp>
+        <p:nvSpPr>
+          <p:cNvPr id="3" name="Content Placeholder 2">
+            <a:extLst>
+              <a:ext uri="{FF2B5EF4-FFF2-40B4-BE49-F238E27FC236}">
+                <a16:creationId xmlns:a16="http://schemas.microsoft.com/office/drawing/2014/main" id="{5DDC1007-FCCB-A791-C158-E92A75DD215B}"/>
+              </a:ext>
+            </a:extLst>
+          </p:cNvPr>
+          <p:cNvSpPr>
+            <a:spLocks noGrp="1"/>
+          </p:cNvSpPr>
+          <p:nvPr>
+            <p:ph idx="1"/>
+          </p:nvPr>
+        </p:nvSpPr>
+        <p:spPr/>
+        <p:txBody>
+          <a:bodyPr>
+            <a:normAutofit lnSpcReduction="10000"/>
+          </a:bodyPr>
+          <a:lstStyle/>
+          <a:p>
+            <a:pPr>
+              <a:buNone/>
+            </a:pPr>
+            <a:r>
+              <a:rPr lang="en-US" b="1" dirty="0"/>
+              <a:t>Example</a:t>
+            </a:r>
+          </a:p>
+          <a:p>
+            <a:pPr>
+              <a:buNone/>
+            </a:pPr>
+            <a:r>
+              <a:rPr lang="en-US" dirty="0"/>
+              <a:t>For documents:</a:t>
+            </a:r>
+          </a:p>
+          <a:p>
+            <a:pPr>
+              <a:buFont typeface="Arial" panose="020B0604020202020204" pitchFamily="34" charset="0"/>
+              <a:buChar char="•"/>
+            </a:pPr>
+            <a:r>
+              <a:rPr lang="en-US" dirty="0"/>
+              <a:t>Doc1: "I love machine learning"</a:t>
+            </a:r>
+          </a:p>
+          <a:p>
+            <a:pPr>
+              <a:buFont typeface="Arial" panose="020B0604020202020204" pitchFamily="34" charset="0"/>
+              <a:buChar char="•"/>
+            </a:pPr>
+            <a:r>
+              <a:rPr lang="en-US" dirty="0"/>
+              <a:t>Doc2: "I love natural language processing"</a:t>
+            </a:r>
+          </a:p>
+          <a:p>
+            <a:pPr>
+              <a:buFont typeface="Arial" panose="020B0604020202020204" pitchFamily="34" charset="0"/>
+              <a:buChar char="•"/>
+            </a:pPr>
+            <a:r>
+              <a:rPr lang="en-US" dirty="0"/>
+              <a:t>Doc3: "Machine learning models require data"</a:t>
+            </a:r>
+          </a:p>
+          <a:p>
+            <a:pPr marL="0" indent="0">
+              <a:buNone/>
+            </a:pPr>
+            <a:r>
+              <a:rPr lang="en-US" dirty="0"/>
+              <a:t>The word "love" appears in multiple documents, so its IDF value is lower. The word "processing" appears in only one document, giving it a higher IDF value.</a:t>
+            </a:r>
+          </a:p>
+          <a:p>
+            <a:pPr>
+              <a:buNone/>
+            </a:pPr>
+            <a:r>
+              <a:rPr lang="en-US" b="1" dirty="0"/>
+              <a:t>Applications</a:t>
+            </a:r>
+          </a:p>
+          <a:p>
+            <a:pPr>
+              <a:buFont typeface="Arial" panose="020B0604020202020204" pitchFamily="34" charset="0"/>
+              <a:buChar char="•"/>
+            </a:pPr>
+            <a:r>
+              <a:rPr lang="en-US" b="1" dirty="0"/>
+              <a:t>Document retrieval and search engines</a:t>
+            </a:r>
+            <a:r>
+              <a:rPr lang="en-US" dirty="0"/>
+              <a:t>: Ranking documents by relevance</a:t>
+            </a:r>
+          </a:p>
+          <a:p>
+            <a:pPr>
+              <a:buFont typeface="Arial" panose="020B0604020202020204" pitchFamily="34" charset="0"/>
+              <a:buChar char="•"/>
+            </a:pPr>
+            <a:r>
+              <a:rPr lang="en-US" b="1" dirty="0"/>
+              <a:t>Document classification</a:t>
+            </a:r>
+            <a:r>
+              <a:rPr lang="en-US" dirty="0"/>
+              <a:t>: Identifying distinguishing terms</a:t>
+            </a:r>
+          </a:p>
+          <a:p>
+            <a:pPr>
+              <a:buFont typeface="Arial" panose="020B0604020202020204" pitchFamily="34" charset="0"/>
+              <a:buChar char="•"/>
+            </a:pPr>
+            <a:r>
+              <a:rPr lang="en-US" b="1" dirty="0"/>
+              <a:t>Keyword extraction</a:t>
+            </a:r>
+            <a:r>
+              <a:rPr lang="en-US" dirty="0"/>
+              <a:t>: Finding important terms in documents</a:t>
+            </a:r>
+          </a:p>
+          <a:p>
+            <a:pPr>
+              <a:buFont typeface="Arial" panose="020B0604020202020204" pitchFamily="34" charset="0"/>
+              <a:buChar char="•"/>
+            </a:pPr>
+            <a:r>
+              <a:rPr lang="en-US" b="1" dirty="0"/>
+              <a:t>Text summarization</a:t>
+            </a:r>
+            <a:r>
+              <a:rPr lang="en-US" dirty="0"/>
+              <a:t>: Identifying key sentences</a:t>
+            </a:r>
+          </a:p>
+          <a:p>
+            <a:endParaRPr lang="en-US" dirty="0"/>
+          </a:p>
+        </p:txBody>
+      </p:sp>
+    </p:spTree>
+    <p:extLst>
+      <p:ext uri="{BB962C8B-B14F-4D97-AF65-F5344CB8AC3E}">
+        <p14:creationId xmlns:p14="http://schemas.microsoft.com/office/powerpoint/2010/main" val="3439562204"/>
+      </p:ext>
+    </p:extLst>
+  </p:cSld>
+  <p:clrMapOvr>
+    <a:masterClrMapping/>
+  </p:clrMapOvr>
+</p:sld>
+</file>
+
+<file path=ppt/slides/slide21.xml><?xml version="1.0" encoding="utf-8"?>
+<p:sld xmlns:a="http://schemas.openxmlformats.org/drawingml/2006/main" xmlns:r="http://schemas.openxmlformats.org/officeDocument/2006/relationships" xmlns:p="http://schemas.openxmlformats.org/presentationml/2006/main">
+  <p:cSld>
+    <p:spTree>
+      <p:nvGrpSpPr>
         <p:cNvPr id="1" name="">
           <a:extLst>
             <a:ext uri="{FF2B5EF4-FFF2-40B4-BE49-F238E27FC236}">
@@ -10229,7 +9559,7 @@
 </p:sld>
 </file>
 
-<file path=ppt/slides/slide21.xml><?xml version="1.0" encoding="utf-8"?>
+<file path=ppt/slides/slide22.xml><?xml version="1.0" encoding="utf-8"?>
 <p:sld xmlns:a="http://schemas.openxmlformats.org/drawingml/2006/main" xmlns:r="http://schemas.openxmlformats.org/officeDocument/2006/relationships" xmlns:p="http://schemas.openxmlformats.org/presentationml/2006/main">
   <p:cSld>
     <p:spTree>
@@ -10898,7 +10228,7 @@
 </p:sld>
 </file>
 
-<file path=ppt/slides/slide22.xml><?xml version="1.0" encoding="utf-8"?>
+<file path=ppt/slides/slide23.xml><?xml version="1.0" encoding="utf-8"?>
 <p:sld xmlns:a="http://schemas.openxmlformats.org/drawingml/2006/main" xmlns:r="http://schemas.openxmlformats.org/officeDocument/2006/relationships" xmlns:p="http://schemas.openxmlformats.org/presentationml/2006/main">
   <p:cSld>
     <p:spTree>
@@ -10991,7 +10321,7 @@
 </p:sld>
 </file>
 
-<file path=ppt/slides/slide23.xml><?xml version="1.0" encoding="utf-8"?>
+<file path=ppt/slides/slide24.xml><?xml version="1.0" encoding="utf-8"?>
 <p:sld xmlns:a="http://schemas.openxmlformats.org/drawingml/2006/main" xmlns:r="http://schemas.openxmlformats.org/officeDocument/2006/relationships" xmlns:p="http://schemas.openxmlformats.org/presentationml/2006/main">
   <p:cSld>
     <p:spTree>
@@ -11122,7 +10452,7 @@
         </p:nvSpPr>
         <p:spPr>
           <a:xfrm>
-            <a:off x="3503025" y="5256704"/>
+            <a:off x="4628433" y="5378867"/>
             <a:ext cx="2114006" cy="399925"/>
           </a:xfrm>
           <a:prstGeom prst="rect">
@@ -11131,7 +10461,7 @@
         </p:spPr>
         <p:txBody>
           <a:bodyPr vert="horz" lIns="91440" tIns="45720" rIns="91440" bIns="45720" rtlCol="0">
-            <a:normAutofit fontScale="92500"/>
+            <a:normAutofit fontScale="62500" lnSpcReduction="20000"/>
           </a:bodyPr>
           <a:lstStyle>
             <a:lvl1pPr marL="228600" indent="-228600" algn="l" defTabSz="914400" rtl="0" eaLnBrk="1" latinLnBrk="0" hangingPunct="1">
@@ -11303,7 +10633,7 @@
             </a:pPr>
             <a:r>
               <a:rPr lang="en-US" dirty="0"/>
-              <a:t>Click to code file</a:t>
+              <a:t>Click to open code file</a:t>
             </a:r>
           </a:p>
         </p:txBody>
@@ -11337,7 +10667,7 @@
         </p:blipFill>
         <p:spPr>
           <a:xfrm>
-            <a:off x="5780450" y="5361417"/>
+            <a:off x="4981575" y="5151992"/>
             <a:ext cx="1114425" cy="190500"/>
           </a:xfrm>
           <a:prstGeom prst="rect">
@@ -11358,7 +10688,7 @@
 </p:sld>
 </file>
 
-<file path=ppt/slides/slide24.xml><?xml version="1.0" encoding="utf-8"?>
+<file path=ppt/slides/slide25.xml><?xml version="1.0" encoding="utf-8"?>
 <p:sld xmlns:a="http://schemas.openxmlformats.org/drawingml/2006/main" xmlns:r="http://schemas.openxmlformats.org/officeDocument/2006/relationships" xmlns:p="http://schemas.openxmlformats.org/presentationml/2006/main">
   <p:cSld>
     <p:spTree>
@@ -13645,7 +12975,7 @@
 </p:sld>
 </file>
 
-<file path=ppt/slides/slide25.xml><?xml version="1.0" encoding="utf-8"?>
+<file path=ppt/slides/slide26.xml><?xml version="1.0" encoding="utf-8"?>
 <p:sld xmlns:a="http://schemas.openxmlformats.org/drawingml/2006/main" xmlns:r="http://schemas.openxmlformats.org/officeDocument/2006/relationships" xmlns:p="http://schemas.openxmlformats.org/presentationml/2006/main">
   <p:cSld>
     <p:spTree>
@@ -15534,7 +14864,7 @@
 </p:sld>
 </file>
 
-<file path=ppt/slides/slide26.xml><?xml version="1.0" encoding="utf-8"?>
+<file path=ppt/slides/slide27.xml><?xml version="1.0" encoding="utf-8"?>
 <p:sld xmlns:a="http://schemas.openxmlformats.org/drawingml/2006/main" xmlns:r="http://schemas.openxmlformats.org/officeDocument/2006/relationships" xmlns:p="http://schemas.openxmlformats.org/presentationml/2006/main">
   <p:cSld>
     <p:spTree>
@@ -17550,7 +16880,7 @@
 </p:sld>
 </file>
 
-<file path=ppt/slides/slide27.xml><?xml version="1.0" encoding="utf-8"?>
+<file path=ppt/slides/slide28.xml><?xml version="1.0" encoding="utf-8"?>
 <p:sld xmlns:a="http://schemas.openxmlformats.org/drawingml/2006/main" xmlns:r="http://schemas.openxmlformats.org/officeDocument/2006/relationships" xmlns:p="http://schemas.openxmlformats.org/presentationml/2006/main">
   <p:cSld>
     <p:spTree>
@@ -19479,7 +18809,7 @@
 </p:sld>
 </file>
 
-<file path=ppt/slides/slide28.xml><?xml version="1.0" encoding="utf-8"?>
+<file path=ppt/slides/slide29.xml><?xml version="1.0" encoding="utf-8"?>
 <p:sld xmlns:a="http://schemas.openxmlformats.org/drawingml/2006/main" xmlns:r="http://schemas.openxmlformats.org/officeDocument/2006/relationships" xmlns:p="http://schemas.openxmlformats.org/presentationml/2006/main">
   <p:cSld>
     <p:spTree>
@@ -19553,277 +18883,6 @@
     <p:extLst>
       <p:ext uri="{BB962C8B-B14F-4D97-AF65-F5344CB8AC3E}">
         <p14:creationId xmlns:p14="http://schemas.microsoft.com/office/powerpoint/2010/main" val="1962627052"/>
-      </p:ext>
-    </p:extLst>
-  </p:cSld>
-  <p:clrMapOvr>
-    <a:masterClrMapping/>
-  </p:clrMapOvr>
-</p:sld>
-</file>
-
-<file path=ppt/slides/slide29.xml><?xml version="1.0" encoding="utf-8"?>
-<p:sld xmlns:a="http://schemas.openxmlformats.org/drawingml/2006/main" xmlns:r="http://schemas.openxmlformats.org/officeDocument/2006/relationships" xmlns:p="http://schemas.openxmlformats.org/presentationml/2006/main">
-  <p:cSld>
-    <p:spTree>
-      <p:nvGrpSpPr>
-        <p:cNvPr id="1" name="">
-          <a:extLst>
-            <a:ext uri="{FF2B5EF4-FFF2-40B4-BE49-F238E27FC236}">
-              <a16:creationId xmlns:a16="http://schemas.microsoft.com/office/drawing/2014/main" id="{780EF83F-1AF2-9F93-36C9-599166F18D98}"/>
-            </a:ext>
-          </a:extLst>
-        </p:cNvPr>
-        <p:cNvGrpSpPr/>
-        <p:nvPr/>
-      </p:nvGrpSpPr>
-      <p:grpSpPr>
-        <a:xfrm>
-          <a:off x="0" y="0"/>
-          <a:ext cx="0" cy="0"/>
-          <a:chOff x="0" y="0"/>
-          <a:chExt cx="0" cy="0"/>
-        </a:xfrm>
-      </p:grpSpPr>
-      <p:sp>
-        <p:nvSpPr>
-          <p:cNvPr id="2" name="Title 1">
-            <a:extLst>
-              <a:ext uri="{FF2B5EF4-FFF2-40B4-BE49-F238E27FC236}">
-                <a16:creationId xmlns:a16="http://schemas.microsoft.com/office/drawing/2014/main" id="{52903DAF-5696-AC19-F8F3-CD988D3057AE}"/>
-              </a:ext>
-            </a:extLst>
-          </p:cNvPr>
-          <p:cNvSpPr>
-            <a:spLocks noGrp="1"/>
-          </p:cNvSpPr>
-          <p:nvPr>
-            <p:ph type="title"/>
-          </p:nvPr>
-        </p:nvSpPr>
-        <p:spPr/>
-        <p:txBody>
-          <a:bodyPr/>
-          <a:lstStyle/>
-          <a:p>
-            <a:r>
-              <a:rPr lang="en-US" dirty="0"/>
-              <a:t>Language Models: N-grams</a:t>
-            </a:r>
-          </a:p>
-        </p:txBody>
-      </p:sp>
-      <p:sp>
-        <p:nvSpPr>
-          <p:cNvPr id="3" name="Content Placeholder 2">
-            <a:extLst>
-              <a:ext uri="{FF2B5EF4-FFF2-40B4-BE49-F238E27FC236}">
-                <a16:creationId xmlns:a16="http://schemas.microsoft.com/office/drawing/2014/main" id="{7D988BEA-61D0-FF52-BEAC-D65E0B8CE8A1}"/>
-              </a:ext>
-            </a:extLst>
-          </p:cNvPr>
-          <p:cNvSpPr>
-            <a:spLocks noGrp="1"/>
-          </p:cNvSpPr>
-          <p:nvPr>
-            <p:ph idx="1"/>
-          </p:nvPr>
-        </p:nvSpPr>
-        <p:spPr/>
-        <p:txBody>
-          <a:bodyPr>
-            <a:normAutofit fontScale="77500" lnSpcReduction="20000"/>
-          </a:bodyPr>
-          <a:lstStyle/>
-          <a:p>
-            <a:pPr marL="0" indent="0">
-              <a:buNone/>
-            </a:pPr>
-            <a:r>
-              <a:rPr lang="en-US" dirty="0"/>
-              <a:t>Language models are statistical or neural models that capture the probability distribution of words or tokens in a language. </a:t>
-            </a:r>
-          </a:p>
-          <a:p>
-            <a:pPr marL="0" indent="0">
-              <a:buNone/>
-            </a:pPr>
-            <a:r>
-              <a:rPr lang="en-US" dirty="0"/>
-              <a:t>They predict the likelihood of a sequence of words occurring together, enabling machines to understand and generate human language.</a:t>
-            </a:r>
-          </a:p>
-          <a:p>
-            <a:pPr>
-              <a:buNone/>
-            </a:pPr>
-            <a:r>
-              <a:rPr lang="en-US" b="1" dirty="0"/>
-              <a:t>Types of Language Models</a:t>
-            </a:r>
-          </a:p>
-          <a:p>
-            <a:pPr>
-              <a:buNone/>
-            </a:pPr>
-            <a:r>
-              <a:rPr lang="en-US" b="1" dirty="0"/>
-              <a:t>1) Statistical Language Models</a:t>
-            </a:r>
-          </a:p>
-          <a:p>
-            <a:pPr>
-              <a:buFont typeface="Arial" panose="020B0604020202020204" pitchFamily="34" charset="0"/>
-              <a:buChar char="•"/>
-            </a:pPr>
-            <a:r>
-              <a:rPr lang="en-US" b="1" dirty="0"/>
-              <a:t>N-gram Models</a:t>
-            </a:r>
-            <a:r>
-              <a:rPr lang="en-US" dirty="0"/>
-              <a:t>: Predict the next word based on the previous N-1 words </a:t>
-            </a:r>
-          </a:p>
-          <a:p>
-            <a:pPr marL="742950" lvl="1" indent="-285750">
-              <a:buFont typeface="Arial" panose="020B0604020202020204" pitchFamily="34" charset="0"/>
-              <a:buChar char="•"/>
-            </a:pPr>
-            <a:r>
-              <a:rPr lang="en-US" dirty="0"/>
-              <a:t>Unigram: P(word) - individual word probabilities</a:t>
-            </a:r>
-          </a:p>
-          <a:p>
-            <a:pPr marL="742950" lvl="1" indent="-285750">
-              <a:buFont typeface="Arial" panose="020B0604020202020204" pitchFamily="34" charset="0"/>
-              <a:buChar char="•"/>
-            </a:pPr>
-            <a:r>
-              <a:rPr lang="en-US" dirty="0"/>
-              <a:t>Bigram: P(word₂|word₁) - probability of word₂ given word₁</a:t>
-            </a:r>
-          </a:p>
-          <a:p>
-            <a:pPr marL="742950" lvl="1" indent="-285750">
-              <a:buFont typeface="Arial" panose="020B0604020202020204" pitchFamily="34" charset="0"/>
-              <a:buChar char="•"/>
-            </a:pPr>
-            <a:r>
-              <a:rPr lang="en-US" dirty="0"/>
-              <a:t>Trigram: P(word₃|</a:t>
-            </a:r>
-            <a:r>
-              <a:rPr lang="en-US" dirty="0" err="1"/>
-              <a:t>word₁,word</a:t>
-            </a:r>
-            <a:r>
-              <a:rPr lang="en-US" dirty="0"/>
-              <a:t>₂) - probability of word₃ given word₁ and word₂</a:t>
-            </a:r>
-          </a:p>
-          <a:p>
-            <a:pPr>
-              <a:buNone/>
-            </a:pPr>
-            <a:r>
-              <a:rPr lang="en-US" b="1" dirty="0"/>
-              <a:t>2) Neural Language Models</a:t>
-            </a:r>
-          </a:p>
-          <a:p>
-            <a:pPr>
-              <a:buFont typeface="Arial" panose="020B0604020202020204" pitchFamily="34" charset="0"/>
-              <a:buChar char="•"/>
-            </a:pPr>
-            <a:r>
-              <a:rPr lang="en-US" b="1" dirty="0"/>
-              <a:t>RNN/LSTM-based</a:t>
-            </a:r>
-            <a:r>
-              <a:rPr lang="en-US" dirty="0"/>
-              <a:t>: Process sequences by maintaining hidden states </a:t>
-            </a:r>
-          </a:p>
-          <a:p>
-            <a:pPr marL="742950" lvl="1" indent="-285750">
-              <a:buFont typeface="Arial" panose="020B0604020202020204" pitchFamily="34" charset="0"/>
-              <a:buChar char="•"/>
-            </a:pPr>
-            <a:r>
-              <a:rPr lang="en-US" dirty="0"/>
-              <a:t>Better at capturing long-range dependencies than n-grams</a:t>
-            </a:r>
-          </a:p>
-          <a:p>
-            <a:pPr marL="742950" lvl="1" indent="-285750">
-              <a:buFont typeface="Arial" panose="020B0604020202020204" pitchFamily="34" charset="0"/>
-              <a:buChar char="•"/>
-            </a:pPr>
-            <a:r>
-              <a:rPr lang="en-US" dirty="0"/>
-              <a:t>Examples: Early versions of Google Translate</a:t>
-            </a:r>
-          </a:p>
-          <a:p>
-            <a:pPr>
-              <a:buFont typeface="Arial" panose="020B0604020202020204" pitchFamily="34" charset="0"/>
-              <a:buChar char="•"/>
-            </a:pPr>
-            <a:r>
-              <a:rPr lang="en-US" b="1" dirty="0"/>
-              <a:t>Transformer-based</a:t>
-            </a:r>
-            <a:r>
-              <a:rPr lang="en-US" dirty="0"/>
-              <a:t>: Use attention mechanisms to process entire sequences </a:t>
-            </a:r>
-          </a:p>
-          <a:p>
-            <a:pPr marL="742950" lvl="1" indent="-285750">
-              <a:buFont typeface="Arial" panose="020B0604020202020204" pitchFamily="34" charset="0"/>
-              <a:buChar char="•"/>
-            </a:pPr>
-            <a:r>
-              <a:rPr lang="en-US" dirty="0"/>
-              <a:t>BERT: Bidirectional, focuses on understanding context</a:t>
-            </a:r>
-          </a:p>
-          <a:p>
-            <a:pPr marL="742950" lvl="1" indent="-285750">
-              <a:buFont typeface="Arial" panose="020B0604020202020204" pitchFamily="34" charset="0"/>
-              <a:buChar char="•"/>
-            </a:pPr>
-            <a:r>
-              <a:rPr lang="en-US" dirty="0"/>
-              <a:t>GPT: Autoregressive, focuses on text generation</a:t>
-            </a:r>
-          </a:p>
-          <a:p>
-            <a:pPr marL="742950" lvl="1" indent="-285750">
-              <a:buFont typeface="Arial" panose="020B0604020202020204" pitchFamily="34" charset="0"/>
-              <a:buChar char="•"/>
-            </a:pPr>
-            <a:r>
-              <a:rPr lang="en-US" dirty="0"/>
-              <a:t>T5, </a:t>
-            </a:r>
-            <a:r>
-              <a:rPr lang="en-US" dirty="0" err="1"/>
-              <a:t>RoBERTa</a:t>
-            </a:r>
-            <a:r>
-              <a:rPr lang="en-US" dirty="0"/>
-              <a:t>, ELECTRA: Refinements of transformer architecture</a:t>
-            </a:r>
-          </a:p>
-        </p:txBody>
-      </p:sp>
-    </p:spTree>
-    <p:extLst>
-      <p:ext uri="{BB962C8B-B14F-4D97-AF65-F5344CB8AC3E}">
-        <p14:creationId xmlns:p14="http://schemas.microsoft.com/office/powerpoint/2010/main" val="184126415"/>
       </p:ext>
     </p:extLst>
   </p:cSld>
@@ -20058,6 +19117,277 @@
   <p:cSld>
     <p:spTree>
       <p:nvGrpSpPr>
+        <p:cNvPr id="1" name="">
+          <a:extLst>
+            <a:ext uri="{FF2B5EF4-FFF2-40B4-BE49-F238E27FC236}">
+              <a16:creationId xmlns:a16="http://schemas.microsoft.com/office/drawing/2014/main" id="{780EF83F-1AF2-9F93-36C9-599166F18D98}"/>
+            </a:ext>
+          </a:extLst>
+        </p:cNvPr>
+        <p:cNvGrpSpPr/>
+        <p:nvPr/>
+      </p:nvGrpSpPr>
+      <p:grpSpPr>
+        <a:xfrm>
+          <a:off x="0" y="0"/>
+          <a:ext cx="0" cy="0"/>
+          <a:chOff x="0" y="0"/>
+          <a:chExt cx="0" cy="0"/>
+        </a:xfrm>
+      </p:grpSpPr>
+      <p:sp>
+        <p:nvSpPr>
+          <p:cNvPr id="2" name="Title 1">
+            <a:extLst>
+              <a:ext uri="{FF2B5EF4-FFF2-40B4-BE49-F238E27FC236}">
+                <a16:creationId xmlns:a16="http://schemas.microsoft.com/office/drawing/2014/main" id="{52903DAF-5696-AC19-F8F3-CD988D3057AE}"/>
+              </a:ext>
+            </a:extLst>
+          </p:cNvPr>
+          <p:cNvSpPr>
+            <a:spLocks noGrp="1"/>
+          </p:cNvSpPr>
+          <p:nvPr>
+            <p:ph type="title"/>
+          </p:nvPr>
+        </p:nvSpPr>
+        <p:spPr/>
+        <p:txBody>
+          <a:bodyPr/>
+          <a:lstStyle/>
+          <a:p>
+            <a:r>
+              <a:rPr lang="en-US" dirty="0"/>
+              <a:t>Language Models: N-grams</a:t>
+            </a:r>
+          </a:p>
+        </p:txBody>
+      </p:sp>
+      <p:sp>
+        <p:nvSpPr>
+          <p:cNvPr id="3" name="Content Placeholder 2">
+            <a:extLst>
+              <a:ext uri="{FF2B5EF4-FFF2-40B4-BE49-F238E27FC236}">
+                <a16:creationId xmlns:a16="http://schemas.microsoft.com/office/drawing/2014/main" id="{7D988BEA-61D0-FF52-BEAC-D65E0B8CE8A1}"/>
+              </a:ext>
+            </a:extLst>
+          </p:cNvPr>
+          <p:cNvSpPr>
+            <a:spLocks noGrp="1"/>
+          </p:cNvSpPr>
+          <p:nvPr>
+            <p:ph idx="1"/>
+          </p:nvPr>
+        </p:nvSpPr>
+        <p:spPr/>
+        <p:txBody>
+          <a:bodyPr>
+            <a:normAutofit fontScale="77500" lnSpcReduction="20000"/>
+          </a:bodyPr>
+          <a:lstStyle/>
+          <a:p>
+            <a:pPr marL="0" indent="0">
+              <a:buNone/>
+            </a:pPr>
+            <a:r>
+              <a:rPr lang="en-US" dirty="0"/>
+              <a:t>Language models are statistical or neural models that capture the probability distribution of words or tokens in a language. </a:t>
+            </a:r>
+          </a:p>
+          <a:p>
+            <a:pPr marL="0" indent="0">
+              <a:buNone/>
+            </a:pPr>
+            <a:r>
+              <a:rPr lang="en-US" dirty="0"/>
+              <a:t>They predict the likelihood of a sequence of words occurring together, enabling machines to understand and generate human language.</a:t>
+            </a:r>
+          </a:p>
+          <a:p>
+            <a:pPr>
+              <a:buNone/>
+            </a:pPr>
+            <a:r>
+              <a:rPr lang="en-US" b="1" dirty="0"/>
+              <a:t>Types of Language Models</a:t>
+            </a:r>
+          </a:p>
+          <a:p>
+            <a:pPr>
+              <a:buNone/>
+            </a:pPr>
+            <a:r>
+              <a:rPr lang="en-US" b="1" dirty="0"/>
+              <a:t>1) Statistical Language Models</a:t>
+            </a:r>
+          </a:p>
+          <a:p>
+            <a:pPr>
+              <a:buFont typeface="Arial" panose="020B0604020202020204" pitchFamily="34" charset="0"/>
+              <a:buChar char="•"/>
+            </a:pPr>
+            <a:r>
+              <a:rPr lang="en-US" b="1" dirty="0"/>
+              <a:t>N-gram Models</a:t>
+            </a:r>
+            <a:r>
+              <a:rPr lang="en-US" dirty="0"/>
+              <a:t>: Predict the next word based on the previous N-1 words </a:t>
+            </a:r>
+          </a:p>
+          <a:p>
+            <a:pPr marL="742950" lvl="1" indent="-285750">
+              <a:buFont typeface="Arial" panose="020B0604020202020204" pitchFamily="34" charset="0"/>
+              <a:buChar char="•"/>
+            </a:pPr>
+            <a:r>
+              <a:rPr lang="en-US" dirty="0"/>
+              <a:t>Unigram: P(word) - individual word probabilities</a:t>
+            </a:r>
+          </a:p>
+          <a:p>
+            <a:pPr marL="742950" lvl="1" indent="-285750">
+              <a:buFont typeface="Arial" panose="020B0604020202020204" pitchFamily="34" charset="0"/>
+              <a:buChar char="•"/>
+            </a:pPr>
+            <a:r>
+              <a:rPr lang="en-US" dirty="0"/>
+              <a:t>Bigram: P(word₂|word₁) - probability of word₂ given word₁</a:t>
+            </a:r>
+          </a:p>
+          <a:p>
+            <a:pPr marL="742950" lvl="1" indent="-285750">
+              <a:buFont typeface="Arial" panose="020B0604020202020204" pitchFamily="34" charset="0"/>
+              <a:buChar char="•"/>
+            </a:pPr>
+            <a:r>
+              <a:rPr lang="en-US" dirty="0"/>
+              <a:t>Trigram: P(word₃|</a:t>
+            </a:r>
+            <a:r>
+              <a:rPr lang="en-US" dirty="0" err="1"/>
+              <a:t>word₁,word</a:t>
+            </a:r>
+            <a:r>
+              <a:rPr lang="en-US" dirty="0"/>
+              <a:t>₂) - probability of word₃ given word₁ and word₂</a:t>
+            </a:r>
+          </a:p>
+          <a:p>
+            <a:pPr>
+              <a:buNone/>
+            </a:pPr>
+            <a:r>
+              <a:rPr lang="en-US" b="1" dirty="0"/>
+              <a:t>2) Neural Language Models</a:t>
+            </a:r>
+          </a:p>
+          <a:p>
+            <a:pPr>
+              <a:buFont typeface="Arial" panose="020B0604020202020204" pitchFamily="34" charset="0"/>
+              <a:buChar char="•"/>
+            </a:pPr>
+            <a:r>
+              <a:rPr lang="en-US" b="1" dirty="0"/>
+              <a:t>RNN/LSTM-based</a:t>
+            </a:r>
+            <a:r>
+              <a:rPr lang="en-US" dirty="0"/>
+              <a:t>: Process sequences by maintaining hidden states </a:t>
+            </a:r>
+          </a:p>
+          <a:p>
+            <a:pPr marL="742950" lvl="1" indent="-285750">
+              <a:buFont typeface="Arial" panose="020B0604020202020204" pitchFamily="34" charset="0"/>
+              <a:buChar char="•"/>
+            </a:pPr>
+            <a:r>
+              <a:rPr lang="en-US" dirty="0"/>
+              <a:t>Better at capturing long-range dependencies than n-grams</a:t>
+            </a:r>
+          </a:p>
+          <a:p>
+            <a:pPr marL="742950" lvl="1" indent="-285750">
+              <a:buFont typeface="Arial" panose="020B0604020202020204" pitchFamily="34" charset="0"/>
+              <a:buChar char="•"/>
+            </a:pPr>
+            <a:r>
+              <a:rPr lang="en-US" dirty="0"/>
+              <a:t>Examples: Early versions of Google Translate</a:t>
+            </a:r>
+          </a:p>
+          <a:p>
+            <a:pPr>
+              <a:buFont typeface="Arial" panose="020B0604020202020204" pitchFamily="34" charset="0"/>
+              <a:buChar char="•"/>
+            </a:pPr>
+            <a:r>
+              <a:rPr lang="en-US" b="1" dirty="0"/>
+              <a:t>Transformer-based</a:t>
+            </a:r>
+            <a:r>
+              <a:rPr lang="en-US" dirty="0"/>
+              <a:t>: Use attention mechanisms to process entire sequences </a:t>
+            </a:r>
+          </a:p>
+          <a:p>
+            <a:pPr marL="742950" lvl="1" indent="-285750">
+              <a:buFont typeface="Arial" panose="020B0604020202020204" pitchFamily="34" charset="0"/>
+              <a:buChar char="•"/>
+            </a:pPr>
+            <a:r>
+              <a:rPr lang="en-US" dirty="0"/>
+              <a:t>BERT: Bidirectional, focuses on understanding context</a:t>
+            </a:r>
+          </a:p>
+          <a:p>
+            <a:pPr marL="742950" lvl="1" indent="-285750">
+              <a:buFont typeface="Arial" panose="020B0604020202020204" pitchFamily="34" charset="0"/>
+              <a:buChar char="•"/>
+            </a:pPr>
+            <a:r>
+              <a:rPr lang="en-US" dirty="0"/>
+              <a:t>GPT: Autoregressive, focuses on text generation</a:t>
+            </a:r>
+          </a:p>
+          <a:p>
+            <a:pPr marL="742950" lvl="1" indent="-285750">
+              <a:buFont typeface="Arial" panose="020B0604020202020204" pitchFamily="34" charset="0"/>
+              <a:buChar char="•"/>
+            </a:pPr>
+            <a:r>
+              <a:rPr lang="en-US" dirty="0"/>
+              <a:t>T5, </a:t>
+            </a:r>
+            <a:r>
+              <a:rPr lang="en-US" dirty="0" err="1"/>
+              <a:t>RoBERTa</a:t>
+            </a:r>
+            <a:r>
+              <a:rPr lang="en-US" dirty="0"/>
+              <a:t>, ELECTRA: Refinements of transformer architecture</a:t>
+            </a:r>
+          </a:p>
+        </p:txBody>
+      </p:sp>
+    </p:spTree>
+    <p:extLst>
+      <p:ext uri="{BB962C8B-B14F-4D97-AF65-F5344CB8AC3E}">
+        <p14:creationId xmlns:p14="http://schemas.microsoft.com/office/powerpoint/2010/main" val="184126415"/>
+      </p:ext>
+    </p:extLst>
+  </p:cSld>
+  <p:clrMapOvr>
+    <a:masterClrMapping/>
+  </p:clrMapOvr>
+</p:sld>
+</file>
+
+<file path=ppt/slides/slide31.xml><?xml version="1.0" encoding="utf-8"?>
+<p:sld xmlns:a="http://schemas.openxmlformats.org/drawingml/2006/main" xmlns:r="http://schemas.openxmlformats.org/officeDocument/2006/relationships" xmlns:p="http://schemas.openxmlformats.org/presentationml/2006/main">
+  <p:cSld>
+    <p:spTree>
+      <p:nvGrpSpPr>
         <p:cNvPr id="1" name=""/>
         <p:cNvGrpSpPr/>
         <p:nvPr/>
@@ -20327,7 +19657,7 @@
 </p:sld>
 </file>
 
-<file path=ppt/slides/slide31.xml><?xml version="1.0" encoding="utf-8"?>
+<file path=ppt/slides/slide32.xml><?xml version="1.0" encoding="utf-8"?>
 <p:sld xmlns:a="http://schemas.openxmlformats.org/drawingml/2006/main" xmlns:r="http://schemas.openxmlformats.org/officeDocument/2006/relationships" xmlns:p="http://schemas.openxmlformats.org/presentationml/2006/main">
   <p:cSld>
     <p:spTree>
@@ -22478,7 +21808,7 @@
 </p:sld>
 </file>
 
-<file path=ppt/slides/slide32.xml><?xml version="1.0" encoding="utf-8"?>
+<file path=ppt/slides/slide33.xml><?xml version="1.0" encoding="utf-8"?>
 <p:sld xmlns:a="http://schemas.openxmlformats.org/drawingml/2006/main" xmlns:r="http://schemas.openxmlformats.org/officeDocument/2006/relationships" xmlns:p="http://schemas.openxmlformats.org/presentationml/2006/main">
   <p:cSld>
     <p:spTree>
@@ -22590,7 +21920,7 @@
 </p:sld>
 </file>
 
-<file path=ppt/slides/slide33.xml><?xml version="1.0" encoding="utf-8"?>
+<file path=ppt/slides/slide34.xml><?xml version="1.0" encoding="utf-8"?>
 <p:sld xmlns:a="http://schemas.openxmlformats.org/drawingml/2006/main" xmlns:r="http://schemas.openxmlformats.org/officeDocument/2006/relationships" xmlns:p="http://schemas.openxmlformats.org/presentationml/2006/main">
   <p:cSld>
     <p:spTree>
@@ -24017,6 +23347,249 @@
           </a:p>
         </p:txBody>
       </p:sp>
+      <p:sp>
+        <p:nvSpPr>
+          <p:cNvPr id="5" name="Content Placeholder 2">
+            <a:extLst>
+              <a:ext uri="{FF2B5EF4-FFF2-40B4-BE49-F238E27FC236}">
+                <a16:creationId xmlns:a16="http://schemas.microsoft.com/office/drawing/2014/main" id="{276D0FCF-4391-4D56-854A-F184802E65F6}"/>
+              </a:ext>
+            </a:extLst>
+          </p:cNvPr>
+          <p:cNvSpPr txBox="1">
+            <a:spLocks/>
+          </p:cNvSpPr>
+          <p:nvPr/>
+        </p:nvSpPr>
+        <p:spPr>
+          <a:xfrm>
+            <a:off x="10162954" y="6435843"/>
+            <a:ext cx="1650788" cy="399925"/>
+          </a:xfrm>
+          <a:prstGeom prst="rect">
+            <a:avLst/>
+          </a:prstGeom>
+        </p:spPr>
+        <p:txBody>
+          <a:bodyPr vert="horz" lIns="91440" tIns="45720" rIns="91440" bIns="45720" rtlCol="0">
+            <a:normAutofit/>
+          </a:bodyPr>
+          <a:lstStyle>
+            <a:lvl1pPr marL="228600" indent="-228600" algn="l" defTabSz="914400" rtl="0" eaLnBrk="1" latinLnBrk="0" hangingPunct="1">
+              <a:lnSpc>
+                <a:spcPct val="90000"/>
+              </a:lnSpc>
+              <a:spcBef>
+                <a:spcPts val="1000"/>
+              </a:spcBef>
+              <a:buFont typeface="Arial" panose="020B0604020202020204" pitchFamily="34" charset="0"/>
+              <a:buChar char="•"/>
+              <a:defRPr sz="2400" kern="1200">
+                <a:solidFill>
+                  <a:schemeClr val="tx1"/>
+                </a:solidFill>
+                <a:latin typeface="+mn-lt"/>
+                <a:ea typeface="+mn-ea"/>
+                <a:cs typeface="+mn-cs"/>
+              </a:defRPr>
+            </a:lvl1pPr>
+            <a:lvl2pPr marL="685800" indent="-228600" algn="l" defTabSz="914400" rtl="0" eaLnBrk="1" latinLnBrk="0" hangingPunct="1">
+              <a:lnSpc>
+                <a:spcPct val="90000"/>
+              </a:lnSpc>
+              <a:spcBef>
+                <a:spcPts val="500"/>
+              </a:spcBef>
+              <a:buFont typeface="Arial" panose="020B0604020202020204" pitchFamily="34" charset="0"/>
+              <a:buChar char="•"/>
+              <a:defRPr sz="2000" kern="1200">
+                <a:solidFill>
+                  <a:schemeClr val="tx1"/>
+                </a:solidFill>
+                <a:latin typeface="+mn-lt"/>
+                <a:ea typeface="+mn-ea"/>
+                <a:cs typeface="+mn-cs"/>
+              </a:defRPr>
+            </a:lvl2pPr>
+            <a:lvl3pPr marL="1143000" indent="-228600" algn="l" defTabSz="914400" rtl="0" eaLnBrk="1" latinLnBrk="0" hangingPunct="1">
+              <a:lnSpc>
+                <a:spcPct val="90000"/>
+              </a:lnSpc>
+              <a:spcBef>
+                <a:spcPts val="500"/>
+              </a:spcBef>
+              <a:buFont typeface="Arial" panose="020B0604020202020204" pitchFamily="34" charset="0"/>
+              <a:buChar char="•"/>
+              <a:defRPr sz="1800" kern="1200">
+                <a:solidFill>
+                  <a:schemeClr val="tx1"/>
+                </a:solidFill>
+                <a:latin typeface="+mn-lt"/>
+                <a:ea typeface="+mn-ea"/>
+                <a:cs typeface="+mn-cs"/>
+              </a:defRPr>
+            </a:lvl3pPr>
+            <a:lvl4pPr marL="1600200" indent="-228600" algn="l" defTabSz="914400" rtl="0" eaLnBrk="1" latinLnBrk="0" hangingPunct="1">
+              <a:lnSpc>
+                <a:spcPct val="90000"/>
+              </a:lnSpc>
+              <a:spcBef>
+                <a:spcPts val="500"/>
+              </a:spcBef>
+              <a:buFont typeface="Arial" panose="020B0604020202020204" pitchFamily="34" charset="0"/>
+              <a:buChar char="•"/>
+              <a:defRPr sz="1600" kern="1200">
+                <a:solidFill>
+                  <a:schemeClr val="tx1"/>
+                </a:solidFill>
+                <a:latin typeface="+mn-lt"/>
+                <a:ea typeface="+mn-ea"/>
+                <a:cs typeface="+mn-cs"/>
+              </a:defRPr>
+            </a:lvl4pPr>
+            <a:lvl5pPr marL="2057400" indent="-228600" algn="l" defTabSz="914400" rtl="0" eaLnBrk="1" latinLnBrk="0" hangingPunct="1">
+              <a:lnSpc>
+                <a:spcPct val="90000"/>
+              </a:lnSpc>
+              <a:spcBef>
+                <a:spcPts val="500"/>
+              </a:spcBef>
+              <a:buFont typeface="Arial" panose="020B0604020202020204" pitchFamily="34" charset="0"/>
+              <a:buChar char="•"/>
+              <a:defRPr sz="1600" kern="1200">
+                <a:solidFill>
+                  <a:schemeClr val="tx1"/>
+                </a:solidFill>
+                <a:latin typeface="+mn-lt"/>
+                <a:ea typeface="+mn-ea"/>
+                <a:cs typeface="+mn-cs"/>
+              </a:defRPr>
+            </a:lvl5pPr>
+            <a:lvl6pPr marL="2514600" indent="-228600" algn="l" defTabSz="914400" rtl="0" eaLnBrk="1" latinLnBrk="0" hangingPunct="1">
+              <a:lnSpc>
+                <a:spcPct val="90000"/>
+              </a:lnSpc>
+              <a:spcBef>
+                <a:spcPts val="500"/>
+              </a:spcBef>
+              <a:buFont typeface="Arial" panose="020B0604020202020204" pitchFamily="34" charset="0"/>
+              <a:buChar char="•"/>
+              <a:defRPr sz="1800" kern="1200">
+                <a:solidFill>
+                  <a:schemeClr val="tx1"/>
+                </a:solidFill>
+                <a:latin typeface="+mn-lt"/>
+                <a:ea typeface="+mn-ea"/>
+                <a:cs typeface="+mn-cs"/>
+              </a:defRPr>
+            </a:lvl6pPr>
+            <a:lvl7pPr marL="2971800" indent="-228600" algn="l" defTabSz="914400" rtl="0" eaLnBrk="1" latinLnBrk="0" hangingPunct="1">
+              <a:lnSpc>
+                <a:spcPct val="90000"/>
+              </a:lnSpc>
+              <a:spcBef>
+                <a:spcPts val="500"/>
+              </a:spcBef>
+              <a:buFont typeface="Arial" panose="020B0604020202020204" pitchFamily="34" charset="0"/>
+              <a:buChar char="•"/>
+              <a:defRPr sz="1800" kern="1200">
+                <a:solidFill>
+                  <a:schemeClr val="tx1"/>
+                </a:solidFill>
+                <a:latin typeface="+mn-lt"/>
+                <a:ea typeface="+mn-ea"/>
+                <a:cs typeface="+mn-cs"/>
+              </a:defRPr>
+            </a:lvl7pPr>
+            <a:lvl8pPr marL="3429000" indent="-228600" algn="l" defTabSz="914400" rtl="0" eaLnBrk="1" latinLnBrk="0" hangingPunct="1">
+              <a:lnSpc>
+                <a:spcPct val="90000"/>
+              </a:lnSpc>
+              <a:spcBef>
+                <a:spcPts val="500"/>
+              </a:spcBef>
+              <a:buFont typeface="Arial" panose="020B0604020202020204" pitchFamily="34" charset="0"/>
+              <a:buChar char="•"/>
+              <a:defRPr sz="1800" kern="1200">
+                <a:solidFill>
+                  <a:schemeClr val="tx1"/>
+                </a:solidFill>
+                <a:latin typeface="+mn-lt"/>
+                <a:ea typeface="+mn-ea"/>
+                <a:cs typeface="+mn-cs"/>
+              </a:defRPr>
+            </a:lvl8pPr>
+            <a:lvl9pPr marL="3886200" indent="-228600" algn="l" defTabSz="914400" rtl="0" eaLnBrk="1" latinLnBrk="0" hangingPunct="1">
+              <a:lnSpc>
+                <a:spcPct val="90000"/>
+              </a:lnSpc>
+              <a:spcBef>
+                <a:spcPts val="500"/>
+              </a:spcBef>
+              <a:buFont typeface="Arial" panose="020B0604020202020204" pitchFamily="34" charset="0"/>
+              <a:buChar char="•"/>
+              <a:defRPr sz="1800" kern="1200">
+                <a:solidFill>
+                  <a:schemeClr val="tx1"/>
+                </a:solidFill>
+                <a:latin typeface="+mn-lt"/>
+                <a:ea typeface="+mn-ea"/>
+                <a:cs typeface="+mn-cs"/>
+              </a:defRPr>
+            </a:lvl9pPr>
+          </a:lstStyle>
+          <a:p>
+            <a:pPr marL="0" indent="0">
+              <a:buNone/>
+            </a:pPr>
+            <a:r>
+              <a:rPr lang="en-US" sz="1400" dirty="0">
+                <a:solidFill>
+                  <a:srgbClr val="0070C0"/>
+                </a:solidFill>
+              </a:rPr>
+              <a:t>Click to Open Code</a:t>
+            </a:r>
+          </a:p>
+        </p:txBody>
+      </p:sp>
+      <p:pic>
+        <p:nvPicPr>
+          <p:cNvPr id="7" name="Graphic 6">
+            <a:hlinkClick r:id="rId2"/>
+            <a:extLst>
+              <a:ext uri="{FF2B5EF4-FFF2-40B4-BE49-F238E27FC236}">
+                <a16:creationId xmlns:a16="http://schemas.microsoft.com/office/drawing/2014/main" id="{DC2CF0F7-2D5E-4690-AF02-D9A372D347F3}"/>
+              </a:ext>
+            </a:extLst>
+          </p:cNvPr>
+          <p:cNvPicPr>
+            <a:picLocks noChangeAspect="1"/>
+          </p:cNvPicPr>
+          <p:nvPr/>
+        </p:nvPicPr>
+        <p:blipFill>
+          <a:blip r:embed="rId3">
+            <a:extLst>
+              <a:ext uri="{96DAC541-7B7A-43D3-8B79-37D633B846F1}">
+                <asvg:svgBlip xmlns:asvg="http://schemas.microsoft.com/office/drawing/2016/SVG/main" r:embed="rId4"/>
+              </a:ext>
+            </a:extLst>
+          </a:blip>
+          <a:stretch>
+            <a:fillRect/>
+          </a:stretch>
+        </p:blipFill>
+        <p:spPr>
+          <a:xfrm>
+            <a:off x="10431136" y="6231200"/>
+            <a:ext cx="1114425" cy="190500"/>
+          </a:xfrm>
+          <a:prstGeom prst="rect">
+            <a:avLst/>
+          </a:prstGeom>
+        </p:spPr>
+      </p:pic>
     </p:spTree>
     <p:extLst>
       <p:ext uri="{BB962C8B-B14F-4D97-AF65-F5344CB8AC3E}">
@@ -24579,8 +24152,8 @@
         </p:nvSpPr>
         <p:spPr>
           <a:xfrm>
-            <a:off x="1241853" y="4429358"/>
-            <a:ext cx="10730299" cy="923330"/>
+            <a:off x="7755147" y="4135860"/>
+            <a:ext cx="3868282" cy="1754326"/>
           </a:xfrm>
           <a:prstGeom prst="rect">
             <a:avLst/>
@@ -24603,6 +24176,149 @@
               <a:rPr lang="en-US" dirty="0"/>
               <a:t>['large', 'language', 'models', 'are', 'revolutionizing', 'business', 'applications', '.']['large', 'language', 'models', 'are', 'revolutionizing', 'business', 'applications', '']</a:t>
             </a:r>
+          </a:p>
+        </p:txBody>
+      </p:sp>
+      <p:sp>
+        <p:nvSpPr>
+          <p:cNvPr id="8" name="TextBox 7">
+            <a:extLst>
+              <a:ext uri="{FF2B5EF4-FFF2-40B4-BE49-F238E27FC236}">
+                <a16:creationId xmlns:a16="http://schemas.microsoft.com/office/drawing/2014/main" id="{A4BECA11-0014-431F-A8D8-3FFAF66D6978}"/>
+              </a:ext>
+            </a:extLst>
+          </p:cNvPr>
+          <p:cNvSpPr txBox="1"/>
+          <p:nvPr/>
+        </p:nvSpPr>
+        <p:spPr>
+          <a:xfrm>
+            <a:off x="1241853" y="4070073"/>
+            <a:ext cx="6306260" cy="2785378"/>
+          </a:xfrm>
+          <a:prstGeom prst="rect">
+            <a:avLst/>
+          </a:prstGeom>
+          <a:noFill/>
+        </p:spPr>
+        <p:txBody>
+          <a:bodyPr wrap="square" rtlCol="0">
+            <a:spAutoFit/>
+          </a:bodyPr>
+          <a:lstStyle/>
+          <a:p>
+            <a:pPr>
+              <a:lnSpc>
+                <a:spcPts val="1425"/>
+              </a:lnSpc>
+              <a:buNone/>
+            </a:pPr>
+            <a:r>
+              <a:rPr lang="en-US" sz="1200" dirty="0">
+                <a:solidFill>
+                  <a:srgbClr val="000000"/>
+                </a:solidFill>
+                <a:latin typeface="Consolas" panose="020B0609020204030204" pitchFamily="49" charset="0"/>
+              </a:rPr>
+              <a:t>The regular expression r'[^\w\s]' does the following:</a:t>
+            </a:r>
+          </a:p>
+          <a:p>
+            <a:pPr marL="171450" indent="-171450">
+              <a:lnSpc>
+                <a:spcPts val="1425"/>
+              </a:lnSpc>
+              <a:buFont typeface="Arial" panose="020B0604020202020204" pitchFamily="34" charset="0"/>
+              <a:buChar char="•"/>
+            </a:pPr>
+            <a:r>
+              <a:rPr lang="en-US" sz="1200" dirty="0">
+                <a:solidFill>
+                  <a:srgbClr val="000000"/>
+                </a:solidFill>
+                <a:latin typeface="Consolas" panose="020B0609020204030204" pitchFamily="49" charset="0"/>
+              </a:rPr>
+              <a:t>r'...': This denotes a raw string in Python. Raw strings treat backslashes \ as literal characters, which is crucial for regular expressions.</a:t>
+            </a:r>
+          </a:p>
+          <a:p>
+            <a:pPr marL="171450" indent="-171450">
+              <a:lnSpc>
+                <a:spcPts val="1425"/>
+              </a:lnSpc>
+              <a:buFont typeface="Arial" panose="020B0604020202020204" pitchFamily="34" charset="0"/>
+              <a:buChar char="•"/>
+            </a:pPr>
+            <a:r>
+              <a:rPr lang="en-US" sz="1200" dirty="0">
+                <a:solidFill>
+                  <a:srgbClr val="000000"/>
+                </a:solidFill>
+                <a:latin typeface="Consolas" panose="020B0609020204030204" pitchFamily="49" charset="0"/>
+              </a:rPr>
+              <a:t>[...]: This represents a character set.^: Inside a character set, ^ negates the set. It means "match any character not in this set.</a:t>
+            </a:r>
+          </a:p>
+          <a:p>
+            <a:pPr marL="171450" indent="-171450">
+              <a:lnSpc>
+                <a:spcPts val="1425"/>
+              </a:lnSpc>
+              <a:buFont typeface="Arial" panose="020B0604020202020204" pitchFamily="34" charset="0"/>
+              <a:buChar char="•"/>
+            </a:pPr>
+            <a:r>
+              <a:rPr lang="en-US" sz="1200" dirty="0">
+                <a:solidFill>
+                  <a:srgbClr val="000000"/>
+                </a:solidFill>
+                <a:latin typeface="Consolas" panose="020B0609020204030204" pitchFamily="49" charset="0"/>
+              </a:rPr>
+              <a:t>"\w: This matches any word character, which includes alphanumeric characters (letters and digits) and the underscore (_).</a:t>
+            </a:r>
+          </a:p>
+          <a:p>
+            <a:pPr marL="171450" indent="-171450">
+              <a:lnSpc>
+                <a:spcPts val="1425"/>
+              </a:lnSpc>
+              <a:buFont typeface="Arial" panose="020B0604020202020204" pitchFamily="34" charset="0"/>
+              <a:buChar char="•"/>
+            </a:pPr>
+            <a:r>
+              <a:rPr lang="en-US" sz="1200" dirty="0">
+                <a:solidFill>
+                  <a:srgbClr val="000000"/>
+                </a:solidFill>
+                <a:latin typeface="Consolas" panose="020B0609020204030204" pitchFamily="49" charset="0"/>
+              </a:rPr>
+              <a:t>\s: This matches any whitespace character, such as spaces, tabs, and newlines.</a:t>
+            </a:r>
+          </a:p>
+          <a:p>
+            <a:pPr marL="171450" indent="-171450">
+              <a:lnSpc>
+                <a:spcPts val="1425"/>
+              </a:lnSpc>
+              <a:buFont typeface="Arial" panose="020B0604020202020204" pitchFamily="34" charset="0"/>
+              <a:buChar char="•"/>
+            </a:pPr>
+            <a:r>
+              <a:rPr lang="en-US" sz="1200" dirty="0">
+                <a:solidFill>
+                  <a:srgbClr val="000000"/>
+                </a:solidFill>
+                <a:latin typeface="Consolas" panose="020B0609020204030204" pitchFamily="49" charset="0"/>
+              </a:rPr>
+              <a:t>Therefore, r'[^\w\s]' matches any character that is not a word character or a whitespace character. In simpler terms, it matches any non-alphanumeric, non-underscore, and non-whitespace character. This effectively targets punctuation marks, symbols, and other special characters.</a:t>
+            </a:r>
+            <a:endParaRPr lang="en-US" sz="1200" b="0" dirty="0">
+              <a:solidFill>
+                <a:srgbClr val="000000"/>
+              </a:solidFill>
+              <a:effectLst/>
+              <a:latin typeface="Consolas" panose="020B0609020204030204" pitchFamily="49" charset="0"/>
+            </a:endParaRPr>
           </a:p>
         </p:txBody>
       </p:sp>

--- a/20242-NLP-LLM/lecture notes/Part 1 - Introduction to NLP/1-introduction to NLP.pptx
+++ b/20242-NLP-LLM/lecture notes/Part 1 - Introduction to NLP/1-introduction to NLP.pptx
@@ -5,43 +5,45 @@
     <p:sldMasterId id="2147483648" r:id="rId1"/>
   </p:sldMasterIdLst>
   <p:notesMasterIdLst>
-    <p:notesMasterId r:id="rId36"/>
+    <p:notesMasterId r:id="rId38"/>
   </p:notesMasterIdLst>
   <p:sldIdLst>
     <p:sldId id="455" r:id="rId2"/>
     <p:sldId id="520" r:id="rId3"/>
-    <p:sldId id="521" r:id="rId4"/>
-    <p:sldId id="530" r:id="rId5"/>
-    <p:sldId id="531" r:id="rId6"/>
-    <p:sldId id="497" r:id="rId7"/>
-    <p:sldId id="525" r:id="rId8"/>
-    <p:sldId id="532" r:id="rId9"/>
-    <p:sldId id="533" r:id="rId10"/>
-    <p:sldId id="534" r:id="rId11"/>
-    <p:sldId id="535" r:id="rId12"/>
-    <p:sldId id="536" r:id="rId13"/>
-    <p:sldId id="537" r:id="rId14"/>
-    <p:sldId id="538" r:id="rId15"/>
-    <p:sldId id="559" r:id="rId16"/>
-    <p:sldId id="539" r:id="rId17"/>
-    <p:sldId id="542" r:id="rId18"/>
-    <p:sldId id="540" r:id="rId19"/>
-    <p:sldId id="543" r:id="rId20"/>
-    <p:sldId id="544" r:id="rId21"/>
-    <p:sldId id="545" r:id="rId22"/>
-    <p:sldId id="546" r:id="rId23"/>
-    <p:sldId id="551" r:id="rId24"/>
-    <p:sldId id="550" r:id="rId25"/>
-    <p:sldId id="552" r:id="rId26"/>
-    <p:sldId id="553" r:id="rId27"/>
-    <p:sldId id="554" r:id="rId28"/>
-    <p:sldId id="555" r:id="rId29"/>
-    <p:sldId id="549" r:id="rId30"/>
-    <p:sldId id="547" r:id="rId31"/>
-    <p:sldId id="557" r:id="rId32"/>
-    <p:sldId id="548" r:id="rId33"/>
-    <p:sldId id="556" r:id="rId34"/>
-    <p:sldId id="558" r:id="rId35"/>
+    <p:sldId id="560" r:id="rId4"/>
+    <p:sldId id="521" r:id="rId5"/>
+    <p:sldId id="530" r:id="rId6"/>
+    <p:sldId id="561" r:id="rId7"/>
+    <p:sldId id="531" r:id="rId8"/>
+    <p:sldId id="497" r:id="rId9"/>
+    <p:sldId id="525" r:id="rId10"/>
+    <p:sldId id="532" r:id="rId11"/>
+    <p:sldId id="533" r:id="rId12"/>
+    <p:sldId id="534" r:id="rId13"/>
+    <p:sldId id="535" r:id="rId14"/>
+    <p:sldId id="536" r:id="rId15"/>
+    <p:sldId id="537" r:id="rId16"/>
+    <p:sldId id="538" r:id="rId17"/>
+    <p:sldId id="559" r:id="rId18"/>
+    <p:sldId id="539" r:id="rId19"/>
+    <p:sldId id="542" r:id="rId20"/>
+    <p:sldId id="540" r:id="rId21"/>
+    <p:sldId id="543" r:id="rId22"/>
+    <p:sldId id="544" r:id="rId23"/>
+    <p:sldId id="545" r:id="rId24"/>
+    <p:sldId id="546" r:id="rId25"/>
+    <p:sldId id="551" r:id="rId26"/>
+    <p:sldId id="550" r:id="rId27"/>
+    <p:sldId id="552" r:id="rId28"/>
+    <p:sldId id="553" r:id="rId29"/>
+    <p:sldId id="554" r:id="rId30"/>
+    <p:sldId id="555" r:id="rId31"/>
+    <p:sldId id="549" r:id="rId32"/>
+    <p:sldId id="547" r:id="rId33"/>
+    <p:sldId id="557" r:id="rId34"/>
+    <p:sldId id="548" r:id="rId35"/>
+    <p:sldId id="558" r:id="rId36"/>
+    <p:sldId id="556" r:id="rId37"/>
   </p:sldIdLst>
   <p:sldSz cx="12192000" cy="6858000"/>
   <p:notesSz cx="6858000" cy="9144000"/>
@@ -157,17 +159,13 @@
 <file path=ppt/revisionInfo.xml><?xml version="1.0" encoding="utf-8"?>
 <p1510:revInfo xmlns:a="http://schemas.openxmlformats.org/drawingml/2006/main" xmlns:r="http://schemas.openxmlformats.org/officeDocument/2006/relationships" xmlns:p1510="http://schemas.microsoft.com/office/powerpoint/2015/10/main">
   <p1510:revLst>
-    <p1510:client id="{1BAE7373-BC78-49F1-9262-209B991CDE28}" v="31" dt="2025-03-15T11:49:33.004"/>
-    <p1510:client id="{534F862C-5423-415F-8625-CCE86B4944CE}" v="42" dt="2025-03-15T15:46:18.147"/>
+    <p1510:client id="{534F862C-5423-415F-8625-CCE86B4944CE}" v="63" dt="2025-03-18T02:15:42.352"/>
   </p1510:revLst>
 </p1510:revInfo>
 </file>
 
 <file path=ppt/changesInfos/changesInfo1.xml><?xml version="1.0" encoding="utf-8"?>
 <pc:chgInfo xmlns:a="http://schemas.openxmlformats.org/drawingml/2006/main" xmlns:r="http://schemas.openxmlformats.org/officeDocument/2006/relationships" xmlns:ac="http://schemas.microsoft.com/office/drawing/2013/main/command" xmlns:pc="http://schemas.microsoft.com/office/powerpoint/2013/main/command">
-  <pc:docChgLst>
-    <pc:chgData name="Mohammed Fasha" userId="cc64f42d-a1a6-4f08-b97b-0c37f877119f" providerId="ADAL" clId="{5980B3BB-4EB6-4E37-92BF-3A2A8F4B2C7A}"/>
-  </pc:docChgLst>
   <pc:docChgLst>
     <pc:chgData name="Mohammed Fasha" userId="cc64f42d-a1a6-4f08-b97b-0c37f877119f" providerId="ADAL" clId="{4C71ED24-115E-432D-933D-C801DA3E52F1}"/>
     <pc:docChg chg="delSld">
@@ -415,14 +413,6 @@
             <ac:spMk id="7" creationId="{AC1598C3-9401-C3A8-98D7-6C942E90F478}"/>
           </ac:spMkLst>
         </pc:spChg>
-        <pc:picChg chg="add mod">
-          <ac:chgData name="Mohammed Fasha" userId="cc64f42d-a1a6-4f08-b97b-0c37f877119f" providerId="ADAL" clId="{1BAE7373-BC78-49F1-9262-209B991CDE28}" dt="2025-03-15T11:39:02.758" v="501" actId="1076"/>
-          <ac:picMkLst>
-            <pc:docMk/>
-            <pc:sldMk cId="3509923534" sldId="520"/>
-            <ac:picMk id="5" creationId="{77EFD2CD-E234-52A1-28F0-23DD6EDC2473}"/>
-          </ac:picMkLst>
-        </pc:picChg>
       </pc:sldChg>
       <pc:sldChg chg="modSp new mod ord">
         <pc:chgData name="Mohammed Fasha" userId="cc64f42d-a1a6-4f08-b97b-0c37f877119f" providerId="ADAL" clId="{1BAE7373-BC78-49F1-9262-209B991CDE28}" dt="2025-03-15T11:40:49.537" v="550"/>
@@ -453,38 +443,6 @@
           <pc:docMk/>
           <pc:sldMk cId="3759274989" sldId="522"/>
         </pc:sldMkLst>
-        <pc:spChg chg="mod">
-          <ac:chgData name="Mohammed Fasha" userId="cc64f42d-a1a6-4f08-b97b-0c37f877119f" providerId="ADAL" clId="{1BAE7373-BC78-49F1-9262-209B991CDE28}" dt="2025-03-15T11:42:32.562" v="612" actId="20577"/>
-          <ac:spMkLst>
-            <pc:docMk/>
-            <pc:sldMk cId="3759274989" sldId="522"/>
-            <ac:spMk id="2" creationId="{E253D051-39F0-8A57-DFD9-63EF758AF158}"/>
-          </ac:spMkLst>
-        </pc:spChg>
-        <pc:spChg chg="del">
-          <ac:chgData name="Mohammed Fasha" userId="cc64f42d-a1a6-4f08-b97b-0c37f877119f" providerId="ADAL" clId="{1BAE7373-BC78-49F1-9262-209B991CDE28}" dt="2025-03-15T11:42:28.787" v="600" actId="22"/>
-          <ac:spMkLst>
-            <pc:docMk/>
-            <pc:sldMk cId="3759274989" sldId="522"/>
-            <ac:spMk id="3" creationId="{3227EDFE-31D7-749E-9308-08659A647FD5}"/>
-          </ac:spMkLst>
-        </pc:spChg>
-        <pc:spChg chg="add mod">
-          <ac:chgData name="Mohammed Fasha" userId="cc64f42d-a1a6-4f08-b97b-0c37f877119f" providerId="ADAL" clId="{1BAE7373-BC78-49F1-9262-209B991CDE28}" dt="2025-03-15T11:47:51.528" v="874" actId="21"/>
-          <ac:spMkLst>
-            <pc:docMk/>
-            <pc:sldMk cId="3759274989" sldId="522"/>
-            <ac:spMk id="7" creationId="{3B79BF46-A34F-DC0B-44F6-64C8470A5975}"/>
-          </ac:spMkLst>
-        </pc:spChg>
-        <pc:picChg chg="add del mod ord">
-          <ac:chgData name="Mohammed Fasha" userId="cc64f42d-a1a6-4f08-b97b-0c37f877119f" providerId="ADAL" clId="{1BAE7373-BC78-49F1-9262-209B991CDE28}" dt="2025-03-15T11:47:51.528" v="874" actId="21"/>
-          <ac:picMkLst>
-            <pc:docMk/>
-            <pc:sldMk cId="3759274989" sldId="522"/>
-            <ac:picMk id="5" creationId="{972EC117-3243-1474-E416-CB5338D9C54B}"/>
-          </ac:picMkLst>
-        </pc:picChg>
       </pc:sldChg>
       <pc:sldChg chg="add del">
         <pc:chgData name="Mohammed Fasha" userId="cc64f42d-a1a6-4f08-b97b-0c37f877119f" providerId="ADAL" clId="{1BAE7373-BC78-49F1-9262-209B991CDE28}" dt="2025-03-15T11:51:59.683" v="909" actId="47"/>
@@ -537,22 +495,6 @@
           <pc:docMk/>
           <pc:sldMk cId="3584780757" sldId="525"/>
         </pc:sldMkLst>
-        <pc:spChg chg="mod">
-          <ac:chgData name="Mohammed Fasha" userId="cc64f42d-a1a6-4f08-b97b-0c37f877119f" providerId="ADAL" clId="{1BAE7373-BC78-49F1-9262-209B991CDE28}" dt="2025-03-15T11:41:15.400" v="565" actId="27636"/>
-          <ac:spMkLst>
-            <pc:docMk/>
-            <pc:sldMk cId="3584780757" sldId="525"/>
-            <ac:spMk id="2" creationId="{02A6A345-9B5F-6DA5-5BF5-0FFAA3A77401}"/>
-          </ac:spMkLst>
-        </pc:spChg>
-        <pc:spChg chg="mod">
-          <ac:chgData name="Mohammed Fasha" userId="cc64f42d-a1a6-4f08-b97b-0c37f877119f" providerId="ADAL" clId="{1BAE7373-BC78-49F1-9262-209B991CDE28}" dt="2025-03-15T11:41:53.217" v="599" actId="20577"/>
-          <ac:spMkLst>
-            <pc:docMk/>
-            <pc:sldMk cId="3584780757" sldId="525"/>
-            <ac:spMk id="3" creationId="{0BCB2A67-C20C-9900-AC67-01F39CB859F8}"/>
-          </ac:spMkLst>
-        </pc:spChg>
       </pc:sldChg>
       <pc:sldChg chg="addSp delSp modSp new del">
         <pc:chgData name="Mohammed Fasha" userId="cc64f42d-a1a6-4f08-b97b-0c37f877119f" providerId="ADAL" clId="{1BAE7373-BC78-49F1-9262-209B991CDE28}" dt="2025-03-15T11:51:57" v="904" actId="47"/>
@@ -560,22 +502,6 @@
           <pc:docMk/>
           <pc:sldMk cId="3883453810" sldId="526"/>
         </pc:sldMkLst>
-        <pc:spChg chg="add del">
-          <ac:chgData name="Mohammed Fasha" userId="cc64f42d-a1a6-4f08-b97b-0c37f877119f" providerId="ADAL" clId="{1BAE7373-BC78-49F1-9262-209B991CDE28}" dt="2025-03-15T11:49:33.004" v="881"/>
-          <ac:spMkLst>
-            <pc:docMk/>
-            <pc:sldMk cId="3883453810" sldId="526"/>
-            <ac:spMk id="3" creationId="{5E414730-EAE2-60A5-8C9B-F8E2254BE6B1}"/>
-          </ac:spMkLst>
-        </pc:spChg>
-        <pc:spChg chg="add mod">
-          <ac:chgData name="Mohammed Fasha" userId="cc64f42d-a1a6-4f08-b97b-0c37f877119f" providerId="ADAL" clId="{1BAE7373-BC78-49F1-9262-209B991CDE28}" dt="2025-03-15T11:49:33.004" v="881"/>
-          <ac:spMkLst>
-            <pc:docMk/>
-            <pc:sldMk cId="3883453810" sldId="526"/>
-            <ac:spMk id="4" creationId="{E1785530-7EE9-07DA-8253-2D44109C6B58}"/>
-          </ac:spMkLst>
-        </pc:spChg>
       </pc:sldChg>
       <pc:sldChg chg="new del">
         <pc:chgData name="Mohammed Fasha" userId="cc64f42d-a1a6-4f08-b97b-0c37f877119f" providerId="ADAL" clId="{1BAE7373-BC78-49F1-9262-209B991CDE28}" dt="2025-03-15T11:51:57.276" v="905" actId="47"/>
@@ -611,22 +537,6 @@
           <pc:docMk/>
           <pc:sldMk cId="3894291026" sldId="530"/>
         </pc:sldMkLst>
-        <pc:spChg chg="mod">
-          <ac:chgData name="Mohammed Fasha" userId="cc64f42d-a1a6-4f08-b97b-0c37f877119f" providerId="ADAL" clId="{1BAE7373-BC78-49F1-9262-209B991CDE28}" dt="2025-03-15T11:43:05.775" v="624"/>
-          <ac:spMkLst>
-            <pc:docMk/>
-            <pc:sldMk cId="3894291026" sldId="530"/>
-            <ac:spMk id="2" creationId="{04479CCA-D646-F84B-D4A7-D655E366911A}"/>
-          </ac:spMkLst>
-        </pc:spChg>
-        <pc:spChg chg="mod">
-          <ac:chgData name="Mohammed Fasha" userId="cc64f42d-a1a6-4f08-b97b-0c37f877119f" providerId="ADAL" clId="{1BAE7373-BC78-49F1-9262-209B991CDE28}" dt="2025-03-15T11:46:09.408" v="792" actId="27636"/>
-          <ac:spMkLst>
-            <pc:docMk/>
-            <pc:sldMk cId="3894291026" sldId="530"/>
-            <ac:spMk id="3" creationId="{0CB143BC-3F6E-AD78-02BB-4295E71F41B9}"/>
-          </ac:spMkLst>
-        </pc:spChg>
       </pc:sldChg>
       <pc:sldChg chg="addSp delSp modSp new mod modClrScheme chgLayout">
         <pc:chgData name="Mohammed Fasha" userId="cc64f42d-a1a6-4f08-b97b-0c37f877119f" providerId="ADAL" clId="{1BAE7373-BC78-49F1-9262-209B991CDE28}" dt="2025-03-15T11:47:02.304" v="823" actId="313"/>
@@ -634,22 +544,6 @@
           <pc:docMk/>
           <pc:sldMk cId="3096298792" sldId="531"/>
         </pc:sldMkLst>
-        <pc:spChg chg="del mod ord">
-          <ac:chgData name="Mohammed Fasha" userId="cc64f42d-a1a6-4f08-b97b-0c37f877119f" providerId="ADAL" clId="{1BAE7373-BC78-49F1-9262-209B991CDE28}" dt="2025-03-15T11:46:48.828" v="796" actId="700"/>
-          <ac:spMkLst>
-            <pc:docMk/>
-            <pc:sldMk cId="3096298792" sldId="531"/>
-            <ac:spMk id="2" creationId="{01509DF9-F86D-6107-E238-B3DE33B216CF}"/>
-          </ac:spMkLst>
-        </pc:spChg>
-        <pc:spChg chg="del mod ord">
-          <ac:chgData name="Mohammed Fasha" userId="cc64f42d-a1a6-4f08-b97b-0c37f877119f" providerId="ADAL" clId="{1BAE7373-BC78-49F1-9262-209B991CDE28}" dt="2025-03-15T11:46:48.828" v="796" actId="700"/>
-          <ac:spMkLst>
-            <pc:docMk/>
-            <pc:sldMk cId="3096298792" sldId="531"/>
-            <ac:spMk id="3" creationId="{7C6D00BD-B545-76A4-D5E1-C202BF652959}"/>
-          </ac:spMkLst>
-        </pc:spChg>
         <pc:spChg chg="add mod ord">
           <ac:chgData name="Mohammed Fasha" userId="cc64f42d-a1a6-4f08-b97b-0c37f877119f" providerId="ADAL" clId="{1BAE7373-BC78-49F1-9262-209B991CDE28}" dt="2025-03-15T11:47:02.304" v="823" actId="313"/>
           <ac:spMkLst>
@@ -679,12 +573,9 @@
     </pc:docChg>
   </pc:docChgLst>
   <pc:docChgLst>
-    <pc:chgData name="Mohammed Fasha" userId="cc64f42d-a1a6-4f08-b97b-0c37f877119f" providerId="ADAL" clId="{6804A8E6-8D7F-46E3-B091-66A8F6B926BF}"/>
-  </pc:docChgLst>
-  <pc:docChgLst>
     <pc:chgData name="Mohammed Fasha" userId="cc64f42d-a1a6-4f08-b97b-0c37f877119f" providerId="ADAL" clId="{534F862C-5423-415F-8625-CCE86B4944CE}"/>
     <pc:docChg chg="undo redo custSel addSld delSld modSld sldOrd">
-      <pc:chgData name="Mohammed Fasha" userId="cc64f42d-a1a6-4f08-b97b-0c37f877119f" providerId="ADAL" clId="{534F862C-5423-415F-8625-CCE86B4944CE}" dt="2025-03-15T15:46:18.147" v="1203"/>
+      <pc:chgData name="Mohammed Fasha" userId="cc64f42d-a1a6-4f08-b97b-0c37f877119f" providerId="ADAL" clId="{534F862C-5423-415F-8625-CCE86B4944CE}" dt="2025-03-18T02:15:54.293" v="1292" actId="21"/>
       <pc:docMkLst>
         <pc:docMk/>
       </pc:docMkLst>
@@ -710,6 +601,21 @@
           <pc:sldMk cId="2022598249" sldId="497"/>
         </pc:sldMkLst>
       </pc:sldChg>
+      <pc:sldChg chg="delSp mod">
+        <pc:chgData name="Mohammed Fasha" userId="cc64f42d-a1a6-4f08-b97b-0c37f877119f" providerId="ADAL" clId="{534F862C-5423-415F-8625-CCE86B4944CE}" dt="2025-03-18T02:06:45.389" v="1268" actId="21"/>
+        <pc:sldMkLst>
+          <pc:docMk/>
+          <pc:sldMk cId="3509923534" sldId="520"/>
+        </pc:sldMkLst>
+        <pc:picChg chg="del">
+          <ac:chgData name="Mohammed Fasha" userId="cc64f42d-a1a6-4f08-b97b-0c37f877119f" providerId="ADAL" clId="{534F862C-5423-415F-8625-CCE86B4944CE}" dt="2025-03-18T02:06:45.389" v="1268" actId="21"/>
+          <ac:picMkLst>
+            <pc:docMk/>
+            <pc:sldMk cId="3509923534" sldId="520"/>
+            <ac:picMk id="5" creationId="{77EFD2CD-E234-52A1-28F0-23DD6EDC2473}"/>
+          </ac:picMkLst>
+        </pc:picChg>
+      </pc:sldChg>
       <pc:sldChg chg="addSp delSp modSp new mod">
         <pc:chgData name="Mohammed Fasha" userId="cc64f42d-a1a6-4f08-b97b-0c37f877119f" providerId="ADAL" clId="{534F862C-5423-415F-8625-CCE86B4944CE}" dt="2025-03-15T14:27:40.922" v="72" actId="14100"/>
         <pc:sldMkLst>
@@ -724,36 +630,12 @@
             <ac:spMk id="2" creationId="{D5521587-682C-AB8B-AEEC-95AEEF6B44B7}"/>
           </ac:spMkLst>
         </pc:spChg>
-        <pc:spChg chg="del">
-          <ac:chgData name="Mohammed Fasha" userId="cc64f42d-a1a6-4f08-b97b-0c37f877119f" providerId="ADAL" clId="{534F862C-5423-415F-8625-CCE86B4944CE}" dt="2025-03-15T14:23:06.170" v="1" actId="22"/>
-          <ac:spMkLst>
-            <pc:docMk/>
-            <pc:sldMk cId="3162735116" sldId="532"/>
-            <ac:spMk id="3" creationId="{33C7F717-C97D-B20F-0911-218CE6BD0FB0}"/>
-          </ac:spMkLst>
-        </pc:spChg>
         <pc:spChg chg="add mod">
           <ac:chgData name="Mohammed Fasha" userId="cc64f42d-a1a6-4f08-b97b-0c37f877119f" providerId="ADAL" clId="{534F862C-5423-415F-8625-CCE86B4944CE}" dt="2025-03-15T14:27:40.922" v="72" actId="14100"/>
           <ac:spMkLst>
             <pc:docMk/>
             <pc:sldMk cId="3162735116" sldId="532"/>
             <ac:spMk id="6" creationId="{1B5F427B-5A38-BC23-AAF5-9DB0E6087E63}"/>
-          </ac:spMkLst>
-        </pc:spChg>
-        <pc:spChg chg="add del mod">
-          <ac:chgData name="Mohammed Fasha" userId="cc64f42d-a1a6-4f08-b97b-0c37f877119f" providerId="ADAL" clId="{534F862C-5423-415F-8625-CCE86B4944CE}" dt="2025-03-15T14:26:06.740" v="8" actId="21"/>
-          <ac:spMkLst>
-            <pc:docMk/>
-            <pc:sldMk cId="3162735116" sldId="532"/>
-            <ac:spMk id="8" creationId="{577566B2-6E28-62B2-7E1B-940DA5F6919E}"/>
-          </ac:spMkLst>
-        </pc:spChg>
-        <pc:spChg chg="add del mod">
-          <ac:chgData name="Mohammed Fasha" userId="cc64f42d-a1a6-4f08-b97b-0c37f877119f" providerId="ADAL" clId="{534F862C-5423-415F-8625-CCE86B4944CE}" dt="2025-03-15T14:27:11.912" v="57" actId="478"/>
-          <ac:spMkLst>
-            <pc:docMk/>
-            <pc:sldMk cId="3162735116" sldId="532"/>
-            <ac:spMk id="9" creationId="{577566B2-6E28-62B2-7E1B-940DA5F6919E}"/>
           </ac:spMkLst>
         </pc:spChg>
         <pc:spChg chg="add mod">
@@ -764,14 +646,6 @@
             <ac:spMk id="11" creationId="{6E835F34-494B-6B04-2CA4-3234ED3663B0}"/>
           </ac:spMkLst>
         </pc:spChg>
-        <pc:picChg chg="add del mod ord">
-          <ac:chgData name="Mohammed Fasha" userId="cc64f42d-a1a6-4f08-b97b-0c37f877119f" providerId="ADAL" clId="{534F862C-5423-415F-8625-CCE86B4944CE}" dt="2025-03-15T14:25:50.177" v="5" actId="21"/>
-          <ac:picMkLst>
-            <pc:docMk/>
-            <pc:sldMk cId="3162735116" sldId="532"/>
-            <ac:picMk id="5" creationId="{9A11A22B-FA32-48C5-6632-77444B35CD79}"/>
-          </ac:picMkLst>
-        </pc:picChg>
       </pc:sldChg>
       <pc:sldChg chg="addSp modSp new mod">
         <pc:chgData name="Mohammed Fasha" userId="cc64f42d-a1a6-4f08-b97b-0c37f877119f" providerId="ADAL" clId="{534F862C-5423-415F-8625-CCE86B4944CE}" dt="2025-03-15T14:30:46.915" v="123" actId="1076"/>
@@ -801,174 +675,6 @@
             <pc:docMk/>
             <pc:sldMk cId="601496234" sldId="533"/>
             <ac:spMk id="4" creationId="{DF4240B0-0DC1-0861-78F7-C2EDD932B078}"/>
-          </ac:spMkLst>
-        </pc:spChg>
-        <pc:spChg chg="add mod">
-          <ac:chgData name="Mohammed Fasha" userId="cc64f42d-a1a6-4f08-b97b-0c37f877119f" providerId="ADAL" clId="{534F862C-5423-415F-8625-CCE86B4944CE}" dt="2025-03-15T14:29:18.297" v="106"/>
-          <ac:spMkLst>
-            <pc:docMk/>
-            <pc:sldMk cId="601496234" sldId="533"/>
-            <ac:spMk id="10" creationId="{7EE1220D-D716-7F86-5BC9-0B91FEB47507}"/>
-          </ac:spMkLst>
-        </pc:spChg>
-        <pc:spChg chg="add mod">
-          <ac:chgData name="Mohammed Fasha" userId="cc64f42d-a1a6-4f08-b97b-0c37f877119f" providerId="ADAL" clId="{534F862C-5423-415F-8625-CCE86B4944CE}" dt="2025-03-15T14:29:18.297" v="106"/>
-          <ac:spMkLst>
-            <pc:docMk/>
-            <pc:sldMk cId="601496234" sldId="533"/>
-            <ac:spMk id="16" creationId="{5B63002A-F9E8-0660-A055-B9AD53833449}"/>
-          </ac:spMkLst>
-        </pc:spChg>
-        <pc:spChg chg="add mod">
-          <ac:chgData name="Mohammed Fasha" userId="cc64f42d-a1a6-4f08-b97b-0c37f877119f" providerId="ADAL" clId="{534F862C-5423-415F-8625-CCE86B4944CE}" dt="2025-03-15T14:29:18.297" v="106"/>
-          <ac:spMkLst>
-            <pc:docMk/>
-            <pc:sldMk cId="601496234" sldId="533"/>
-            <ac:spMk id="17" creationId="{D4ADB129-A5A1-89E6-A58F-C4AFAE7C7125}"/>
-          </ac:spMkLst>
-        </pc:spChg>
-        <pc:spChg chg="add mod">
-          <ac:chgData name="Mohammed Fasha" userId="cc64f42d-a1a6-4f08-b97b-0c37f877119f" providerId="ADAL" clId="{534F862C-5423-415F-8625-CCE86B4944CE}" dt="2025-03-15T14:29:18.297" v="106"/>
-          <ac:spMkLst>
-            <pc:docMk/>
-            <pc:sldMk cId="601496234" sldId="533"/>
-            <ac:spMk id="19" creationId="{8DB7A457-0770-AE39-4F13-B958A47C3A5C}"/>
-          </ac:spMkLst>
-        </pc:spChg>
-        <pc:spChg chg="add mod">
-          <ac:chgData name="Mohammed Fasha" userId="cc64f42d-a1a6-4f08-b97b-0c37f877119f" providerId="ADAL" clId="{534F862C-5423-415F-8625-CCE86B4944CE}" dt="2025-03-15T14:29:18.297" v="106"/>
-          <ac:spMkLst>
-            <pc:docMk/>
-            <pc:sldMk cId="601496234" sldId="533"/>
-            <ac:spMk id="20" creationId="{E0852B58-9879-C59F-6F9F-418CED728AB5}"/>
-          </ac:spMkLst>
-        </pc:spChg>
-        <pc:spChg chg="add mod">
-          <ac:chgData name="Mohammed Fasha" userId="cc64f42d-a1a6-4f08-b97b-0c37f877119f" providerId="ADAL" clId="{534F862C-5423-415F-8625-CCE86B4944CE}" dt="2025-03-15T14:29:18.297" v="106"/>
-          <ac:spMkLst>
-            <pc:docMk/>
-            <pc:sldMk cId="601496234" sldId="533"/>
-            <ac:spMk id="28" creationId="{F9078D4F-389A-54C9-1473-2A48C429425B}"/>
-          </ac:spMkLst>
-        </pc:spChg>
-        <pc:spChg chg="add mod">
-          <ac:chgData name="Mohammed Fasha" userId="cc64f42d-a1a6-4f08-b97b-0c37f877119f" providerId="ADAL" clId="{534F862C-5423-415F-8625-CCE86B4944CE}" dt="2025-03-15T14:29:18.297" v="106"/>
-          <ac:spMkLst>
-            <pc:docMk/>
-            <pc:sldMk cId="601496234" sldId="533"/>
-            <ac:spMk id="30" creationId="{04FEF3EC-BE86-BB6F-01FE-998C3897E005}"/>
-          </ac:spMkLst>
-        </pc:spChg>
-        <pc:spChg chg="add mod">
-          <ac:chgData name="Mohammed Fasha" userId="cc64f42d-a1a6-4f08-b97b-0c37f877119f" providerId="ADAL" clId="{534F862C-5423-415F-8625-CCE86B4944CE}" dt="2025-03-15T14:29:18.297" v="106"/>
-          <ac:spMkLst>
-            <pc:docMk/>
-            <pc:sldMk cId="601496234" sldId="533"/>
-            <ac:spMk id="31" creationId="{E0DC89A6-B18C-8FD8-C625-DA2229BDAC7B}"/>
-          </ac:spMkLst>
-        </pc:spChg>
-        <pc:spChg chg="add mod">
-          <ac:chgData name="Mohammed Fasha" userId="cc64f42d-a1a6-4f08-b97b-0c37f877119f" providerId="ADAL" clId="{534F862C-5423-415F-8625-CCE86B4944CE}" dt="2025-03-15T14:29:18.297" v="106"/>
-          <ac:spMkLst>
-            <pc:docMk/>
-            <pc:sldMk cId="601496234" sldId="533"/>
-            <ac:spMk id="34" creationId="{0F2D6C20-C2D4-6F20-8A7D-76D1546FC055}"/>
-          </ac:spMkLst>
-        </pc:spChg>
-        <pc:spChg chg="add mod">
-          <ac:chgData name="Mohammed Fasha" userId="cc64f42d-a1a6-4f08-b97b-0c37f877119f" providerId="ADAL" clId="{534F862C-5423-415F-8625-CCE86B4944CE}" dt="2025-03-15T14:29:18.297" v="106"/>
-          <ac:spMkLst>
-            <pc:docMk/>
-            <pc:sldMk cId="601496234" sldId="533"/>
-            <ac:spMk id="42" creationId="{162D6671-B2B6-2E81-CA45-8A629481AADD}"/>
-          </ac:spMkLst>
-        </pc:spChg>
-        <pc:spChg chg="add mod">
-          <ac:chgData name="Mohammed Fasha" userId="cc64f42d-a1a6-4f08-b97b-0c37f877119f" providerId="ADAL" clId="{534F862C-5423-415F-8625-CCE86B4944CE}" dt="2025-03-15T14:29:20.874" v="108"/>
-          <ac:spMkLst>
-            <pc:docMk/>
-            <pc:sldMk cId="601496234" sldId="533"/>
-            <ac:spMk id="45" creationId="{E621DC3A-CF3E-DC53-3A06-58A6CB3C083D}"/>
-          </ac:spMkLst>
-        </pc:spChg>
-        <pc:spChg chg="add mod">
-          <ac:chgData name="Mohammed Fasha" userId="cc64f42d-a1a6-4f08-b97b-0c37f877119f" providerId="ADAL" clId="{534F862C-5423-415F-8625-CCE86B4944CE}" dt="2025-03-15T14:29:20.874" v="108"/>
-          <ac:spMkLst>
-            <pc:docMk/>
-            <pc:sldMk cId="601496234" sldId="533"/>
-            <ac:spMk id="47" creationId="{13E94B4C-17FA-B886-BBD5-13D592903ACF}"/>
-          </ac:spMkLst>
-        </pc:spChg>
-        <pc:spChg chg="add mod">
-          <ac:chgData name="Mohammed Fasha" userId="cc64f42d-a1a6-4f08-b97b-0c37f877119f" providerId="ADAL" clId="{534F862C-5423-415F-8625-CCE86B4944CE}" dt="2025-03-15T14:29:20.102" v="107"/>
-          <ac:spMkLst>
-            <pc:docMk/>
-            <pc:sldMk cId="601496234" sldId="533"/>
-            <ac:spMk id="55" creationId="{2EA6E4B7-6D6E-D0E1-BA70-20ADFBAD1C8E}"/>
-          </ac:spMkLst>
-        </pc:spChg>
-        <pc:spChg chg="mod">
-          <ac:chgData name="Mohammed Fasha" userId="cc64f42d-a1a6-4f08-b97b-0c37f877119f" providerId="ADAL" clId="{534F862C-5423-415F-8625-CCE86B4944CE}" dt="2025-03-15T14:29:20.874" v="108"/>
-          <ac:spMkLst>
-            <pc:docMk/>
-            <pc:sldMk cId="601496234" sldId="533"/>
-            <ac:spMk id="58" creationId="{E458161B-793A-6FB1-F623-AE3838034FAB}"/>
-          </ac:spMkLst>
-        </pc:spChg>
-        <pc:spChg chg="add mod">
-          <ac:chgData name="Mohammed Fasha" userId="cc64f42d-a1a6-4f08-b97b-0c37f877119f" providerId="ADAL" clId="{534F862C-5423-415F-8625-CCE86B4944CE}" dt="2025-03-15T14:29:20.874" v="108"/>
-          <ac:spMkLst>
-            <pc:docMk/>
-            <pc:sldMk cId="601496234" sldId="533"/>
-            <ac:spMk id="59" creationId="{2D5D3F9E-4D2B-F626-A097-629008C9D61E}"/>
-          </ac:spMkLst>
-        </pc:spChg>
-        <pc:spChg chg="add mod">
-          <ac:chgData name="Mohammed Fasha" userId="cc64f42d-a1a6-4f08-b97b-0c37f877119f" providerId="ADAL" clId="{534F862C-5423-415F-8625-CCE86B4944CE}" dt="2025-03-15T14:29:20.874" v="108"/>
-          <ac:spMkLst>
-            <pc:docMk/>
-            <pc:sldMk cId="601496234" sldId="533"/>
-            <ac:spMk id="1026" creationId="{33D0D62F-7D3D-A491-086F-46F43B677A9D}"/>
-          </ac:spMkLst>
-        </pc:spChg>
-        <pc:spChg chg="add mod">
-          <ac:chgData name="Mohammed Fasha" userId="cc64f42d-a1a6-4f08-b97b-0c37f877119f" providerId="ADAL" clId="{534F862C-5423-415F-8625-CCE86B4944CE}" dt="2025-03-15T14:29:20.874" v="108"/>
-          <ac:spMkLst>
-            <pc:docMk/>
-            <pc:sldMk cId="601496234" sldId="533"/>
-            <ac:spMk id="1028" creationId="{0EC27E3D-0636-0510-0E58-E50233FBA0FB}"/>
-          </ac:spMkLst>
-        </pc:spChg>
-        <pc:spChg chg="add mod">
-          <ac:chgData name="Mohammed Fasha" userId="cc64f42d-a1a6-4f08-b97b-0c37f877119f" providerId="ADAL" clId="{534F862C-5423-415F-8625-CCE86B4944CE}" dt="2025-03-15T14:29:20.874" v="108"/>
-          <ac:spMkLst>
-            <pc:docMk/>
-            <pc:sldMk cId="601496234" sldId="533"/>
-            <ac:spMk id="1030" creationId="{F1764B5C-0EA3-3C4F-3BBB-68E7B91DC232}"/>
-          </ac:spMkLst>
-        </pc:spChg>
-        <pc:spChg chg="add mod">
-          <ac:chgData name="Mohammed Fasha" userId="cc64f42d-a1a6-4f08-b97b-0c37f877119f" providerId="ADAL" clId="{534F862C-5423-415F-8625-CCE86B4944CE}" dt="2025-03-15T14:29:20.874" v="108"/>
-          <ac:spMkLst>
-            <pc:docMk/>
-            <pc:sldMk cId="601496234" sldId="533"/>
-            <ac:spMk id="1035" creationId="{4D6F47DA-9A52-A424-28CF-A6127273D3B2}"/>
-          </ac:spMkLst>
-        </pc:spChg>
-        <pc:spChg chg="add mod">
-          <ac:chgData name="Mohammed Fasha" userId="cc64f42d-a1a6-4f08-b97b-0c37f877119f" providerId="ADAL" clId="{534F862C-5423-415F-8625-CCE86B4944CE}" dt="2025-03-15T14:29:20.874" v="108"/>
-          <ac:spMkLst>
-            <pc:docMk/>
-            <pc:sldMk cId="601496234" sldId="533"/>
-            <ac:spMk id="1037" creationId="{C9D5714F-ADCF-F63A-A509-BFB86EE77A12}"/>
-          </ac:spMkLst>
-        </pc:spChg>
-        <pc:spChg chg="add mod">
-          <ac:chgData name="Mohammed Fasha" userId="cc64f42d-a1a6-4f08-b97b-0c37f877119f" providerId="ADAL" clId="{534F862C-5423-415F-8625-CCE86B4944CE}" dt="2025-03-15T14:29:20.874" v="108"/>
-          <ac:spMkLst>
-            <pc:docMk/>
-            <pc:sldMk cId="601496234" sldId="533"/>
-            <ac:spMk id="1042" creationId="{6945F5D4-2CD4-5FF0-F9E1-EEF2051AE7CD}"/>
           </ac:spMkLst>
         </pc:spChg>
         <pc:spChg chg="add mod">
@@ -1102,22 +808,6 @@
           <pc:docMk/>
           <pc:sldMk cId="514683601" sldId="538"/>
         </pc:sldMkLst>
-        <pc:spChg chg="del mod ord">
-          <ac:chgData name="Mohammed Fasha" userId="cc64f42d-a1a6-4f08-b97b-0c37f877119f" providerId="ADAL" clId="{534F862C-5423-415F-8625-CCE86B4944CE}" dt="2025-03-15T14:38:46.316" v="357" actId="21"/>
-          <ac:spMkLst>
-            <pc:docMk/>
-            <pc:sldMk cId="514683601" sldId="538"/>
-            <ac:spMk id="2" creationId="{289D9ADB-119A-DB37-2C2E-16F6F8D32588}"/>
-          </ac:spMkLst>
-        </pc:spChg>
-        <pc:spChg chg="del mod">
-          <ac:chgData name="Mohammed Fasha" userId="cc64f42d-a1a6-4f08-b97b-0c37f877119f" providerId="ADAL" clId="{534F862C-5423-415F-8625-CCE86B4944CE}" dt="2025-03-15T14:38:27.015" v="352" actId="21"/>
-          <ac:spMkLst>
-            <pc:docMk/>
-            <pc:sldMk cId="514683601" sldId="538"/>
-            <ac:spMk id="3" creationId="{FD1D5DF3-59AE-3311-56F9-A6C7E34DB12F}"/>
-          </ac:spMkLst>
-        </pc:spChg>
         <pc:spChg chg="add mod">
           <ac:chgData name="Mohammed Fasha" userId="cc64f42d-a1a6-4f08-b97b-0c37f877119f" providerId="ADAL" clId="{534F862C-5423-415F-8625-CCE86B4944CE}" dt="2025-03-15T14:39:54.524" v="469" actId="14100"/>
           <ac:spMkLst>
@@ -1157,22 +847,6 @@
           <pc:docMk/>
           <pc:sldMk cId="2711506933" sldId="539"/>
         </pc:sldMkLst>
-        <pc:spChg chg="add del mod">
-          <ac:chgData name="Mohammed Fasha" userId="cc64f42d-a1a6-4f08-b97b-0c37f877119f" providerId="ADAL" clId="{534F862C-5423-415F-8625-CCE86B4944CE}" dt="2025-03-15T14:40:32.104" v="480" actId="700"/>
-          <ac:spMkLst>
-            <pc:docMk/>
-            <pc:sldMk cId="2711506933" sldId="539"/>
-            <ac:spMk id="2" creationId="{FB22B7A2-F53E-F5FE-FE14-DDD5FDE2EB2E}"/>
-          </ac:spMkLst>
-        </pc:spChg>
-        <pc:spChg chg="add del mod">
-          <ac:chgData name="Mohammed Fasha" userId="cc64f42d-a1a6-4f08-b97b-0c37f877119f" providerId="ADAL" clId="{534F862C-5423-415F-8625-CCE86B4944CE}" dt="2025-03-15T14:40:32.104" v="480" actId="700"/>
-          <ac:spMkLst>
-            <pc:docMk/>
-            <pc:sldMk cId="2711506933" sldId="539"/>
-            <ac:spMk id="3" creationId="{FF77B555-8C75-4AD4-5F80-16D68DAE56A7}"/>
-          </ac:spMkLst>
-        </pc:spChg>
         <pc:spChg chg="add mod ord">
           <ac:chgData name="Mohammed Fasha" userId="cc64f42d-a1a6-4f08-b97b-0c37f877119f" providerId="ADAL" clId="{534F862C-5423-415F-8625-CCE86B4944CE}" dt="2025-03-15T15:03:01.459" v="821" actId="27636"/>
           <ac:spMkLst>
@@ -1220,14 +894,6 @@
             <ac:spMk id="5" creationId="{B3E2DD2C-FC6F-5E35-7761-75734B27494E}"/>
           </ac:spMkLst>
         </pc:spChg>
-        <pc:spChg chg="add del">
-          <ac:chgData name="Mohammed Fasha" userId="cc64f42d-a1a6-4f08-b97b-0c37f877119f" providerId="ADAL" clId="{534F862C-5423-415F-8625-CCE86B4944CE}" dt="2025-03-15T14:41:26.005" v="530" actId="22"/>
-          <ac:spMkLst>
-            <pc:docMk/>
-            <pc:sldMk cId="1314172448" sldId="540"/>
-            <ac:spMk id="7" creationId="{891D5168-2691-4FBC-9A0F-6DC91B070D6C}"/>
-          </ac:spMkLst>
-        </pc:spChg>
         <pc:spChg chg="add mod">
           <ac:chgData name="Mohammed Fasha" userId="cc64f42d-a1a6-4f08-b97b-0c37f877119f" providerId="ADAL" clId="{534F862C-5423-415F-8625-CCE86B4944CE}" dt="2025-03-15T14:41:45.163" v="537" actId="20577"/>
           <ac:spMkLst>
@@ -1250,22 +916,6 @@
           <pc:docMk/>
           <pc:sldMk cId="2326721154" sldId="541"/>
         </pc:sldMkLst>
-        <pc:spChg chg="mod">
-          <ac:chgData name="Mohammed Fasha" userId="cc64f42d-a1a6-4f08-b97b-0c37f877119f" providerId="ADAL" clId="{534F862C-5423-415F-8625-CCE86B4944CE}" dt="2025-03-15T14:46:17.291" v="594"/>
-          <ac:spMkLst>
-            <pc:docMk/>
-            <pc:sldMk cId="2326721154" sldId="541"/>
-            <ac:spMk id="4" creationId="{697DFFFB-15FE-42FE-05CB-E3D34128B84A}"/>
-          </ac:spMkLst>
-        </pc:spChg>
-        <pc:spChg chg="mod">
-          <ac:chgData name="Mohammed Fasha" userId="cc64f42d-a1a6-4f08-b97b-0c37f877119f" providerId="ADAL" clId="{534F862C-5423-415F-8625-CCE86B4944CE}" dt="2025-03-15T14:46:41.811" v="620" actId="20577"/>
-          <ac:spMkLst>
-            <pc:docMk/>
-            <pc:sldMk cId="2326721154" sldId="541"/>
-            <ac:spMk id="5" creationId="{8BC4FBB5-C91B-A4CC-0D87-060CDEBEF494}"/>
-          </ac:spMkLst>
-        </pc:spChg>
       </pc:sldChg>
       <pc:sldChg chg="add del">
         <pc:chgData name="Mohammed Fasha" userId="cc64f42d-a1a6-4f08-b97b-0c37f877119f" providerId="ADAL" clId="{534F862C-5423-415F-8625-CCE86B4944CE}" dt="2025-03-15T14:40:27.804" v="477" actId="47"/>
@@ -1434,8 +1084,8 @@
           </ac:spMkLst>
         </pc:spChg>
       </pc:sldChg>
-      <pc:sldChg chg="modSp add mod">
-        <pc:chgData name="Mohammed Fasha" userId="cc64f42d-a1a6-4f08-b97b-0c37f877119f" providerId="ADAL" clId="{534F862C-5423-415F-8625-CCE86B4944CE}" dt="2025-03-15T14:58:43.419" v="797" actId="14100"/>
+      <pc:sldChg chg="addSp modSp add mod">
+        <pc:chgData name="Mohammed Fasha" userId="cc64f42d-a1a6-4f08-b97b-0c37f877119f" providerId="ADAL" clId="{534F862C-5423-415F-8625-CCE86B4944CE}" dt="2025-03-18T02:04:15.822" v="1241" actId="1076"/>
         <pc:sldMkLst>
           <pc:docMk/>
           <pc:sldMk cId="1532144506" sldId="548"/>
@@ -1449,13 +1099,21 @@
           </ac:spMkLst>
         </pc:spChg>
         <pc:spChg chg="mod">
-          <ac:chgData name="Mohammed Fasha" userId="cc64f42d-a1a6-4f08-b97b-0c37f877119f" providerId="ADAL" clId="{534F862C-5423-415F-8625-CCE86B4944CE}" dt="2025-03-15T14:58:43.419" v="797" actId="14100"/>
+          <ac:chgData name="Mohammed Fasha" userId="cc64f42d-a1a6-4f08-b97b-0c37f877119f" providerId="ADAL" clId="{534F862C-5423-415F-8625-CCE86B4944CE}" dt="2025-03-18T02:03:01.013" v="1234" actId="14100"/>
           <ac:spMkLst>
             <pc:docMk/>
             <pc:sldMk cId="1532144506" sldId="548"/>
             <ac:spMk id="3" creationId="{F2642ABB-E5EA-5E94-ECA2-1C5C13EC4A20}"/>
           </ac:spMkLst>
         </pc:spChg>
+        <pc:picChg chg="add mod">
+          <ac:chgData name="Mohammed Fasha" userId="cc64f42d-a1a6-4f08-b97b-0c37f877119f" providerId="ADAL" clId="{534F862C-5423-415F-8625-CCE86B4944CE}" dt="2025-03-18T02:04:15.822" v="1241" actId="1076"/>
+          <ac:picMkLst>
+            <pc:docMk/>
+            <pc:sldMk cId="1532144506" sldId="548"/>
+            <ac:picMk id="1026" creationId="{9C123F94-BC05-DA2F-D744-F4CB2C79A932}"/>
+          </ac:picMkLst>
+        </pc:picChg>
       </pc:sldChg>
       <pc:sldChg chg="add">
         <pc:chgData name="Mohammed Fasha" userId="cc64f42d-a1a6-4f08-b97b-0c37f877119f" providerId="ADAL" clId="{534F862C-5423-415F-8625-CCE86B4944CE}" dt="2025-03-15T15:11:24.978" v="996"/>
@@ -1470,38 +1128,6 @@
           <pc:docMk/>
           <pc:sldMk cId="2226758089" sldId="549"/>
         </pc:sldMkLst>
-        <pc:spChg chg="del mod ord">
-          <ac:chgData name="Mohammed Fasha" userId="cc64f42d-a1a6-4f08-b97b-0c37f877119f" providerId="ADAL" clId="{534F862C-5423-415F-8625-CCE86B4944CE}" dt="2025-03-15T15:03:16.922" v="823" actId="700"/>
-          <ac:spMkLst>
-            <pc:docMk/>
-            <pc:sldMk cId="2226758089" sldId="549"/>
-            <ac:spMk id="2" creationId="{A73EB990-AA0B-0142-B9BA-518BDE9B331C}"/>
-          </ac:spMkLst>
-        </pc:spChg>
-        <pc:spChg chg="del mod ord">
-          <ac:chgData name="Mohammed Fasha" userId="cc64f42d-a1a6-4f08-b97b-0c37f877119f" providerId="ADAL" clId="{534F862C-5423-415F-8625-CCE86B4944CE}" dt="2025-03-15T15:03:16.922" v="823" actId="700"/>
-          <ac:spMkLst>
-            <pc:docMk/>
-            <pc:sldMk cId="2226758089" sldId="549"/>
-            <ac:spMk id="3" creationId="{7301A38D-3F42-BA74-72C1-FA54930345D3}"/>
-          </ac:spMkLst>
-        </pc:spChg>
-        <pc:spChg chg="add mod ord">
-          <ac:chgData name="Mohammed Fasha" userId="cc64f42d-a1a6-4f08-b97b-0c37f877119f" providerId="ADAL" clId="{534F862C-5423-415F-8625-CCE86B4944CE}" dt="2025-03-15T15:03:21.592" v="838" actId="20577"/>
-          <ac:spMkLst>
-            <pc:docMk/>
-            <pc:sldMk cId="2226758089" sldId="549"/>
-            <ac:spMk id="4" creationId="{F7C91F0E-E051-C42F-5CF0-4301F606A56E}"/>
-          </ac:spMkLst>
-        </pc:spChg>
-        <pc:spChg chg="add mod ord">
-          <ac:chgData name="Mohammed Fasha" userId="cc64f42d-a1a6-4f08-b97b-0c37f877119f" providerId="ADAL" clId="{534F862C-5423-415F-8625-CCE86B4944CE}" dt="2025-03-15T15:03:16.922" v="823" actId="700"/>
-          <ac:spMkLst>
-            <pc:docMk/>
-            <pc:sldMk cId="2226758089" sldId="549"/>
-            <ac:spMk id="5" creationId="{E91FDDBF-6326-4631-9B52-C042061CEEA1}"/>
-          </ac:spMkLst>
-        </pc:spChg>
       </pc:sldChg>
       <pc:sldChg chg="addSp modSp new mod">
         <pc:chgData name="Mohammed Fasha" userId="cc64f42d-a1a6-4f08-b97b-0c37f877119f" providerId="ADAL" clId="{534F862C-5423-415F-8625-CCE86B4944CE}" dt="2025-03-15T15:46:18.147" v="1203"/>
@@ -1523,14 +1149,6 @@
             <pc:docMk/>
             <pc:sldMk cId="51728829" sldId="550"/>
             <ac:spMk id="3" creationId="{CA818D56-B852-D4FC-E994-990B5F898E18}"/>
-          </ac:spMkLst>
-        </pc:spChg>
-        <pc:spChg chg="add">
-          <ac:chgData name="Mohammed Fasha" userId="cc64f42d-a1a6-4f08-b97b-0c37f877119f" providerId="ADAL" clId="{534F862C-5423-415F-8625-CCE86B4944CE}" dt="2025-03-15T15:06:52.874" v="891"/>
-          <ac:spMkLst>
-            <pc:docMk/>
-            <pc:sldMk cId="51728829" sldId="550"/>
-            <ac:spMk id="4" creationId="{FDD15BE4-049C-3B76-CA33-46995EADA93B}"/>
           </ac:spMkLst>
         </pc:spChg>
         <pc:spChg chg="add mod">
@@ -1556,22 +1174,6 @@
           <pc:docMk/>
           <pc:sldMk cId="2939072846" sldId="551"/>
         </pc:sldMkLst>
-        <pc:spChg chg="del mod ord">
-          <ac:chgData name="Mohammed Fasha" userId="cc64f42d-a1a6-4f08-b97b-0c37f877119f" providerId="ADAL" clId="{534F862C-5423-415F-8625-CCE86B4944CE}" dt="2025-03-15T15:03:31.478" v="841" actId="700"/>
-          <ac:spMkLst>
-            <pc:docMk/>
-            <pc:sldMk cId="2939072846" sldId="551"/>
-            <ac:spMk id="2" creationId="{313A7AC1-92F3-07A8-FDAB-9434557AC1B1}"/>
-          </ac:spMkLst>
-        </pc:spChg>
-        <pc:spChg chg="del mod ord">
-          <ac:chgData name="Mohammed Fasha" userId="cc64f42d-a1a6-4f08-b97b-0c37f877119f" providerId="ADAL" clId="{534F862C-5423-415F-8625-CCE86B4944CE}" dt="2025-03-15T15:03:31.478" v="841" actId="700"/>
-          <ac:spMkLst>
-            <pc:docMk/>
-            <pc:sldMk cId="2939072846" sldId="551"/>
-            <ac:spMk id="3" creationId="{791288F5-AF79-7044-7F2D-D715A5B9BF4C}"/>
-          </ac:spMkLst>
-        </pc:spChg>
         <pc:spChg chg="add mod ord">
           <ac:chgData name="Mohammed Fasha" userId="cc64f42d-a1a6-4f08-b97b-0c37f877119f" providerId="ADAL" clId="{534F862C-5423-415F-8625-CCE86B4944CE}" dt="2025-03-15T15:03:35.944" v="858" actId="20577"/>
           <ac:spMkLst>
@@ -1595,22 +1197,6 @@
           <pc:docMk/>
           <pc:sldMk cId="3828354163" sldId="552"/>
         </pc:sldMkLst>
-        <pc:spChg chg="del">
-          <ac:chgData name="Mohammed Fasha" userId="cc64f42d-a1a6-4f08-b97b-0c37f877119f" providerId="ADAL" clId="{534F862C-5423-415F-8625-CCE86B4944CE}" dt="2025-03-15T15:07:45.765" v="897" actId="700"/>
-          <ac:spMkLst>
-            <pc:docMk/>
-            <pc:sldMk cId="3828354163" sldId="552"/>
-            <ac:spMk id="2" creationId="{B3B0ED14-CA4F-AFCA-8276-46820FCCC4EC}"/>
-          </ac:spMkLst>
-        </pc:spChg>
-        <pc:spChg chg="del">
-          <ac:chgData name="Mohammed Fasha" userId="cc64f42d-a1a6-4f08-b97b-0c37f877119f" providerId="ADAL" clId="{534F862C-5423-415F-8625-CCE86B4944CE}" dt="2025-03-15T15:07:45.765" v="897" actId="700"/>
-          <ac:spMkLst>
-            <pc:docMk/>
-            <pc:sldMk cId="3828354163" sldId="552"/>
-            <ac:spMk id="3" creationId="{F334C854-6E51-BC50-1C6A-64502B3A3189}"/>
-          </ac:spMkLst>
-        </pc:spChg>
         <pc:spChg chg="add mod">
           <ac:chgData name="Mohammed Fasha" userId="cc64f42d-a1a6-4f08-b97b-0c37f877119f" providerId="ADAL" clId="{534F862C-5423-415F-8625-CCE86B4944CE}" dt="2025-03-15T15:09:54.988" v="987" actId="20577"/>
           <ac:spMkLst>
@@ -1626,22 +1212,6 @@
           <pc:docMk/>
           <pc:sldMk cId="4066624001" sldId="553"/>
         </pc:sldMkLst>
-        <pc:spChg chg="add del mod">
-          <ac:chgData name="Mohammed Fasha" userId="cc64f42d-a1a6-4f08-b97b-0c37f877119f" providerId="ADAL" clId="{534F862C-5423-415F-8625-CCE86B4944CE}" dt="2025-03-15T15:08:34.352" v="914" actId="21"/>
-          <ac:spMkLst>
-            <pc:docMk/>
-            <pc:sldMk cId="4066624001" sldId="553"/>
-            <ac:spMk id="3" creationId="{1913502C-BA6C-4A00-DB07-8B2133F6BE17}"/>
-          </ac:spMkLst>
-        </pc:spChg>
-        <pc:spChg chg="del mod">
-          <ac:chgData name="Mohammed Fasha" userId="cc64f42d-a1a6-4f08-b97b-0c37f877119f" providerId="ADAL" clId="{534F862C-5423-415F-8625-CCE86B4944CE}" dt="2025-03-15T15:08:26.833" v="910" actId="478"/>
-          <ac:spMkLst>
-            <pc:docMk/>
-            <pc:sldMk cId="4066624001" sldId="553"/>
-            <ac:spMk id="5" creationId="{44D62765-B385-8211-8036-7E9B03EB1DB5}"/>
-          </ac:spMkLst>
-        </pc:spChg>
         <pc:spChg chg="add mod">
           <ac:chgData name="Mohammed Fasha" userId="cc64f42d-a1a6-4f08-b97b-0c37f877119f" providerId="ADAL" clId="{534F862C-5423-415F-8625-CCE86B4944CE}" dt="2025-03-15T15:09:49.920" v="984" actId="1035"/>
           <ac:spMkLst>
@@ -1665,14 +1235,6 @@
             <ac:spMk id="3" creationId="{9AD8AF12-87DE-57A8-CC84-2D601E00B4EE}"/>
           </ac:spMkLst>
         </pc:spChg>
-        <pc:spChg chg="del">
-          <ac:chgData name="Mohammed Fasha" userId="cc64f42d-a1a6-4f08-b97b-0c37f877119f" providerId="ADAL" clId="{534F862C-5423-415F-8625-CCE86B4944CE}" dt="2025-03-15T15:10:01.163" v="988" actId="21"/>
-          <ac:spMkLst>
-            <pc:docMk/>
-            <pc:sldMk cId="1318473408" sldId="554"/>
-            <ac:spMk id="5" creationId="{B8847187-90DE-091A-E5D9-81735EA29D70}"/>
-          </ac:spMkLst>
-        </pc:spChg>
       </pc:sldChg>
       <pc:sldChg chg="addSp delSp modSp add mod">
         <pc:chgData name="Mohammed Fasha" userId="cc64f42d-a1a6-4f08-b97b-0c37f877119f" providerId="ADAL" clId="{534F862C-5423-415F-8625-CCE86B4944CE}" dt="2025-03-15T15:12:36.079" v="1004" actId="1076"/>
@@ -1688,17 +1250,9 @@
             <ac:spMk id="3" creationId="{187810EE-8111-BD9B-4A1B-7D196A06E838}"/>
           </ac:spMkLst>
         </pc:spChg>
-        <pc:spChg chg="del">
-          <ac:chgData name="Mohammed Fasha" userId="cc64f42d-a1a6-4f08-b97b-0c37f877119f" providerId="ADAL" clId="{534F862C-5423-415F-8625-CCE86B4944CE}" dt="2025-03-15T15:10:03.862" v="989" actId="21"/>
-          <ac:spMkLst>
-            <pc:docMk/>
-            <pc:sldMk cId="1685077969" sldId="555"/>
-            <ac:spMk id="5" creationId="{B46EFC3A-E068-E521-28EF-F622AF72DE4A}"/>
-          </ac:spMkLst>
-        </pc:spChg>
       </pc:sldChg>
       <pc:sldChg chg="modSp new mod ord">
-        <pc:chgData name="Mohammed Fasha" userId="cc64f42d-a1a6-4f08-b97b-0c37f877119f" providerId="ADAL" clId="{534F862C-5423-415F-8625-CCE86B4944CE}" dt="2025-03-15T15:38:28.503" v="1122"/>
+        <pc:chgData name="Mohammed Fasha" userId="cc64f42d-a1a6-4f08-b97b-0c37f877119f" providerId="ADAL" clId="{534F862C-5423-415F-8625-CCE86B4944CE}" dt="2025-03-18T02:00:54.941" v="1214" actId="6549"/>
         <pc:sldMkLst>
           <pc:docMk/>
           <pc:sldMk cId="2953760213" sldId="556"/>
@@ -1712,7 +1266,7 @@
           </ac:spMkLst>
         </pc:spChg>
         <pc:spChg chg="mod">
-          <ac:chgData name="Mohammed Fasha" userId="cc64f42d-a1a6-4f08-b97b-0c37f877119f" providerId="ADAL" clId="{534F862C-5423-415F-8625-CCE86B4944CE}" dt="2025-03-15T15:35:56.072" v="1095" actId="12"/>
+          <ac:chgData name="Mohammed Fasha" userId="cc64f42d-a1a6-4f08-b97b-0c37f877119f" providerId="ADAL" clId="{534F862C-5423-415F-8625-CCE86B4944CE}" dt="2025-03-18T02:00:54.941" v="1214" actId="6549"/>
           <ac:spMkLst>
             <pc:docMk/>
             <pc:sldMk cId="2953760213" sldId="556"/>
@@ -1721,7 +1275,7 @@
         </pc:spChg>
       </pc:sldChg>
       <pc:sldChg chg="modSp new mod">
-        <pc:chgData name="Mohammed Fasha" userId="cc64f42d-a1a6-4f08-b97b-0c37f877119f" providerId="ADAL" clId="{534F862C-5423-415F-8625-CCE86B4944CE}" dt="2025-03-15T15:38:18.785" v="1118" actId="12"/>
+        <pc:chgData name="Mohammed Fasha" userId="cc64f42d-a1a6-4f08-b97b-0c37f877119f" providerId="ADAL" clId="{534F862C-5423-415F-8625-CCE86B4944CE}" dt="2025-03-18T02:02:53.065" v="1233" actId="5793"/>
         <pc:sldMkLst>
           <pc:docMk/>
           <pc:sldMk cId="47443413" sldId="557"/>
@@ -1735,7 +1289,7 @@
           </ac:spMkLst>
         </pc:spChg>
         <pc:spChg chg="mod">
-          <ac:chgData name="Mohammed Fasha" userId="cc64f42d-a1a6-4f08-b97b-0c37f877119f" providerId="ADAL" clId="{534F862C-5423-415F-8625-CCE86B4944CE}" dt="2025-03-15T15:38:18.785" v="1118" actId="12"/>
+          <ac:chgData name="Mohammed Fasha" userId="cc64f42d-a1a6-4f08-b97b-0c37f877119f" providerId="ADAL" clId="{534F862C-5423-415F-8625-CCE86B4944CE}" dt="2025-03-18T02:02:53.065" v="1233" actId="5793"/>
           <ac:spMkLst>
             <pc:docMk/>
             <pc:sldMk cId="47443413" sldId="557"/>
@@ -1743,8 +1297,8 @@
           </ac:spMkLst>
         </pc:spChg>
       </pc:sldChg>
-      <pc:sldChg chg="modSp new mod">
-        <pc:chgData name="Mohammed Fasha" userId="cc64f42d-a1a6-4f08-b97b-0c37f877119f" providerId="ADAL" clId="{534F862C-5423-415F-8625-CCE86B4944CE}" dt="2025-03-15T15:40:29.246" v="1136" actId="20577"/>
+      <pc:sldChg chg="modSp new mod ord">
+        <pc:chgData name="Mohammed Fasha" userId="cc64f42d-a1a6-4f08-b97b-0c37f877119f" providerId="ADAL" clId="{534F862C-5423-415F-8625-CCE86B4944CE}" dt="2025-03-18T02:03:33.425" v="1240"/>
         <pc:sldMkLst>
           <pc:docMk/>
           <pc:sldMk cId="421367154" sldId="558"/>
@@ -1765,6 +1319,84 @@
             <ac:spMk id="3" creationId="{13B04378-246B-4FE4-2C64-C63653A45260}"/>
           </ac:spMkLst>
         </pc:spChg>
+      </pc:sldChg>
+      <pc:sldChg chg="addSp modSp new mod">
+        <pc:chgData name="Mohammed Fasha" userId="cc64f42d-a1a6-4f08-b97b-0c37f877119f" providerId="ADAL" clId="{534F862C-5423-415F-8625-CCE86B4944CE}" dt="2025-03-18T02:08:12.173" v="1285" actId="1076"/>
+        <pc:sldMkLst>
+          <pc:docMk/>
+          <pc:sldMk cId="2279320564" sldId="560"/>
+        </pc:sldMkLst>
+        <pc:spChg chg="mod">
+          <ac:chgData name="Mohammed Fasha" userId="cc64f42d-a1a6-4f08-b97b-0c37f877119f" providerId="ADAL" clId="{534F862C-5423-415F-8625-CCE86B4944CE}" dt="2025-03-18T02:05:48.025" v="1257" actId="6549"/>
+          <ac:spMkLst>
+            <pc:docMk/>
+            <pc:sldMk cId="2279320564" sldId="560"/>
+            <ac:spMk id="2" creationId="{40D5681E-8023-8C0D-91C0-DD0674DE5C9B}"/>
+          </ac:spMkLst>
+        </pc:spChg>
+        <pc:spChg chg="mod">
+          <ac:chgData name="Mohammed Fasha" userId="cc64f42d-a1a6-4f08-b97b-0c37f877119f" providerId="ADAL" clId="{534F862C-5423-415F-8625-CCE86B4944CE}" dt="2025-03-18T02:06:41.664" v="1267" actId="179"/>
+          <ac:spMkLst>
+            <pc:docMk/>
+            <pc:sldMk cId="2279320564" sldId="560"/>
+            <ac:spMk id="3" creationId="{94D699DC-EB35-242E-ABB5-8CF78304E6B9}"/>
+          </ac:spMkLst>
+        </pc:spChg>
+        <pc:picChg chg="add mod">
+          <ac:chgData name="Mohammed Fasha" userId="cc64f42d-a1a6-4f08-b97b-0c37f877119f" providerId="ADAL" clId="{534F862C-5423-415F-8625-CCE86B4944CE}" dt="2025-03-18T02:08:12.173" v="1285" actId="1076"/>
+          <ac:picMkLst>
+            <pc:docMk/>
+            <pc:sldMk cId="2279320564" sldId="560"/>
+            <ac:picMk id="5" creationId="{77EFD2CD-E234-52A1-28F0-23DD6EDC2473}"/>
+          </ac:picMkLst>
+        </pc:picChg>
+        <pc:picChg chg="add mod">
+          <ac:chgData name="Mohammed Fasha" userId="cc64f42d-a1a6-4f08-b97b-0c37f877119f" providerId="ADAL" clId="{534F862C-5423-415F-8625-CCE86B4944CE}" dt="2025-03-18T02:08:07.223" v="1284" actId="14100"/>
+          <ac:picMkLst>
+            <pc:docMk/>
+            <pc:sldMk cId="2279320564" sldId="560"/>
+            <ac:picMk id="1026" creationId="{D33EEC85-6378-500B-038C-970B7E6443A9}"/>
+          </ac:picMkLst>
+        </pc:picChg>
+      </pc:sldChg>
+      <pc:sldChg chg="addSp delSp modSp new mod">
+        <pc:chgData name="Mohammed Fasha" userId="cc64f42d-a1a6-4f08-b97b-0c37f877119f" providerId="ADAL" clId="{534F862C-5423-415F-8625-CCE86B4944CE}" dt="2025-03-18T02:15:54.293" v="1292" actId="21"/>
+        <pc:sldMkLst>
+          <pc:docMk/>
+          <pc:sldMk cId="3352254752" sldId="561"/>
+        </pc:sldMkLst>
+        <pc:spChg chg="del">
+          <ac:chgData name="Mohammed Fasha" userId="cc64f42d-a1a6-4f08-b97b-0c37f877119f" providerId="ADAL" clId="{534F862C-5423-415F-8625-CCE86B4944CE}" dt="2025-03-18T02:08:53.713" v="1287"/>
+          <ac:spMkLst>
+            <pc:docMk/>
+            <pc:sldMk cId="3352254752" sldId="561"/>
+            <ac:spMk id="3" creationId="{79E53D71-D1E7-4E71-0D3C-B59C707E3B63}"/>
+          </ac:spMkLst>
+        </pc:spChg>
+        <pc:spChg chg="add del mod">
+          <ac:chgData name="Mohammed Fasha" userId="cc64f42d-a1a6-4f08-b97b-0c37f877119f" providerId="ADAL" clId="{534F862C-5423-415F-8625-CCE86B4944CE}" dt="2025-03-18T02:15:54.293" v="1292" actId="21"/>
+          <ac:spMkLst>
+            <pc:docMk/>
+            <pc:sldMk cId="3352254752" sldId="561"/>
+            <ac:spMk id="4" creationId="{C630603E-F520-1578-58E8-4BE5AF6D7CED}"/>
+          </ac:spMkLst>
+        </pc:spChg>
+        <pc:spChg chg="add mod">
+          <ac:chgData name="Mohammed Fasha" userId="cc64f42d-a1a6-4f08-b97b-0c37f877119f" providerId="ADAL" clId="{534F862C-5423-415F-8625-CCE86B4944CE}" dt="2025-03-18T02:15:42.352" v="1290"/>
+          <ac:spMkLst>
+            <pc:docMk/>
+            <pc:sldMk cId="3352254752" sldId="561"/>
+            <ac:spMk id="5" creationId="{9CC1359C-4725-6F40-1E3C-0855EC65FA75}"/>
+          </ac:spMkLst>
+        </pc:spChg>
+        <pc:picChg chg="add del mod">
+          <ac:chgData name="Mohammed Fasha" userId="cc64f42d-a1a6-4f08-b97b-0c37f877119f" providerId="ADAL" clId="{534F862C-5423-415F-8625-CCE86B4944CE}" dt="2025-03-18T02:09:06.778" v="1288" actId="21"/>
+          <ac:picMkLst>
+            <pc:docMk/>
+            <pc:sldMk cId="3352254752" sldId="561"/>
+            <ac:picMk id="2050" creationId="{804C5AFC-2370-82B7-38A0-7C05C6C3769B}"/>
+          </ac:picMkLst>
+        </pc:picChg>
       </pc:sldChg>
     </pc:docChg>
   </pc:docChgLst>
@@ -1804,30 +1436,6 @@
           <pc:docMk/>
           <pc:sldMk cId="601496234" sldId="533"/>
         </pc:sldMkLst>
-        <pc:spChg chg="add del mod">
-          <ac:chgData name="Mohammed Fasha" userId="cc64f42d-a1a6-4f08-b97b-0c37f877119f" providerId="ADAL" clId="{C411E271-76BA-4F65-AAC3-462D3CC4567C}" dt="2025-03-16T06:38:37.457" v="55"/>
-          <ac:spMkLst>
-            <pc:docMk/>
-            <pc:sldMk cId="601496234" sldId="533"/>
-            <ac:spMk id="5" creationId="{4B36095E-A4BA-44E7-8F69-A775646D0956}"/>
-          </ac:spMkLst>
-        </pc:spChg>
-        <pc:spChg chg="add del">
-          <ac:chgData name="Mohammed Fasha" userId="cc64f42d-a1a6-4f08-b97b-0c37f877119f" providerId="ADAL" clId="{C411E271-76BA-4F65-AAC3-462D3CC4567C}" dt="2025-03-16T06:38:34.922" v="54"/>
-          <ac:spMkLst>
-            <pc:docMk/>
-            <pc:sldMk cId="601496234" sldId="533"/>
-            <ac:spMk id="6" creationId="{07137515-EE97-4896-8B5A-41231EAF77F7}"/>
-          </ac:spMkLst>
-        </pc:spChg>
-        <pc:spChg chg="add del mod">
-          <ac:chgData name="Mohammed Fasha" userId="cc64f42d-a1a6-4f08-b97b-0c37f877119f" providerId="ADAL" clId="{C411E271-76BA-4F65-AAC3-462D3CC4567C}" dt="2025-03-16T06:37:45.884" v="42"/>
-          <ac:spMkLst>
-            <pc:docMk/>
-            <pc:sldMk cId="601496234" sldId="533"/>
-            <ac:spMk id="7" creationId="{01B05A74-6BBD-41F5-92E5-4F4C2B1A9DBE}"/>
-          </ac:spMkLst>
-        </pc:spChg>
         <pc:spChg chg="add mod">
           <ac:chgData name="Mohammed Fasha" userId="cc64f42d-a1a6-4f08-b97b-0c37f877119f" providerId="ADAL" clId="{C411E271-76BA-4F65-AAC3-462D3CC4567C}" dt="2025-03-16T06:39:34.453" v="68" actId="12"/>
           <ac:spMkLst>
@@ -2031,7 +1639,7 @@
           <a:p>
             <a:fld id="{13BA03A4-B9F1-404C-8A74-B1AFD6480953}" type="datetimeFigureOut">
               <a:rPr lang="en-US" smtClean="0"/>
-              <a:t>3/16/2025</a:t>
+              <a:t>3/18/2025</a:t>
             </a:fld>
             <a:endParaRPr lang="en-US"/>
           </a:p>
@@ -2445,7 +2053,7 @@
           <a:p>
             <a:fld id="{0DB78E95-DE77-44D3-BDB9-E242948FB112}" type="datetimeFigureOut">
               <a:rPr lang="en-US" smtClean="0"/>
-              <a:t>3/16/2025</a:t>
+              <a:t>3/18/2025</a:t>
             </a:fld>
             <a:endParaRPr lang="en-US"/>
           </a:p>
@@ -2673,7 +2281,7 @@
           <a:p>
             <a:fld id="{0DB78E95-DE77-44D3-BDB9-E242948FB112}" type="datetimeFigureOut">
               <a:rPr lang="en-US" smtClean="0"/>
-              <a:t>3/16/2025</a:t>
+              <a:t>3/18/2025</a:t>
             </a:fld>
             <a:endParaRPr lang="en-US"/>
           </a:p>
@@ -2881,7 +2489,7 @@
           <a:p>
             <a:fld id="{0DB78E95-DE77-44D3-BDB9-E242948FB112}" type="datetimeFigureOut">
               <a:rPr lang="en-US" smtClean="0"/>
-              <a:t>3/16/2025</a:t>
+              <a:t>3/18/2025</a:t>
             </a:fld>
             <a:endParaRPr lang="en-US"/>
           </a:p>
@@ -3312,7 +2920,7 @@
           <a:p>
             <a:fld id="{0DB78E95-DE77-44D3-BDB9-E242948FB112}" type="datetimeFigureOut">
               <a:rPr lang="en-US" smtClean="0"/>
-              <a:t>3/16/2025</a:t>
+              <a:t>3/18/2025</a:t>
             </a:fld>
             <a:endParaRPr lang="en-US"/>
           </a:p>
@@ -3691,7 +3299,7 @@
           <a:p>
             <a:fld id="{0DB78E95-DE77-44D3-BDB9-E242948FB112}" type="datetimeFigureOut">
               <a:rPr lang="en-US" smtClean="0"/>
-              <a:t>3/16/2025</a:t>
+              <a:t>3/18/2025</a:t>
             </a:fld>
             <a:endParaRPr lang="en-US"/>
           </a:p>
@@ -4103,7 +3711,7 @@
           <a:p>
             <a:fld id="{0DB78E95-DE77-44D3-BDB9-E242948FB112}" type="datetimeFigureOut">
               <a:rPr lang="en-US" smtClean="0"/>
-              <a:t>3/16/2025</a:t>
+              <a:t>3/18/2025</a:t>
             </a:fld>
             <a:endParaRPr lang="en-US"/>
           </a:p>
@@ -4244,7 +3852,7 @@
           <a:p>
             <a:fld id="{0DB78E95-DE77-44D3-BDB9-E242948FB112}" type="datetimeFigureOut">
               <a:rPr lang="en-US" smtClean="0"/>
-              <a:t>3/16/2025</a:t>
+              <a:t>3/18/2025</a:t>
             </a:fld>
             <a:endParaRPr lang="en-US"/>
           </a:p>
@@ -4357,7 +3965,7 @@
           <a:p>
             <a:fld id="{0DB78E95-DE77-44D3-BDB9-E242948FB112}" type="datetimeFigureOut">
               <a:rPr lang="en-US" smtClean="0"/>
-              <a:t>3/16/2025</a:t>
+              <a:t>3/18/2025</a:t>
             </a:fld>
             <a:endParaRPr lang="en-US"/>
           </a:p>
@@ -4668,7 +4276,7 @@
           <a:p>
             <a:fld id="{0DB78E95-DE77-44D3-BDB9-E242948FB112}" type="datetimeFigureOut">
               <a:rPr lang="en-US" smtClean="0"/>
-              <a:t>3/16/2025</a:t>
+              <a:t>3/18/2025</a:t>
             </a:fld>
             <a:endParaRPr lang="en-US"/>
           </a:p>
@@ -4956,7 +4564,7 @@
           <a:p>
             <a:fld id="{0DB78E95-DE77-44D3-BDB9-E242948FB112}" type="datetimeFigureOut">
               <a:rPr lang="en-US" smtClean="0"/>
-              <a:t>3/16/2025</a:t>
+              <a:t>3/18/2025</a:t>
             </a:fld>
             <a:endParaRPr lang="en-US"/>
           </a:p>
@@ -5197,7 +4805,7 @@
           <a:p>
             <a:fld id="{0DB78E95-DE77-44D3-BDB9-E242948FB112}" type="datetimeFigureOut">
               <a:rPr lang="en-US" smtClean="0"/>
-              <a:t>3/16/2025</a:t>
+              <a:t>3/18/2025</a:t>
             </a:fld>
             <a:endParaRPr lang="en-US"/>
           </a:p>
@@ -5815,6 +5423,1519 @@
   <p:cSld>
     <p:spTree>
       <p:nvGrpSpPr>
+        <p:cNvPr id="1" name=""/>
+        <p:cNvGrpSpPr/>
+        <p:nvPr/>
+      </p:nvGrpSpPr>
+      <p:grpSpPr>
+        <a:xfrm>
+          <a:off x="0" y="0"/>
+          <a:ext cx="0" cy="0"/>
+          <a:chOff x="0" y="0"/>
+          <a:chExt cx="0" cy="0"/>
+        </a:xfrm>
+      </p:grpSpPr>
+      <p:sp>
+        <p:nvSpPr>
+          <p:cNvPr id="2" name="Title 1">
+            <a:extLst>
+              <a:ext uri="{FF2B5EF4-FFF2-40B4-BE49-F238E27FC236}">
+                <a16:creationId xmlns:a16="http://schemas.microsoft.com/office/drawing/2014/main" id="{D5521587-682C-AB8B-AEEC-95AEEF6B44B7}"/>
+              </a:ext>
+            </a:extLst>
+          </p:cNvPr>
+          <p:cNvSpPr>
+            <a:spLocks noGrp="1"/>
+          </p:cNvSpPr>
+          <p:nvPr>
+            <p:ph type="title"/>
+          </p:nvPr>
+        </p:nvSpPr>
+        <p:spPr/>
+        <p:txBody>
+          <a:bodyPr>
+            <a:normAutofit/>
+          </a:bodyPr>
+          <a:lstStyle/>
+          <a:p>
+            <a:r>
+              <a:rPr lang="en-US" dirty="0"/>
+              <a:t>Tokenize text using NLTK package</a:t>
+            </a:r>
+          </a:p>
+        </p:txBody>
+      </p:sp>
+      <p:sp>
+        <p:nvSpPr>
+          <p:cNvPr id="6" name="TextBox 5">
+            <a:extLst>
+              <a:ext uri="{FF2B5EF4-FFF2-40B4-BE49-F238E27FC236}">
+                <a16:creationId xmlns:a16="http://schemas.microsoft.com/office/drawing/2014/main" id="{1B5F427B-5A38-BC23-AAF5-9DB0E6087E63}"/>
+              </a:ext>
+            </a:extLst>
+          </p:cNvPr>
+          <p:cNvSpPr txBox="1"/>
+          <p:nvPr/>
+        </p:nvSpPr>
+        <p:spPr>
+          <a:xfrm>
+            <a:off x="982363" y="2526958"/>
+            <a:ext cx="10132540" cy="1543115"/>
+          </a:xfrm>
+          <a:prstGeom prst="rect">
+            <a:avLst/>
+          </a:prstGeom>
+          <a:noFill/>
+        </p:spPr>
+        <p:txBody>
+          <a:bodyPr wrap="square" rtlCol="0">
+            <a:spAutoFit/>
+          </a:bodyPr>
+          <a:lstStyle/>
+          <a:p>
+            <a:pPr>
+              <a:lnSpc>
+                <a:spcPts val="1425"/>
+              </a:lnSpc>
+              <a:buNone/>
+            </a:pPr>
+            <a:r>
+              <a:rPr lang="en-US" b="0" dirty="0">
+                <a:solidFill>
+                  <a:srgbClr val="0000FF"/>
+                </a:solidFill>
+                <a:effectLst/>
+                <a:latin typeface="Consolas" panose="020B0609020204030204" pitchFamily="49" charset="0"/>
+              </a:rPr>
+              <a:t>from</a:t>
+            </a:r>
+            <a:r>
+              <a:rPr lang="en-US" b="0" dirty="0">
+                <a:solidFill>
+                  <a:srgbClr val="000000"/>
+                </a:solidFill>
+                <a:effectLst/>
+                <a:latin typeface="Consolas" panose="020B0609020204030204" pitchFamily="49" charset="0"/>
+              </a:rPr>
+              <a:t> </a:t>
+            </a:r>
+            <a:r>
+              <a:rPr lang="en-US" b="0" dirty="0" err="1">
+                <a:solidFill>
+                  <a:srgbClr val="000000"/>
+                </a:solidFill>
+                <a:effectLst/>
+                <a:latin typeface="Consolas" panose="020B0609020204030204" pitchFamily="49" charset="0"/>
+              </a:rPr>
+              <a:t>nltk.tokenize</a:t>
+            </a:r>
+            <a:r>
+              <a:rPr lang="en-US" b="0" dirty="0">
+                <a:solidFill>
+                  <a:srgbClr val="000000"/>
+                </a:solidFill>
+                <a:effectLst/>
+                <a:latin typeface="Consolas" panose="020B0609020204030204" pitchFamily="49" charset="0"/>
+              </a:rPr>
+              <a:t> </a:t>
+            </a:r>
+            <a:r>
+              <a:rPr lang="en-US" b="0" dirty="0">
+                <a:solidFill>
+                  <a:srgbClr val="0000FF"/>
+                </a:solidFill>
+                <a:effectLst/>
+                <a:latin typeface="Consolas" panose="020B0609020204030204" pitchFamily="49" charset="0"/>
+              </a:rPr>
+              <a:t>import</a:t>
+            </a:r>
+            <a:r>
+              <a:rPr lang="en-US" b="0" dirty="0">
+                <a:solidFill>
+                  <a:srgbClr val="000000"/>
+                </a:solidFill>
+                <a:effectLst/>
+                <a:latin typeface="Consolas" panose="020B0609020204030204" pitchFamily="49" charset="0"/>
+              </a:rPr>
+              <a:t> </a:t>
+            </a:r>
+            <a:r>
+              <a:rPr lang="en-US" b="0" dirty="0" err="1">
+                <a:solidFill>
+                  <a:srgbClr val="000000"/>
+                </a:solidFill>
+                <a:effectLst/>
+                <a:latin typeface="Consolas" panose="020B0609020204030204" pitchFamily="49" charset="0"/>
+              </a:rPr>
+              <a:t>word_tokenize</a:t>
+            </a:r>
+            <a:endParaRPr lang="en-US" b="0" dirty="0">
+              <a:solidFill>
+                <a:srgbClr val="000000"/>
+              </a:solidFill>
+              <a:effectLst/>
+              <a:latin typeface="Consolas" panose="020B0609020204030204" pitchFamily="49" charset="0"/>
+            </a:endParaRPr>
+          </a:p>
+          <a:p>
+            <a:pPr>
+              <a:lnSpc>
+                <a:spcPts val="1425"/>
+              </a:lnSpc>
+              <a:buNone/>
+            </a:pPr>
+            <a:r>
+              <a:rPr lang="en-US" b="0" dirty="0">
+                <a:solidFill>
+                  <a:srgbClr val="008000"/>
+                </a:solidFill>
+                <a:effectLst/>
+                <a:latin typeface="Consolas" panose="020B0609020204030204" pitchFamily="49" charset="0"/>
+              </a:rPr>
+              <a:t>#punkt is a pretrained tokenization model used for splitting text into sentences and words.</a:t>
+            </a:r>
+            <a:endParaRPr lang="en-US" b="0" dirty="0">
+              <a:solidFill>
+                <a:srgbClr val="000000"/>
+              </a:solidFill>
+              <a:effectLst/>
+              <a:latin typeface="Consolas" panose="020B0609020204030204" pitchFamily="49" charset="0"/>
+            </a:endParaRPr>
+          </a:p>
+          <a:p>
+            <a:pPr>
+              <a:lnSpc>
+                <a:spcPts val="1425"/>
+              </a:lnSpc>
+              <a:buNone/>
+            </a:pPr>
+            <a:r>
+              <a:rPr lang="en-US" b="0" dirty="0" err="1">
+                <a:solidFill>
+                  <a:srgbClr val="000000"/>
+                </a:solidFill>
+                <a:effectLst/>
+                <a:latin typeface="Consolas" panose="020B0609020204030204" pitchFamily="49" charset="0"/>
+              </a:rPr>
+              <a:t>nltk.download</a:t>
+            </a:r>
+            <a:r>
+              <a:rPr lang="en-US" b="0" dirty="0">
+                <a:solidFill>
+                  <a:srgbClr val="000000"/>
+                </a:solidFill>
+                <a:effectLst/>
+                <a:latin typeface="Consolas" panose="020B0609020204030204" pitchFamily="49" charset="0"/>
+              </a:rPr>
+              <a:t>(</a:t>
+            </a:r>
+            <a:r>
+              <a:rPr lang="en-US" b="0" dirty="0">
+                <a:solidFill>
+                  <a:srgbClr val="A31515"/>
+                </a:solidFill>
+                <a:effectLst/>
+                <a:latin typeface="Consolas" panose="020B0609020204030204" pitchFamily="49" charset="0"/>
+              </a:rPr>
+              <a:t>'</a:t>
+            </a:r>
+            <a:r>
+              <a:rPr lang="en-US" b="0" dirty="0" err="1">
+                <a:solidFill>
+                  <a:srgbClr val="A31515"/>
+                </a:solidFill>
+                <a:effectLst/>
+                <a:latin typeface="Consolas" panose="020B0609020204030204" pitchFamily="49" charset="0"/>
+              </a:rPr>
+              <a:t>punkt</a:t>
+            </a:r>
+            <a:r>
+              <a:rPr lang="en-US" b="0" dirty="0">
+                <a:solidFill>
+                  <a:srgbClr val="A31515"/>
+                </a:solidFill>
+                <a:effectLst/>
+                <a:latin typeface="Consolas" panose="020B0609020204030204" pitchFamily="49" charset="0"/>
+              </a:rPr>
+              <a:t>'</a:t>
+            </a:r>
+            <a:r>
+              <a:rPr lang="en-US" b="0" dirty="0">
+                <a:solidFill>
+                  <a:srgbClr val="000000"/>
+                </a:solidFill>
+                <a:effectLst/>
+                <a:latin typeface="Consolas" panose="020B0609020204030204" pitchFamily="49" charset="0"/>
+              </a:rPr>
+              <a:t>)</a:t>
+            </a:r>
+          </a:p>
+          <a:p>
+            <a:pPr>
+              <a:lnSpc>
+                <a:spcPts val="1425"/>
+              </a:lnSpc>
+              <a:buNone/>
+            </a:pPr>
+            <a:br>
+              <a:rPr lang="en-US" b="0" dirty="0">
+                <a:solidFill>
+                  <a:srgbClr val="000000"/>
+                </a:solidFill>
+                <a:effectLst/>
+                <a:latin typeface="Consolas" panose="020B0609020204030204" pitchFamily="49" charset="0"/>
+              </a:rPr>
+            </a:br>
+            <a:r>
+              <a:rPr lang="en-US" b="0" dirty="0">
+                <a:solidFill>
+                  <a:srgbClr val="000000"/>
+                </a:solidFill>
+                <a:effectLst/>
+                <a:latin typeface="Consolas" panose="020B0609020204030204" pitchFamily="49" charset="0"/>
+              </a:rPr>
+              <a:t>sentence = </a:t>
+            </a:r>
+            <a:r>
+              <a:rPr lang="en-US" b="0" dirty="0">
+                <a:solidFill>
+                  <a:srgbClr val="A31515"/>
+                </a:solidFill>
+                <a:effectLst/>
+                <a:latin typeface="Consolas" panose="020B0609020204030204" pitchFamily="49" charset="0"/>
+              </a:rPr>
+              <a:t>"Large language models are revolutionizing business applications."</a:t>
+            </a:r>
+            <a:endParaRPr lang="en-US" b="0" dirty="0">
+              <a:solidFill>
+                <a:srgbClr val="000000"/>
+              </a:solidFill>
+              <a:effectLst/>
+              <a:latin typeface="Consolas" panose="020B0609020204030204" pitchFamily="49" charset="0"/>
+            </a:endParaRPr>
+          </a:p>
+          <a:p>
+            <a:pPr>
+              <a:lnSpc>
+                <a:spcPts val="1425"/>
+              </a:lnSpc>
+              <a:buNone/>
+            </a:pPr>
+            <a:r>
+              <a:rPr lang="en-US" b="0" dirty="0">
+                <a:solidFill>
+                  <a:srgbClr val="000000"/>
+                </a:solidFill>
+                <a:effectLst/>
+                <a:latin typeface="Consolas" panose="020B0609020204030204" pitchFamily="49" charset="0"/>
+              </a:rPr>
+              <a:t>tokens = </a:t>
+            </a:r>
+            <a:r>
+              <a:rPr lang="en-US" b="0" dirty="0" err="1">
+                <a:solidFill>
+                  <a:srgbClr val="000000"/>
+                </a:solidFill>
+                <a:effectLst/>
+                <a:latin typeface="Consolas" panose="020B0609020204030204" pitchFamily="49" charset="0"/>
+              </a:rPr>
+              <a:t>word_tokenize</a:t>
+            </a:r>
+            <a:r>
+              <a:rPr lang="en-US" b="0" dirty="0">
+                <a:solidFill>
+                  <a:srgbClr val="000000"/>
+                </a:solidFill>
+                <a:effectLst/>
+                <a:latin typeface="Consolas" panose="020B0609020204030204" pitchFamily="49" charset="0"/>
+              </a:rPr>
+              <a:t>(sentence)</a:t>
+            </a:r>
+          </a:p>
+          <a:p>
+            <a:pPr>
+              <a:lnSpc>
+                <a:spcPts val="1425"/>
+              </a:lnSpc>
+            </a:pPr>
+            <a:r>
+              <a:rPr lang="en-US" b="0" dirty="0">
+                <a:solidFill>
+                  <a:srgbClr val="000000"/>
+                </a:solidFill>
+                <a:effectLst/>
+                <a:latin typeface="Consolas" panose="020B0609020204030204" pitchFamily="49" charset="0"/>
+              </a:rPr>
+              <a:t>print(tokens)</a:t>
+            </a:r>
+          </a:p>
+        </p:txBody>
+      </p:sp>
+      <p:sp>
+        <p:nvSpPr>
+          <p:cNvPr id="11" name="TextBox 10">
+            <a:extLst>
+              <a:ext uri="{FF2B5EF4-FFF2-40B4-BE49-F238E27FC236}">
+                <a16:creationId xmlns:a16="http://schemas.microsoft.com/office/drawing/2014/main" id="{6E835F34-494B-6B04-2CA4-3234ED3663B0}"/>
+              </a:ext>
+            </a:extLst>
+          </p:cNvPr>
+          <p:cNvSpPr txBox="1"/>
+          <p:nvPr/>
+        </p:nvSpPr>
+        <p:spPr>
+          <a:xfrm>
+            <a:off x="982363" y="4630671"/>
+            <a:ext cx="9698510" cy="1477328"/>
+          </a:xfrm>
+          <a:prstGeom prst="rect">
+            <a:avLst/>
+          </a:prstGeom>
+          <a:noFill/>
+        </p:spPr>
+        <p:txBody>
+          <a:bodyPr wrap="square">
+            <a:spAutoFit/>
+          </a:bodyPr>
+          <a:lstStyle/>
+          <a:p>
+            <a:pPr algn="l">
+              <a:buNone/>
+            </a:pPr>
+            <a:r>
+              <a:rPr lang="en-US" b="0" i="0" dirty="0">
+                <a:solidFill>
+                  <a:srgbClr val="000000"/>
+                </a:solidFill>
+                <a:effectLst/>
+                <a:latin typeface="Consolas" panose="020B0609020204030204" pitchFamily="49" charset="0"/>
+              </a:rPr>
+              <a:t>Output:</a:t>
+            </a:r>
+          </a:p>
+          <a:p>
+            <a:pPr algn="l">
+              <a:buNone/>
+            </a:pPr>
+            <a:r>
+              <a:rPr lang="en-US" b="0" i="0" dirty="0">
+                <a:solidFill>
+                  <a:srgbClr val="000000"/>
+                </a:solidFill>
+                <a:effectLst/>
+                <a:latin typeface="Consolas" panose="020B0609020204030204" pitchFamily="49" charset="0"/>
+              </a:rPr>
+              <a:t>['Large', 'language', 'models', 'are', 'revolutionizing', 'business', 'applications', '.'] </a:t>
+            </a:r>
+          </a:p>
+          <a:p>
+            <a:pPr algn="l"/>
+            <a:r>
+              <a:rPr lang="en-US" b="0" i="0" dirty="0">
+                <a:solidFill>
+                  <a:srgbClr val="000000"/>
+                </a:solidFill>
+                <a:effectLst/>
+                <a:latin typeface="Consolas" panose="020B0609020204030204" pitchFamily="49" charset="0"/>
+              </a:rPr>
+              <a:t>[</a:t>
+            </a:r>
+            <a:r>
+              <a:rPr lang="en-US" b="0" i="0" dirty="0" err="1">
+                <a:solidFill>
+                  <a:srgbClr val="000000"/>
+                </a:solidFill>
+                <a:effectLst/>
+                <a:latin typeface="Consolas" panose="020B0609020204030204" pitchFamily="49" charset="0"/>
+              </a:rPr>
+              <a:t>nltk_data</a:t>
+            </a:r>
+            <a:r>
+              <a:rPr lang="en-US" b="0" i="0" dirty="0">
+                <a:solidFill>
+                  <a:srgbClr val="000000"/>
+                </a:solidFill>
+                <a:effectLst/>
+                <a:latin typeface="Consolas" panose="020B0609020204030204" pitchFamily="49" charset="0"/>
+              </a:rPr>
+              <a:t>] Downloading package </a:t>
+            </a:r>
+            <a:r>
+              <a:rPr lang="en-US" b="0" i="0" dirty="0" err="1">
+                <a:solidFill>
+                  <a:srgbClr val="000000"/>
+                </a:solidFill>
+                <a:effectLst/>
+                <a:latin typeface="Consolas" panose="020B0609020204030204" pitchFamily="49" charset="0"/>
+              </a:rPr>
+              <a:t>punkt</a:t>
+            </a:r>
+            <a:r>
+              <a:rPr lang="en-US" b="0" i="0" dirty="0">
+                <a:solidFill>
+                  <a:srgbClr val="000000"/>
+                </a:solidFill>
+                <a:effectLst/>
+                <a:latin typeface="Consolas" panose="020B0609020204030204" pitchFamily="49" charset="0"/>
+              </a:rPr>
+              <a:t> to /home/me/</a:t>
+            </a:r>
+            <a:r>
+              <a:rPr lang="en-US" b="0" i="0" dirty="0" err="1">
+                <a:solidFill>
+                  <a:srgbClr val="000000"/>
+                </a:solidFill>
+                <a:effectLst/>
+                <a:latin typeface="Consolas" panose="020B0609020204030204" pitchFamily="49" charset="0"/>
+              </a:rPr>
+              <a:t>nltk_data</a:t>
+            </a:r>
+            <a:r>
+              <a:rPr lang="en-US" b="0" i="0" dirty="0">
+                <a:solidFill>
+                  <a:srgbClr val="000000"/>
+                </a:solidFill>
+                <a:effectLst/>
+                <a:latin typeface="Consolas" panose="020B0609020204030204" pitchFamily="49" charset="0"/>
+              </a:rPr>
+              <a:t>... [</a:t>
+            </a:r>
+            <a:r>
+              <a:rPr lang="en-US" b="0" i="0" dirty="0" err="1">
+                <a:solidFill>
+                  <a:srgbClr val="000000"/>
+                </a:solidFill>
+                <a:effectLst/>
+                <a:latin typeface="Consolas" panose="020B0609020204030204" pitchFamily="49" charset="0"/>
+              </a:rPr>
+              <a:t>nltk_data</a:t>
+            </a:r>
+            <a:r>
+              <a:rPr lang="en-US" b="0" i="0" dirty="0">
+                <a:solidFill>
+                  <a:srgbClr val="000000"/>
+                </a:solidFill>
+                <a:effectLst/>
+                <a:latin typeface="Consolas" panose="020B0609020204030204" pitchFamily="49" charset="0"/>
+              </a:rPr>
+              <a:t>] Package </a:t>
+            </a:r>
+            <a:r>
+              <a:rPr lang="en-US" b="0" i="0" dirty="0" err="1">
+                <a:solidFill>
+                  <a:srgbClr val="000000"/>
+                </a:solidFill>
+                <a:effectLst/>
+                <a:latin typeface="Consolas" panose="020B0609020204030204" pitchFamily="49" charset="0"/>
+              </a:rPr>
+              <a:t>punkt</a:t>
+            </a:r>
+            <a:r>
+              <a:rPr lang="en-US" b="0" i="0" dirty="0">
+                <a:solidFill>
+                  <a:srgbClr val="000000"/>
+                </a:solidFill>
+                <a:effectLst/>
+                <a:latin typeface="Consolas" panose="020B0609020204030204" pitchFamily="49" charset="0"/>
+              </a:rPr>
+              <a:t> is already up-to-date!</a:t>
+            </a:r>
+          </a:p>
+        </p:txBody>
+      </p:sp>
+      <p:sp>
+        <p:nvSpPr>
+          <p:cNvPr id="5" name="Content Placeholder 2">
+            <a:extLst>
+              <a:ext uri="{FF2B5EF4-FFF2-40B4-BE49-F238E27FC236}">
+                <a16:creationId xmlns:a16="http://schemas.microsoft.com/office/drawing/2014/main" id="{276D0FCF-4391-4D56-854A-F184802E65F6}"/>
+              </a:ext>
+            </a:extLst>
+          </p:cNvPr>
+          <p:cNvSpPr txBox="1">
+            <a:spLocks/>
+          </p:cNvSpPr>
+          <p:nvPr/>
+        </p:nvSpPr>
+        <p:spPr>
+          <a:xfrm>
+            <a:off x="10162954" y="6435843"/>
+            <a:ext cx="1650788" cy="399925"/>
+          </a:xfrm>
+          <a:prstGeom prst="rect">
+            <a:avLst/>
+          </a:prstGeom>
+        </p:spPr>
+        <p:txBody>
+          <a:bodyPr vert="horz" lIns="91440" tIns="45720" rIns="91440" bIns="45720" rtlCol="0">
+            <a:normAutofit/>
+          </a:bodyPr>
+          <a:lstStyle>
+            <a:lvl1pPr marL="228600" indent="-228600" algn="l" defTabSz="914400" rtl="0" eaLnBrk="1" latinLnBrk="0" hangingPunct="1">
+              <a:lnSpc>
+                <a:spcPct val="90000"/>
+              </a:lnSpc>
+              <a:spcBef>
+                <a:spcPts val="1000"/>
+              </a:spcBef>
+              <a:buFont typeface="Arial" panose="020B0604020202020204" pitchFamily="34" charset="0"/>
+              <a:buChar char="•"/>
+              <a:defRPr sz="2400" kern="1200">
+                <a:solidFill>
+                  <a:schemeClr val="tx1"/>
+                </a:solidFill>
+                <a:latin typeface="+mn-lt"/>
+                <a:ea typeface="+mn-ea"/>
+                <a:cs typeface="+mn-cs"/>
+              </a:defRPr>
+            </a:lvl1pPr>
+            <a:lvl2pPr marL="685800" indent="-228600" algn="l" defTabSz="914400" rtl="0" eaLnBrk="1" latinLnBrk="0" hangingPunct="1">
+              <a:lnSpc>
+                <a:spcPct val="90000"/>
+              </a:lnSpc>
+              <a:spcBef>
+                <a:spcPts val="500"/>
+              </a:spcBef>
+              <a:buFont typeface="Arial" panose="020B0604020202020204" pitchFamily="34" charset="0"/>
+              <a:buChar char="•"/>
+              <a:defRPr sz="2000" kern="1200">
+                <a:solidFill>
+                  <a:schemeClr val="tx1"/>
+                </a:solidFill>
+                <a:latin typeface="+mn-lt"/>
+                <a:ea typeface="+mn-ea"/>
+                <a:cs typeface="+mn-cs"/>
+              </a:defRPr>
+            </a:lvl2pPr>
+            <a:lvl3pPr marL="1143000" indent="-228600" algn="l" defTabSz="914400" rtl="0" eaLnBrk="1" latinLnBrk="0" hangingPunct="1">
+              <a:lnSpc>
+                <a:spcPct val="90000"/>
+              </a:lnSpc>
+              <a:spcBef>
+                <a:spcPts val="500"/>
+              </a:spcBef>
+              <a:buFont typeface="Arial" panose="020B0604020202020204" pitchFamily="34" charset="0"/>
+              <a:buChar char="•"/>
+              <a:defRPr sz="1800" kern="1200">
+                <a:solidFill>
+                  <a:schemeClr val="tx1"/>
+                </a:solidFill>
+                <a:latin typeface="+mn-lt"/>
+                <a:ea typeface="+mn-ea"/>
+                <a:cs typeface="+mn-cs"/>
+              </a:defRPr>
+            </a:lvl3pPr>
+            <a:lvl4pPr marL="1600200" indent="-228600" algn="l" defTabSz="914400" rtl="0" eaLnBrk="1" latinLnBrk="0" hangingPunct="1">
+              <a:lnSpc>
+                <a:spcPct val="90000"/>
+              </a:lnSpc>
+              <a:spcBef>
+                <a:spcPts val="500"/>
+              </a:spcBef>
+              <a:buFont typeface="Arial" panose="020B0604020202020204" pitchFamily="34" charset="0"/>
+              <a:buChar char="•"/>
+              <a:defRPr sz="1600" kern="1200">
+                <a:solidFill>
+                  <a:schemeClr val="tx1"/>
+                </a:solidFill>
+                <a:latin typeface="+mn-lt"/>
+                <a:ea typeface="+mn-ea"/>
+                <a:cs typeface="+mn-cs"/>
+              </a:defRPr>
+            </a:lvl4pPr>
+            <a:lvl5pPr marL="2057400" indent="-228600" algn="l" defTabSz="914400" rtl="0" eaLnBrk="1" latinLnBrk="0" hangingPunct="1">
+              <a:lnSpc>
+                <a:spcPct val="90000"/>
+              </a:lnSpc>
+              <a:spcBef>
+                <a:spcPts val="500"/>
+              </a:spcBef>
+              <a:buFont typeface="Arial" panose="020B0604020202020204" pitchFamily="34" charset="0"/>
+              <a:buChar char="•"/>
+              <a:defRPr sz="1600" kern="1200">
+                <a:solidFill>
+                  <a:schemeClr val="tx1"/>
+                </a:solidFill>
+                <a:latin typeface="+mn-lt"/>
+                <a:ea typeface="+mn-ea"/>
+                <a:cs typeface="+mn-cs"/>
+              </a:defRPr>
+            </a:lvl5pPr>
+            <a:lvl6pPr marL="2514600" indent="-228600" algn="l" defTabSz="914400" rtl="0" eaLnBrk="1" latinLnBrk="0" hangingPunct="1">
+              <a:lnSpc>
+                <a:spcPct val="90000"/>
+              </a:lnSpc>
+              <a:spcBef>
+                <a:spcPts val="500"/>
+              </a:spcBef>
+              <a:buFont typeface="Arial" panose="020B0604020202020204" pitchFamily="34" charset="0"/>
+              <a:buChar char="•"/>
+              <a:defRPr sz="1800" kern="1200">
+                <a:solidFill>
+                  <a:schemeClr val="tx1"/>
+                </a:solidFill>
+                <a:latin typeface="+mn-lt"/>
+                <a:ea typeface="+mn-ea"/>
+                <a:cs typeface="+mn-cs"/>
+              </a:defRPr>
+            </a:lvl6pPr>
+            <a:lvl7pPr marL="2971800" indent="-228600" algn="l" defTabSz="914400" rtl="0" eaLnBrk="1" latinLnBrk="0" hangingPunct="1">
+              <a:lnSpc>
+                <a:spcPct val="90000"/>
+              </a:lnSpc>
+              <a:spcBef>
+                <a:spcPts val="500"/>
+              </a:spcBef>
+              <a:buFont typeface="Arial" panose="020B0604020202020204" pitchFamily="34" charset="0"/>
+              <a:buChar char="•"/>
+              <a:defRPr sz="1800" kern="1200">
+                <a:solidFill>
+                  <a:schemeClr val="tx1"/>
+                </a:solidFill>
+                <a:latin typeface="+mn-lt"/>
+                <a:ea typeface="+mn-ea"/>
+                <a:cs typeface="+mn-cs"/>
+              </a:defRPr>
+            </a:lvl7pPr>
+            <a:lvl8pPr marL="3429000" indent="-228600" algn="l" defTabSz="914400" rtl="0" eaLnBrk="1" latinLnBrk="0" hangingPunct="1">
+              <a:lnSpc>
+                <a:spcPct val="90000"/>
+              </a:lnSpc>
+              <a:spcBef>
+                <a:spcPts val="500"/>
+              </a:spcBef>
+              <a:buFont typeface="Arial" panose="020B0604020202020204" pitchFamily="34" charset="0"/>
+              <a:buChar char="•"/>
+              <a:defRPr sz="1800" kern="1200">
+                <a:solidFill>
+                  <a:schemeClr val="tx1"/>
+                </a:solidFill>
+                <a:latin typeface="+mn-lt"/>
+                <a:ea typeface="+mn-ea"/>
+                <a:cs typeface="+mn-cs"/>
+              </a:defRPr>
+            </a:lvl8pPr>
+            <a:lvl9pPr marL="3886200" indent="-228600" algn="l" defTabSz="914400" rtl="0" eaLnBrk="1" latinLnBrk="0" hangingPunct="1">
+              <a:lnSpc>
+                <a:spcPct val="90000"/>
+              </a:lnSpc>
+              <a:spcBef>
+                <a:spcPts val="500"/>
+              </a:spcBef>
+              <a:buFont typeface="Arial" panose="020B0604020202020204" pitchFamily="34" charset="0"/>
+              <a:buChar char="•"/>
+              <a:defRPr sz="1800" kern="1200">
+                <a:solidFill>
+                  <a:schemeClr val="tx1"/>
+                </a:solidFill>
+                <a:latin typeface="+mn-lt"/>
+                <a:ea typeface="+mn-ea"/>
+                <a:cs typeface="+mn-cs"/>
+              </a:defRPr>
+            </a:lvl9pPr>
+          </a:lstStyle>
+          <a:p>
+            <a:pPr marL="0" indent="0">
+              <a:buNone/>
+            </a:pPr>
+            <a:r>
+              <a:rPr lang="en-US" sz="1400" dirty="0">
+                <a:solidFill>
+                  <a:srgbClr val="0070C0"/>
+                </a:solidFill>
+              </a:rPr>
+              <a:t>Click to Open Code</a:t>
+            </a:r>
+          </a:p>
+        </p:txBody>
+      </p:sp>
+      <p:pic>
+        <p:nvPicPr>
+          <p:cNvPr id="7" name="Graphic 6">
+            <a:hlinkClick r:id="rId2"/>
+            <a:extLst>
+              <a:ext uri="{FF2B5EF4-FFF2-40B4-BE49-F238E27FC236}">
+                <a16:creationId xmlns:a16="http://schemas.microsoft.com/office/drawing/2014/main" id="{DC2CF0F7-2D5E-4690-AF02-D9A372D347F3}"/>
+              </a:ext>
+            </a:extLst>
+          </p:cNvPr>
+          <p:cNvPicPr>
+            <a:picLocks noChangeAspect="1"/>
+          </p:cNvPicPr>
+          <p:nvPr/>
+        </p:nvPicPr>
+        <p:blipFill>
+          <a:blip r:embed="rId3">
+            <a:extLst>
+              <a:ext uri="{96DAC541-7B7A-43D3-8B79-37D633B846F1}">
+                <asvg:svgBlip xmlns:asvg="http://schemas.microsoft.com/office/drawing/2016/SVG/main" r:embed="rId4"/>
+              </a:ext>
+            </a:extLst>
+          </a:blip>
+          <a:stretch>
+            <a:fillRect/>
+          </a:stretch>
+        </p:blipFill>
+        <p:spPr>
+          <a:xfrm>
+            <a:off x="10431136" y="6231200"/>
+            <a:ext cx="1114425" cy="190500"/>
+          </a:xfrm>
+          <a:prstGeom prst="rect">
+            <a:avLst/>
+          </a:prstGeom>
+        </p:spPr>
+      </p:pic>
+    </p:spTree>
+    <p:extLst>
+      <p:ext uri="{BB962C8B-B14F-4D97-AF65-F5344CB8AC3E}">
+        <p14:creationId xmlns:p14="http://schemas.microsoft.com/office/powerpoint/2010/main" val="3162735116"/>
+      </p:ext>
+    </p:extLst>
+  </p:cSld>
+  <p:clrMapOvr>
+    <a:masterClrMapping/>
+  </p:clrMapOvr>
+</p:sld>
+</file>
+
+<file path=ppt/slides/slide11.xml><?xml version="1.0" encoding="utf-8"?>
+<p:sld xmlns:a="http://schemas.openxmlformats.org/drawingml/2006/main" xmlns:r="http://schemas.openxmlformats.org/officeDocument/2006/relationships" xmlns:p="http://schemas.openxmlformats.org/presentationml/2006/main">
+  <p:cSld>
+    <p:spTree>
+      <p:nvGrpSpPr>
+        <p:cNvPr id="1" name=""/>
+        <p:cNvGrpSpPr/>
+        <p:nvPr/>
+      </p:nvGrpSpPr>
+      <p:grpSpPr>
+        <a:xfrm>
+          <a:off x="0" y="0"/>
+          <a:ext cx="0" cy="0"/>
+          <a:chOff x="0" y="0"/>
+          <a:chExt cx="0" cy="0"/>
+        </a:xfrm>
+      </p:grpSpPr>
+      <p:sp>
+        <p:nvSpPr>
+          <p:cNvPr id="2" name="Title 1">
+            <a:extLst>
+              <a:ext uri="{FF2B5EF4-FFF2-40B4-BE49-F238E27FC236}">
+                <a16:creationId xmlns:a16="http://schemas.microsoft.com/office/drawing/2014/main" id="{91029C9F-0A38-A846-9AF9-7AA426997374}"/>
+              </a:ext>
+            </a:extLst>
+          </p:cNvPr>
+          <p:cNvSpPr>
+            <a:spLocks noGrp="1"/>
+          </p:cNvSpPr>
+          <p:nvPr>
+            <p:ph type="title"/>
+          </p:nvPr>
+        </p:nvSpPr>
+        <p:spPr/>
+        <p:txBody>
+          <a:bodyPr/>
+          <a:lstStyle/>
+          <a:p>
+            <a:r>
+              <a:rPr lang="en-US" dirty="0"/>
+              <a:t>Normalization</a:t>
+            </a:r>
+          </a:p>
+        </p:txBody>
+      </p:sp>
+      <p:sp>
+        <p:nvSpPr>
+          <p:cNvPr id="3" name="Content Placeholder 2">
+            <a:extLst>
+              <a:ext uri="{FF2B5EF4-FFF2-40B4-BE49-F238E27FC236}">
+                <a16:creationId xmlns:a16="http://schemas.microsoft.com/office/drawing/2014/main" id="{A33A7CDC-7FBB-C0C1-952D-4A7F6B5C8037}"/>
+              </a:ext>
+            </a:extLst>
+          </p:cNvPr>
+          <p:cNvSpPr>
+            <a:spLocks noGrp="1"/>
+          </p:cNvSpPr>
+          <p:nvPr>
+            <p:ph idx="1"/>
+          </p:nvPr>
+        </p:nvSpPr>
+        <p:spPr>
+          <a:xfrm>
+            <a:off x="838200" y="1706008"/>
+            <a:ext cx="10515600" cy="820950"/>
+          </a:xfrm>
+        </p:spPr>
+        <p:txBody>
+          <a:bodyPr/>
+          <a:lstStyle/>
+          <a:p>
+            <a:r>
+              <a:rPr lang="en-US" dirty="0"/>
+              <a:t>Converting text to a standard form to reduce variability:</a:t>
+            </a:r>
+          </a:p>
+        </p:txBody>
+      </p:sp>
+      <p:sp>
+        <p:nvSpPr>
+          <p:cNvPr id="4" name="TextBox 3">
+            <a:extLst>
+              <a:ext uri="{FF2B5EF4-FFF2-40B4-BE49-F238E27FC236}">
+                <a16:creationId xmlns:a16="http://schemas.microsoft.com/office/drawing/2014/main" id="{DF4240B0-0DC1-0861-78F7-C2EDD932B078}"/>
+              </a:ext>
+            </a:extLst>
+          </p:cNvPr>
+          <p:cNvSpPr txBox="1"/>
+          <p:nvPr/>
+        </p:nvSpPr>
+        <p:spPr>
+          <a:xfrm>
+            <a:off x="1241853" y="2526958"/>
+            <a:ext cx="10225217" cy="1543115"/>
+          </a:xfrm>
+          <a:prstGeom prst="rect">
+            <a:avLst/>
+          </a:prstGeom>
+          <a:noFill/>
+        </p:spPr>
+        <p:txBody>
+          <a:bodyPr wrap="square" rtlCol="0">
+            <a:spAutoFit/>
+          </a:bodyPr>
+          <a:lstStyle/>
+          <a:p>
+            <a:pPr>
+              <a:lnSpc>
+                <a:spcPts val="1425"/>
+              </a:lnSpc>
+              <a:buNone/>
+            </a:pPr>
+            <a:r>
+              <a:rPr lang="en-US" b="0" dirty="0">
+                <a:solidFill>
+                  <a:srgbClr val="008000"/>
+                </a:solidFill>
+                <a:effectLst/>
+                <a:latin typeface="Consolas" panose="020B0609020204030204" pitchFamily="49" charset="0"/>
+              </a:rPr>
+              <a:t># Lowercasing</a:t>
+            </a:r>
+            <a:endParaRPr lang="en-US" b="0" dirty="0">
+              <a:solidFill>
+                <a:srgbClr val="000000"/>
+              </a:solidFill>
+              <a:effectLst/>
+              <a:latin typeface="Consolas" panose="020B0609020204030204" pitchFamily="49" charset="0"/>
+            </a:endParaRPr>
+          </a:p>
+          <a:p>
+            <a:pPr>
+              <a:lnSpc>
+                <a:spcPts val="1425"/>
+              </a:lnSpc>
+              <a:buNone/>
+            </a:pPr>
+            <a:r>
+              <a:rPr lang="en-US" b="0" dirty="0" err="1">
+                <a:solidFill>
+                  <a:srgbClr val="000000"/>
+                </a:solidFill>
+                <a:effectLst/>
+                <a:latin typeface="Consolas" panose="020B0609020204030204" pitchFamily="49" charset="0"/>
+              </a:rPr>
+              <a:t>normalized_tokens</a:t>
+            </a:r>
+            <a:r>
+              <a:rPr lang="en-US" b="0" dirty="0">
+                <a:solidFill>
+                  <a:srgbClr val="000000"/>
+                </a:solidFill>
+                <a:effectLst/>
+                <a:latin typeface="Consolas" panose="020B0609020204030204" pitchFamily="49" charset="0"/>
+              </a:rPr>
+              <a:t> = [</a:t>
+            </a:r>
+            <a:r>
+              <a:rPr lang="en-US" b="0" dirty="0" err="1">
+                <a:solidFill>
+                  <a:srgbClr val="000000"/>
+                </a:solidFill>
+                <a:effectLst/>
+                <a:latin typeface="Consolas" panose="020B0609020204030204" pitchFamily="49" charset="0"/>
+              </a:rPr>
+              <a:t>token.lower</a:t>
+            </a:r>
+            <a:r>
+              <a:rPr lang="en-US" b="0" dirty="0">
+                <a:solidFill>
+                  <a:srgbClr val="000000"/>
+                </a:solidFill>
+                <a:effectLst/>
+                <a:latin typeface="Consolas" panose="020B0609020204030204" pitchFamily="49" charset="0"/>
+              </a:rPr>
+              <a:t>() </a:t>
+            </a:r>
+            <a:r>
+              <a:rPr lang="en-US" b="0" dirty="0">
+                <a:solidFill>
+                  <a:srgbClr val="0000FF"/>
+                </a:solidFill>
+                <a:effectLst/>
+                <a:latin typeface="Consolas" panose="020B0609020204030204" pitchFamily="49" charset="0"/>
+              </a:rPr>
+              <a:t>for</a:t>
+            </a:r>
+            <a:r>
+              <a:rPr lang="en-US" b="0" dirty="0">
+                <a:solidFill>
+                  <a:srgbClr val="000000"/>
+                </a:solidFill>
+                <a:effectLst/>
+                <a:latin typeface="Consolas" panose="020B0609020204030204" pitchFamily="49" charset="0"/>
+              </a:rPr>
+              <a:t> token </a:t>
+            </a:r>
+            <a:r>
+              <a:rPr lang="en-US" b="0" dirty="0">
+                <a:solidFill>
+                  <a:srgbClr val="0000FF"/>
+                </a:solidFill>
+                <a:effectLst/>
+                <a:latin typeface="Consolas" panose="020B0609020204030204" pitchFamily="49" charset="0"/>
+              </a:rPr>
+              <a:t>in</a:t>
+            </a:r>
+            <a:r>
+              <a:rPr lang="en-US" b="0" dirty="0">
+                <a:solidFill>
+                  <a:srgbClr val="000000"/>
+                </a:solidFill>
+                <a:effectLst/>
+                <a:latin typeface="Consolas" panose="020B0609020204030204" pitchFamily="49" charset="0"/>
+              </a:rPr>
+              <a:t> tokens]</a:t>
+            </a:r>
+          </a:p>
+          <a:p>
+            <a:pPr>
+              <a:lnSpc>
+                <a:spcPts val="1425"/>
+              </a:lnSpc>
+              <a:buNone/>
+            </a:pPr>
+            <a:r>
+              <a:rPr lang="en-US" b="0" dirty="0">
+                <a:solidFill>
+                  <a:srgbClr val="000000"/>
+                </a:solidFill>
+                <a:effectLst/>
+                <a:latin typeface="Consolas" panose="020B0609020204030204" pitchFamily="49" charset="0"/>
+              </a:rPr>
+              <a:t>print(</a:t>
+            </a:r>
+            <a:r>
+              <a:rPr lang="en-US" b="0" dirty="0" err="1">
+                <a:solidFill>
+                  <a:srgbClr val="000000"/>
+                </a:solidFill>
+                <a:effectLst/>
+                <a:latin typeface="Consolas" panose="020B0609020204030204" pitchFamily="49" charset="0"/>
+              </a:rPr>
+              <a:t>normalized_tokens</a:t>
+            </a:r>
+            <a:r>
+              <a:rPr lang="en-US" b="0" dirty="0">
+                <a:solidFill>
+                  <a:srgbClr val="000000"/>
+                </a:solidFill>
+                <a:effectLst/>
+                <a:latin typeface="Consolas" panose="020B0609020204030204" pitchFamily="49" charset="0"/>
+              </a:rPr>
+              <a:t>)</a:t>
+            </a:r>
+          </a:p>
+          <a:p>
+            <a:pPr>
+              <a:lnSpc>
+                <a:spcPts val="1425"/>
+              </a:lnSpc>
+              <a:buNone/>
+            </a:pPr>
+            <a:br>
+              <a:rPr lang="en-US" b="0" dirty="0">
+                <a:solidFill>
+                  <a:srgbClr val="000000"/>
+                </a:solidFill>
+                <a:effectLst/>
+                <a:latin typeface="Consolas" panose="020B0609020204030204" pitchFamily="49" charset="0"/>
+              </a:rPr>
+            </a:br>
+            <a:r>
+              <a:rPr lang="en-US" b="0" dirty="0">
+                <a:solidFill>
+                  <a:srgbClr val="008000"/>
+                </a:solidFill>
+                <a:effectLst/>
+                <a:latin typeface="Consolas" panose="020B0609020204030204" pitchFamily="49" charset="0"/>
+              </a:rPr>
+              <a:t># Removing punctuation</a:t>
+            </a:r>
+            <a:endParaRPr lang="en-US" b="0" dirty="0">
+              <a:solidFill>
+                <a:srgbClr val="000000"/>
+              </a:solidFill>
+              <a:effectLst/>
+              <a:latin typeface="Consolas" panose="020B0609020204030204" pitchFamily="49" charset="0"/>
+            </a:endParaRPr>
+          </a:p>
+          <a:p>
+            <a:pPr>
+              <a:lnSpc>
+                <a:spcPts val="1425"/>
+              </a:lnSpc>
+              <a:buNone/>
+            </a:pPr>
+            <a:r>
+              <a:rPr lang="en-US" b="0" dirty="0">
+                <a:solidFill>
+                  <a:srgbClr val="0000FF"/>
+                </a:solidFill>
+                <a:effectLst/>
+                <a:latin typeface="Consolas" panose="020B0609020204030204" pitchFamily="49" charset="0"/>
+              </a:rPr>
+              <a:t>import</a:t>
+            </a:r>
+            <a:r>
+              <a:rPr lang="en-US" b="0" dirty="0">
+                <a:solidFill>
+                  <a:srgbClr val="000000"/>
+                </a:solidFill>
+                <a:effectLst/>
+                <a:latin typeface="Consolas" panose="020B0609020204030204" pitchFamily="49" charset="0"/>
+              </a:rPr>
+              <a:t> re</a:t>
+            </a:r>
+          </a:p>
+          <a:p>
+            <a:pPr>
+              <a:lnSpc>
+                <a:spcPts val="1425"/>
+              </a:lnSpc>
+              <a:buNone/>
+            </a:pPr>
+            <a:r>
+              <a:rPr lang="en-US" b="0" dirty="0" err="1">
+                <a:solidFill>
+                  <a:srgbClr val="000000"/>
+                </a:solidFill>
+                <a:effectLst/>
+                <a:latin typeface="Consolas" panose="020B0609020204030204" pitchFamily="49" charset="0"/>
+              </a:rPr>
+              <a:t>normalized_tokens</a:t>
+            </a:r>
+            <a:r>
+              <a:rPr lang="en-US" b="0" dirty="0">
+                <a:solidFill>
+                  <a:srgbClr val="000000"/>
+                </a:solidFill>
+                <a:effectLst/>
+                <a:latin typeface="Consolas" panose="020B0609020204030204" pitchFamily="49" charset="0"/>
+              </a:rPr>
+              <a:t> = [</a:t>
+            </a:r>
+            <a:r>
+              <a:rPr lang="en-US" b="0" dirty="0" err="1">
+                <a:solidFill>
+                  <a:srgbClr val="000000"/>
+                </a:solidFill>
+                <a:effectLst/>
+                <a:latin typeface="Consolas" panose="020B0609020204030204" pitchFamily="49" charset="0"/>
+              </a:rPr>
+              <a:t>re.sub</a:t>
+            </a:r>
+            <a:r>
+              <a:rPr lang="en-US" b="0" dirty="0">
+                <a:solidFill>
+                  <a:srgbClr val="000000"/>
+                </a:solidFill>
+                <a:effectLst/>
+                <a:latin typeface="Consolas" panose="020B0609020204030204" pitchFamily="49" charset="0"/>
+              </a:rPr>
+              <a:t>(</a:t>
+            </a:r>
+            <a:r>
+              <a:rPr lang="en-US" b="0" dirty="0">
+                <a:solidFill>
+                  <a:srgbClr val="0000FF"/>
+                </a:solidFill>
+                <a:effectLst/>
+                <a:latin typeface="Consolas" panose="020B0609020204030204" pitchFamily="49" charset="0"/>
+              </a:rPr>
+              <a:t>r</a:t>
+            </a:r>
+            <a:r>
+              <a:rPr lang="en-US" b="0" dirty="0">
+                <a:solidFill>
+                  <a:srgbClr val="811F3F"/>
+                </a:solidFill>
+                <a:effectLst/>
+                <a:latin typeface="Consolas" panose="020B0609020204030204" pitchFamily="49" charset="0"/>
+              </a:rPr>
+              <a:t>'[</a:t>
+            </a:r>
+            <a:r>
+              <a:rPr lang="en-US" b="0" dirty="0">
+                <a:solidFill>
+                  <a:srgbClr val="000000"/>
+                </a:solidFill>
+                <a:effectLst/>
+                <a:latin typeface="Consolas" panose="020B0609020204030204" pitchFamily="49" charset="0"/>
+              </a:rPr>
+              <a:t>^</a:t>
+            </a:r>
+            <a:r>
+              <a:rPr lang="en-US" b="0" dirty="0">
+                <a:solidFill>
+                  <a:srgbClr val="811F3F"/>
+                </a:solidFill>
+                <a:effectLst/>
+                <a:latin typeface="Consolas" panose="020B0609020204030204" pitchFamily="49" charset="0"/>
+              </a:rPr>
+              <a:t>\w\s]'</a:t>
+            </a:r>
+            <a:r>
+              <a:rPr lang="en-US" b="0" dirty="0">
+                <a:solidFill>
+                  <a:srgbClr val="000000"/>
+                </a:solidFill>
+                <a:effectLst/>
+                <a:latin typeface="Consolas" panose="020B0609020204030204" pitchFamily="49" charset="0"/>
+              </a:rPr>
+              <a:t>, </a:t>
+            </a:r>
+            <a:r>
+              <a:rPr lang="en-US" b="0" dirty="0">
+                <a:solidFill>
+                  <a:srgbClr val="A31515"/>
+                </a:solidFill>
+                <a:effectLst/>
+                <a:latin typeface="Consolas" panose="020B0609020204030204" pitchFamily="49" charset="0"/>
+              </a:rPr>
+              <a:t>''</a:t>
+            </a:r>
+            <a:r>
+              <a:rPr lang="en-US" b="0" dirty="0">
+                <a:solidFill>
+                  <a:srgbClr val="000000"/>
+                </a:solidFill>
+                <a:effectLst/>
+                <a:latin typeface="Consolas" panose="020B0609020204030204" pitchFamily="49" charset="0"/>
+              </a:rPr>
+              <a:t>, </a:t>
+            </a:r>
+            <a:r>
+              <a:rPr lang="en-US" b="0" dirty="0" err="1">
+                <a:solidFill>
+                  <a:srgbClr val="000000"/>
+                </a:solidFill>
+                <a:effectLst/>
+                <a:latin typeface="Consolas" panose="020B0609020204030204" pitchFamily="49" charset="0"/>
+              </a:rPr>
+              <a:t>token.lower</a:t>
+            </a:r>
+            <a:r>
+              <a:rPr lang="en-US" b="0" dirty="0">
+                <a:solidFill>
+                  <a:srgbClr val="000000"/>
+                </a:solidFill>
+                <a:effectLst/>
+                <a:latin typeface="Consolas" panose="020B0609020204030204" pitchFamily="49" charset="0"/>
+              </a:rPr>
+              <a:t>()) </a:t>
+            </a:r>
+            <a:r>
+              <a:rPr lang="en-US" b="0" dirty="0">
+                <a:solidFill>
+                  <a:srgbClr val="0000FF"/>
+                </a:solidFill>
+                <a:effectLst/>
+                <a:latin typeface="Consolas" panose="020B0609020204030204" pitchFamily="49" charset="0"/>
+              </a:rPr>
+              <a:t>for</a:t>
+            </a:r>
+            <a:r>
+              <a:rPr lang="en-US" b="0" dirty="0">
+                <a:solidFill>
+                  <a:srgbClr val="000000"/>
+                </a:solidFill>
+                <a:effectLst/>
+                <a:latin typeface="Consolas" panose="020B0609020204030204" pitchFamily="49" charset="0"/>
+              </a:rPr>
+              <a:t> token </a:t>
+            </a:r>
+            <a:r>
+              <a:rPr lang="en-US" b="0" dirty="0">
+                <a:solidFill>
+                  <a:srgbClr val="0000FF"/>
+                </a:solidFill>
+                <a:effectLst/>
+                <a:latin typeface="Consolas" panose="020B0609020204030204" pitchFamily="49" charset="0"/>
+              </a:rPr>
+              <a:t>in</a:t>
+            </a:r>
+            <a:r>
+              <a:rPr lang="en-US" b="0" dirty="0">
+                <a:solidFill>
+                  <a:srgbClr val="000000"/>
+                </a:solidFill>
+                <a:effectLst/>
+                <a:latin typeface="Consolas" panose="020B0609020204030204" pitchFamily="49" charset="0"/>
+              </a:rPr>
+              <a:t> tokens]</a:t>
+            </a:r>
+          </a:p>
+          <a:p>
+            <a:pPr>
+              <a:lnSpc>
+                <a:spcPts val="1425"/>
+              </a:lnSpc>
+            </a:pPr>
+            <a:r>
+              <a:rPr lang="en-US" b="0" dirty="0">
+                <a:solidFill>
+                  <a:srgbClr val="000000"/>
+                </a:solidFill>
+                <a:effectLst/>
+                <a:latin typeface="Consolas" panose="020B0609020204030204" pitchFamily="49" charset="0"/>
+              </a:rPr>
+              <a:t>print(</a:t>
+            </a:r>
+            <a:r>
+              <a:rPr lang="en-US" b="0" dirty="0" err="1">
+                <a:solidFill>
+                  <a:srgbClr val="000000"/>
+                </a:solidFill>
+                <a:effectLst/>
+                <a:latin typeface="Consolas" panose="020B0609020204030204" pitchFamily="49" charset="0"/>
+              </a:rPr>
+              <a:t>normalized_tokens</a:t>
+            </a:r>
+            <a:r>
+              <a:rPr lang="en-US" b="0" dirty="0">
+                <a:solidFill>
+                  <a:srgbClr val="000000"/>
+                </a:solidFill>
+                <a:effectLst/>
+                <a:latin typeface="Consolas" panose="020B0609020204030204" pitchFamily="49" charset="0"/>
+              </a:rPr>
+              <a:t>)</a:t>
+            </a:r>
+          </a:p>
+        </p:txBody>
+      </p:sp>
+      <p:sp>
+        <p:nvSpPr>
+          <p:cNvPr id="1044" name="TextBox 1043">
+            <a:extLst>
+              <a:ext uri="{FF2B5EF4-FFF2-40B4-BE49-F238E27FC236}">
+                <a16:creationId xmlns:a16="http://schemas.microsoft.com/office/drawing/2014/main" id="{75470B80-147E-475F-A4A3-BAFF5796EB38}"/>
+              </a:ext>
+            </a:extLst>
+          </p:cNvPr>
+          <p:cNvSpPr txBox="1"/>
+          <p:nvPr/>
+        </p:nvSpPr>
+        <p:spPr>
+          <a:xfrm>
+            <a:off x="7755147" y="4135860"/>
+            <a:ext cx="3868282" cy="1754326"/>
+          </a:xfrm>
+          <a:prstGeom prst="rect">
+            <a:avLst/>
+          </a:prstGeom>
+          <a:noFill/>
+        </p:spPr>
+        <p:txBody>
+          <a:bodyPr wrap="square">
+            <a:spAutoFit/>
+          </a:bodyPr>
+          <a:lstStyle/>
+          <a:p>
+            <a:r>
+              <a:rPr lang="en-US" dirty="0"/>
+              <a:t>Output:</a:t>
+            </a:r>
+          </a:p>
+          <a:p>
+            <a:r>
+              <a:rPr lang="en-US" dirty="0"/>
+              <a:t>['large', 'language', 'models', 'are', 'revolutionizing', 'business', 'applications', '.']['large', 'language', 'models', 'are', 'revolutionizing', 'business', 'applications', '']</a:t>
+            </a:r>
+          </a:p>
+        </p:txBody>
+      </p:sp>
+      <p:sp>
+        <p:nvSpPr>
+          <p:cNvPr id="8" name="TextBox 7">
+            <a:extLst>
+              <a:ext uri="{FF2B5EF4-FFF2-40B4-BE49-F238E27FC236}">
+                <a16:creationId xmlns:a16="http://schemas.microsoft.com/office/drawing/2014/main" id="{A4BECA11-0014-431F-A8D8-3FFAF66D6978}"/>
+              </a:ext>
+            </a:extLst>
+          </p:cNvPr>
+          <p:cNvSpPr txBox="1"/>
+          <p:nvPr/>
+        </p:nvSpPr>
+        <p:spPr>
+          <a:xfrm>
+            <a:off x="1241853" y="4070073"/>
+            <a:ext cx="6306260" cy="2785378"/>
+          </a:xfrm>
+          <a:prstGeom prst="rect">
+            <a:avLst/>
+          </a:prstGeom>
+          <a:noFill/>
+        </p:spPr>
+        <p:txBody>
+          <a:bodyPr wrap="square" rtlCol="0">
+            <a:spAutoFit/>
+          </a:bodyPr>
+          <a:lstStyle/>
+          <a:p>
+            <a:pPr>
+              <a:lnSpc>
+                <a:spcPts val="1425"/>
+              </a:lnSpc>
+              <a:buNone/>
+            </a:pPr>
+            <a:r>
+              <a:rPr lang="en-US" sz="1200" dirty="0">
+                <a:solidFill>
+                  <a:srgbClr val="000000"/>
+                </a:solidFill>
+                <a:latin typeface="Consolas" panose="020B0609020204030204" pitchFamily="49" charset="0"/>
+              </a:rPr>
+              <a:t>The regular expression r'[^\w\s]' does the following:</a:t>
+            </a:r>
+          </a:p>
+          <a:p>
+            <a:pPr marL="171450" indent="-171450">
+              <a:lnSpc>
+                <a:spcPts val="1425"/>
+              </a:lnSpc>
+              <a:buFont typeface="Arial" panose="020B0604020202020204" pitchFamily="34" charset="0"/>
+              <a:buChar char="•"/>
+            </a:pPr>
+            <a:r>
+              <a:rPr lang="en-US" sz="1200" dirty="0">
+                <a:solidFill>
+                  <a:srgbClr val="000000"/>
+                </a:solidFill>
+                <a:latin typeface="Consolas" panose="020B0609020204030204" pitchFamily="49" charset="0"/>
+              </a:rPr>
+              <a:t>r'...': This denotes a raw string in Python. Raw strings treat backslashes \ as literal characters, which is crucial for regular expressions.</a:t>
+            </a:r>
+          </a:p>
+          <a:p>
+            <a:pPr marL="171450" indent="-171450">
+              <a:lnSpc>
+                <a:spcPts val="1425"/>
+              </a:lnSpc>
+              <a:buFont typeface="Arial" panose="020B0604020202020204" pitchFamily="34" charset="0"/>
+              <a:buChar char="•"/>
+            </a:pPr>
+            <a:r>
+              <a:rPr lang="en-US" sz="1200" dirty="0">
+                <a:solidFill>
+                  <a:srgbClr val="000000"/>
+                </a:solidFill>
+                <a:latin typeface="Consolas" panose="020B0609020204030204" pitchFamily="49" charset="0"/>
+              </a:rPr>
+              <a:t>[...]: This represents a character set.^: Inside a character set, ^ negates the set. It means "match any character not in this set.</a:t>
+            </a:r>
+          </a:p>
+          <a:p>
+            <a:pPr marL="171450" indent="-171450">
+              <a:lnSpc>
+                <a:spcPts val="1425"/>
+              </a:lnSpc>
+              <a:buFont typeface="Arial" panose="020B0604020202020204" pitchFamily="34" charset="0"/>
+              <a:buChar char="•"/>
+            </a:pPr>
+            <a:r>
+              <a:rPr lang="en-US" sz="1200" dirty="0">
+                <a:solidFill>
+                  <a:srgbClr val="000000"/>
+                </a:solidFill>
+                <a:latin typeface="Consolas" panose="020B0609020204030204" pitchFamily="49" charset="0"/>
+              </a:rPr>
+              <a:t>"\w: This matches any word character, which includes alphanumeric characters (letters and digits) and the underscore (_).</a:t>
+            </a:r>
+          </a:p>
+          <a:p>
+            <a:pPr marL="171450" indent="-171450">
+              <a:lnSpc>
+                <a:spcPts val="1425"/>
+              </a:lnSpc>
+              <a:buFont typeface="Arial" panose="020B0604020202020204" pitchFamily="34" charset="0"/>
+              <a:buChar char="•"/>
+            </a:pPr>
+            <a:r>
+              <a:rPr lang="en-US" sz="1200" dirty="0">
+                <a:solidFill>
+                  <a:srgbClr val="000000"/>
+                </a:solidFill>
+                <a:latin typeface="Consolas" panose="020B0609020204030204" pitchFamily="49" charset="0"/>
+              </a:rPr>
+              <a:t>\s: This matches any whitespace character, such as spaces, tabs, and newlines.</a:t>
+            </a:r>
+          </a:p>
+          <a:p>
+            <a:pPr marL="171450" indent="-171450">
+              <a:lnSpc>
+                <a:spcPts val="1425"/>
+              </a:lnSpc>
+              <a:buFont typeface="Arial" panose="020B0604020202020204" pitchFamily="34" charset="0"/>
+              <a:buChar char="•"/>
+            </a:pPr>
+            <a:r>
+              <a:rPr lang="en-US" sz="1200" dirty="0">
+                <a:solidFill>
+                  <a:srgbClr val="000000"/>
+                </a:solidFill>
+                <a:latin typeface="Consolas" panose="020B0609020204030204" pitchFamily="49" charset="0"/>
+              </a:rPr>
+              <a:t>Therefore, r'[^\w\s]' matches any character that is not a word character or a whitespace character. In simpler terms, it matches any non-alphanumeric, non-underscore, and non-whitespace character. This effectively targets punctuation marks, symbols, and other special characters.</a:t>
+            </a:r>
+            <a:endParaRPr lang="en-US" sz="1200" b="0" dirty="0">
+              <a:solidFill>
+                <a:srgbClr val="000000"/>
+              </a:solidFill>
+              <a:effectLst/>
+              <a:latin typeface="Consolas" panose="020B0609020204030204" pitchFamily="49" charset="0"/>
+            </a:endParaRPr>
+          </a:p>
+        </p:txBody>
+      </p:sp>
+    </p:spTree>
+    <p:extLst>
+      <p:ext uri="{BB962C8B-B14F-4D97-AF65-F5344CB8AC3E}">
+        <p14:creationId xmlns:p14="http://schemas.microsoft.com/office/powerpoint/2010/main" val="601496234"/>
+      </p:ext>
+    </p:extLst>
+  </p:cSld>
+  <p:clrMapOvr>
+    <a:masterClrMapping/>
+  </p:clrMapOvr>
+</p:sld>
+</file>
+
+<file path=ppt/slides/slide12.xml><?xml version="1.0" encoding="utf-8"?>
+<p:sld xmlns:a="http://schemas.openxmlformats.org/drawingml/2006/main" xmlns:r="http://schemas.openxmlformats.org/officeDocument/2006/relationships" xmlns:p="http://schemas.openxmlformats.org/presentationml/2006/main">
+  <p:cSld>
+    <p:spTree>
+      <p:nvGrpSpPr>
         <p:cNvPr id="1" name="">
           <a:extLst>
             <a:ext uri="{FF2B5EF4-FFF2-40B4-BE49-F238E27FC236}">
@@ -6542,7 +7663,7 @@
 </p:sld>
 </file>
 
-<file path=ppt/slides/slide11.xml><?xml version="1.0" encoding="utf-8"?>
+<file path=ppt/slides/slide13.xml><?xml version="1.0" encoding="utf-8"?>
 <p:sld xmlns:a="http://schemas.openxmlformats.org/drawingml/2006/main" xmlns:r="http://schemas.openxmlformats.org/officeDocument/2006/relationships" xmlns:p="http://schemas.openxmlformats.org/presentationml/2006/main">
   <p:cSld>
     <p:spTree>
@@ -6675,7 +7796,7 @@
 </p:sld>
 </file>
 
-<file path=ppt/slides/slide12.xml><?xml version="1.0" encoding="utf-8"?>
+<file path=ppt/slides/slide14.xml><?xml version="1.0" encoding="utf-8"?>
 <p:sld xmlns:a="http://schemas.openxmlformats.org/drawingml/2006/main" xmlns:r="http://schemas.openxmlformats.org/officeDocument/2006/relationships" xmlns:p="http://schemas.openxmlformats.org/presentationml/2006/main">
   <p:cSld>
     <p:spTree>
@@ -6829,7 +7950,7 @@
 </p:sld>
 </file>
 
-<file path=ppt/slides/slide13.xml><?xml version="1.0" encoding="utf-8"?>
+<file path=ppt/slides/slide15.xml><?xml version="1.0" encoding="utf-8"?>
 <p:sld xmlns:a="http://schemas.openxmlformats.org/drawingml/2006/main" xmlns:r="http://schemas.openxmlformats.org/officeDocument/2006/relationships" xmlns:p="http://schemas.openxmlformats.org/presentationml/2006/main">
   <p:cSld>
     <p:spTree>
@@ -7015,7 +8136,7 @@
 </p:sld>
 </file>
 
-<file path=ppt/slides/slide14.xml><?xml version="1.0" encoding="utf-8"?>
+<file path=ppt/slides/slide16.xml><?xml version="1.0" encoding="utf-8"?>
 <p:sld xmlns:a="http://schemas.openxmlformats.org/drawingml/2006/main" xmlns:r="http://schemas.openxmlformats.org/officeDocument/2006/relationships" xmlns:p="http://schemas.openxmlformats.org/presentationml/2006/main">
   <p:cSld>
     <p:spTree>
@@ -7686,7 +8807,7 @@
 </p:sld>
 </file>
 
-<file path=ppt/slides/slide15.xml><?xml version="1.0" encoding="utf-8"?>
+<file path=ppt/slides/slide17.xml><?xml version="1.0" encoding="utf-8"?>
 <p:sld xmlns:a="http://schemas.openxmlformats.org/drawingml/2006/main" xmlns:r="http://schemas.openxmlformats.org/officeDocument/2006/relationships" xmlns:p="http://schemas.openxmlformats.org/presentationml/2006/main">
   <p:cSld>
     <p:spTree>
@@ -7789,7 +8910,7 @@
 </p:sld>
 </file>
 
-<file path=ppt/slides/slide16.xml><?xml version="1.0" encoding="utf-8"?>
+<file path=ppt/slides/slide18.xml><?xml version="1.0" encoding="utf-8"?>
 <p:sld xmlns:a="http://schemas.openxmlformats.org/drawingml/2006/main" xmlns:r="http://schemas.openxmlformats.org/officeDocument/2006/relationships" xmlns:p="http://schemas.openxmlformats.org/presentationml/2006/main">
   <p:cSld>
     <p:spTree>
@@ -7974,7 +9095,7 @@
 </p:sld>
 </file>
 
-<file path=ppt/slides/slide17.xml><?xml version="1.0" encoding="utf-8"?>
+<file path=ppt/slides/slide19.xml><?xml version="1.0" encoding="utf-8"?>
 <p:sld xmlns:a="http://schemas.openxmlformats.org/drawingml/2006/main" xmlns:r="http://schemas.openxmlformats.org/officeDocument/2006/relationships" xmlns:p="http://schemas.openxmlformats.org/presentationml/2006/main">
   <p:cSld>
     <p:spTree>
@@ -8204,787 +9325,6 @@
     <p:extLst>
       <p:ext uri="{BB962C8B-B14F-4D97-AF65-F5344CB8AC3E}">
         <p14:creationId xmlns:p14="http://schemas.microsoft.com/office/powerpoint/2010/main" val="168241686"/>
-      </p:ext>
-    </p:extLst>
-  </p:cSld>
-  <p:clrMapOvr>
-    <a:masterClrMapping/>
-  </p:clrMapOvr>
-</p:sld>
-</file>
-
-<file path=ppt/slides/slide18.xml><?xml version="1.0" encoding="utf-8"?>
-<p:sld xmlns:a="http://schemas.openxmlformats.org/drawingml/2006/main" xmlns:r="http://schemas.openxmlformats.org/officeDocument/2006/relationships" xmlns:p="http://schemas.openxmlformats.org/presentationml/2006/main">
-  <p:cSld>
-    <p:spTree>
-      <p:nvGrpSpPr>
-        <p:cNvPr id="1" name="">
-          <a:extLst>
-            <a:ext uri="{FF2B5EF4-FFF2-40B4-BE49-F238E27FC236}">
-              <a16:creationId xmlns:a16="http://schemas.microsoft.com/office/drawing/2014/main" id="{B8430022-9432-9912-94BC-5702795E0A31}"/>
-            </a:ext>
-          </a:extLst>
-        </p:cNvPr>
-        <p:cNvGrpSpPr/>
-        <p:nvPr/>
-      </p:nvGrpSpPr>
-      <p:grpSpPr>
-        <a:xfrm>
-          <a:off x="0" y="0"/>
-          <a:ext cx="0" cy="0"/>
-          <a:chOff x="0" y="0"/>
-          <a:chExt cx="0" cy="0"/>
-        </a:xfrm>
-      </p:grpSpPr>
-      <p:sp>
-        <p:nvSpPr>
-          <p:cNvPr id="4" name="Title 3">
-            <a:extLst>
-              <a:ext uri="{FF2B5EF4-FFF2-40B4-BE49-F238E27FC236}">
-                <a16:creationId xmlns:a16="http://schemas.microsoft.com/office/drawing/2014/main" id="{4E06737A-DE4A-EA9B-F4E7-17C4DD7C966B}"/>
-              </a:ext>
-            </a:extLst>
-          </p:cNvPr>
-          <p:cNvSpPr>
-            <a:spLocks noGrp="1"/>
-          </p:cNvSpPr>
-          <p:nvPr>
-            <p:ph type="title"/>
-          </p:nvPr>
-        </p:nvSpPr>
-        <p:spPr/>
-        <p:txBody>
-          <a:bodyPr/>
-          <a:lstStyle/>
-          <a:p>
-            <a:r>
-              <a:rPr lang="en-US" dirty="0" err="1"/>
-              <a:t>BoW</a:t>
-            </a:r>
-            <a:r>
-              <a:rPr lang="en-US" dirty="0"/>
-              <a:t> Example</a:t>
-            </a:r>
-          </a:p>
-        </p:txBody>
-      </p:sp>
-      <p:sp>
-        <p:nvSpPr>
-          <p:cNvPr id="5" name="Content Placeholder 4">
-            <a:extLst>
-              <a:ext uri="{FF2B5EF4-FFF2-40B4-BE49-F238E27FC236}">
-                <a16:creationId xmlns:a16="http://schemas.microsoft.com/office/drawing/2014/main" id="{B3E2DD2C-FC6F-5E35-7761-75734B27494E}"/>
-              </a:ext>
-            </a:extLst>
-          </p:cNvPr>
-          <p:cNvSpPr>
-            <a:spLocks noGrp="1"/>
-          </p:cNvSpPr>
-          <p:nvPr>
-            <p:ph idx="1"/>
-          </p:nvPr>
-        </p:nvSpPr>
-        <p:spPr>
-          <a:xfrm>
-            <a:off x="838200" y="1706007"/>
-            <a:ext cx="10515600" cy="323059"/>
-          </a:xfrm>
-        </p:spPr>
-        <p:txBody>
-          <a:bodyPr>
-            <a:normAutofit fontScale="85000" lnSpcReduction="20000"/>
-          </a:bodyPr>
-          <a:lstStyle/>
-          <a:p>
-            <a:endParaRPr lang="en-US" dirty="0"/>
-          </a:p>
-        </p:txBody>
-      </p:sp>
-      <p:sp>
-        <p:nvSpPr>
-          <p:cNvPr id="3" name="TextBox 2">
-            <a:extLst>
-              <a:ext uri="{FF2B5EF4-FFF2-40B4-BE49-F238E27FC236}">
-                <a16:creationId xmlns:a16="http://schemas.microsoft.com/office/drawing/2014/main" id="{1AF4753F-59A7-EED5-D386-B6A6DB20562D}"/>
-              </a:ext>
-            </a:extLst>
-          </p:cNvPr>
-          <p:cNvSpPr txBox="1"/>
-          <p:nvPr/>
-        </p:nvSpPr>
-        <p:spPr>
-          <a:xfrm>
-            <a:off x="838199" y="2094073"/>
-            <a:ext cx="9687742" cy="2440796"/>
-          </a:xfrm>
-          <a:prstGeom prst="rect">
-            <a:avLst/>
-          </a:prstGeom>
-          <a:noFill/>
-        </p:spPr>
-        <p:txBody>
-          <a:bodyPr wrap="square">
-            <a:spAutoFit/>
-          </a:bodyPr>
-          <a:lstStyle/>
-          <a:p>
-            <a:pPr>
-              <a:lnSpc>
-                <a:spcPts val="1425"/>
-              </a:lnSpc>
-              <a:buNone/>
-            </a:pPr>
-            <a:r>
-              <a:rPr lang="en-US" b="0" dirty="0">
-                <a:solidFill>
-                  <a:srgbClr val="0000FF"/>
-                </a:solidFill>
-                <a:effectLst/>
-                <a:latin typeface="Consolas" panose="020B0609020204030204" pitchFamily="49" charset="0"/>
-              </a:rPr>
-              <a:t>from</a:t>
-            </a:r>
-            <a:r>
-              <a:rPr lang="en-US" b="0" dirty="0">
-                <a:solidFill>
-                  <a:srgbClr val="000000"/>
-                </a:solidFill>
-                <a:effectLst/>
-                <a:latin typeface="Consolas" panose="020B0609020204030204" pitchFamily="49" charset="0"/>
-              </a:rPr>
-              <a:t> </a:t>
-            </a:r>
-            <a:r>
-              <a:rPr lang="en-US" b="0" dirty="0" err="1">
-                <a:solidFill>
-                  <a:srgbClr val="000000"/>
-                </a:solidFill>
-                <a:effectLst/>
-                <a:latin typeface="Consolas" panose="020B0609020204030204" pitchFamily="49" charset="0"/>
-              </a:rPr>
-              <a:t>sklearn.feature_extraction.text</a:t>
-            </a:r>
-            <a:r>
-              <a:rPr lang="en-US" b="0" dirty="0">
-                <a:solidFill>
-                  <a:srgbClr val="000000"/>
-                </a:solidFill>
-                <a:effectLst/>
-                <a:latin typeface="Consolas" panose="020B0609020204030204" pitchFamily="49" charset="0"/>
-              </a:rPr>
-              <a:t> </a:t>
-            </a:r>
-            <a:r>
-              <a:rPr lang="en-US" b="0" dirty="0">
-                <a:solidFill>
-                  <a:srgbClr val="0000FF"/>
-                </a:solidFill>
-                <a:effectLst/>
-                <a:latin typeface="Consolas" panose="020B0609020204030204" pitchFamily="49" charset="0"/>
-              </a:rPr>
-              <a:t>import</a:t>
-            </a:r>
-            <a:r>
-              <a:rPr lang="en-US" b="0" dirty="0">
-                <a:solidFill>
-                  <a:srgbClr val="000000"/>
-                </a:solidFill>
-                <a:effectLst/>
-                <a:latin typeface="Consolas" panose="020B0609020204030204" pitchFamily="49" charset="0"/>
-              </a:rPr>
-              <a:t> </a:t>
-            </a:r>
-            <a:r>
-              <a:rPr lang="en-US" b="0" dirty="0" err="1">
-                <a:solidFill>
-                  <a:srgbClr val="000000"/>
-                </a:solidFill>
-                <a:effectLst/>
-                <a:latin typeface="Consolas" panose="020B0609020204030204" pitchFamily="49" charset="0"/>
-              </a:rPr>
-              <a:t>CountVectorizer</a:t>
-            </a:r>
-            <a:endParaRPr lang="en-US" b="0" dirty="0">
-              <a:solidFill>
-                <a:srgbClr val="000000"/>
-              </a:solidFill>
-              <a:effectLst/>
-              <a:latin typeface="Consolas" panose="020B0609020204030204" pitchFamily="49" charset="0"/>
-            </a:endParaRPr>
-          </a:p>
-          <a:p>
-            <a:pPr>
-              <a:lnSpc>
-                <a:spcPts val="1425"/>
-              </a:lnSpc>
-              <a:buNone/>
-            </a:pPr>
-            <a:br>
-              <a:rPr lang="en-US" b="0" dirty="0">
-                <a:solidFill>
-                  <a:srgbClr val="000000"/>
-                </a:solidFill>
-                <a:effectLst/>
-                <a:latin typeface="Consolas" panose="020B0609020204030204" pitchFamily="49" charset="0"/>
-              </a:rPr>
-            </a:br>
-            <a:r>
-              <a:rPr lang="en-US" b="0" dirty="0">
-                <a:solidFill>
-                  <a:srgbClr val="000000"/>
-                </a:solidFill>
-                <a:effectLst/>
-                <a:latin typeface="Consolas" panose="020B0609020204030204" pitchFamily="49" charset="0"/>
-              </a:rPr>
-              <a:t>corpus = [</a:t>
-            </a:r>
-          </a:p>
-          <a:p>
-            <a:pPr>
-              <a:lnSpc>
-                <a:spcPts val="1425"/>
-              </a:lnSpc>
-              <a:buNone/>
-            </a:pPr>
-            <a:r>
-              <a:rPr lang="en-US" b="0" dirty="0">
-                <a:solidFill>
-                  <a:srgbClr val="000000"/>
-                </a:solidFill>
-                <a:effectLst/>
-                <a:latin typeface="Consolas" panose="020B0609020204030204" pitchFamily="49" charset="0"/>
-              </a:rPr>
-              <a:t>    </a:t>
-            </a:r>
-            <a:r>
-              <a:rPr lang="en-US" b="0" dirty="0">
-                <a:solidFill>
-                  <a:srgbClr val="A31515"/>
-                </a:solidFill>
-                <a:effectLst/>
-                <a:latin typeface="Consolas" panose="020B0609020204030204" pitchFamily="49" charset="0"/>
-              </a:rPr>
-              <a:t>"Large language models revolutionize business."</a:t>
-            </a:r>
-            <a:r>
-              <a:rPr lang="en-US" b="0" dirty="0">
-                <a:solidFill>
-                  <a:srgbClr val="000000"/>
-                </a:solidFill>
-                <a:effectLst/>
-                <a:latin typeface="Consolas" panose="020B0609020204030204" pitchFamily="49" charset="0"/>
-              </a:rPr>
-              <a:t>,</a:t>
-            </a:r>
-          </a:p>
-          <a:p>
-            <a:pPr>
-              <a:lnSpc>
-                <a:spcPts val="1425"/>
-              </a:lnSpc>
-              <a:buNone/>
-            </a:pPr>
-            <a:r>
-              <a:rPr lang="en-US" b="0" dirty="0">
-                <a:solidFill>
-                  <a:srgbClr val="000000"/>
-                </a:solidFill>
-                <a:effectLst/>
-                <a:latin typeface="Consolas" panose="020B0609020204030204" pitchFamily="49" charset="0"/>
-              </a:rPr>
-              <a:t>    </a:t>
-            </a:r>
-            <a:r>
-              <a:rPr lang="en-US" b="0" dirty="0">
-                <a:solidFill>
-                  <a:srgbClr val="A31515"/>
-                </a:solidFill>
-                <a:effectLst/>
-                <a:latin typeface="Consolas" panose="020B0609020204030204" pitchFamily="49" charset="0"/>
-              </a:rPr>
-              <a:t>"Business applications benefit from AI."</a:t>
-            </a:r>
-            <a:r>
-              <a:rPr lang="en-US" b="0" dirty="0">
-                <a:solidFill>
-                  <a:srgbClr val="000000"/>
-                </a:solidFill>
-                <a:effectLst/>
-                <a:latin typeface="Consolas" panose="020B0609020204030204" pitchFamily="49" charset="0"/>
-              </a:rPr>
-              <a:t>,</a:t>
-            </a:r>
-          </a:p>
-          <a:p>
-            <a:pPr>
-              <a:lnSpc>
-                <a:spcPts val="1425"/>
-              </a:lnSpc>
-              <a:buNone/>
-            </a:pPr>
-            <a:r>
-              <a:rPr lang="en-US" b="0" dirty="0">
-                <a:solidFill>
-                  <a:srgbClr val="000000"/>
-                </a:solidFill>
-                <a:effectLst/>
-                <a:latin typeface="Consolas" panose="020B0609020204030204" pitchFamily="49" charset="0"/>
-              </a:rPr>
-              <a:t>    </a:t>
-            </a:r>
-            <a:r>
-              <a:rPr lang="en-US" b="0" dirty="0">
-                <a:solidFill>
-                  <a:srgbClr val="A31515"/>
-                </a:solidFill>
-                <a:effectLst/>
-                <a:latin typeface="Consolas" panose="020B0609020204030204" pitchFamily="49" charset="0"/>
-              </a:rPr>
-              <a:t>"Language models learn from text data."</a:t>
-            </a:r>
-            <a:endParaRPr lang="en-US" b="0" dirty="0">
-              <a:solidFill>
-                <a:srgbClr val="000000"/>
-              </a:solidFill>
-              <a:effectLst/>
-              <a:latin typeface="Consolas" panose="020B0609020204030204" pitchFamily="49" charset="0"/>
-            </a:endParaRPr>
-          </a:p>
-          <a:p>
-            <a:pPr>
-              <a:lnSpc>
-                <a:spcPts val="1425"/>
-              </a:lnSpc>
-              <a:buNone/>
-            </a:pPr>
-            <a:r>
-              <a:rPr lang="en-US" b="0" dirty="0">
-                <a:solidFill>
-                  <a:srgbClr val="000000"/>
-                </a:solidFill>
-                <a:effectLst/>
-                <a:latin typeface="Consolas" panose="020B0609020204030204" pitchFamily="49" charset="0"/>
-              </a:rPr>
-              <a:t>]</a:t>
-            </a:r>
-          </a:p>
-          <a:p>
-            <a:pPr>
-              <a:lnSpc>
-                <a:spcPts val="1425"/>
-              </a:lnSpc>
-              <a:buNone/>
-            </a:pPr>
-            <a:br>
-              <a:rPr lang="en-US" b="0" dirty="0">
-                <a:solidFill>
-                  <a:srgbClr val="000000"/>
-                </a:solidFill>
-                <a:effectLst/>
-                <a:latin typeface="Consolas" panose="020B0609020204030204" pitchFamily="49" charset="0"/>
-              </a:rPr>
-            </a:br>
-            <a:r>
-              <a:rPr lang="en-US" b="0" dirty="0">
-                <a:solidFill>
-                  <a:srgbClr val="000000"/>
-                </a:solidFill>
-                <a:effectLst/>
-                <a:latin typeface="Consolas" panose="020B0609020204030204" pitchFamily="49" charset="0"/>
-              </a:rPr>
-              <a:t>vectorizer = </a:t>
-            </a:r>
-            <a:r>
-              <a:rPr lang="en-US" b="0" dirty="0" err="1">
-                <a:solidFill>
-                  <a:srgbClr val="000000"/>
-                </a:solidFill>
-                <a:effectLst/>
-                <a:latin typeface="Consolas" panose="020B0609020204030204" pitchFamily="49" charset="0"/>
-              </a:rPr>
-              <a:t>CountVectorizer</a:t>
-            </a:r>
-            <a:r>
-              <a:rPr lang="en-US" b="0" dirty="0">
-                <a:solidFill>
-                  <a:srgbClr val="000000"/>
-                </a:solidFill>
-                <a:effectLst/>
-                <a:latin typeface="Consolas" panose="020B0609020204030204" pitchFamily="49" charset="0"/>
-              </a:rPr>
-              <a:t>()</a:t>
-            </a:r>
-          </a:p>
-          <a:p>
-            <a:pPr>
-              <a:lnSpc>
-                <a:spcPts val="1425"/>
-              </a:lnSpc>
-              <a:buNone/>
-            </a:pPr>
-            <a:r>
-              <a:rPr lang="en-US" b="0" dirty="0">
-                <a:solidFill>
-                  <a:srgbClr val="000000"/>
-                </a:solidFill>
-                <a:effectLst/>
-                <a:latin typeface="Consolas" panose="020B0609020204030204" pitchFamily="49" charset="0"/>
-              </a:rPr>
-              <a:t>X = </a:t>
-            </a:r>
-            <a:r>
-              <a:rPr lang="en-US" b="0" dirty="0" err="1">
-                <a:solidFill>
-                  <a:srgbClr val="000000"/>
-                </a:solidFill>
-                <a:effectLst/>
-                <a:latin typeface="Consolas" panose="020B0609020204030204" pitchFamily="49" charset="0"/>
-              </a:rPr>
-              <a:t>vectorizer.fit_transform</a:t>
-            </a:r>
-            <a:r>
-              <a:rPr lang="en-US" b="0" dirty="0">
-                <a:solidFill>
-                  <a:srgbClr val="000000"/>
-                </a:solidFill>
-                <a:effectLst/>
-                <a:latin typeface="Consolas" panose="020B0609020204030204" pitchFamily="49" charset="0"/>
-              </a:rPr>
-              <a:t>(corpus)</a:t>
-            </a:r>
-          </a:p>
-          <a:p>
-            <a:pPr>
-              <a:lnSpc>
-                <a:spcPts val="1425"/>
-              </a:lnSpc>
-              <a:buNone/>
-            </a:pPr>
-            <a:br>
-              <a:rPr lang="en-US" b="0" dirty="0">
-                <a:solidFill>
-                  <a:srgbClr val="000000"/>
-                </a:solidFill>
-                <a:effectLst/>
-                <a:latin typeface="Consolas" panose="020B0609020204030204" pitchFamily="49" charset="0"/>
-              </a:rPr>
-            </a:br>
-            <a:r>
-              <a:rPr lang="en-US" b="0" dirty="0">
-                <a:solidFill>
-                  <a:srgbClr val="000000"/>
-                </a:solidFill>
-                <a:effectLst/>
-                <a:latin typeface="Consolas" panose="020B0609020204030204" pitchFamily="49" charset="0"/>
-              </a:rPr>
-              <a:t>print(</a:t>
-            </a:r>
-            <a:r>
-              <a:rPr lang="en-US" b="0" dirty="0" err="1">
-                <a:solidFill>
-                  <a:srgbClr val="000000"/>
-                </a:solidFill>
-                <a:effectLst/>
-                <a:latin typeface="Consolas" panose="020B0609020204030204" pitchFamily="49" charset="0"/>
-              </a:rPr>
-              <a:t>vectorizer.get_feature_names_out</a:t>
-            </a:r>
-            <a:r>
-              <a:rPr lang="en-US" b="0" dirty="0">
-                <a:solidFill>
-                  <a:srgbClr val="000000"/>
-                </a:solidFill>
-                <a:effectLst/>
-                <a:latin typeface="Consolas" panose="020B0609020204030204" pitchFamily="49" charset="0"/>
-              </a:rPr>
-              <a:t>())</a:t>
-            </a:r>
-          </a:p>
-          <a:p>
-            <a:pPr>
-              <a:lnSpc>
-                <a:spcPts val="1425"/>
-              </a:lnSpc>
-            </a:pPr>
-            <a:r>
-              <a:rPr lang="en-US" b="0" dirty="0">
-                <a:solidFill>
-                  <a:srgbClr val="000000"/>
-                </a:solidFill>
-                <a:effectLst/>
-                <a:latin typeface="Consolas" panose="020B0609020204030204" pitchFamily="49" charset="0"/>
-              </a:rPr>
-              <a:t>print(</a:t>
-            </a:r>
-            <a:r>
-              <a:rPr lang="en-US" b="0" dirty="0" err="1">
-                <a:solidFill>
-                  <a:srgbClr val="000000"/>
-                </a:solidFill>
-                <a:effectLst/>
-                <a:latin typeface="Consolas" panose="020B0609020204030204" pitchFamily="49" charset="0"/>
-              </a:rPr>
-              <a:t>X.toarray</a:t>
-            </a:r>
-            <a:r>
-              <a:rPr lang="en-US" b="0" dirty="0">
-                <a:solidFill>
-                  <a:srgbClr val="000000"/>
-                </a:solidFill>
-                <a:effectLst/>
-                <a:latin typeface="Consolas" panose="020B0609020204030204" pitchFamily="49" charset="0"/>
-              </a:rPr>
-              <a:t>())</a:t>
-            </a:r>
-          </a:p>
-        </p:txBody>
-      </p:sp>
-      <p:sp>
-        <p:nvSpPr>
-          <p:cNvPr id="9" name="TextBox 8">
-            <a:extLst>
-              <a:ext uri="{FF2B5EF4-FFF2-40B4-BE49-F238E27FC236}">
-                <a16:creationId xmlns:a16="http://schemas.microsoft.com/office/drawing/2014/main" id="{963B9F29-7D58-0123-A6FF-C0BD1D88DED2}"/>
-              </a:ext>
-            </a:extLst>
-          </p:cNvPr>
-          <p:cNvSpPr txBox="1"/>
-          <p:nvPr/>
-        </p:nvSpPr>
-        <p:spPr>
-          <a:xfrm>
-            <a:off x="838199" y="5018204"/>
-            <a:ext cx="10813869" cy="1200329"/>
-          </a:xfrm>
-          <a:prstGeom prst="rect">
-            <a:avLst/>
-          </a:prstGeom>
-          <a:noFill/>
-        </p:spPr>
-        <p:txBody>
-          <a:bodyPr wrap="square">
-            <a:spAutoFit/>
-          </a:bodyPr>
-          <a:lstStyle/>
-          <a:p>
-            <a:r>
-              <a:rPr lang="en-US" dirty="0"/>
-              <a:t>['ai' 'applications' 'benefit' 'business' 'data' 'from' 'language' 'large' 'learn' 'models' 'revolutionize' 'text’]</a:t>
-            </a:r>
-          </a:p>
-          <a:p>
-            <a:r>
-              <a:rPr lang="en-US" dirty="0"/>
-              <a:t>[[0 0 0 1 0 0 1 1 0 1 1 0] </a:t>
-            </a:r>
-          </a:p>
-          <a:p>
-            <a:r>
-              <a:rPr lang="en-US" dirty="0"/>
-              <a:t>[1 1 1 1 0 1 0 0 0 0 0 0] </a:t>
-            </a:r>
-          </a:p>
-          <a:p>
-            <a:r>
-              <a:rPr lang="en-US" dirty="0"/>
-              <a:t>[0 0 0 0 1 1 1 0 1 1 0 1]]</a:t>
-            </a:r>
-          </a:p>
-        </p:txBody>
-      </p:sp>
-    </p:spTree>
-    <p:extLst>
-      <p:ext uri="{BB962C8B-B14F-4D97-AF65-F5344CB8AC3E}">
-        <p14:creationId xmlns:p14="http://schemas.microsoft.com/office/powerpoint/2010/main" val="1314172448"/>
-      </p:ext>
-    </p:extLst>
-  </p:cSld>
-  <p:clrMapOvr>
-    <a:masterClrMapping/>
-  </p:clrMapOvr>
-</p:sld>
-</file>
-
-<file path=ppt/slides/slide19.xml><?xml version="1.0" encoding="utf-8"?>
-<p:sld xmlns:a="http://schemas.openxmlformats.org/drawingml/2006/main" xmlns:r="http://schemas.openxmlformats.org/officeDocument/2006/relationships" xmlns:p="http://schemas.openxmlformats.org/presentationml/2006/main">
-  <p:cSld>
-    <p:spTree>
-      <p:nvGrpSpPr>
-        <p:cNvPr id="1" name=""/>
-        <p:cNvGrpSpPr/>
-        <p:nvPr/>
-      </p:nvGrpSpPr>
-      <p:grpSpPr>
-        <a:xfrm>
-          <a:off x="0" y="0"/>
-          <a:ext cx="0" cy="0"/>
-          <a:chOff x="0" y="0"/>
-          <a:chExt cx="0" cy="0"/>
-        </a:xfrm>
-      </p:grpSpPr>
-      <p:sp>
-        <p:nvSpPr>
-          <p:cNvPr id="2" name="Title 1">
-            <a:extLst>
-              <a:ext uri="{FF2B5EF4-FFF2-40B4-BE49-F238E27FC236}">
-                <a16:creationId xmlns:a16="http://schemas.microsoft.com/office/drawing/2014/main" id="{E9C280EE-865C-D7D4-DFE1-0BC32081155C}"/>
-              </a:ext>
-            </a:extLst>
-          </p:cNvPr>
-          <p:cNvSpPr>
-            <a:spLocks noGrp="1"/>
-          </p:cNvSpPr>
-          <p:nvPr>
-            <p:ph type="title"/>
-          </p:nvPr>
-        </p:nvSpPr>
-        <p:spPr/>
-        <p:txBody>
-          <a:bodyPr>
-            <a:normAutofit fontScale="90000"/>
-          </a:bodyPr>
-          <a:lstStyle/>
-          <a:p>
-            <a:r>
-              <a:rPr lang="en-US" dirty="0"/>
-              <a:t>Representing Text - TF-IDF (Term Frequency-Inverse Document Frequency)</a:t>
-            </a:r>
-          </a:p>
-        </p:txBody>
-      </p:sp>
-      <p:sp>
-        <p:nvSpPr>
-          <p:cNvPr id="3" name="Content Placeholder 2">
-            <a:extLst>
-              <a:ext uri="{FF2B5EF4-FFF2-40B4-BE49-F238E27FC236}">
-                <a16:creationId xmlns:a16="http://schemas.microsoft.com/office/drawing/2014/main" id="{6A705A9E-F80F-555B-0D7F-85673DABD754}"/>
-              </a:ext>
-            </a:extLst>
-          </p:cNvPr>
-          <p:cNvSpPr>
-            <a:spLocks noGrp="1"/>
-          </p:cNvSpPr>
-          <p:nvPr>
-            <p:ph idx="1"/>
-          </p:nvPr>
-        </p:nvSpPr>
-        <p:spPr/>
-        <p:txBody>
-          <a:bodyPr>
-            <a:normAutofit lnSpcReduction="10000"/>
-          </a:bodyPr>
-          <a:lstStyle/>
-          <a:p>
-            <a:pPr marL="0" indent="0">
-              <a:buNone/>
-            </a:pPr>
-            <a:r>
-              <a:rPr lang="en-US" b="1" dirty="0"/>
-              <a:t>Definition</a:t>
-            </a:r>
-          </a:p>
-          <a:p>
-            <a:r>
-              <a:rPr lang="en-US" dirty="0"/>
-              <a:t>TF-IDF is a statistical measure that evaluates the importance of a word in a document relative to a collection of documents (corpus). </a:t>
-            </a:r>
-          </a:p>
-          <a:p>
-            <a:r>
-              <a:rPr lang="en-US" dirty="0"/>
-              <a:t>It improves upon the basic Bag of Words model by weighing terms based on how unique they are to a specific document.</a:t>
-            </a:r>
-          </a:p>
-          <a:p>
-            <a:pPr>
-              <a:buNone/>
-            </a:pPr>
-            <a:r>
-              <a:rPr lang="en-US" b="1" dirty="0"/>
-              <a:t>Components</a:t>
-            </a:r>
-          </a:p>
-          <a:p>
-            <a:pPr>
-              <a:buFont typeface="+mj-lt"/>
-              <a:buAutoNum type="arabicPeriod"/>
-            </a:pPr>
-            <a:r>
-              <a:rPr lang="en-US" b="1" dirty="0"/>
-              <a:t>Term Frequency (TF): </a:t>
-            </a:r>
-            <a:r>
-              <a:rPr lang="en-US" dirty="0"/>
-              <a:t>Measures how frequently a term appears in a document </a:t>
-            </a:r>
-          </a:p>
-          <a:p>
-            <a:pPr lvl="1"/>
-            <a:r>
-              <a:rPr lang="en-US" dirty="0"/>
-              <a:t>TF(</a:t>
-            </a:r>
-            <a:r>
-              <a:rPr lang="en-US" dirty="0" err="1"/>
-              <a:t>t,d</a:t>
-            </a:r>
-            <a:r>
-              <a:rPr lang="en-US" dirty="0"/>
-              <a:t>) = (Number of times term t appears in document d) / (Total number of terms in document d)</a:t>
-            </a:r>
-          </a:p>
-          <a:p>
-            <a:pPr>
-              <a:buFont typeface="+mj-lt"/>
-              <a:buAutoNum type="arabicPeriod"/>
-            </a:pPr>
-            <a:r>
-              <a:rPr lang="en-US" b="1" dirty="0"/>
-              <a:t>Inverse Document Frequency (IDF): </a:t>
-            </a:r>
-            <a:r>
-              <a:rPr lang="en-US" dirty="0"/>
-              <a:t>Measures how important or unique a term is across all documents </a:t>
-            </a:r>
-          </a:p>
-          <a:p>
-            <a:pPr lvl="1"/>
-            <a:r>
-              <a:rPr lang="en-US" dirty="0"/>
-              <a:t>IDF(t) = log(Total number of documents / Number of documents containing term t)</a:t>
-            </a:r>
-          </a:p>
-          <a:p>
-            <a:pPr>
-              <a:buFont typeface="+mj-lt"/>
-              <a:buAutoNum type="arabicPeriod"/>
-            </a:pPr>
-            <a:r>
-              <a:rPr lang="en-US" b="1" dirty="0"/>
-              <a:t>TF-IDF score</a:t>
-            </a:r>
-            <a:r>
-              <a:rPr lang="en-US" dirty="0"/>
-              <a:t>: TF(</a:t>
-            </a:r>
-            <a:r>
-              <a:rPr lang="en-US" dirty="0" err="1"/>
-              <a:t>t,d</a:t>
-            </a:r>
-            <a:r>
-              <a:rPr lang="en-US" dirty="0"/>
-              <a:t>) × IDF(t)</a:t>
-            </a:r>
-          </a:p>
-          <a:p>
-            <a:endParaRPr lang="en-US" dirty="0"/>
-          </a:p>
-        </p:txBody>
-      </p:sp>
-    </p:spTree>
-    <p:extLst>
-      <p:ext uri="{BB962C8B-B14F-4D97-AF65-F5344CB8AC3E}">
-        <p14:creationId xmlns:p14="http://schemas.microsoft.com/office/powerpoint/2010/main" val="3088397267"/>
       </p:ext>
     </p:extLst>
   </p:cSld>
@@ -9076,36 +9416,6 @@
           </a:p>
         </p:txBody>
       </p:sp>
-      <p:pic>
-        <p:nvPicPr>
-          <p:cNvPr id="5" name="Picture 4">
-            <a:extLst>
-              <a:ext uri="{FF2B5EF4-FFF2-40B4-BE49-F238E27FC236}">
-                <a16:creationId xmlns:a16="http://schemas.microsoft.com/office/drawing/2014/main" id="{77EFD2CD-E234-52A1-28F0-23DD6EDC2473}"/>
-              </a:ext>
-            </a:extLst>
-          </p:cNvPr>
-          <p:cNvPicPr>
-            <a:picLocks noChangeAspect="1"/>
-          </p:cNvPicPr>
-          <p:nvPr/>
-        </p:nvPicPr>
-        <p:blipFill>
-          <a:blip r:embed="rId2"/>
-          <a:stretch>
-            <a:fillRect/>
-          </a:stretch>
-        </p:blipFill>
-        <p:spPr>
-          <a:xfrm>
-            <a:off x="3370364" y="3605386"/>
-            <a:ext cx="5451271" cy="2455091"/>
-          </a:xfrm>
-          <a:prstGeom prst="rect">
-            <a:avLst/>
-          </a:prstGeom>
-        </p:spPr>
-      </p:pic>
       <p:sp>
         <p:nvSpPr>
           <p:cNvPr id="7" name="TextBox 6">
@@ -9158,6 +9468,787 @@
 </file>
 
 <file path=ppt/slides/slide20.xml><?xml version="1.0" encoding="utf-8"?>
+<p:sld xmlns:a="http://schemas.openxmlformats.org/drawingml/2006/main" xmlns:r="http://schemas.openxmlformats.org/officeDocument/2006/relationships" xmlns:p="http://schemas.openxmlformats.org/presentationml/2006/main">
+  <p:cSld>
+    <p:spTree>
+      <p:nvGrpSpPr>
+        <p:cNvPr id="1" name="">
+          <a:extLst>
+            <a:ext uri="{FF2B5EF4-FFF2-40B4-BE49-F238E27FC236}">
+              <a16:creationId xmlns:a16="http://schemas.microsoft.com/office/drawing/2014/main" id="{B8430022-9432-9912-94BC-5702795E0A31}"/>
+            </a:ext>
+          </a:extLst>
+        </p:cNvPr>
+        <p:cNvGrpSpPr/>
+        <p:nvPr/>
+      </p:nvGrpSpPr>
+      <p:grpSpPr>
+        <a:xfrm>
+          <a:off x="0" y="0"/>
+          <a:ext cx="0" cy="0"/>
+          <a:chOff x="0" y="0"/>
+          <a:chExt cx="0" cy="0"/>
+        </a:xfrm>
+      </p:grpSpPr>
+      <p:sp>
+        <p:nvSpPr>
+          <p:cNvPr id="4" name="Title 3">
+            <a:extLst>
+              <a:ext uri="{FF2B5EF4-FFF2-40B4-BE49-F238E27FC236}">
+                <a16:creationId xmlns:a16="http://schemas.microsoft.com/office/drawing/2014/main" id="{4E06737A-DE4A-EA9B-F4E7-17C4DD7C966B}"/>
+              </a:ext>
+            </a:extLst>
+          </p:cNvPr>
+          <p:cNvSpPr>
+            <a:spLocks noGrp="1"/>
+          </p:cNvSpPr>
+          <p:nvPr>
+            <p:ph type="title"/>
+          </p:nvPr>
+        </p:nvSpPr>
+        <p:spPr/>
+        <p:txBody>
+          <a:bodyPr/>
+          <a:lstStyle/>
+          <a:p>
+            <a:r>
+              <a:rPr lang="en-US" dirty="0" err="1"/>
+              <a:t>BoW</a:t>
+            </a:r>
+            <a:r>
+              <a:rPr lang="en-US" dirty="0"/>
+              <a:t> Example</a:t>
+            </a:r>
+          </a:p>
+        </p:txBody>
+      </p:sp>
+      <p:sp>
+        <p:nvSpPr>
+          <p:cNvPr id="5" name="Content Placeholder 4">
+            <a:extLst>
+              <a:ext uri="{FF2B5EF4-FFF2-40B4-BE49-F238E27FC236}">
+                <a16:creationId xmlns:a16="http://schemas.microsoft.com/office/drawing/2014/main" id="{B3E2DD2C-FC6F-5E35-7761-75734B27494E}"/>
+              </a:ext>
+            </a:extLst>
+          </p:cNvPr>
+          <p:cNvSpPr>
+            <a:spLocks noGrp="1"/>
+          </p:cNvSpPr>
+          <p:nvPr>
+            <p:ph idx="1"/>
+          </p:nvPr>
+        </p:nvSpPr>
+        <p:spPr>
+          <a:xfrm>
+            <a:off x="838200" y="1706007"/>
+            <a:ext cx="10515600" cy="323059"/>
+          </a:xfrm>
+        </p:spPr>
+        <p:txBody>
+          <a:bodyPr>
+            <a:normAutofit fontScale="85000" lnSpcReduction="20000"/>
+          </a:bodyPr>
+          <a:lstStyle/>
+          <a:p>
+            <a:endParaRPr lang="en-US" dirty="0"/>
+          </a:p>
+        </p:txBody>
+      </p:sp>
+      <p:sp>
+        <p:nvSpPr>
+          <p:cNvPr id="3" name="TextBox 2">
+            <a:extLst>
+              <a:ext uri="{FF2B5EF4-FFF2-40B4-BE49-F238E27FC236}">
+                <a16:creationId xmlns:a16="http://schemas.microsoft.com/office/drawing/2014/main" id="{1AF4753F-59A7-EED5-D386-B6A6DB20562D}"/>
+              </a:ext>
+            </a:extLst>
+          </p:cNvPr>
+          <p:cNvSpPr txBox="1"/>
+          <p:nvPr/>
+        </p:nvSpPr>
+        <p:spPr>
+          <a:xfrm>
+            <a:off x="838199" y="2094073"/>
+            <a:ext cx="9687742" cy="2440796"/>
+          </a:xfrm>
+          <a:prstGeom prst="rect">
+            <a:avLst/>
+          </a:prstGeom>
+          <a:noFill/>
+        </p:spPr>
+        <p:txBody>
+          <a:bodyPr wrap="square">
+            <a:spAutoFit/>
+          </a:bodyPr>
+          <a:lstStyle/>
+          <a:p>
+            <a:pPr>
+              <a:lnSpc>
+                <a:spcPts val="1425"/>
+              </a:lnSpc>
+              <a:buNone/>
+            </a:pPr>
+            <a:r>
+              <a:rPr lang="en-US" b="0" dirty="0">
+                <a:solidFill>
+                  <a:srgbClr val="0000FF"/>
+                </a:solidFill>
+                <a:effectLst/>
+                <a:latin typeface="Consolas" panose="020B0609020204030204" pitchFamily="49" charset="0"/>
+              </a:rPr>
+              <a:t>from</a:t>
+            </a:r>
+            <a:r>
+              <a:rPr lang="en-US" b="0" dirty="0">
+                <a:solidFill>
+                  <a:srgbClr val="000000"/>
+                </a:solidFill>
+                <a:effectLst/>
+                <a:latin typeface="Consolas" panose="020B0609020204030204" pitchFamily="49" charset="0"/>
+              </a:rPr>
+              <a:t> </a:t>
+            </a:r>
+            <a:r>
+              <a:rPr lang="en-US" b="0" dirty="0" err="1">
+                <a:solidFill>
+                  <a:srgbClr val="000000"/>
+                </a:solidFill>
+                <a:effectLst/>
+                <a:latin typeface="Consolas" panose="020B0609020204030204" pitchFamily="49" charset="0"/>
+              </a:rPr>
+              <a:t>sklearn.feature_extraction.text</a:t>
+            </a:r>
+            <a:r>
+              <a:rPr lang="en-US" b="0" dirty="0">
+                <a:solidFill>
+                  <a:srgbClr val="000000"/>
+                </a:solidFill>
+                <a:effectLst/>
+                <a:latin typeface="Consolas" panose="020B0609020204030204" pitchFamily="49" charset="0"/>
+              </a:rPr>
+              <a:t> </a:t>
+            </a:r>
+            <a:r>
+              <a:rPr lang="en-US" b="0" dirty="0">
+                <a:solidFill>
+                  <a:srgbClr val="0000FF"/>
+                </a:solidFill>
+                <a:effectLst/>
+                <a:latin typeface="Consolas" panose="020B0609020204030204" pitchFamily="49" charset="0"/>
+              </a:rPr>
+              <a:t>import</a:t>
+            </a:r>
+            <a:r>
+              <a:rPr lang="en-US" b="0" dirty="0">
+                <a:solidFill>
+                  <a:srgbClr val="000000"/>
+                </a:solidFill>
+                <a:effectLst/>
+                <a:latin typeface="Consolas" panose="020B0609020204030204" pitchFamily="49" charset="0"/>
+              </a:rPr>
+              <a:t> </a:t>
+            </a:r>
+            <a:r>
+              <a:rPr lang="en-US" b="0" dirty="0" err="1">
+                <a:solidFill>
+                  <a:srgbClr val="000000"/>
+                </a:solidFill>
+                <a:effectLst/>
+                <a:latin typeface="Consolas" panose="020B0609020204030204" pitchFamily="49" charset="0"/>
+              </a:rPr>
+              <a:t>CountVectorizer</a:t>
+            </a:r>
+            <a:endParaRPr lang="en-US" b="0" dirty="0">
+              <a:solidFill>
+                <a:srgbClr val="000000"/>
+              </a:solidFill>
+              <a:effectLst/>
+              <a:latin typeface="Consolas" panose="020B0609020204030204" pitchFamily="49" charset="0"/>
+            </a:endParaRPr>
+          </a:p>
+          <a:p>
+            <a:pPr>
+              <a:lnSpc>
+                <a:spcPts val="1425"/>
+              </a:lnSpc>
+              <a:buNone/>
+            </a:pPr>
+            <a:br>
+              <a:rPr lang="en-US" b="0" dirty="0">
+                <a:solidFill>
+                  <a:srgbClr val="000000"/>
+                </a:solidFill>
+                <a:effectLst/>
+                <a:latin typeface="Consolas" panose="020B0609020204030204" pitchFamily="49" charset="0"/>
+              </a:rPr>
+            </a:br>
+            <a:r>
+              <a:rPr lang="en-US" b="0" dirty="0">
+                <a:solidFill>
+                  <a:srgbClr val="000000"/>
+                </a:solidFill>
+                <a:effectLst/>
+                <a:latin typeface="Consolas" panose="020B0609020204030204" pitchFamily="49" charset="0"/>
+              </a:rPr>
+              <a:t>corpus = [</a:t>
+            </a:r>
+          </a:p>
+          <a:p>
+            <a:pPr>
+              <a:lnSpc>
+                <a:spcPts val="1425"/>
+              </a:lnSpc>
+              <a:buNone/>
+            </a:pPr>
+            <a:r>
+              <a:rPr lang="en-US" b="0" dirty="0">
+                <a:solidFill>
+                  <a:srgbClr val="000000"/>
+                </a:solidFill>
+                <a:effectLst/>
+                <a:latin typeface="Consolas" panose="020B0609020204030204" pitchFamily="49" charset="0"/>
+              </a:rPr>
+              <a:t>    </a:t>
+            </a:r>
+            <a:r>
+              <a:rPr lang="en-US" b="0" dirty="0">
+                <a:solidFill>
+                  <a:srgbClr val="A31515"/>
+                </a:solidFill>
+                <a:effectLst/>
+                <a:latin typeface="Consolas" panose="020B0609020204030204" pitchFamily="49" charset="0"/>
+              </a:rPr>
+              <a:t>"Large language models revolutionize business."</a:t>
+            </a:r>
+            <a:r>
+              <a:rPr lang="en-US" b="0" dirty="0">
+                <a:solidFill>
+                  <a:srgbClr val="000000"/>
+                </a:solidFill>
+                <a:effectLst/>
+                <a:latin typeface="Consolas" panose="020B0609020204030204" pitchFamily="49" charset="0"/>
+              </a:rPr>
+              <a:t>,</a:t>
+            </a:r>
+          </a:p>
+          <a:p>
+            <a:pPr>
+              <a:lnSpc>
+                <a:spcPts val="1425"/>
+              </a:lnSpc>
+              <a:buNone/>
+            </a:pPr>
+            <a:r>
+              <a:rPr lang="en-US" b="0" dirty="0">
+                <a:solidFill>
+                  <a:srgbClr val="000000"/>
+                </a:solidFill>
+                <a:effectLst/>
+                <a:latin typeface="Consolas" panose="020B0609020204030204" pitchFamily="49" charset="0"/>
+              </a:rPr>
+              <a:t>    </a:t>
+            </a:r>
+            <a:r>
+              <a:rPr lang="en-US" b="0" dirty="0">
+                <a:solidFill>
+                  <a:srgbClr val="A31515"/>
+                </a:solidFill>
+                <a:effectLst/>
+                <a:latin typeface="Consolas" panose="020B0609020204030204" pitchFamily="49" charset="0"/>
+              </a:rPr>
+              <a:t>"Business applications benefit from AI."</a:t>
+            </a:r>
+            <a:r>
+              <a:rPr lang="en-US" b="0" dirty="0">
+                <a:solidFill>
+                  <a:srgbClr val="000000"/>
+                </a:solidFill>
+                <a:effectLst/>
+                <a:latin typeface="Consolas" panose="020B0609020204030204" pitchFamily="49" charset="0"/>
+              </a:rPr>
+              <a:t>,</a:t>
+            </a:r>
+          </a:p>
+          <a:p>
+            <a:pPr>
+              <a:lnSpc>
+                <a:spcPts val="1425"/>
+              </a:lnSpc>
+              <a:buNone/>
+            </a:pPr>
+            <a:r>
+              <a:rPr lang="en-US" b="0" dirty="0">
+                <a:solidFill>
+                  <a:srgbClr val="000000"/>
+                </a:solidFill>
+                <a:effectLst/>
+                <a:latin typeface="Consolas" panose="020B0609020204030204" pitchFamily="49" charset="0"/>
+              </a:rPr>
+              <a:t>    </a:t>
+            </a:r>
+            <a:r>
+              <a:rPr lang="en-US" b="0" dirty="0">
+                <a:solidFill>
+                  <a:srgbClr val="A31515"/>
+                </a:solidFill>
+                <a:effectLst/>
+                <a:latin typeface="Consolas" panose="020B0609020204030204" pitchFamily="49" charset="0"/>
+              </a:rPr>
+              <a:t>"Language models learn from text data."</a:t>
+            </a:r>
+            <a:endParaRPr lang="en-US" b="0" dirty="0">
+              <a:solidFill>
+                <a:srgbClr val="000000"/>
+              </a:solidFill>
+              <a:effectLst/>
+              <a:latin typeface="Consolas" panose="020B0609020204030204" pitchFamily="49" charset="0"/>
+            </a:endParaRPr>
+          </a:p>
+          <a:p>
+            <a:pPr>
+              <a:lnSpc>
+                <a:spcPts val="1425"/>
+              </a:lnSpc>
+              <a:buNone/>
+            </a:pPr>
+            <a:r>
+              <a:rPr lang="en-US" b="0" dirty="0">
+                <a:solidFill>
+                  <a:srgbClr val="000000"/>
+                </a:solidFill>
+                <a:effectLst/>
+                <a:latin typeface="Consolas" panose="020B0609020204030204" pitchFamily="49" charset="0"/>
+              </a:rPr>
+              <a:t>]</a:t>
+            </a:r>
+          </a:p>
+          <a:p>
+            <a:pPr>
+              <a:lnSpc>
+                <a:spcPts val="1425"/>
+              </a:lnSpc>
+              <a:buNone/>
+            </a:pPr>
+            <a:br>
+              <a:rPr lang="en-US" b="0" dirty="0">
+                <a:solidFill>
+                  <a:srgbClr val="000000"/>
+                </a:solidFill>
+                <a:effectLst/>
+                <a:latin typeface="Consolas" panose="020B0609020204030204" pitchFamily="49" charset="0"/>
+              </a:rPr>
+            </a:br>
+            <a:r>
+              <a:rPr lang="en-US" b="0" dirty="0">
+                <a:solidFill>
+                  <a:srgbClr val="000000"/>
+                </a:solidFill>
+                <a:effectLst/>
+                <a:latin typeface="Consolas" panose="020B0609020204030204" pitchFamily="49" charset="0"/>
+              </a:rPr>
+              <a:t>vectorizer = </a:t>
+            </a:r>
+            <a:r>
+              <a:rPr lang="en-US" b="0" dirty="0" err="1">
+                <a:solidFill>
+                  <a:srgbClr val="000000"/>
+                </a:solidFill>
+                <a:effectLst/>
+                <a:latin typeface="Consolas" panose="020B0609020204030204" pitchFamily="49" charset="0"/>
+              </a:rPr>
+              <a:t>CountVectorizer</a:t>
+            </a:r>
+            <a:r>
+              <a:rPr lang="en-US" b="0" dirty="0">
+                <a:solidFill>
+                  <a:srgbClr val="000000"/>
+                </a:solidFill>
+                <a:effectLst/>
+                <a:latin typeface="Consolas" panose="020B0609020204030204" pitchFamily="49" charset="0"/>
+              </a:rPr>
+              <a:t>()</a:t>
+            </a:r>
+          </a:p>
+          <a:p>
+            <a:pPr>
+              <a:lnSpc>
+                <a:spcPts val="1425"/>
+              </a:lnSpc>
+              <a:buNone/>
+            </a:pPr>
+            <a:r>
+              <a:rPr lang="en-US" b="0" dirty="0">
+                <a:solidFill>
+                  <a:srgbClr val="000000"/>
+                </a:solidFill>
+                <a:effectLst/>
+                <a:latin typeface="Consolas" panose="020B0609020204030204" pitchFamily="49" charset="0"/>
+              </a:rPr>
+              <a:t>X = </a:t>
+            </a:r>
+            <a:r>
+              <a:rPr lang="en-US" b="0" dirty="0" err="1">
+                <a:solidFill>
+                  <a:srgbClr val="000000"/>
+                </a:solidFill>
+                <a:effectLst/>
+                <a:latin typeface="Consolas" panose="020B0609020204030204" pitchFamily="49" charset="0"/>
+              </a:rPr>
+              <a:t>vectorizer.fit_transform</a:t>
+            </a:r>
+            <a:r>
+              <a:rPr lang="en-US" b="0" dirty="0">
+                <a:solidFill>
+                  <a:srgbClr val="000000"/>
+                </a:solidFill>
+                <a:effectLst/>
+                <a:latin typeface="Consolas" panose="020B0609020204030204" pitchFamily="49" charset="0"/>
+              </a:rPr>
+              <a:t>(corpus)</a:t>
+            </a:r>
+          </a:p>
+          <a:p>
+            <a:pPr>
+              <a:lnSpc>
+                <a:spcPts val="1425"/>
+              </a:lnSpc>
+              <a:buNone/>
+            </a:pPr>
+            <a:br>
+              <a:rPr lang="en-US" b="0" dirty="0">
+                <a:solidFill>
+                  <a:srgbClr val="000000"/>
+                </a:solidFill>
+                <a:effectLst/>
+                <a:latin typeface="Consolas" panose="020B0609020204030204" pitchFamily="49" charset="0"/>
+              </a:rPr>
+            </a:br>
+            <a:r>
+              <a:rPr lang="en-US" b="0" dirty="0">
+                <a:solidFill>
+                  <a:srgbClr val="000000"/>
+                </a:solidFill>
+                <a:effectLst/>
+                <a:latin typeface="Consolas" panose="020B0609020204030204" pitchFamily="49" charset="0"/>
+              </a:rPr>
+              <a:t>print(</a:t>
+            </a:r>
+            <a:r>
+              <a:rPr lang="en-US" b="0" dirty="0" err="1">
+                <a:solidFill>
+                  <a:srgbClr val="000000"/>
+                </a:solidFill>
+                <a:effectLst/>
+                <a:latin typeface="Consolas" panose="020B0609020204030204" pitchFamily="49" charset="0"/>
+              </a:rPr>
+              <a:t>vectorizer.get_feature_names_out</a:t>
+            </a:r>
+            <a:r>
+              <a:rPr lang="en-US" b="0" dirty="0">
+                <a:solidFill>
+                  <a:srgbClr val="000000"/>
+                </a:solidFill>
+                <a:effectLst/>
+                <a:latin typeface="Consolas" panose="020B0609020204030204" pitchFamily="49" charset="0"/>
+              </a:rPr>
+              <a:t>())</a:t>
+            </a:r>
+          </a:p>
+          <a:p>
+            <a:pPr>
+              <a:lnSpc>
+                <a:spcPts val="1425"/>
+              </a:lnSpc>
+            </a:pPr>
+            <a:r>
+              <a:rPr lang="en-US" b="0" dirty="0">
+                <a:solidFill>
+                  <a:srgbClr val="000000"/>
+                </a:solidFill>
+                <a:effectLst/>
+                <a:latin typeface="Consolas" panose="020B0609020204030204" pitchFamily="49" charset="0"/>
+              </a:rPr>
+              <a:t>print(</a:t>
+            </a:r>
+            <a:r>
+              <a:rPr lang="en-US" b="0" dirty="0" err="1">
+                <a:solidFill>
+                  <a:srgbClr val="000000"/>
+                </a:solidFill>
+                <a:effectLst/>
+                <a:latin typeface="Consolas" panose="020B0609020204030204" pitchFamily="49" charset="0"/>
+              </a:rPr>
+              <a:t>X.toarray</a:t>
+            </a:r>
+            <a:r>
+              <a:rPr lang="en-US" b="0" dirty="0">
+                <a:solidFill>
+                  <a:srgbClr val="000000"/>
+                </a:solidFill>
+                <a:effectLst/>
+                <a:latin typeface="Consolas" panose="020B0609020204030204" pitchFamily="49" charset="0"/>
+              </a:rPr>
+              <a:t>())</a:t>
+            </a:r>
+          </a:p>
+        </p:txBody>
+      </p:sp>
+      <p:sp>
+        <p:nvSpPr>
+          <p:cNvPr id="9" name="TextBox 8">
+            <a:extLst>
+              <a:ext uri="{FF2B5EF4-FFF2-40B4-BE49-F238E27FC236}">
+                <a16:creationId xmlns:a16="http://schemas.microsoft.com/office/drawing/2014/main" id="{963B9F29-7D58-0123-A6FF-C0BD1D88DED2}"/>
+              </a:ext>
+            </a:extLst>
+          </p:cNvPr>
+          <p:cNvSpPr txBox="1"/>
+          <p:nvPr/>
+        </p:nvSpPr>
+        <p:spPr>
+          <a:xfrm>
+            <a:off x="838199" y="5018204"/>
+            <a:ext cx="10813869" cy="1200329"/>
+          </a:xfrm>
+          <a:prstGeom prst="rect">
+            <a:avLst/>
+          </a:prstGeom>
+          <a:noFill/>
+        </p:spPr>
+        <p:txBody>
+          <a:bodyPr wrap="square">
+            <a:spAutoFit/>
+          </a:bodyPr>
+          <a:lstStyle/>
+          <a:p>
+            <a:r>
+              <a:rPr lang="en-US" dirty="0"/>
+              <a:t>['ai' 'applications' 'benefit' 'business' 'data' 'from' 'language' 'large' 'learn' 'models' 'revolutionize' 'text’]</a:t>
+            </a:r>
+          </a:p>
+          <a:p>
+            <a:r>
+              <a:rPr lang="en-US" dirty="0"/>
+              <a:t>[[0 0 0 1 0 0 1 1 0 1 1 0] </a:t>
+            </a:r>
+          </a:p>
+          <a:p>
+            <a:r>
+              <a:rPr lang="en-US" dirty="0"/>
+              <a:t>[1 1 1 1 0 1 0 0 0 0 0 0] </a:t>
+            </a:r>
+          </a:p>
+          <a:p>
+            <a:r>
+              <a:rPr lang="en-US" dirty="0"/>
+              <a:t>[0 0 0 0 1 1 1 0 1 1 0 1]]</a:t>
+            </a:r>
+          </a:p>
+        </p:txBody>
+      </p:sp>
+    </p:spTree>
+    <p:extLst>
+      <p:ext uri="{BB962C8B-B14F-4D97-AF65-F5344CB8AC3E}">
+        <p14:creationId xmlns:p14="http://schemas.microsoft.com/office/powerpoint/2010/main" val="1314172448"/>
+      </p:ext>
+    </p:extLst>
+  </p:cSld>
+  <p:clrMapOvr>
+    <a:masterClrMapping/>
+  </p:clrMapOvr>
+</p:sld>
+</file>
+
+<file path=ppt/slides/slide21.xml><?xml version="1.0" encoding="utf-8"?>
+<p:sld xmlns:a="http://schemas.openxmlformats.org/drawingml/2006/main" xmlns:r="http://schemas.openxmlformats.org/officeDocument/2006/relationships" xmlns:p="http://schemas.openxmlformats.org/presentationml/2006/main">
+  <p:cSld>
+    <p:spTree>
+      <p:nvGrpSpPr>
+        <p:cNvPr id="1" name=""/>
+        <p:cNvGrpSpPr/>
+        <p:nvPr/>
+      </p:nvGrpSpPr>
+      <p:grpSpPr>
+        <a:xfrm>
+          <a:off x="0" y="0"/>
+          <a:ext cx="0" cy="0"/>
+          <a:chOff x="0" y="0"/>
+          <a:chExt cx="0" cy="0"/>
+        </a:xfrm>
+      </p:grpSpPr>
+      <p:sp>
+        <p:nvSpPr>
+          <p:cNvPr id="2" name="Title 1">
+            <a:extLst>
+              <a:ext uri="{FF2B5EF4-FFF2-40B4-BE49-F238E27FC236}">
+                <a16:creationId xmlns:a16="http://schemas.microsoft.com/office/drawing/2014/main" id="{E9C280EE-865C-D7D4-DFE1-0BC32081155C}"/>
+              </a:ext>
+            </a:extLst>
+          </p:cNvPr>
+          <p:cNvSpPr>
+            <a:spLocks noGrp="1"/>
+          </p:cNvSpPr>
+          <p:nvPr>
+            <p:ph type="title"/>
+          </p:nvPr>
+        </p:nvSpPr>
+        <p:spPr/>
+        <p:txBody>
+          <a:bodyPr>
+            <a:normAutofit fontScale="90000"/>
+          </a:bodyPr>
+          <a:lstStyle/>
+          <a:p>
+            <a:r>
+              <a:rPr lang="en-US" dirty="0"/>
+              <a:t>Representing Text - TF-IDF (Term Frequency-Inverse Document Frequency)</a:t>
+            </a:r>
+          </a:p>
+        </p:txBody>
+      </p:sp>
+      <p:sp>
+        <p:nvSpPr>
+          <p:cNvPr id="3" name="Content Placeholder 2">
+            <a:extLst>
+              <a:ext uri="{FF2B5EF4-FFF2-40B4-BE49-F238E27FC236}">
+                <a16:creationId xmlns:a16="http://schemas.microsoft.com/office/drawing/2014/main" id="{6A705A9E-F80F-555B-0D7F-85673DABD754}"/>
+              </a:ext>
+            </a:extLst>
+          </p:cNvPr>
+          <p:cNvSpPr>
+            <a:spLocks noGrp="1"/>
+          </p:cNvSpPr>
+          <p:nvPr>
+            <p:ph idx="1"/>
+          </p:nvPr>
+        </p:nvSpPr>
+        <p:spPr/>
+        <p:txBody>
+          <a:bodyPr>
+            <a:normAutofit lnSpcReduction="10000"/>
+          </a:bodyPr>
+          <a:lstStyle/>
+          <a:p>
+            <a:pPr marL="0" indent="0">
+              <a:buNone/>
+            </a:pPr>
+            <a:r>
+              <a:rPr lang="en-US" b="1" dirty="0"/>
+              <a:t>Definition</a:t>
+            </a:r>
+          </a:p>
+          <a:p>
+            <a:r>
+              <a:rPr lang="en-US" dirty="0"/>
+              <a:t>TF-IDF is a statistical measure that evaluates the importance of a word in a document relative to a collection of documents (corpus). </a:t>
+            </a:r>
+          </a:p>
+          <a:p>
+            <a:r>
+              <a:rPr lang="en-US" dirty="0"/>
+              <a:t>It improves upon the basic Bag of Words model by weighing terms based on how unique they are to a specific document.</a:t>
+            </a:r>
+          </a:p>
+          <a:p>
+            <a:pPr>
+              <a:buNone/>
+            </a:pPr>
+            <a:r>
+              <a:rPr lang="en-US" b="1" dirty="0"/>
+              <a:t>Components</a:t>
+            </a:r>
+          </a:p>
+          <a:p>
+            <a:pPr>
+              <a:buFont typeface="+mj-lt"/>
+              <a:buAutoNum type="arabicPeriod"/>
+            </a:pPr>
+            <a:r>
+              <a:rPr lang="en-US" b="1" dirty="0"/>
+              <a:t>Term Frequency (TF): </a:t>
+            </a:r>
+            <a:r>
+              <a:rPr lang="en-US" dirty="0"/>
+              <a:t>Measures how frequently a term appears in a document </a:t>
+            </a:r>
+          </a:p>
+          <a:p>
+            <a:pPr lvl="1"/>
+            <a:r>
+              <a:rPr lang="en-US" dirty="0"/>
+              <a:t>TF(</a:t>
+            </a:r>
+            <a:r>
+              <a:rPr lang="en-US" dirty="0" err="1"/>
+              <a:t>t,d</a:t>
+            </a:r>
+            <a:r>
+              <a:rPr lang="en-US" dirty="0"/>
+              <a:t>) = (Number of times term t appears in document d) / (Total number of terms in document d)</a:t>
+            </a:r>
+          </a:p>
+          <a:p>
+            <a:pPr>
+              <a:buFont typeface="+mj-lt"/>
+              <a:buAutoNum type="arabicPeriod"/>
+            </a:pPr>
+            <a:r>
+              <a:rPr lang="en-US" b="1" dirty="0"/>
+              <a:t>Inverse Document Frequency (IDF): </a:t>
+            </a:r>
+            <a:r>
+              <a:rPr lang="en-US" dirty="0"/>
+              <a:t>Measures how important or unique a term is across all documents </a:t>
+            </a:r>
+          </a:p>
+          <a:p>
+            <a:pPr lvl="1"/>
+            <a:r>
+              <a:rPr lang="en-US" dirty="0"/>
+              <a:t>IDF(t) = log(Total number of documents / Number of documents containing term t)</a:t>
+            </a:r>
+          </a:p>
+          <a:p>
+            <a:pPr>
+              <a:buFont typeface="+mj-lt"/>
+              <a:buAutoNum type="arabicPeriod"/>
+            </a:pPr>
+            <a:r>
+              <a:rPr lang="en-US" b="1" dirty="0"/>
+              <a:t>TF-IDF score</a:t>
+            </a:r>
+            <a:r>
+              <a:rPr lang="en-US" dirty="0"/>
+              <a:t>: TF(</a:t>
+            </a:r>
+            <a:r>
+              <a:rPr lang="en-US" dirty="0" err="1"/>
+              <a:t>t,d</a:t>
+            </a:r>
+            <a:r>
+              <a:rPr lang="en-US" dirty="0"/>
+              <a:t>) × IDF(t)</a:t>
+            </a:r>
+          </a:p>
+          <a:p>
+            <a:endParaRPr lang="en-US" dirty="0"/>
+          </a:p>
+        </p:txBody>
+      </p:sp>
+    </p:spTree>
+    <p:extLst>
+      <p:ext uri="{BB962C8B-B14F-4D97-AF65-F5344CB8AC3E}">
+        <p14:creationId xmlns:p14="http://schemas.microsoft.com/office/powerpoint/2010/main" val="3088397267"/>
+      </p:ext>
+    </p:extLst>
+  </p:cSld>
+  <p:clrMapOvr>
+    <a:masterClrMapping/>
+  </p:clrMapOvr>
+</p:sld>
+</file>
+
+<file path=ppt/slides/slide22.xml><?xml version="1.0" encoding="utf-8"?>
 <p:sld xmlns:a="http://schemas.openxmlformats.org/drawingml/2006/main" xmlns:r="http://schemas.openxmlformats.org/officeDocument/2006/relationships" xmlns:p="http://schemas.openxmlformats.org/presentationml/2006/main">
   <p:cSld>
     <p:spTree>
@@ -9364,7 +10455,7 @@
 </p:sld>
 </file>
 
-<file path=ppt/slides/slide21.xml><?xml version="1.0" encoding="utf-8"?>
+<file path=ppt/slides/slide23.xml><?xml version="1.0" encoding="utf-8"?>
 <p:sld xmlns:a="http://schemas.openxmlformats.org/drawingml/2006/main" xmlns:r="http://schemas.openxmlformats.org/officeDocument/2006/relationships" xmlns:p="http://schemas.openxmlformats.org/presentationml/2006/main">
   <p:cSld>
     <p:spTree>
@@ -9559,7 +10650,7 @@
 </p:sld>
 </file>
 
-<file path=ppt/slides/slide22.xml><?xml version="1.0" encoding="utf-8"?>
+<file path=ppt/slides/slide24.xml><?xml version="1.0" encoding="utf-8"?>
 <p:sld xmlns:a="http://schemas.openxmlformats.org/drawingml/2006/main" xmlns:r="http://schemas.openxmlformats.org/officeDocument/2006/relationships" xmlns:p="http://schemas.openxmlformats.org/presentationml/2006/main">
   <p:cSld>
     <p:spTree>
@@ -10228,7 +11319,7 @@
 </p:sld>
 </file>
 
-<file path=ppt/slides/slide23.xml><?xml version="1.0" encoding="utf-8"?>
+<file path=ppt/slides/slide25.xml><?xml version="1.0" encoding="utf-8"?>
 <p:sld xmlns:a="http://schemas.openxmlformats.org/drawingml/2006/main" xmlns:r="http://schemas.openxmlformats.org/officeDocument/2006/relationships" xmlns:p="http://schemas.openxmlformats.org/presentationml/2006/main">
   <p:cSld>
     <p:spTree>
@@ -10321,7 +11412,7 @@
 </p:sld>
 </file>
 
-<file path=ppt/slides/slide24.xml><?xml version="1.0" encoding="utf-8"?>
+<file path=ppt/slides/slide26.xml><?xml version="1.0" encoding="utf-8"?>
 <p:sld xmlns:a="http://schemas.openxmlformats.org/drawingml/2006/main" xmlns:r="http://schemas.openxmlformats.org/officeDocument/2006/relationships" xmlns:p="http://schemas.openxmlformats.org/presentationml/2006/main">
   <p:cSld>
     <p:spTree>
@@ -10688,7 +11779,7 @@
 </p:sld>
 </file>
 
-<file path=ppt/slides/slide25.xml><?xml version="1.0" encoding="utf-8"?>
+<file path=ppt/slides/slide27.xml><?xml version="1.0" encoding="utf-8"?>
 <p:sld xmlns:a="http://schemas.openxmlformats.org/drawingml/2006/main" xmlns:r="http://schemas.openxmlformats.org/officeDocument/2006/relationships" xmlns:p="http://schemas.openxmlformats.org/presentationml/2006/main">
   <p:cSld>
     <p:spTree>
@@ -12975,7 +14066,7 @@
 </p:sld>
 </file>
 
-<file path=ppt/slides/slide26.xml><?xml version="1.0" encoding="utf-8"?>
+<file path=ppt/slides/slide28.xml><?xml version="1.0" encoding="utf-8"?>
 <p:sld xmlns:a="http://schemas.openxmlformats.org/drawingml/2006/main" xmlns:r="http://schemas.openxmlformats.org/officeDocument/2006/relationships" xmlns:p="http://schemas.openxmlformats.org/presentationml/2006/main">
   <p:cSld>
     <p:spTree>
@@ -14864,7 +15955,7 @@
 </p:sld>
 </file>
 
-<file path=ppt/slides/slide27.xml><?xml version="1.0" encoding="utf-8"?>
+<file path=ppt/slides/slide29.xml><?xml version="1.0" encoding="utf-8"?>
 <p:sld xmlns:a="http://schemas.openxmlformats.org/drawingml/2006/main" xmlns:r="http://schemas.openxmlformats.org/officeDocument/2006/relationships" xmlns:p="http://schemas.openxmlformats.org/presentationml/2006/main">
   <p:cSld>
     <p:spTree>
@@ -16880,7 +17971,389 @@
 </p:sld>
 </file>
 
-<file path=ppt/slides/slide28.xml><?xml version="1.0" encoding="utf-8"?>
+<file path=ppt/slides/slide3.xml><?xml version="1.0" encoding="utf-8"?>
+<p:sld xmlns:a="http://schemas.openxmlformats.org/drawingml/2006/main" xmlns:r="http://schemas.openxmlformats.org/officeDocument/2006/relationships" xmlns:p="http://schemas.openxmlformats.org/presentationml/2006/main">
+  <p:cSld>
+    <p:spTree>
+      <p:nvGrpSpPr>
+        <p:cNvPr id="1" name=""/>
+        <p:cNvGrpSpPr/>
+        <p:nvPr/>
+      </p:nvGrpSpPr>
+      <p:grpSpPr>
+        <a:xfrm>
+          <a:off x="0" y="0"/>
+          <a:ext cx="0" cy="0"/>
+          <a:chOff x="0" y="0"/>
+          <a:chExt cx="0" cy="0"/>
+        </a:xfrm>
+      </p:grpSpPr>
+      <p:pic>
+        <p:nvPicPr>
+          <p:cNvPr id="1026" name="Picture 2" descr="history of NLP timeline">
+            <a:extLst>
+              <a:ext uri="{FF2B5EF4-FFF2-40B4-BE49-F238E27FC236}">
+                <a16:creationId xmlns:a16="http://schemas.microsoft.com/office/drawing/2014/main" id="{D33EEC85-6378-500B-038C-970B7E6443A9}"/>
+              </a:ext>
+            </a:extLst>
+          </p:cNvPr>
+          <p:cNvPicPr>
+            <a:picLocks noChangeAspect="1" noChangeArrowheads="1"/>
+          </p:cNvPicPr>
+          <p:nvPr/>
+        </p:nvPicPr>
+        <p:blipFill>
+          <a:blip r:embed="rId2">
+            <a:extLst>
+              <a:ext uri="{28A0092B-C50C-407E-A947-70E740481C1C}">
+                <a14:useLocalDpi xmlns:a14="http://schemas.microsoft.com/office/drawing/2010/main" val="0"/>
+              </a:ext>
+            </a:extLst>
+          </a:blip>
+          <a:srcRect/>
+          <a:stretch>
+            <a:fillRect/>
+          </a:stretch>
+        </p:blipFill>
+        <p:spPr bwMode="auto">
+          <a:xfrm>
+            <a:off x="5060093" y="1706006"/>
+            <a:ext cx="7006986" cy="3144021"/>
+          </a:xfrm>
+          <a:prstGeom prst="rect">
+            <a:avLst/>
+          </a:prstGeom>
+          <a:noFill/>
+          <a:extLst>
+            <a:ext uri="{909E8E84-426E-40DD-AFC4-6F175D3DCCD1}">
+              <a14:hiddenFill xmlns:a14="http://schemas.microsoft.com/office/drawing/2010/main">
+                <a:solidFill>
+                  <a:srgbClr val="FFFFFF"/>
+                </a:solidFill>
+              </a14:hiddenFill>
+            </a:ext>
+          </a:extLst>
+        </p:spPr>
+      </p:pic>
+      <p:sp>
+        <p:nvSpPr>
+          <p:cNvPr id="2" name="Title 1">
+            <a:extLst>
+              <a:ext uri="{FF2B5EF4-FFF2-40B4-BE49-F238E27FC236}">
+                <a16:creationId xmlns:a16="http://schemas.microsoft.com/office/drawing/2014/main" id="{40D5681E-8023-8C0D-91C0-DD0674DE5C9B}"/>
+              </a:ext>
+            </a:extLst>
+          </p:cNvPr>
+          <p:cNvSpPr>
+            <a:spLocks noGrp="1"/>
+          </p:cNvSpPr>
+          <p:nvPr>
+            <p:ph type="title"/>
+          </p:nvPr>
+        </p:nvSpPr>
+        <p:spPr/>
+        <p:txBody>
+          <a:bodyPr>
+            <a:normAutofit/>
+          </a:bodyPr>
+          <a:lstStyle/>
+          <a:p>
+            <a:r>
+              <a:rPr lang="en-US" b="1" dirty="0"/>
+              <a:t>Historical Development of NLP</a:t>
+            </a:r>
+            <a:endParaRPr lang="en-US" dirty="0"/>
+          </a:p>
+        </p:txBody>
+      </p:sp>
+      <p:sp>
+        <p:nvSpPr>
+          <p:cNvPr id="3" name="Content Placeholder 2">
+            <a:extLst>
+              <a:ext uri="{FF2B5EF4-FFF2-40B4-BE49-F238E27FC236}">
+                <a16:creationId xmlns:a16="http://schemas.microsoft.com/office/drawing/2014/main" id="{94D699DC-EB35-242E-ABB5-8CF78304E6B9}"/>
+              </a:ext>
+            </a:extLst>
+          </p:cNvPr>
+          <p:cNvSpPr>
+            <a:spLocks noGrp="1"/>
+          </p:cNvSpPr>
+          <p:nvPr>
+            <p:ph idx="1"/>
+          </p:nvPr>
+        </p:nvSpPr>
+        <p:spPr/>
+        <p:txBody>
+          <a:bodyPr>
+            <a:normAutofit fontScale="40000" lnSpcReduction="20000"/>
+          </a:bodyPr>
+          <a:lstStyle/>
+          <a:p>
+            <a:pPr>
+              <a:buNone/>
+            </a:pPr>
+            <a:r>
+              <a:rPr lang="en-US" dirty="0"/>
+              <a:t>NLP has evolved dramatically over the decades:</a:t>
+            </a:r>
+          </a:p>
+          <a:p>
+            <a:pPr>
+              <a:buNone/>
+            </a:pPr>
+            <a:r>
+              <a:rPr lang="en-US" b="1" dirty="0"/>
+              <a:t>1950s-1960s: Rule-Based Approaches</a:t>
+            </a:r>
+            <a:endParaRPr lang="en-US" dirty="0"/>
+          </a:p>
+          <a:p>
+            <a:pPr indent="-117475">
+              <a:buFont typeface="Arial" panose="020B0604020202020204" pitchFamily="34" charset="0"/>
+              <a:buChar char="•"/>
+            </a:pPr>
+            <a:r>
+              <a:rPr lang="en-US" dirty="0"/>
+              <a:t>Focus on machine translation during the Cold War</a:t>
+            </a:r>
+          </a:p>
+          <a:p>
+            <a:pPr indent="-117475">
+              <a:buFont typeface="Arial" panose="020B0604020202020204" pitchFamily="34" charset="0"/>
+              <a:buChar char="•"/>
+            </a:pPr>
+            <a:r>
+              <a:rPr lang="en-US" dirty="0"/>
+              <a:t>Primitive rule-based systems with hand-crafted grammars</a:t>
+            </a:r>
+          </a:p>
+          <a:p>
+            <a:pPr indent="-117475">
+              <a:buFont typeface="Arial" panose="020B0604020202020204" pitchFamily="34" charset="0"/>
+              <a:buChar char="•"/>
+            </a:pPr>
+            <a:r>
+              <a:rPr lang="en-US" dirty="0"/>
+              <a:t>Limited by the complexity of language rules</a:t>
+            </a:r>
+          </a:p>
+          <a:p>
+            <a:pPr>
+              <a:buNone/>
+            </a:pPr>
+            <a:r>
+              <a:rPr lang="en-US" b="1" dirty="0"/>
+              <a:t>1970s-1980s: Statistical Revolution Begins</a:t>
+            </a:r>
+            <a:endParaRPr lang="en-US" dirty="0"/>
+          </a:p>
+          <a:p>
+            <a:pPr indent="-117475">
+              <a:buFont typeface="Arial" panose="020B0604020202020204" pitchFamily="34" charset="0"/>
+              <a:buChar char="•"/>
+            </a:pPr>
+            <a:r>
+              <a:rPr lang="en-US" dirty="0"/>
+              <a:t>Introduction of probabilistic models</a:t>
+            </a:r>
+          </a:p>
+          <a:p>
+            <a:pPr indent="-117475">
+              <a:buFont typeface="Arial" panose="020B0604020202020204" pitchFamily="34" charset="0"/>
+              <a:buChar char="•"/>
+            </a:pPr>
+            <a:r>
+              <a:rPr lang="en-US" dirty="0"/>
+              <a:t>Hidden Markov Models for part-of-speech tagging</a:t>
+            </a:r>
+          </a:p>
+          <a:p>
+            <a:pPr indent="-117475">
+              <a:buFont typeface="Arial" panose="020B0604020202020204" pitchFamily="34" charset="0"/>
+              <a:buChar char="•"/>
+            </a:pPr>
+            <a:r>
+              <a:rPr lang="en-US" dirty="0"/>
+              <a:t>Still limited by computational power and data availability</a:t>
+            </a:r>
+          </a:p>
+          <a:p>
+            <a:pPr>
+              <a:buNone/>
+            </a:pPr>
+            <a:r>
+              <a:rPr lang="en-US" b="1" dirty="0"/>
+              <a:t>1990s-2000s: Statistical NLP Flourishes</a:t>
+            </a:r>
+            <a:endParaRPr lang="en-US" dirty="0"/>
+          </a:p>
+          <a:p>
+            <a:pPr indent="-117475">
+              <a:buFont typeface="Arial" panose="020B0604020202020204" pitchFamily="34" charset="0"/>
+              <a:buChar char="•"/>
+            </a:pPr>
+            <a:r>
+              <a:rPr lang="en-US" dirty="0"/>
+              <a:t>Large text corpora become available</a:t>
+            </a:r>
+          </a:p>
+          <a:p>
+            <a:pPr indent="-117475">
+              <a:buFont typeface="Arial" panose="020B0604020202020204" pitchFamily="34" charset="0"/>
+              <a:buChar char="•"/>
+            </a:pPr>
+            <a:r>
+              <a:rPr lang="en-US" dirty="0"/>
+              <a:t>Machine learning approaches gain prominence</a:t>
+            </a:r>
+          </a:p>
+          <a:p>
+            <a:pPr indent="-117475">
+              <a:buFont typeface="Arial" panose="020B0604020202020204" pitchFamily="34" charset="0"/>
+              <a:buChar char="•"/>
+            </a:pPr>
+            <a:r>
+              <a:rPr lang="en-US" dirty="0"/>
+              <a:t>Statistical machine translation emerges</a:t>
+            </a:r>
+          </a:p>
+          <a:p>
+            <a:pPr>
+              <a:buNone/>
+            </a:pPr>
+            <a:r>
+              <a:rPr lang="en-US" b="1" dirty="0"/>
+              <a:t>2010-2018: Neural Revolution</a:t>
+            </a:r>
+            <a:endParaRPr lang="en-US" dirty="0"/>
+          </a:p>
+          <a:p>
+            <a:pPr indent="-117475">
+              <a:buFont typeface="Arial" panose="020B0604020202020204" pitchFamily="34" charset="0"/>
+              <a:buChar char="•"/>
+            </a:pPr>
+            <a:r>
+              <a:rPr lang="en-US" dirty="0"/>
+              <a:t>Word embeddings (Word2Vec, </a:t>
+            </a:r>
+            <a:r>
+              <a:rPr lang="en-US" dirty="0" err="1"/>
+              <a:t>GloVe</a:t>
+            </a:r>
+            <a:r>
+              <a:rPr lang="en-US" dirty="0"/>
+              <a:t>) transform representation</a:t>
+            </a:r>
+          </a:p>
+          <a:p>
+            <a:pPr indent="-117475">
+              <a:buFont typeface="Arial" panose="020B0604020202020204" pitchFamily="34" charset="0"/>
+              <a:buChar char="•"/>
+            </a:pPr>
+            <a:r>
+              <a:rPr lang="en-US" dirty="0"/>
+              <a:t>Recurrent Neural Networks and LSTMs for sequence modeling</a:t>
+            </a:r>
+          </a:p>
+          <a:p>
+            <a:pPr indent="-117475">
+              <a:buFont typeface="Arial" panose="020B0604020202020204" pitchFamily="34" charset="0"/>
+              <a:buChar char="•"/>
+            </a:pPr>
+            <a:r>
+              <a:rPr lang="en-US" dirty="0"/>
+              <a:t>Attention mechanisms improve performance</a:t>
+            </a:r>
+          </a:p>
+          <a:p>
+            <a:pPr>
+              <a:buNone/>
+            </a:pPr>
+            <a:r>
+              <a:rPr lang="en-US" b="1" dirty="0"/>
+              <a:t>2018-Present: Transformer Era</a:t>
+            </a:r>
+            <a:endParaRPr lang="en-US" dirty="0"/>
+          </a:p>
+          <a:p>
+            <a:pPr indent="-117475">
+              <a:buFont typeface="Arial" panose="020B0604020202020204" pitchFamily="34" charset="0"/>
+              <a:buChar char="•"/>
+            </a:pPr>
+            <a:r>
+              <a:rPr lang="en-US" dirty="0"/>
+              <a:t>BERT, GPT, and other transformer models revolutionize the field</a:t>
+            </a:r>
+          </a:p>
+          <a:p>
+            <a:pPr indent="-117475">
+              <a:buFont typeface="Arial" panose="020B0604020202020204" pitchFamily="34" charset="0"/>
+              <a:buChar char="•"/>
+            </a:pPr>
+            <a:r>
+              <a:rPr lang="en-US" dirty="0"/>
+              <a:t>Pre-training and fine-tuning paradigm</a:t>
+            </a:r>
+          </a:p>
+          <a:p>
+            <a:pPr indent="-117475">
+              <a:buFont typeface="Arial" panose="020B0604020202020204" pitchFamily="34" charset="0"/>
+              <a:buChar char="•"/>
+            </a:pPr>
+            <a:r>
+              <a:rPr lang="en-US" dirty="0"/>
+              <a:t>Increasingly human-like language understanding capabilities</a:t>
+            </a:r>
+          </a:p>
+          <a:p>
+            <a:endParaRPr lang="en-US" dirty="0"/>
+          </a:p>
+        </p:txBody>
+      </p:sp>
+      <p:pic>
+        <p:nvPicPr>
+          <p:cNvPr id="5" name="Picture 4">
+            <a:extLst>
+              <a:ext uri="{FF2B5EF4-FFF2-40B4-BE49-F238E27FC236}">
+                <a16:creationId xmlns:a16="http://schemas.microsoft.com/office/drawing/2014/main" id="{77EFD2CD-E234-52A1-28F0-23DD6EDC2473}"/>
+              </a:ext>
+            </a:extLst>
+          </p:cNvPr>
+          <p:cNvPicPr>
+            <a:picLocks noChangeAspect="1"/>
+          </p:cNvPicPr>
+          <p:nvPr/>
+        </p:nvPicPr>
+        <p:blipFill>
+          <a:blip r:embed="rId3"/>
+          <a:stretch>
+            <a:fillRect/>
+          </a:stretch>
+        </p:blipFill>
+        <p:spPr>
+          <a:xfrm>
+            <a:off x="6355360" y="4495813"/>
+            <a:ext cx="4416451" cy="1989039"/>
+          </a:xfrm>
+          <a:prstGeom prst="rect">
+            <a:avLst/>
+          </a:prstGeom>
+        </p:spPr>
+      </p:pic>
+    </p:spTree>
+    <p:extLst>
+      <p:ext uri="{BB962C8B-B14F-4D97-AF65-F5344CB8AC3E}">
+        <p14:creationId xmlns:p14="http://schemas.microsoft.com/office/powerpoint/2010/main" val="2279320564"/>
+      </p:ext>
+    </p:extLst>
+  </p:cSld>
+  <p:clrMapOvr>
+    <a:masterClrMapping/>
+  </p:clrMapOvr>
+</p:sld>
+</file>
+
+<file path=ppt/slides/slide30.xml><?xml version="1.0" encoding="utf-8"?>
 <p:sld xmlns:a="http://schemas.openxmlformats.org/drawingml/2006/main" xmlns:r="http://schemas.openxmlformats.org/officeDocument/2006/relationships" xmlns:p="http://schemas.openxmlformats.org/presentationml/2006/main">
   <p:cSld>
     <p:spTree>
@@ -18809,7 +20282,7 @@
 </p:sld>
 </file>
 
-<file path=ppt/slides/slide29.xml><?xml version="1.0" encoding="utf-8"?>
+<file path=ppt/slides/slide31.xml><?xml version="1.0" encoding="utf-8"?>
 <p:sld xmlns:a="http://schemas.openxmlformats.org/drawingml/2006/main" xmlns:r="http://schemas.openxmlformats.org/officeDocument/2006/relationships" xmlns:p="http://schemas.openxmlformats.org/presentationml/2006/main">
   <p:cSld>
     <p:spTree>
@@ -18892,227 +20365,7 @@
 </p:sld>
 </file>
 
-<file path=ppt/slides/slide3.xml><?xml version="1.0" encoding="utf-8"?>
-<p:sld xmlns:a="http://schemas.openxmlformats.org/drawingml/2006/main" xmlns:r="http://schemas.openxmlformats.org/officeDocument/2006/relationships" xmlns:p="http://schemas.openxmlformats.org/presentationml/2006/main">
-  <p:cSld>
-    <p:spTree>
-      <p:nvGrpSpPr>
-        <p:cNvPr id="1" name=""/>
-        <p:cNvGrpSpPr/>
-        <p:nvPr/>
-      </p:nvGrpSpPr>
-      <p:grpSpPr>
-        <a:xfrm>
-          <a:off x="0" y="0"/>
-          <a:ext cx="0" cy="0"/>
-          <a:chOff x="0" y="0"/>
-          <a:chExt cx="0" cy="0"/>
-        </a:xfrm>
-      </p:grpSpPr>
-      <p:sp>
-        <p:nvSpPr>
-          <p:cNvPr id="2" name="Title 1">
-            <a:extLst>
-              <a:ext uri="{FF2B5EF4-FFF2-40B4-BE49-F238E27FC236}">
-                <a16:creationId xmlns:a16="http://schemas.microsoft.com/office/drawing/2014/main" id="{C42AB93C-A03E-1E2E-6361-CC316BDA668E}"/>
-              </a:ext>
-            </a:extLst>
-          </p:cNvPr>
-          <p:cNvSpPr>
-            <a:spLocks noGrp="1"/>
-          </p:cNvSpPr>
-          <p:nvPr>
-            <p:ph type="title"/>
-          </p:nvPr>
-        </p:nvSpPr>
-        <p:spPr/>
-        <p:txBody>
-          <a:bodyPr/>
-          <a:lstStyle/>
-          <a:p>
-            <a:r>
-              <a:rPr lang="en-US" dirty="0"/>
-              <a:t>Why is NLP Challenging?</a:t>
-            </a:r>
-          </a:p>
-        </p:txBody>
-      </p:sp>
-      <p:sp>
-        <p:nvSpPr>
-          <p:cNvPr id="3" name="Content Placeholder 2">
-            <a:extLst>
-              <a:ext uri="{FF2B5EF4-FFF2-40B4-BE49-F238E27FC236}">
-                <a16:creationId xmlns:a16="http://schemas.microsoft.com/office/drawing/2014/main" id="{2064DFA4-415B-78E0-2D28-2B7DB6158806}"/>
-              </a:ext>
-            </a:extLst>
-          </p:cNvPr>
-          <p:cNvSpPr>
-            <a:spLocks noGrp="1"/>
-          </p:cNvSpPr>
-          <p:nvPr>
-            <p:ph idx="1"/>
-          </p:nvPr>
-        </p:nvSpPr>
-        <p:spPr>
-          <a:xfrm>
-            <a:off x="838199" y="1706007"/>
-            <a:ext cx="11107783" cy="4991039"/>
-          </a:xfrm>
-        </p:spPr>
-        <p:txBody>
-          <a:bodyPr>
-            <a:normAutofit fontScale="85000" lnSpcReduction="20000"/>
-          </a:bodyPr>
-          <a:lstStyle/>
-          <a:p>
-            <a:pPr marL="0" indent="0">
-              <a:buNone/>
-            </a:pPr>
-            <a:r>
-              <a:rPr lang="en-US" dirty="0"/>
-              <a:t>Human language is ambiguous: Words and sentences can have multiple interpretations</a:t>
-            </a:r>
-          </a:p>
-          <a:p>
-            <a:r>
-              <a:rPr lang="en-US" b="1" dirty="0"/>
-              <a:t>Lexical ambiguity</a:t>
-            </a:r>
-            <a:r>
-              <a:rPr lang="en-US" dirty="0"/>
-              <a:t>: When a word has multiple meanings</a:t>
-            </a:r>
-          </a:p>
-          <a:p>
-            <a:pPr lvl="1"/>
-            <a:r>
-              <a:rPr lang="en-US" dirty="0"/>
-              <a:t>Example: "The bank is closed" (financial institution or riverbank)</a:t>
-            </a:r>
-          </a:p>
-          <a:p>
-            <a:pPr lvl="1"/>
-            <a:r>
-              <a:rPr lang="en-US" dirty="0"/>
-              <a:t>Example: "The suit was expensive" (Formal set of clothes or Legal proceeding)</a:t>
-            </a:r>
-          </a:p>
-          <a:p>
-            <a:pPr lvl="1"/>
-            <a:r>
-              <a:rPr lang="en-US" sz="2100" dirty="0"/>
-              <a:t>Computational challenge: Systems must select the correct word sense from multiple possibilities</a:t>
-            </a:r>
-          </a:p>
-          <a:p>
-            <a:r>
-              <a:rPr lang="en-US" b="1" dirty="0"/>
-              <a:t>Syntactic ambiguity</a:t>
-            </a:r>
-            <a:r>
-              <a:rPr lang="en-US" dirty="0"/>
-              <a:t>: When a sentence can be parsed in multiple ways</a:t>
-            </a:r>
-          </a:p>
-          <a:p>
-            <a:pPr lvl="1"/>
-            <a:r>
-              <a:rPr lang="en-US" dirty="0"/>
-              <a:t>Example: "I saw the man with the telescope" (Who has the telescope?)</a:t>
-            </a:r>
-          </a:p>
-          <a:p>
-            <a:pPr lvl="1"/>
-            <a:r>
-              <a:rPr lang="en-US" dirty="0"/>
-              <a:t>Example: "Flying planes can be dangerous" (The act of flying planes or planes that are flying?)</a:t>
-            </a:r>
-          </a:p>
-          <a:p>
-            <a:pPr lvl="1"/>
-            <a:r>
-              <a:rPr lang="en-US" dirty="0"/>
-              <a:t>Computational challenge: Models must determine the correct grammatical structure</a:t>
-            </a:r>
-          </a:p>
-          <a:p>
-            <a:r>
-              <a:rPr lang="en-US" b="1" dirty="0"/>
-              <a:t>Semantic ambiguity</a:t>
-            </a:r>
-            <a:r>
-              <a:rPr lang="en-US" dirty="0"/>
-              <a:t>: When the meaning of a sentence has multiple interpretations</a:t>
-            </a:r>
-          </a:p>
-          <a:p>
-            <a:pPr lvl="1"/>
-            <a:r>
-              <a:rPr lang="en-US" dirty="0"/>
-              <a:t>Example: "The chicken is ready to eat" (Ready to be eaten or ready to consume food?)</a:t>
-            </a:r>
-          </a:p>
-          <a:p>
-            <a:pPr lvl="1"/>
-            <a:r>
-              <a:rPr lang="en-US" dirty="0"/>
-              <a:t>Example: "John and Mary got married last year" (To each other or to other people?)</a:t>
-            </a:r>
-          </a:p>
-          <a:p>
-            <a:pPr lvl="1"/>
-            <a:r>
-              <a:rPr lang="en-US" dirty="0"/>
-              <a:t>Computational challenge: Systems must infer the intended meaning based on context</a:t>
-            </a:r>
-          </a:p>
-          <a:p>
-            <a:r>
-              <a:rPr lang="en-US" b="1" dirty="0"/>
-              <a:t>Pragmatic ambiguity</a:t>
-            </a:r>
-            <a:r>
-              <a:rPr lang="en-US" dirty="0"/>
-              <a:t>: When the intended meaning depends on context, intent, or implied information</a:t>
-            </a:r>
-          </a:p>
-          <a:p>
-            <a:pPr lvl="1"/>
-            <a:r>
-              <a:rPr lang="en-US" dirty="0"/>
-              <a:t>Example: "It's cold in here" (Statement of fact or request to close a window/turn up heat?)</a:t>
-            </a:r>
-          </a:p>
-          <a:p>
-            <a:pPr lvl="1"/>
-            <a:r>
-              <a:rPr lang="en-US" dirty="0"/>
-              <a:t>Example: "Do you know what time it is?" (Yes/no question or request for the time?)</a:t>
-            </a:r>
-          </a:p>
-          <a:p>
-            <a:pPr lvl="1"/>
-            <a:r>
-              <a:rPr lang="en-US" dirty="0"/>
-              <a:t>Computational challenge: Models must understand communicative intent beyond literal meaning</a:t>
-            </a:r>
-          </a:p>
-        </p:txBody>
-      </p:sp>
-    </p:spTree>
-    <p:extLst>
-      <p:ext uri="{BB962C8B-B14F-4D97-AF65-F5344CB8AC3E}">
-        <p14:creationId xmlns:p14="http://schemas.microsoft.com/office/powerpoint/2010/main" val="3581711231"/>
-      </p:ext>
-    </p:extLst>
-  </p:cSld>
-  <p:clrMapOvr>
-    <a:masterClrMapping/>
-  </p:clrMapOvr>
-</p:sld>
-</file>
-
-<file path=ppt/slides/slide30.xml><?xml version="1.0" encoding="utf-8"?>
+<file path=ppt/slides/slide32.xml><?xml version="1.0" encoding="utf-8"?>
 <p:sld xmlns:a="http://schemas.openxmlformats.org/drawingml/2006/main" xmlns:r="http://schemas.openxmlformats.org/officeDocument/2006/relationships" xmlns:p="http://schemas.openxmlformats.org/presentationml/2006/main">
   <p:cSld>
     <p:spTree>
@@ -19383,7 +20636,7 @@
 </p:sld>
 </file>
 
-<file path=ppt/slides/slide31.xml><?xml version="1.0" encoding="utf-8"?>
+<file path=ppt/slides/slide33.xml><?xml version="1.0" encoding="utf-8"?>
 <p:sld xmlns:a="http://schemas.openxmlformats.org/drawingml/2006/main" xmlns:r="http://schemas.openxmlformats.org/officeDocument/2006/relationships" xmlns:p="http://schemas.openxmlformats.org/presentationml/2006/main">
   <p:cSld>
     <p:spTree>
@@ -19450,13 +20703,12 @@
         <p:spPr/>
         <p:txBody>
           <a:bodyPr>
-            <a:normAutofit fontScale="92500" lnSpcReduction="20000"/>
+            <a:normAutofit fontScale="92500" lnSpcReduction="10000"/>
           </a:bodyPr>
           <a:lstStyle/>
           <a:p>
-            <a:pPr>
-              <a:buFont typeface="+mj-lt"/>
-              <a:buAutoNum type="arabicPeriod"/>
+            <a:pPr marL="0" indent="0">
+              <a:buNone/>
             </a:pPr>
             <a:r>
               <a:rPr lang="en-US" b="1" dirty="0"/>
@@ -19476,9 +20728,8 @@
             </a:r>
           </a:p>
           <a:p>
-            <a:pPr>
-              <a:buFont typeface="+mj-lt"/>
-              <a:buAutoNum type="arabicPeriod"/>
+            <a:pPr marL="0" indent="0">
+              <a:buNone/>
             </a:pPr>
             <a:r>
               <a:rPr lang="en-US" b="1" dirty="0"/>
@@ -19512,9 +20763,8 @@
             </a:r>
           </a:p>
           <a:p>
-            <a:pPr>
-              <a:buFont typeface="+mj-lt"/>
-              <a:buAutoNum type="arabicPeriod"/>
+            <a:pPr marL="0" indent="0">
+              <a:buNone/>
             </a:pPr>
             <a:r>
               <a:rPr lang="en-US" b="1" dirty="0"/>
@@ -19533,9 +20783,8 @@
             </a:r>
           </a:p>
           <a:p>
-            <a:pPr>
-              <a:buFont typeface="+mj-lt"/>
-              <a:buAutoNum type="arabicPeriod"/>
+            <a:pPr marL="0" indent="0">
+              <a:buNone/>
             </a:pPr>
             <a:r>
               <a:rPr lang="en-US" b="1" dirty="0"/>
@@ -19552,14 +20801,11 @@
             </a:pPr>
             <a:r>
               <a:rPr lang="en-US" b="1" dirty="0"/>
-              <a:t>Applications</a:t>
-            </a:r>
-          </a:p>
-          <a:p>
-            <a:pPr>
-              <a:buFont typeface="Arial" panose="020B0604020202020204" pitchFamily="34" charset="0"/>
-              <a:buChar char="•"/>
-            </a:pPr>
+              <a:t>Applications:</a:t>
+            </a:r>
+          </a:p>
+          <a:p>
+            <a:pPr lvl="1"/>
             <a:r>
               <a:rPr lang="en-US" b="1" dirty="0"/>
               <a:t>Text Generation</a:t>
@@ -19570,10 +20816,7 @@
             </a:r>
           </a:p>
           <a:p>
-            <a:pPr>
-              <a:buFont typeface="Arial" panose="020B0604020202020204" pitchFamily="34" charset="0"/>
-              <a:buChar char="•"/>
-            </a:pPr>
+            <a:pPr lvl="1"/>
             <a:r>
               <a:rPr lang="en-US" b="1" dirty="0"/>
               <a:t>Machine Translation</a:t>
@@ -19584,10 +20827,7 @@
             </a:r>
           </a:p>
           <a:p>
-            <a:pPr>
-              <a:buFont typeface="Arial" panose="020B0604020202020204" pitchFamily="34" charset="0"/>
-              <a:buChar char="•"/>
-            </a:pPr>
+            <a:pPr lvl="1"/>
             <a:r>
               <a:rPr lang="en-US" b="1" dirty="0"/>
               <a:t>Summarization</a:t>
@@ -19598,10 +20838,7 @@
             </a:r>
           </a:p>
           <a:p>
-            <a:pPr>
-              <a:buFont typeface="Arial" panose="020B0604020202020204" pitchFamily="34" charset="0"/>
-              <a:buChar char="•"/>
-            </a:pPr>
+            <a:pPr lvl="1"/>
             <a:r>
               <a:rPr lang="en-US" b="1" dirty="0"/>
               <a:t>Question Answering</a:t>
@@ -19612,10 +20849,7 @@
             </a:r>
           </a:p>
           <a:p>
-            <a:pPr>
-              <a:buFont typeface="Arial" panose="020B0604020202020204" pitchFamily="34" charset="0"/>
-              <a:buChar char="•"/>
-            </a:pPr>
+            <a:pPr lvl="1"/>
             <a:r>
               <a:rPr lang="en-US" b="1" dirty="0"/>
               <a:t>Text Classification</a:t>
@@ -19626,10 +20860,7 @@
             </a:r>
           </a:p>
           <a:p>
-            <a:pPr>
-              <a:buFont typeface="Arial" panose="020B0604020202020204" pitchFamily="34" charset="0"/>
-              <a:buChar char="•"/>
-            </a:pPr>
+            <a:pPr lvl="1"/>
             <a:r>
               <a:rPr lang="en-US" b="1" dirty="0"/>
               <a:t>Dialogue Systems</a:t>
@@ -19657,7 +20888,7 @@
 </p:sld>
 </file>
 
-<file path=ppt/slides/slide32.xml><?xml version="1.0" encoding="utf-8"?>
+<file path=ppt/slides/slide34.xml><?xml version="1.0" encoding="utf-8"?>
 <p:sld xmlns:a="http://schemas.openxmlformats.org/drawingml/2006/main" xmlns:r="http://schemas.openxmlformats.org/officeDocument/2006/relationships" xmlns:p="http://schemas.openxmlformats.org/presentationml/2006/main">
   <p:cSld>
     <p:spTree>
@@ -19727,7 +20958,7 @@
         <p:spPr>
           <a:xfrm>
             <a:off x="838200" y="1600200"/>
-            <a:ext cx="10515600" cy="5257799"/>
+            <a:ext cx="4901514" cy="5257799"/>
           </a:xfrm>
         </p:spPr>
         <p:txBody>
@@ -21795,6 +23026,53 @@
           </a:p>
         </p:txBody>
       </p:sp>
+      <p:pic>
+        <p:nvPicPr>
+          <p:cNvPr id="1026" name="Picture 2" descr="N-grams - fastText Quick Start Guide [Book]">
+            <a:extLst>
+              <a:ext uri="{FF2B5EF4-FFF2-40B4-BE49-F238E27FC236}">
+                <a16:creationId xmlns:a16="http://schemas.microsoft.com/office/drawing/2014/main" id="{9C123F94-BC05-DA2F-D744-F4CB2C79A932}"/>
+              </a:ext>
+            </a:extLst>
+          </p:cNvPr>
+          <p:cNvPicPr>
+            <a:picLocks noChangeAspect="1" noChangeArrowheads="1"/>
+          </p:cNvPicPr>
+          <p:nvPr/>
+        </p:nvPicPr>
+        <p:blipFill>
+          <a:blip r:embed="rId2">
+            <a:extLst>
+              <a:ext uri="{28A0092B-C50C-407E-A947-70E740481C1C}">
+                <a14:useLocalDpi xmlns:a14="http://schemas.microsoft.com/office/drawing/2010/main" val="0"/>
+              </a:ext>
+            </a:extLst>
+          </a:blip>
+          <a:srcRect/>
+          <a:stretch>
+            <a:fillRect/>
+          </a:stretch>
+        </p:blipFill>
+        <p:spPr bwMode="auto">
+          <a:xfrm>
+            <a:off x="6158498" y="1755433"/>
+            <a:ext cx="5195302" cy="2223444"/>
+          </a:xfrm>
+          <a:prstGeom prst="rect">
+            <a:avLst/>
+          </a:prstGeom>
+          <a:noFill/>
+          <a:extLst>
+            <a:ext uri="{909E8E84-426E-40DD-AFC4-6F175D3DCCD1}">
+              <a14:hiddenFill xmlns:a14="http://schemas.microsoft.com/office/drawing/2010/main">
+                <a:solidFill>
+                  <a:srgbClr val="FFFFFF"/>
+                </a:solidFill>
+              </a14:hiddenFill>
+            </a:ext>
+          </a:extLst>
+        </p:spPr>
+      </p:pic>
     </p:spTree>
     <p:extLst>
       <p:ext uri="{BB962C8B-B14F-4D97-AF65-F5344CB8AC3E}">
@@ -21808,7 +23086,257 @@
 </p:sld>
 </file>
 
-<file path=ppt/slides/slide33.xml><?xml version="1.0" encoding="utf-8"?>
+<file path=ppt/slides/slide35.xml><?xml version="1.0" encoding="utf-8"?>
+<p:sld xmlns:a="http://schemas.openxmlformats.org/drawingml/2006/main" xmlns:r="http://schemas.openxmlformats.org/officeDocument/2006/relationships" xmlns:p="http://schemas.openxmlformats.org/presentationml/2006/main">
+  <p:cSld>
+    <p:spTree>
+      <p:nvGrpSpPr>
+        <p:cNvPr id="1" name=""/>
+        <p:cNvGrpSpPr/>
+        <p:nvPr/>
+      </p:nvGrpSpPr>
+      <p:grpSpPr>
+        <a:xfrm>
+          <a:off x="0" y="0"/>
+          <a:ext cx="0" cy="0"/>
+          <a:chOff x="0" y="0"/>
+          <a:chExt cx="0" cy="0"/>
+        </a:xfrm>
+      </p:grpSpPr>
+      <p:sp>
+        <p:nvSpPr>
+          <p:cNvPr id="2" name="Title 1">
+            <a:extLst>
+              <a:ext uri="{FF2B5EF4-FFF2-40B4-BE49-F238E27FC236}">
+                <a16:creationId xmlns:a16="http://schemas.microsoft.com/office/drawing/2014/main" id="{B21FD281-A534-66DD-A1FD-4A9DBA92E8BE}"/>
+              </a:ext>
+            </a:extLst>
+          </p:cNvPr>
+          <p:cNvSpPr>
+            <a:spLocks noGrp="1"/>
+          </p:cNvSpPr>
+          <p:nvPr>
+            <p:ph type="title"/>
+          </p:nvPr>
+        </p:nvSpPr>
+        <p:spPr/>
+        <p:txBody>
+          <a:bodyPr/>
+          <a:lstStyle/>
+          <a:p>
+            <a:r>
+              <a:rPr lang="en-US" dirty="0"/>
+              <a:t>Perplexity</a:t>
+            </a:r>
+          </a:p>
+        </p:txBody>
+      </p:sp>
+      <p:sp>
+        <p:nvSpPr>
+          <p:cNvPr id="3" name="Content Placeholder 2">
+            <a:extLst>
+              <a:ext uri="{FF2B5EF4-FFF2-40B4-BE49-F238E27FC236}">
+                <a16:creationId xmlns:a16="http://schemas.microsoft.com/office/drawing/2014/main" id="{13B04378-246B-4FE4-2C64-C63653A45260}"/>
+              </a:ext>
+            </a:extLst>
+          </p:cNvPr>
+          <p:cNvSpPr>
+            <a:spLocks noGrp="1"/>
+          </p:cNvSpPr>
+          <p:nvPr>
+            <p:ph idx="1"/>
+          </p:nvPr>
+        </p:nvSpPr>
+        <p:spPr/>
+        <p:txBody>
+          <a:bodyPr>
+            <a:normAutofit fontScale="55000" lnSpcReduction="20000"/>
+          </a:bodyPr>
+          <a:lstStyle/>
+          <a:p>
+            <a:pPr>
+              <a:buNone/>
+            </a:pPr>
+            <a:r>
+              <a:rPr lang="en-US" dirty="0"/>
+              <a:t>Perplexity measures how confused a language model is when predicting text.</a:t>
+            </a:r>
+          </a:p>
+          <a:p>
+            <a:pPr>
+              <a:buNone/>
+            </a:pPr>
+            <a:r>
+              <a:rPr lang="en-US" b="1" dirty="0"/>
+              <a:t>What It Means</a:t>
+            </a:r>
+          </a:p>
+          <a:p>
+            <a:pPr>
+              <a:buFont typeface="Arial" panose="020B0604020202020204" pitchFamily="34" charset="0"/>
+              <a:buChar char="•"/>
+            </a:pPr>
+            <a:r>
+              <a:rPr lang="en-US" b="1" dirty="0"/>
+              <a:t>Lower perplexity</a:t>
+            </a:r>
+            <a:r>
+              <a:rPr lang="en-US" dirty="0"/>
+              <a:t> = Model is more confident and accurate</a:t>
+            </a:r>
+          </a:p>
+          <a:p>
+            <a:pPr>
+              <a:buFont typeface="Arial" panose="020B0604020202020204" pitchFamily="34" charset="0"/>
+              <a:buChar char="•"/>
+            </a:pPr>
+            <a:r>
+              <a:rPr lang="en-US" b="1" dirty="0"/>
+              <a:t>Higher perplexity</a:t>
+            </a:r>
+            <a:r>
+              <a:rPr lang="en-US" dirty="0"/>
+              <a:t> = Model is more uncertain and confused</a:t>
+            </a:r>
+          </a:p>
+          <a:p>
+            <a:pPr>
+              <a:buNone/>
+            </a:pPr>
+            <a:r>
+              <a:rPr lang="en-US" b="1" dirty="0"/>
+              <a:t>Simple Example</a:t>
+            </a:r>
+          </a:p>
+          <a:p>
+            <a:pPr>
+              <a:buNone/>
+            </a:pPr>
+            <a:r>
+              <a:rPr lang="en-US" dirty="0"/>
+              <a:t>Imagine you're trying to predict the next word in: "I went to the _____"</a:t>
+            </a:r>
+          </a:p>
+          <a:p>
+            <a:pPr>
+              <a:buFont typeface="Arial" panose="020B0604020202020204" pitchFamily="34" charset="0"/>
+              <a:buChar char="•"/>
+            </a:pPr>
+            <a:r>
+              <a:rPr lang="en-US" dirty="0"/>
+              <a:t>A good model might assign high probability to words like "store," "park," "beach"</a:t>
+            </a:r>
+          </a:p>
+          <a:p>
+            <a:pPr>
+              <a:buFont typeface="Arial" panose="020B0604020202020204" pitchFamily="34" charset="0"/>
+              <a:buChar char="•"/>
+            </a:pPr>
+            <a:r>
+              <a:rPr lang="en-US" dirty="0"/>
+              <a:t>A confused model might spread probabilities evenly across thousands of words</a:t>
+            </a:r>
+          </a:p>
+          <a:p>
+            <a:pPr>
+              <a:buNone/>
+            </a:pPr>
+            <a:r>
+              <a:rPr lang="en-US" dirty="0"/>
+              <a:t>Perplexity essentially counts how many reasonable options the model is considering. If the model has a perplexity of 10, it's like the model is equally confused between 10 possible words.</a:t>
+            </a:r>
+          </a:p>
+          <a:p>
+            <a:pPr>
+              <a:buNone/>
+            </a:pPr>
+            <a:r>
+              <a:rPr lang="en-US" b="1" dirty="0"/>
+              <a:t>Real-World Comparison</a:t>
+            </a:r>
+          </a:p>
+          <a:p>
+            <a:pPr>
+              <a:buNone/>
+            </a:pPr>
+            <a:r>
+              <a:rPr lang="en-US" dirty="0"/>
+              <a:t>If your phone keyboard suggests 3 very likely next words, it has low perplexity. If it suggests random unrelated words, it has high perplexity.</a:t>
+            </a:r>
+          </a:p>
+          <a:p>
+            <a:pPr>
+              <a:buNone/>
+            </a:pPr>
+            <a:r>
+              <a:rPr lang="en-US" b="1" dirty="0"/>
+              <a:t>Why It Matters</a:t>
+            </a:r>
+          </a:p>
+          <a:p>
+            <a:pPr>
+              <a:buNone/>
+            </a:pPr>
+            <a:r>
+              <a:rPr lang="en-US" dirty="0"/>
+              <a:t>Think of perplexity as a "confusion score" that helps researchers:</a:t>
+            </a:r>
+          </a:p>
+          <a:p>
+            <a:pPr>
+              <a:buFont typeface="Arial" panose="020B0604020202020204" pitchFamily="34" charset="0"/>
+              <a:buChar char="•"/>
+            </a:pPr>
+            <a:r>
+              <a:rPr lang="en-US" dirty="0"/>
+              <a:t>Compare different language models</a:t>
+            </a:r>
+          </a:p>
+          <a:p>
+            <a:pPr>
+              <a:buFont typeface="Arial" panose="020B0604020202020204" pitchFamily="34" charset="0"/>
+              <a:buChar char="•"/>
+            </a:pPr>
+            <a:r>
+              <a:rPr lang="en-US" dirty="0"/>
+              <a:t>Check if a model is improving during training</a:t>
+            </a:r>
+          </a:p>
+          <a:p>
+            <a:pPr>
+              <a:buFont typeface="Arial" panose="020B0604020202020204" pitchFamily="34" charset="0"/>
+              <a:buChar char="•"/>
+            </a:pPr>
+            <a:r>
+              <a:rPr lang="en-US" dirty="0"/>
+              <a:t>Identify when a model works better for certain types of text</a:t>
+            </a:r>
+          </a:p>
+          <a:p>
+            <a:r>
+              <a:rPr lang="en-US" dirty="0"/>
+              <a:t>The best language models today have much lower perplexity than older models, which is why they produce more natural-sounding text.</a:t>
+            </a:r>
+          </a:p>
+          <a:p>
+            <a:endParaRPr lang="en-US" dirty="0"/>
+          </a:p>
+        </p:txBody>
+      </p:sp>
+    </p:spTree>
+    <p:extLst>
+      <p:ext uri="{BB962C8B-B14F-4D97-AF65-F5344CB8AC3E}">
+        <p14:creationId xmlns:p14="http://schemas.microsoft.com/office/powerpoint/2010/main" val="421367154"/>
+      </p:ext>
+    </p:extLst>
+  </p:cSld>
+  <p:clrMapOvr>
+    <a:masterClrMapping/>
+  </p:clrMapOvr>
+</p:sld>
+</file>
+
+<file path=ppt/slides/slide36.xml><?xml version="1.0" encoding="utf-8"?>
 <p:sld xmlns:a="http://schemas.openxmlformats.org/drawingml/2006/main" xmlns:r="http://schemas.openxmlformats.org/officeDocument/2006/relationships" xmlns:p="http://schemas.openxmlformats.org/presentationml/2006/main">
   <p:cSld>
     <p:spTree>
@@ -21884,26 +23412,29 @@
           <a:p>
             <a:r>
               <a:rPr lang="en-US" dirty="0"/>
+              <a:t>No long-range dependencies: Cannot capture relationships between distant words</a:t>
+            </a:r>
+          </a:p>
+          <a:p>
+            <a:r>
+              <a:rPr lang="en-US" dirty="0"/>
+              <a:t>No semantic understanding: Model captures statistical patterns but not meaning</a:t>
+            </a:r>
+          </a:p>
+          <a:p>
+            <a:r>
+              <a:rPr lang="en-US" dirty="0"/>
+              <a:t>Memory intensive: Storing all possible n-grams requires significant space</a:t>
+            </a:r>
+          </a:p>
+          <a:p>
+            <a:r>
+              <a:rPr lang="en-US" dirty="0"/>
               <a:t>Data sparsity: Many valid word combinations don't appear in training data</a:t>
             </a:r>
           </a:p>
           <a:p>
-            <a:r>
-              <a:rPr lang="en-US" dirty="0"/>
-              <a:t>No semantic understanding: Model captures statistical patterns but not meaning</a:t>
-            </a:r>
-          </a:p>
-          <a:p>
-            <a:r>
-              <a:rPr lang="en-US" dirty="0"/>
-              <a:t>Memory intensive: Storing all possible n-grams requires significant space</a:t>
-            </a:r>
-          </a:p>
-          <a:p>
-            <a:r>
-              <a:rPr lang="en-US" dirty="0"/>
-              <a:t>No long-range dependencies: Cannot capture relationships between distant words</a:t>
-            </a:r>
+            <a:endParaRPr lang="en-US" dirty="0"/>
           </a:p>
         </p:txBody>
       </p:sp>
@@ -21920,7 +23451,7 @@
 </p:sld>
 </file>
 
-<file path=ppt/slides/slide34.xml><?xml version="1.0" encoding="utf-8"?>
+<file path=ppt/slides/slide4.xml><?xml version="1.0" encoding="utf-8"?>
 <p:sld xmlns:a="http://schemas.openxmlformats.org/drawingml/2006/main" xmlns:r="http://schemas.openxmlformats.org/officeDocument/2006/relationships" xmlns:p="http://schemas.openxmlformats.org/presentationml/2006/main">
   <p:cSld>
     <p:spTree>
@@ -21942,7 +23473,7 @@
           <p:cNvPr id="2" name="Title 1">
             <a:extLst>
               <a:ext uri="{FF2B5EF4-FFF2-40B4-BE49-F238E27FC236}">
-                <a16:creationId xmlns:a16="http://schemas.microsoft.com/office/drawing/2014/main" id="{B21FD281-A534-66DD-A1FD-4A9DBA92E8BE}"/>
+                <a16:creationId xmlns:a16="http://schemas.microsoft.com/office/drawing/2014/main" id="{C42AB93C-A03E-1E2E-6361-CC316BDA668E}"/>
               </a:ext>
             </a:extLst>
           </p:cNvPr>
@@ -21960,7 +23491,7 @@
           <a:p>
             <a:r>
               <a:rPr lang="en-US" dirty="0"/>
-              <a:t>Perplexity</a:t>
+              <a:t>Why is NLP Challenging?</a:t>
             </a:r>
           </a:p>
         </p:txBody>
@@ -21970,7 +23501,7 @@
           <p:cNvPr id="3" name="Content Placeholder 2">
             <a:extLst>
               <a:ext uri="{FF2B5EF4-FFF2-40B4-BE49-F238E27FC236}">
-                <a16:creationId xmlns:a16="http://schemas.microsoft.com/office/drawing/2014/main" id="{13B04378-246B-4FE4-2C64-C63653A45260}"/>
+                <a16:creationId xmlns:a16="http://schemas.microsoft.com/office/drawing/2014/main" id="{2064DFA4-415B-78E0-2D28-2B7DB6158806}"/>
               </a:ext>
             </a:extLst>
           </p:cNvPr>
@@ -21981,186 +23512,156 @@
             <p:ph idx="1"/>
           </p:nvPr>
         </p:nvSpPr>
-        <p:spPr/>
+        <p:spPr>
+          <a:xfrm>
+            <a:off x="838199" y="1706007"/>
+            <a:ext cx="11107783" cy="4991039"/>
+          </a:xfrm>
+        </p:spPr>
         <p:txBody>
           <a:bodyPr>
-            <a:normAutofit fontScale="55000" lnSpcReduction="20000"/>
+            <a:normAutofit fontScale="85000" lnSpcReduction="20000"/>
           </a:bodyPr>
           <a:lstStyle/>
           <a:p>
-            <a:pPr>
-              <a:buNone/>
-            </a:pPr>
-            <a:r>
-              <a:rPr lang="en-US" dirty="0"/>
-              <a:t>Perplexity measures how confused a language model is when predicting text.</a:t>
-            </a:r>
-          </a:p>
-          <a:p>
-            <a:pPr>
-              <a:buNone/>
-            </a:pPr>
+            <a:pPr marL="0" indent="0">
+              <a:buNone/>
+            </a:pPr>
+            <a:r>
+              <a:rPr lang="en-US" dirty="0"/>
+              <a:t>Human language is ambiguous: Words and sentences can have multiple interpretations</a:t>
+            </a:r>
+          </a:p>
+          <a:p>
             <a:r>
               <a:rPr lang="en-US" b="1" dirty="0"/>
-              <a:t>What It Means</a:t>
-            </a:r>
-          </a:p>
-          <a:p>
-            <a:pPr>
-              <a:buFont typeface="Arial" panose="020B0604020202020204" pitchFamily="34" charset="0"/>
-              <a:buChar char="•"/>
-            </a:pPr>
+              <a:t>Lexical ambiguity</a:t>
+            </a:r>
+            <a:r>
+              <a:rPr lang="en-US" dirty="0"/>
+              <a:t>: When a word has multiple meanings</a:t>
+            </a:r>
+          </a:p>
+          <a:p>
+            <a:pPr lvl="1"/>
+            <a:r>
+              <a:rPr lang="en-US" dirty="0"/>
+              <a:t>Example: "The bank is closed" (financial institution or riverbank)</a:t>
+            </a:r>
+          </a:p>
+          <a:p>
+            <a:pPr lvl="1"/>
+            <a:r>
+              <a:rPr lang="en-US" dirty="0"/>
+              <a:t>Example: "The suit was expensive" (Formal set of clothes or Legal proceeding)</a:t>
+            </a:r>
+          </a:p>
+          <a:p>
+            <a:pPr lvl="1"/>
+            <a:r>
+              <a:rPr lang="en-US" sz="2100" dirty="0"/>
+              <a:t>Computational challenge: Systems must select the correct word sense from multiple possibilities</a:t>
+            </a:r>
+          </a:p>
+          <a:p>
             <a:r>
               <a:rPr lang="en-US" b="1" dirty="0"/>
-              <a:t>Lower perplexity</a:t>
-            </a:r>
-            <a:r>
-              <a:rPr lang="en-US" dirty="0"/>
-              <a:t> = Model is more confident and accurate</a:t>
-            </a:r>
-          </a:p>
-          <a:p>
-            <a:pPr>
-              <a:buFont typeface="Arial" panose="020B0604020202020204" pitchFamily="34" charset="0"/>
-              <a:buChar char="•"/>
-            </a:pPr>
+              <a:t>Syntactic ambiguity</a:t>
+            </a:r>
+            <a:r>
+              <a:rPr lang="en-US" dirty="0"/>
+              <a:t>: When a sentence can be parsed in multiple ways</a:t>
+            </a:r>
+          </a:p>
+          <a:p>
+            <a:pPr lvl="1"/>
+            <a:r>
+              <a:rPr lang="en-US" dirty="0"/>
+              <a:t>Example: "I saw the man with the telescope" (Who has the telescope?)</a:t>
+            </a:r>
+          </a:p>
+          <a:p>
+            <a:pPr lvl="1"/>
+            <a:r>
+              <a:rPr lang="en-US" dirty="0"/>
+              <a:t>Example: "Flying planes can be dangerous" (The act of flying planes or planes that are flying?)</a:t>
+            </a:r>
+          </a:p>
+          <a:p>
+            <a:pPr lvl="1"/>
+            <a:r>
+              <a:rPr lang="en-US" dirty="0"/>
+              <a:t>Computational challenge: Models must determine the correct grammatical structure</a:t>
+            </a:r>
+          </a:p>
+          <a:p>
             <a:r>
               <a:rPr lang="en-US" b="1" dirty="0"/>
-              <a:t>Higher perplexity</a:t>
-            </a:r>
-            <a:r>
-              <a:rPr lang="en-US" dirty="0"/>
-              <a:t> = Model is more uncertain and confused</a:t>
-            </a:r>
-          </a:p>
-          <a:p>
-            <a:pPr>
-              <a:buNone/>
-            </a:pPr>
+              <a:t>Semantic ambiguity</a:t>
+            </a:r>
+            <a:r>
+              <a:rPr lang="en-US" dirty="0"/>
+              <a:t>: When the meaning of a sentence has multiple interpretations</a:t>
+            </a:r>
+          </a:p>
+          <a:p>
+            <a:pPr lvl="1"/>
+            <a:r>
+              <a:rPr lang="en-US" dirty="0"/>
+              <a:t>Example: "The chicken is ready to eat" (Ready to be eaten or ready to consume food?)</a:t>
+            </a:r>
+          </a:p>
+          <a:p>
+            <a:pPr lvl="1"/>
+            <a:r>
+              <a:rPr lang="en-US" dirty="0"/>
+              <a:t>Example: "John and Mary got married last year" (To each other or to other people?)</a:t>
+            </a:r>
+          </a:p>
+          <a:p>
+            <a:pPr lvl="1"/>
+            <a:r>
+              <a:rPr lang="en-US" dirty="0"/>
+              <a:t>Computational challenge: Systems must infer the intended meaning based on context</a:t>
+            </a:r>
+          </a:p>
+          <a:p>
             <a:r>
               <a:rPr lang="en-US" b="1" dirty="0"/>
-              <a:t>Simple Example</a:t>
-            </a:r>
-          </a:p>
-          <a:p>
-            <a:pPr>
-              <a:buNone/>
-            </a:pPr>
-            <a:r>
-              <a:rPr lang="en-US" dirty="0"/>
-              <a:t>Imagine you're trying to predict the next word in: "I went to the _____"</a:t>
-            </a:r>
-          </a:p>
-          <a:p>
-            <a:pPr>
-              <a:buFont typeface="Arial" panose="020B0604020202020204" pitchFamily="34" charset="0"/>
-              <a:buChar char="•"/>
-            </a:pPr>
-            <a:r>
-              <a:rPr lang="en-US" dirty="0"/>
-              <a:t>A good model might assign high probability to words like "store," "park," "beach"</a:t>
-            </a:r>
-          </a:p>
-          <a:p>
-            <a:pPr>
-              <a:buFont typeface="Arial" panose="020B0604020202020204" pitchFamily="34" charset="0"/>
-              <a:buChar char="•"/>
-            </a:pPr>
-            <a:r>
-              <a:rPr lang="en-US" dirty="0"/>
-              <a:t>A confused model might spread probabilities evenly across thousands of words</a:t>
-            </a:r>
-          </a:p>
-          <a:p>
-            <a:pPr>
-              <a:buNone/>
-            </a:pPr>
-            <a:r>
-              <a:rPr lang="en-US" dirty="0"/>
-              <a:t>Perplexity essentially counts how many reasonable options the model is considering. If the model has a perplexity of 10, it's like the model is equally confused between 10 possible words.</a:t>
-            </a:r>
-          </a:p>
-          <a:p>
-            <a:pPr>
-              <a:buNone/>
-            </a:pPr>
-            <a:r>
-              <a:rPr lang="en-US" b="1" dirty="0"/>
-              <a:t>Real-World Comparison</a:t>
-            </a:r>
-          </a:p>
-          <a:p>
-            <a:pPr>
-              <a:buNone/>
-            </a:pPr>
-            <a:r>
-              <a:rPr lang="en-US" dirty="0"/>
-              <a:t>If your phone keyboard suggests 3 very likely next words, it has low perplexity. If it suggests random unrelated words, it has high perplexity.</a:t>
-            </a:r>
-          </a:p>
-          <a:p>
-            <a:pPr>
-              <a:buNone/>
-            </a:pPr>
-            <a:r>
-              <a:rPr lang="en-US" b="1" dirty="0"/>
-              <a:t>Why It Matters</a:t>
-            </a:r>
-          </a:p>
-          <a:p>
-            <a:pPr>
-              <a:buNone/>
-            </a:pPr>
-            <a:r>
-              <a:rPr lang="en-US" dirty="0"/>
-              <a:t>Think of perplexity as a "confusion score" that helps researchers:</a:t>
-            </a:r>
-          </a:p>
-          <a:p>
-            <a:pPr>
-              <a:buFont typeface="Arial" panose="020B0604020202020204" pitchFamily="34" charset="0"/>
-              <a:buChar char="•"/>
-            </a:pPr>
-            <a:r>
-              <a:rPr lang="en-US" dirty="0"/>
-              <a:t>Compare different language models</a:t>
-            </a:r>
-          </a:p>
-          <a:p>
-            <a:pPr>
-              <a:buFont typeface="Arial" panose="020B0604020202020204" pitchFamily="34" charset="0"/>
-              <a:buChar char="•"/>
-            </a:pPr>
-            <a:r>
-              <a:rPr lang="en-US" dirty="0"/>
-              <a:t>Check if a model is improving during training</a:t>
-            </a:r>
-          </a:p>
-          <a:p>
-            <a:pPr>
-              <a:buFont typeface="Arial" panose="020B0604020202020204" pitchFamily="34" charset="0"/>
-              <a:buChar char="•"/>
-            </a:pPr>
-            <a:r>
-              <a:rPr lang="en-US" dirty="0"/>
-              <a:t>Identify when a model works better for certain types of text</a:t>
-            </a:r>
-          </a:p>
-          <a:p>
-            <a:r>
-              <a:rPr lang="en-US" dirty="0"/>
-              <a:t>The best language models today have much lower perplexity than older models, which is why they produce more natural-sounding text.</a:t>
-            </a:r>
-          </a:p>
-          <a:p>
-            <a:endParaRPr lang="en-US" dirty="0"/>
+              <a:t>Pragmatic ambiguity</a:t>
+            </a:r>
+            <a:r>
+              <a:rPr lang="en-US" dirty="0"/>
+              <a:t>: When the intended meaning depends on context, intent, or implied information</a:t>
+            </a:r>
+          </a:p>
+          <a:p>
+            <a:pPr lvl="1"/>
+            <a:r>
+              <a:rPr lang="en-US" dirty="0"/>
+              <a:t>Example: "It's cold in here" (Statement of fact or request to close a window/turn up heat?)</a:t>
+            </a:r>
+          </a:p>
+          <a:p>
+            <a:pPr lvl="1"/>
+            <a:r>
+              <a:rPr lang="en-US" dirty="0"/>
+              <a:t>Example: "Do you know what time it is?" (Yes/no question or request for the time?)</a:t>
+            </a:r>
+          </a:p>
+          <a:p>
+            <a:pPr lvl="1"/>
+            <a:r>
+              <a:rPr lang="en-US" dirty="0"/>
+              <a:t>Computational challenge: Models must understand communicative intent beyond literal meaning</a:t>
+            </a:r>
           </a:p>
         </p:txBody>
       </p:sp>
     </p:spTree>
     <p:extLst>
       <p:ext uri="{BB962C8B-B14F-4D97-AF65-F5344CB8AC3E}">
-        <p14:creationId xmlns:p14="http://schemas.microsoft.com/office/powerpoint/2010/main" val="421367154"/>
+        <p14:creationId xmlns:p14="http://schemas.microsoft.com/office/powerpoint/2010/main" val="3581711231"/>
       </p:ext>
     </p:extLst>
   </p:cSld>
@@ -22170,7 +23671,7 @@
 </p:sld>
 </file>
 
-<file path=ppt/slides/slide4.xml><?xml version="1.0" encoding="utf-8"?>
+<file path=ppt/slides/slide5.xml><?xml version="1.0" encoding="utf-8"?>
 <p:sld xmlns:a="http://schemas.openxmlformats.org/drawingml/2006/main" xmlns:r="http://schemas.openxmlformats.org/officeDocument/2006/relationships" xmlns:p="http://schemas.openxmlformats.org/presentationml/2006/main">
   <p:cSld>
     <p:spTree>
@@ -22402,7 +23903,87 @@
 </p:sld>
 </file>
 
-<file path=ppt/slides/slide5.xml><?xml version="1.0" encoding="utf-8"?>
+<file path=ppt/slides/slide6.xml><?xml version="1.0" encoding="utf-8"?>
+<p:sld xmlns:a="http://schemas.openxmlformats.org/drawingml/2006/main" xmlns:r="http://schemas.openxmlformats.org/officeDocument/2006/relationships" xmlns:p="http://schemas.openxmlformats.org/presentationml/2006/main">
+  <p:cSld>
+    <p:spTree>
+      <p:nvGrpSpPr>
+        <p:cNvPr id="1" name=""/>
+        <p:cNvGrpSpPr/>
+        <p:nvPr/>
+      </p:nvGrpSpPr>
+      <p:grpSpPr>
+        <a:xfrm>
+          <a:off x="0" y="0"/>
+          <a:ext cx="0" cy="0"/>
+          <a:chOff x="0" y="0"/>
+          <a:chExt cx="0" cy="0"/>
+        </a:xfrm>
+      </p:grpSpPr>
+      <p:sp>
+        <p:nvSpPr>
+          <p:cNvPr id="2" name="Title 1">
+            <a:extLst>
+              <a:ext uri="{FF2B5EF4-FFF2-40B4-BE49-F238E27FC236}">
+                <a16:creationId xmlns:a16="http://schemas.microsoft.com/office/drawing/2014/main" id="{F8014ED6-E777-BABA-FCDB-A2BC082401D0}"/>
+              </a:ext>
+            </a:extLst>
+          </p:cNvPr>
+          <p:cNvSpPr>
+            <a:spLocks noGrp="1"/>
+          </p:cNvSpPr>
+          <p:nvPr>
+            <p:ph type="title"/>
+          </p:nvPr>
+        </p:nvSpPr>
+        <p:spPr/>
+        <p:txBody>
+          <a:bodyPr/>
+          <a:lstStyle/>
+          <a:p>
+            <a:endParaRPr lang="en-US"/>
+          </a:p>
+        </p:txBody>
+      </p:sp>
+      <p:sp>
+        <p:nvSpPr>
+          <p:cNvPr id="4" name="Content Placeholder 3">
+            <a:extLst>
+              <a:ext uri="{FF2B5EF4-FFF2-40B4-BE49-F238E27FC236}">
+                <a16:creationId xmlns:a16="http://schemas.microsoft.com/office/drawing/2014/main" id="{C630603E-F520-1578-58E8-4BE5AF6D7CED}"/>
+              </a:ext>
+            </a:extLst>
+          </p:cNvPr>
+          <p:cNvSpPr>
+            <a:spLocks noGrp="1"/>
+          </p:cNvSpPr>
+          <p:nvPr>
+            <p:ph idx="1"/>
+          </p:nvPr>
+        </p:nvSpPr>
+        <p:spPr/>
+        <p:txBody>
+          <a:bodyPr/>
+          <a:lstStyle/>
+          <a:p>
+            <a:endParaRPr lang="en-US" dirty="0"/>
+          </a:p>
+        </p:txBody>
+      </p:sp>
+    </p:spTree>
+    <p:extLst>
+      <p:ext uri="{BB962C8B-B14F-4D97-AF65-F5344CB8AC3E}">
+        <p14:creationId xmlns:p14="http://schemas.microsoft.com/office/powerpoint/2010/main" val="3352254752"/>
+      </p:ext>
+    </p:extLst>
+  </p:cSld>
+  <p:clrMapOvr>
+    <a:masterClrMapping/>
+  </p:clrMapOvr>
+</p:sld>
+</file>
+
+<file path=ppt/slides/slide7.xml><?xml version="1.0" encoding="utf-8"?>
 <p:sld xmlns:a="http://schemas.openxmlformats.org/drawingml/2006/main" xmlns:r="http://schemas.openxmlformats.org/officeDocument/2006/relationships" xmlns:p="http://schemas.openxmlformats.org/presentationml/2006/main">
   <p:cSld>
     <p:spTree>
@@ -22485,7 +24066,7 @@
 </p:sld>
 </file>
 
-<file path=ppt/slides/slide6.xml><?xml version="1.0" encoding="utf-8"?>
+<file path=ppt/slides/slide8.xml><?xml version="1.0" encoding="utf-8"?>
 <p:sld xmlns:a="http://schemas.openxmlformats.org/drawingml/2006/main" xmlns:r="http://schemas.openxmlformats.org/officeDocument/2006/relationships" xmlns:p="http://schemas.openxmlformats.org/presentationml/2006/main">
   <p:cSld>
     <p:spTree>
@@ -22673,7 +24254,7 @@
 </p:sld>
 </file>
 
-<file path=ppt/slides/slide7.xml><?xml version="1.0" encoding="utf-8"?>
+<file path=ppt/slides/slide9.xml><?xml version="1.0" encoding="utf-8"?>
 <p:sld xmlns:a="http://schemas.openxmlformats.org/drawingml/2006/main" xmlns:r="http://schemas.openxmlformats.org/officeDocument/2006/relationships" xmlns:p="http://schemas.openxmlformats.org/presentationml/2006/main">
   <p:cSld>
     <p:spTree>
@@ -22813,1519 +24394,6 @@
     <p:extLst>
       <p:ext uri="{BB962C8B-B14F-4D97-AF65-F5344CB8AC3E}">
         <p14:creationId xmlns:p14="http://schemas.microsoft.com/office/powerpoint/2010/main" val="107150565"/>
-      </p:ext>
-    </p:extLst>
-  </p:cSld>
-  <p:clrMapOvr>
-    <a:masterClrMapping/>
-  </p:clrMapOvr>
-</p:sld>
-</file>
-
-<file path=ppt/slides/slide8.xml><?xml version="1.0" encoding="utf-8"?>
-<p:sld xmlns:a="http://schemas.openxmlformats.org/drawingml/2006/main" xmlns:r="http://schemas.openxmlformats.org/officeDocument/2006/relationships" xmlns:p="http://schemas.openxmlformats.org/presentationml/2006/main">
-  <p:cSld>
-    <p:spTree>
-      <p:nvGrpSpPr>
-        <p:cNvPr id="1" name=""/>
-        <p:cNvGrpSpPr/>
-        <p:nvPr/>
-      </p:nvGrpSpPr>
-      <p:grpSpPr>
-        <a:xfrm>
-          <a:off x="0" y="0"/>
-          <a:ext cx="0" cy="0"/>
-          <a:chOff x="0" y="0"/>
-          <a:chExt cx="0" cy="0"/>
-        </a:xfrm>
-      </p:grpSpPr>
-      <p:sp>
-        <p:nvSpPr>
-          <p:cNvPr id="2" name="Title 1">
-            <a:extLst>
-              <a:ext uri="{FF2B5EF4-FFF2-40B4-BE49-F238E27FC236}">
-                <a16:creationId xmlns:a16="http://schemas.microsoft.com/office/drawing/2014/main" id="{D5521587-682C-AB8B-AEEC-95AEEF6B44B7}"/>
-              </a:ext>
-            </a:extLst>
-          </p:cNvPr>
-          <p:cNvSpPr>
-            <a:spLocks noGrp="1"/>
-          </p:cNvSpPr>
-          <p:nvPr>
-            <p:ph type="title"/>
-          </p:nvPr>
-        </p:nvSpPr>
-        <p:spPr/>
-        <p:txBody>
-          <a:bodyPr>
-            <a:normAutofit/>
-          </a:bodyPr>
-          <a:lstStyle/>
-          <a:p>
-            <a:r>
-              <a:rPr lang="en-US" dirty="0"/>
-              <a:t>Tokenize text using NLTK package</a:t>
-            </a:r>
-          </a:p>
-        </p:txBody>
-      </p:sp>
-      <p:sp>
-        <p:nvSpPr>
-          <p:cNvPr id="6" name="TextBox 5">
-            <a:extLst>
-              <a:ext uri="{FF2B5EF4-FFF2-40B4-BE49-F238E27FC236}">
-                <a16:creationId xmlns:a16="http://schemas.microsoft.com/office/drawing/2014/main" id="{1B5F427B-5A38-BC23-AAF5-9DB0E6087E63}"/>
-              </a:ext>
-            </a:extLst>
-          </p:cNvPr>
-          <p:cNvSpPr txBox="1"/>
-          <p:nvPr/>
-        </p:nvSpPr>
-        <p:spPr>
-          <a:xfrm>
-            <a:off x="982363" y="2526958"/>
-            <a:ext cx="10132540" cy="1543115"/>
-          </a:xfrm>
-          <a:prstGeom prst="rect">
-            <a:avLst/>
-          </a:prstGeom>
-          <a:noFill/>
-        </p:spPr>
-        <p:txBody>
-          <a:bodyPr wrap="square" rtlCol="0">
-            <a:spAutoFit/>
-          </a:bodyPr>
-          <a:lstStyle/>
-          <a:p>
-            <a:pPr>
-              <a:lnSpc>
-                <a:spcPts val="1425"/>
-              </a:lnSpc>
-              <a:buNone/>
-            </a:pPr>
-            <a:r>
-              <a:rPr lang="en-US" b="0" dirty="0">
-                <a:solidFill>
-                  <a:srgbClr val="0000FF"/>
-                </a:solidFill>
-                <a:effectLst/>
-                <a:latin typeface="Consolas" panose="020B0609020204030204" pitchFamily="49" charset="0"/>
-              </a:rPr>
-              <a:t>from</a:t>
-            </a:r>
-            <a:r>
-              <a:rPr lang="en-US" b="0" dirty="0">
-                <a:solidFill>
-                  <a:srgbClr val="000000"/>
-                </a:solidFill>
-                <a:effectLst/>
-                <a:latin typeface="Consolas" panose="020B0609020204030204" pitchFamily="49" charset="0"/>
-              </a:rPr>
-              <a:t> </a:t>
-            </a:r>
-            <a:r>
-              <a:rPr lang="en-US" b="0" dirty="0" err="1">
-                <a:solidFill>
-                  <a:srgbClr val="000000"/>
-                </a:solidFill>
-                <a:effectLst/>
-                <a:latin typeface="Consolas" panose="020B0609020204030204" pitchFamily="49" charset="0"/>
-              </a:rPr>
-              <a:t>nltk.tokenize</a:t>
-            </a:r>
-            <a:r>
-              <a:rPr lang="en-US" b="0" dirty="0">
-                <a:solidFill>
-                  <a:srgbClr val="000000"/>
-                </a:solidFill>
-                <a:effectLst/>
-                <a:latin typeface="Consolas" panose="020B0609020204030204" pitchFamily="49" charset="0"/>
-              </a:rPr>
-              <a:t> </a:t>
-            </a:r>
-            <a:r>
-              <a:rPr lang="en-US" b="0" dirty="0">
-                <a:solidFill>
-                  <a:srgbClr val="0000FF"/>
-                </a:solidFill>
-                <a:effectLst/>
-                <a:latin typeface="Consolas" panose="020B0609020204030204" pitchFamily="49" charset="0"/>
-              </a:rPr>
-              <a:t>import</a:t>
-            </a:r>
-            <a:r>
-              <a:rPr lang="en-US" b="0" dirty="0">
-                <a:solidFill>
-                  <a:srgbClr val="000000"/>
-                </a:solidFill>
-                <a:effectLst/>
-                <a:latin typeface="Consolas" panose="020B0609020204030204" pitchFamily="49" charset="0"/>
-              </a:rPr>
-              <a:t> </a:t>
-            </a:r>
-            <a:r>
-              <a:rPr lang="en-US" b="0" dirty="0" err="1">
-                <a:solidFill>
-                  <a:srgbClr val="000000"/>
-                </a:solidFill>
-                <a:effectLst/>
-                <a:latin typeface="Consolas" panose="020B0609020204030204" pitchFamily="49" charset="0"/>
-              </a:rPr>
-              <a:t>word_tokenize</a:t>
-            </a:r>
-            <a:endParaRPr lang="en-US" b="0" dirty="0">
-              <a:solidFill>
-                <a:srgbClr val="000000"/>
-              </a:solidFill>
-              <a:effectLst/>
-              <a:latin typeface="Consolas" panose="020B0609020204030204" pitchFamily="49" charset="0"/>
-            </a:endParaRPr>
-          </a:p>
-          <a:p>
-            <a:pPr>
-              <a:lnSpc>
-                <a:spcPts val="1425"/>
-              </a:lnSpc>
-              <a:buNone/>
-            </a:pPr>
-            <a:r>
-              <a:rPr lang="en-US" b="0" dirty="0">
-                <a:solidFill>
-                  <a:srgbClr val="008000"/>
-                </a:solidFill>
-                <a:effectLst/>
-                <a:latin typeface="Consolas" panose="020B0609020204030204" pitchFamily="49" charset="0"/>
-              </a:rPr>
-              <a:t>#punkt is a pretrained tokenization model used for splitting text into sentences and words.</a:t>
-            </a:r>
-            <a:endParaRPr lang="en-US" b="0" dirty="0">
-              <a:solidFill>
-                <a:srgbClr val="000000"/>
-              </a:solidFill>
-              <a:effectLst/>
-              <a:latin typeface="Consolas" panose="020B0609020204030204" pitchFamily="49" charset="0"/>
-            </a:endParaRPr>
-          </a:p>
-          <a:p>
-            <a:pPr>
-              <a:lnSpc>
-                <a:spcPts val="1425"/>
-              </a:lnSpc>
-              <a:buNone/>
-            </a:pPr>
-            <a:r>
-              <a:rPr lang="en-US" b="0" dirty="0" err="1">
-                <a:solidFill>
-                  <a:srgbClr val="000000"/>
-                </a:solidFill>
-                <a:effectLst/>
-                <a:latin typeface="Consolas" panose="020B0609020204030204" pitchFamily="49" charset="0"/>
-              </a:rPr>
-              <a:t>nltk.download</a:t>
-            </a:r>
-            <a:r>
-              <a:rPr lang="en-US" b="0" dirty="0">
-                <a:solidFill>
-                  <a:srgbClr val="000000"/>
-                </a:solidFill>
-                <a:effectLst/>
-                <a:latin typeface="Consolas" panose="020B0609020204030204" pitchFamily="49" charset="0"/>
-              </a:rPr>
-              <a:t>(</a:t>
-            </a:r>
-            <a:r>
-              <a:rPr lang="en-US" b="0" dirty="0">
-                <a:solidFill>
-                  <a:srgbClr val="A31515"/>
-                </a:solidFill>
-                <a:effectLst/>
-                <a:latin typeface="Consolas" panose="020B0609020204030204" pitchFamily="49" charset="0"/>
-              </a:rPr>
-              <a:t>'</a:t>
-            </a:r>
-            <a:r>
-              <a:rPr lang="en-US" b="0" dirty="0" err="1">
-                <a:solidFill>
-                  <a:srgbClr val="A31515"/>
-                </a:solidFill>
-                <a:effectLst/>
-                <a:latin typeface="Consolas" panose="020B0609020204030204" pitchFamily="49" charset="0"/>
-              </a:rPr>
-              <a:t>punkt</a:t>
-            </a:r>
-            <a:r>
-              <a:rPr lang="en-US" b="0" dirty="0">
-                <a:solidFill>
-                  <a:srgbClr val="A31515"/>
-                </a:solidFill>
-                <a:effectLst/>
-                <a:latin typeface="Consolas" panose="020B0609020204030204" pitchFamily="49" charset="0"/>
-              </a:rPr>
-              <a:t>'</a:t>
-            </a:r>
-            <a:r>
-              <a:rPr lang="en-US" b="0" dirty="0">
-                <a:solidFill>
-                  <a:srgbClr val="000000"/>
-                </a:solidFill>
-                <a:effectLst/>
-                <a:latin typeface="Consolas" panose="020B0609020204030204" pitchFamily="49" charset="0"/>
-              </a:rPr>
-              <a:t>)</a:t>
-            </a:r>
-          </a:p>
-          <a:p>
-            <a:pPr>
-              <a:lnSpc>
-                <a:spcPts val="1425"/>
-              </a:lnSpc>
-              <a:buNone/>
-            </a:pPr>
-            <a:br>
-              <a:rPr lang="en-US" b="0" dirty="0">
-                <a:solidFill>
-                  <a:srgbClr val="000000"/>
-                </a:solidFill>
-                <a:effectLst/>
-                <a:latin typeface="Consolas" panose="020B0609020204030204" pitchFamily="49" charset="0"/>
-              </a:rPr>
-            </a:br>
-            <a:r>
-              <a:rPr lang="en-US" b="0" dirty="0">
-                <a:solidFill>
-                  <a:srgbClr val="000000"/>
-                </a:solidFill>
-                <a:effectLst/>
-                <a:latin typeface="Consolas" panose="020B0609020204030204" pitchFamily="49" charset="0"/>
-              </a:rPr>
-              <a:t>sentence = </a:t>
-            </a:r>
-            <a:r>
-              <a:rPr lang="en-US" b="0" dirty="0">
-                <a:solidFill>
-                  <a:srgbClr val="A31515"/>
-                </a:solidFill>
-                <a:effectLst/>
-                <a:latin typeface="Consolas" panose="020B0609020204030204" pitchFamily="49" charset="0"/>
-              </a:rPr>
-              <a:t>"Large language models are revolutionizing business applications."</a:t>
-            </a:r>
-            <a:endParaRPr lang="en-US" b="0" dirty="0">
-              <a:solidFill>
-                <a:srgbClr val="000000"/>
-              </a:solidFill>
-              <a:effectLst/>
-              <a:latin typeface="Consolas" panose="020B0609020204030204" pitchFamily="49" charset="0"/>
-            </a:endParaRPr>
-          </a:p>
-          <a:p>
-            <a:pPr>
-              <a:lnSpc>
-                <a:spcPts val="1425"/>
-              </a:lnSpc>
-              <a:buNone/>
-            </a:pPr>
-            <a:r>
-              <a:rPr lang="en-US" b="0" dirty="0">
-                <a:solidFill>
-                  <a:srgbClr val="000000"/>
-                </a:solidFill>
-                <a:effectLst/>
-                <a:latin typeface="Consolas" panose="020B0609020204030204" pitchFamily="49" charset="0"/>
-              </a:rPr>
-              <a:t>tokens = </a:t>
-            </a:r>
-            <a:r>
-              <a:rPr lang="en-US" b="0" dirty="0" err="1">
-                <a:solidFill>
-                  <a:srgbClr val="000000"/>
-                </a:solidFill>
-                <a:effectLst/>
-                <a:latin typeface="Consolas" panose="020B0609020204030204" pitchFamily="49" charset="0"/>
-              </a:rPr>
-              <a:t>word_tokenize</a:t>
-            </a:r>
-            <a:r>
-              <a:rPr lang="en-US" b="0" dirty="0">
-                <a:solidFill>
-                  <a:srgbClr val="000000"/>
-                </a:solidFill>
-                <a:effectLst/>
-                <a:latin typeface="Consolas" panose="020B0609020204030204" pitchFamily="49" charset="0"/>
-              </a:rPr>
-              <a:t>(sentence)</a:t>
-            </a:r>
-          </a:p>
-          <a:p>
-            <a:pPr>
-              <a:lnSpc>
-                <a:spcPts val="1425"/>
-              </a:lnSpc>
-            </a:pPr>
-            <a:r>
-              <a:rPr lang="en-US" b="0" dirty="0">
-                <a:solidFill>
-                  <a:srgbClr val="000000"/>
-                </a:solidFill>
-                <a:effectLst/>
-                <a:latin typeface="Consolas" panose="020B0609020204030204" pitchFamily="49" charset="0"/>
-              </a:rPr>
-              <a:t>print(tokens)</a:t>
-            </a:r>
-          </a:p>
-        </p:txBody>
-      </p:sp>
-      <p:sp>
-        <p:nvSpPr>
-          <p:cNvPr id="11" name="TextBox 10">
-            <a:extLst>
-              <a:ext uri="{FF2B5EF4-FFF2-40B4-BE49-F238E27FC236}">
-                <a16:creationId xmlns:a16="http://schemas.microsoft.com/office/drawing/2014/main" id="{6E835F34-494B-6B04-2CA4-3234ED3663B0}"/>
-              </a:ext>
-            </a:extLst>
-          </p:cNvPr>
-          <p:cNvSpPr txBox="1"/>
-          <p:nvPr/>
-        </p:nvSpPr>
-        <p:spPr>
-          <a:xfrm>
-            <a:off x="982363" y="4630671"/>
-            <a:ext cx="9698510" cy="1477328"/>
-          </a:xfrm>
-          <a:prstGeom prst="rect">
-            <a:avLst/>
-          </a:prstGeom>
-          <a:noFill/>
-        </p:spPr>
-        <p:txBody>
-          <a:bodyPr wrap="square">
-            <a:spAutoFit/>
-          </a:bodyPr>
-          <a:lstStyle/>
-          <a:p>
-            <a:pPr algn="l">
-              <a:buNone/>
-            </a:pPr>
-            <a:r>
-              <a:rPr lang="en-US" b="0" i="0" dirty="0">
-                <a:solidFill>
-                  <a:srgbClr val="000000"/>
-                </a:solidFill>
-                <a:effectLst/>
-                <a:latin typeface="Consolas" panose="020B0609020204030204" pitchFamily="49" charset="0"/>
-              </a:rPr>
-              <a:t>Output:</a:t>
-            </a:r>
-          </a:p>
-          <a:p>
-            <a:pPr algn="l">
-              <a:buNone/>
-            </a:pPr>
-            <a:r>
-              <a:rPr lang="en-US" b="0" i="0" dirty="0">
-                <a:solidFill>
-                  <a:srgbClr val="000000"/>
-                </a:solidFill>
-                <a:effectLst/>
-                <a:latin typeface="Consolas" panose="020B0609020204030204" pitchFamily="49" charset="0"/>
-              </a:rPr>
-              <a:t>['Large', 'language', 'models', 'are', 'revolutionizing', 'business', 'applications', '.'] </a:t>
-            </a:r>
-          </a:p>
-          <a:p>
-            <a:pPr algn="l"/>
-            <a:r>
-              <a:rPr lang="en-US" b="0" i="0" dirty="0">
-                <a:solidFill>
-                  <a:srgbClr val="000000"/>
-                </a:solidFill>
-                <a:effectLst/>
-                <a:latin typeface="Consolas" panose="020B0609020204030204" pitchFamily="49" charset="0"/>
-              </a:rPr>
-              <a:t>[</a:t>
-            </a:r>
-            <a:r>
-              <a:rPr lang="en-US" b="0" i="0" dirty="0" err="1">
-                <a:solidFill>
-                  <a:srgbClr val="000000"/>
-                </a:solidFill>
-                <a:effectLst/>
-                <a:latin typeface="Consolas" panose="020B0609020204030204" pitchFamily="49" charset="0"/>
-              </a:rPr>
-              <a:t>nltk_data</a:t>
-            </a:r>
-            <a:r>
-              <a:rPr lang="en-US" b="0" i="0" dirty="0">
-                <a:solidFill>
-                  <a:srgbClr val="000000"/>
-                </a:solidFill>
-                <a:effectLst/>
-                <a:latin typeface="Consolas" panose="020B0609020204030204" pitchFamily="49" charset="0"/>
-              </a:rPr>
-              <a:t>] Downloading package </a:t>
-            </a:r>
-            <a:r>
-              <a:rPr lang="en-US" b="0" i="0" dirty="0" err="1">
-                <a:solidFill>
-                  <a:srgbClr val="000000"/>
-                </a:solidFill>
-                <a:effectLst/>
-                <a:latin typeface="Consolas" panose="020B0609020204030204" pitchFamily="49" charset="0"/>
-              </a:rPr>
-              <a:t>punkt</a:t>
-            </a:r>
-            <a:r>
-              <a:rPr lang="en-US" b="0" i="0" dirty="0">
-                <a:solidFill>
-                  <a:srgbClr val="000000"/>
-                </a:solidFill>
-                <a:effectLst/>
-                <a:latin typeface="Consolas" panose="020B0609020204030204" pitchFamily="49" charset="0"/>
-              </a:rPr>
-              <a:t> to /home/me/</a:t>
-            </a:r>
-            <a:r>
-              <a:rPr lang="en-US" b="0" i="0" dirty="0" err="1">
-                <a:solidFill>
-                  <a:srgbClr val="000000"/>
-                </a:solidFill>
-                <a:effectLst/>
-                <a:latin typeface="Consolas" panose="020B0609020204030204" pitchFamily="49" charset="0"/>
-              </a:rPr>
-              <a:t>nltk_data</a:t>
-            </a:r>
-            <a:r>
-              <a:rPr lang="en-US" b="0" i="0" dirty="0">
-                <a:solidFill>
-                  <a:srgbClr val="000000"/>
-                </a:solidFill>
-                <a:effectLst/>
-                <a:latin typeface="Consolas" panose="020B0609020204030204" pitchFamily="49" charset="0"/>
-              </a:rPr>
-              <a:t>... [</a:t>
-            </a:r>
-            <a:r>
-              <a:rPr lang="en-US" b="0" i="0" dirty="0" err="1">
-                <a:solidFill>
-                  <a:srgbClr val="000000"/>
-                </a:solidFill>
-                <a:effectLst/>
-                <a:latin typeface="Consolas" panose="020B0609020204030204" pitchFamily="49" charset="0"/>
-              </a:rPr>
-              <a:t>nltk_data</a:t>
-            </a:r>
-            <a:r>
-              <a:rPr lang="en-US" b="0" i="0" dirty="0">
-                <a:solidFill>
-                  <a:srgbClr val="000000"/>
-                </a:solidFill>
-                <a:effectLst/>
-                <a:latin typeface="Consolas" panose="020B0609020204030204" pitchFamily="49" charset="0"/>
-              </a:rPr>
-              <a:t>] Package </a:t>
-            </a:r>
-            <a:r>
-              <a:rPr lang="en-US" b="0" i="0" dirty="0" err="1">
-                <a:solidFill>
-                  <a:srgbClr val="000000"/>
-                </a:solidFill>
-                <a:effectLst/>
-                <a:latin typeface="Consolas" panose="020B0609020204030204" pitchFamily="49" charset="0"/>
-              </a:rPr>
-              <a:t>punkt</a:t>
-            </a:r>
-            <a:r>
-              <a:rPr lang="en-US" b="0" i="0" dirty="0">
-                <a:solidFill>
-                  <a:srgbClr val="000000"/>
-                </a:solidFill>
-                <a:effectLst/>
-                <a:latin typeface="Consolas" panose="020B0609020204030204" pitchFamily="49" charset="0"/>
-              </a:rPr>
-              <a:t> is already up-to-date!</a:t>
-            </a:r>
-          </a:p>
-        </p:txBody>
-      </p:sp>
-      <p:sp>
-        <p:nvSpPr>
-          <p:cNvPr id="5" name="Content Placeholder 2">
-            <a:extLst>
-              <a:ext uri="{FF2B5EF4-FFF2-40B4-BE49-F238E27FC236}">
-                <a16:creationId xmlns:a16="http://schemas.microsoft.com/office/drawing/2014/main" id="{276D0FCF-4391-4D56-854A-F184802E65F6}"/>
-              </a:ext>
-            </a:extLst>
-          </p:cNvPr>
-          <p:cNvSpPr txBox="1">
-            <a:spLocks/>
-          </p:cNvSpPr>
-          <p:nvPr/>
-        </p:nvSpPr>
-        <p:spPr>
-          <a:xfrm>
-            <a:off x="10162954" y="6435843"/>
-            <a:ext cx="1650788" cy="399925"/>
-          </a:xfrm>
-          <a:prstGeom prst="rect">
-            <a:avLst/>
-          </a:prstGeom>
-        </p:spPr>
-        <p:txBody>
-          <a:bodyPr vert="horz" lIns="91440" tIns="45720" rIns="91440" bIns="45720" rtlCol="0">
-            <a:normAutofit/>
-          </a:bodyPr>
-          <a:lstStyle>
-            <a:lvl1pPr marL="228600" indent="-228600" algn="l" defTabSz="914400" rtl="0" eaLnBrk="1" latinLnBrk="0" hangingPunct="1">
-              <a:lnSpc>
-                <a:spcPct val="90000"/>
-              </a:lnSpc>
-              <a:spcBef>
-                <a:spcPts val="1000"/>
-              </a:spcBef>
-              <a:buFont typeface="Arial" panose="020B0604020202020204" pitchFamily="34" charset="0"/>
-              <a:buChar char="•"/>
-              <a:defRPr sz="2400" kern="1200">
-                <a:solidFill>
-                  <a:schemeClr val="tx1"/>
-                </a:solidFill>
-                <a:latin typeface="+mn-lt"/>
-                <a:ea typeface="+mn-ea"/>
-                <a:cs typeface="+mn-cs"/>
-              </a:defRPr>
-            </a:lvl1pPr>
-            <a:lvl2pPr marL="685800" indent="-228600" algn="l" defTabSz="914400" rtl="0" eaLnBrk="1" latinLnBrk="0" hangingPunct="1">
-              <a:lnSpc>
-                <a:spcPct val="90000"/>
-              </a:lnSpc>
-              <a:spcBef>
-                <a:spcPts val="500"/>
-              </a:spcBef>
-              <a:buFont typeface="Arial" panose="020B0604020202020204" pitchFamily="34" charset="0"/>
-              <a:buChar char="•"/>
-              <a:defRPr sz="2000" kern="1200">
-                <a:solidFill>
-                  <a:schemeClr val="tx1"/>
-                </a:solidFill>
-                <a:latin typeface="+mn-lt"/>
-                <a:ea typeface="+mn-ea"/>
-                <a:cs typeface="+mn-cs"/>
-              </a:defRPr>
-            </a:lvl2pPr>
-            <a:lvl3pPr marL="1143000" indent="-228600" algn="l" defTabSz="914400" rtl="0" eaLnBrk="1" latinLnBrk="0" hangingPunct="1">
-              <a:lnSpc>
-                <a:spcPct val="90000"/>
-              </a:lnSpc>
-              <a:spcBef>
-                <a:spcPts val="500"/>
-              </a:spcBef>
-              <a:buFont typeface="Arial" panose="020B0604020202020204" pitchFamily="34" charset="0"/>
-              <a:buChar char="•"/>
-              <a:defRPr sz="1800" kern="1200">
-                <a:solidFill>
-                  <a:schemeClr val="tx1"/>
-                </a:solidFill>
-                <a:latin typeface="+mn-lt"/>
-                <a:ea typeface="+mn-ea"/>
-                <a:cs typeface="+mn-cs"/>
-              </a:defRPr>
-            </a:lvl3pPr>
-            <a:lvl4pPr marL="1600200" indent="-228600" algn="l" defTabSz="914400" rtl="0" eaLnBrk="1" latinLnBrk="0" hangingPunct="1">
-              <a:lnSpc>
-                <a:spcPct val="90000"/>
-              </a:lnSpc>
-              <a:spcBef>
-                <a:spcPts val="500"/>
-              </a:spcBef>
-              <a:buFont typeface="Arial" panose="020B0604020202020204" pitchFamily="34" charset="0"/>
-              <a:buChar char="•"/>
-              <a:defRPr sz="1600" kern="1200">
-                <a:solidFill>
-                  <a:schemeClr val="tx1"/>
-                </a:solidFill>
-                <a:latin typeface="+mn-lt"/>
-                <a:ea typeface="+mn-ea"/>
-                <a:cs typeface="+mn-cs"/>
-              </a:defRPr>
-            </a:lvl4pPr>
-            <a:lvl5pPr marL="2057400" indent="-228600" algn="l" defTabSz="914400" rtl="0" eaLnBrk="1" latinLnBrk="0" hangingPunct="1">
-              <a:lnSpc>
-                <a:spcPct val="90000"/>
-              </a:lnSpc>
-              <a:spcBef>
-                <a:spcPts val="500"/>
-              </a:spcBef>
-              <a:buFont typeface="Arial" panose="020B0604020202020204" pitchFamily="34" charset="0"/>
-              <a:buChar char="•"/>
-              <a:defRPr sz="1600" kern="1200">
-                <a:solidFill>
-                  <a:schemeClr val="tx1"/>
-                </a:solidFill>
-                <a:latin typeface="+mn-lt"/>
-                <a:ea typeface="+mn-ea"/>
-                <a:cs typeface="+mn-cs"/>
-              </a:defRPr>
-            </a:lvl5pPr>
-            <a:lvl6pPr marL="2514600" indent="-228600" algn="l" defTabSz="914400" rtl="0" eaLnBrk="1" latinLnBrk="0" hangingPunct="1">
-              <a:lnSpc>
-                <a:spcPct val="90000"/>
-              </a:lnSpc>
-              <a:spcBef>
-                <a:spcPts val="500"/>
-              </a:spcBef>
-              <a:buFont typeface="Arial" panose="020B0604020202020204" pitchFamily="34" charset="0"/>
-              <a:buChar char="•"/>
-              <a:defRPr sz="1800" kern="1200">
-                <a:solidFill>
-                  <a:schemeClr val="tx1"/>
-                </a:solidFill>
-                <a:latin typeface="+mn-lt"/>
-                <a:ea typeface="+mn-ea"/>
-                <a:cs typeface="+mn-cs"/>
-              </a:defRPr>
-            </a:lvl6pPr>
-            <a:lvl7pPr marL="2971800" indent="-228600" algn="l" defTabSz="914400" rtl="0" eaLnBrk="1" latinLnBrk="0" hangingPunct="1">
-              <a:lnSpc>
-                <a:spcPct val="90000"/>
-              </a:lnSpc>
-              <a:spcBef>
-                <a:spcPts val="500"/>
-              </a:spcBef>
-              <a:buFont typeface="Arial" panose="020B0604020202020204" pitchFamily="34" charset="0"/>
-              <a:buChar char="•"/>
-              <a:defRPr sz="1800" kern="1200">
-                <a:solidFill>
-                  <a:schemeClr val="tx1"/>
-                </a:solidFill>
-                <a:latin typeface="+mn-lt"/>
-                <a:ea typeface="+mn-ea"/>
-                <a:cs typeface="+mn-cs"/>
-              </a:defRPr>
-            </a:lvl7pPr>
-            <a:lvl8pPr marL="3429000" indent="-228600" algn="l" defTabSz="914400" rtl="0" eaLnBrk="1" latinLnBrk="0" hangingPunct="1">
-              <a:lnSpc>
-                <a:spcPct val="90000"/>
-              </a:lnSpc>
-              <a:spcBef>
-                <a:spcPts val="500"/>
-              </a:spcBef>
-              <a:buFont typeface="Arial" panose="020B0604020202020204" pitchFamily="34" charset="0"/>
-              <a:buChar char="•"/>
-              <a:defRPr sz="1800" kern="1200">
-                <a:solidFill>
-                  <a:schemeClr val="tx1"/>
-                </a:solidFill>
-                <a:latin typeface="+mn-lt"/>
-                <a:ea typeface="+mn-ea"/>
-                <a:cs typeface="+mn-cs"/>
-              </a:defRPr>
-            </a:lvl8pPr>
-            <a:lvl9pPr marL="3886200" indent="-228600" algn="l" defTabSz="914400" rtl="0" eaLnBrk="1" latinLnBrk="0" hangingPunct="1">
-              <a:lnSpc>
-                <a:spcPct val="90000"/>
-              </a:lnSpc>
-              <a:spcBef>
-                <a:spcPts val="500"/>
-              </a:spcBef>
-              <a:buFont typeface="Arial" panose="020B0604020202020204" pitchFamily="34" charset="0"/>
-              <a:buChar char="•"/>
-              <a:defRPr sz="1800" kern="1200">
-                <a:solidFill>
-                  <a:schemeClr val="tx1"/>
-                </a:solidFill>
-                <a:latin typeface="+mn-lt"/>
-                <a:ea typeface="+mn-ea"/>
-                <a:cs typeface="+mn-cs"/>
-              </a:defRPr>
-            </a:lvl9pPr>
-          </a:lstStyle>
-          <a:p>
-            <a:pPr marL="0" indent="0">
-              <a:buNone/>
-            </a:pPr>
-            <a:r>
-              <a:rPr lang="en-US" sz="1400" dirty="0">
-                <a:solidFill>
-                  <a:srgbClr val="0070C0"/>
-                </a:solidFill>
-              </a:rPr>
-              <a:t>Click to Open Code</a:t>
-            </a:r>
-          </a:p>
-        </p:txBody>
-      </p:sp>
-      <p:pic>
-        <p:nvPicPr>
-          <p:cNvPr id="7" name="Graphic 6">
-            <a:hlinkClick r:id="rId2"/>
-            <a:extLst>
-              <a:ext uri="{FF2B5EF4-FFF2-40B4-BE49-F238E27FC236}">
-                <a16:creationId xmlns:a16="http://schemas.microsoft.com/office/drawing/2014/main" id="{DC2CF0F7-2D5E-4690-AF02-D9A372D347F3}"/>
-              </a:ext>
-            </a:extLst>
-          </p:cNvPr>
-          <p:cNvPicPr>
-            <a:picLocks noChangeAspect="1"/>
-          </p:cNvPicPr>
-          <p:nvPr/>
-        </p:nvPicPr>
-        <p:blipFill>
-          <a:blip r:embed="rId3">
-            <a:extLst>
-              <a:ext uri="{96DAC541-7B7A-43D3-8B79-37D633B846F1}">
-                <asvg:svgBlip xmlns:asvg="http://schemas.microsoft.com/office/drawing/2016/SVG/main" r:embed="rId4"/>
-              </a:ext>
-            </a:extLst>
-          </a:blip>
-          <a:stretch>
-            <a:fillRect/>
-          </a:stretch>
-        </p:blipFill>
-        <p:spPr>
-          <a:xfrm>
-            <a:off x="10431136" y="6231200"/>
-            <a:ext cx="1114425" cy="190500"/>
-          </a:xfrm>
-          <a:prstGeom prst="rect">
-            <a:avLst/>
-          </a:prstGeom>
-        </p:spPr>
-      </p:pic>
-    </p:spTree>
-    <p:extLst>
-      <p:ext uri="{BB962C8B-B14F-4D97-AF65-F5344CB8AC3E}">
-        <p14:creationId xmlns:p14="http://schemas.microsoft.com/office/powerpoint/2010/main" val="3162735116"/>
-      </p:ext>
-    </p:extLst>
-  </p:cSld>
-  <p:clrMapOvr>
-    <a:masterClrMapping/>
-  </p:clrMapOvr>
-</p:sld>
-</file>
-
-<file path=ppt/slides/slide9.xml><?xml version="1.0" encoding="utf-8"?>
-<p:sld xmlns:a="http://schemas.openxmlformats.org/drawingml/2006/main" xmlns:r="http://schemas.openxmlformats.org/officeDocument/2006/relationships" xmlns:p="http://schemas.openxmlformats.org/presentationml/2006/main">
-  <p:cSld>
-    <p:spTree>
-      <p:nvGrpSpPr>
-        <p:cNvPr id="1" name=""/>
-        <p:cNvGrpSpPr/>
-        <p:nvPr/>
-      </p:nvGrpSpPr>
-      <p:grpSpPr>
-        <a:xfrm>
-          <a:off x="0" y="0"/>
-          <a:ext cx="0" cy="0"/>
-          <a:chOff x="0" y="0"/>
-          <a:chExt cx="0" cy="0"/>
-        </a:xfrm>
-      </p:grpSpPr>
-      <p:sp>
-        <p:nvSpPr>
-          <p:cNvPr id="2" name="Title 1">
-            <a:extLst>
-              <a:ext uri="{FF2B5EF4-FFF2-40B4-BE49-F238E27FC236}">
-                <a16:creationId xmlns:a16="http://schemas.microsoft.com/office/drawing/2014/main" id="{91029C9F-0A38-A846-9AF9-7AA426997374}"/>
-              </a:ext>
-            </a:extLst>
-          </p:cNvPr>
-          <p:cNvSpPr>
-            <a:spLocks noGrp="1"/>
-          </p:cNvSpPr>
-          <p:nvPr>
-            <p:ph type="title"/>
-          </p:nvPr>
-        </p:nvSpPr>
-        <p:spPr/>
-        <p:txBody>
-          <a:bodyPr/>
-          <a:lstStyle/>
-          <a:p>
-            <a:r>
-              <a:rPr lang="en-US" dirty="0"/>
-              <a:t>Normalization</a:t>
-            </a:r>
-          </a:p>
-        </p:txBody>
-      </p:sp>
-      <p:sp>
-        <p:nvSpPr>
-          <p:cNvPr id="3" name="Content Placeholder 2">
-            <a:extLst>
-              <a:ext uri="{FF2B5EF4-FFF2-40B4-BE49-F238E27FC236}">
-                <a16:creationId xmlns:a16="http://schemas.microsoft.com/office/drawing/2014/main" id="{A33A7CDC-7FBB-C0C1-952D-4A7F6B5C8037}"/>
-              </a:ext>
-            </a:extLst>
-          </p:cNvPr>
-          <p:cNvSpPr>
-            <a:spLocks noGrp="1"/>
-          </p:cNvSpPr>
-          <p:nvPr>
-            <p:ph idx="1"/>
-          </p:nvPr>
-        </p:nvSpPr>
-        <p:spPr>
-          <a:xfrm>
-            <a:off x="838200" y="1706008"/>
-            <a:ext cx="10515600" cy="820950"/>
-          </a:xfrm>
-        </p:spPr>
-        <p:txBody>
-          <a:bodyPr/>
-          <a:lstStyle/>
-          <a:p>
-            <a:r>
-              <a:rPr lang="en-US" dirty="0"/>
-              <a:t>Converting text to a standard form to reduce variability:</a:t>
-            </a:r>
-          </a:p>
-        </p:txBody>
-      </p:sp>
-      <p:sp>
-        <p:nvSpPr>
-          <p:cNvPr id="4" name="TextBox 3">
-            <a:extLst>
-              <a:ext uri="{FF2B5EF4-FFF2-40B4-BE49-F238E27FC236}">
-                <a16:creationId xmlns:a16="http://schemas.microsoft.com/office/drawing/2014/main" id="{DF4240B0-0DC1-0861-78F7-C2EDD932B078}"/>
-              </a:ext>
-            </a:extLst>
-          </p:cNvPr>
-          <p:cNvSpPr txBox="1"/>
-          <p:nvPr/>
-        </p:nvSpPr>
-        <p:spPr>
-          <a:xfrm>
-            <a:off x="1241853" y="2526958"/>
-            <a:ext cx="10225217" cy="1543115"/>
-          </a:xfrm>
-          <a:prstGeom prst="rect">
-            <a:avLst/>
-          </a:prstGeom>
-          <a:noFill/>
-        </p:spPr>
-        <p:txBody>
-          <a:bodyPr wrap="square" rtlCol="0">
-            <a:spAutoFit/>
-          </a:bodyPr>
-          <a:lstStyle/>
-          <a:p>
-            <a:pPr>
-              <a:lnSpc>
-                <a:spcPts val="1425"/>
-              </a:lnSpc>
-              <a:buNone/>
-            </a:pPr>
-            <a:r>
-              <a:rPr lang="en-US" b="0" dirty="0">
-                <a:solidFill>
-                  <a:srgbClr val="008000"/>
-                </a:solidFill>
-                <a:effectLst/>
-                <a:latin typeface="Consolas" panose="020B0609020204030204" pitchFamily="49" charset="0"/>
-              </a:rPr>
-              <a:t># Lowercasing</a:t>
-            </a:r>
-            <a:endParaRPr lang="en-US" b="0" dirty="0">
-              <a:solidFill>
-                <a:srgbClr val="000000"/>
-              </a:solidFill>
-              <a:effectLst/>
-              <a:latin typeface="Consolas" panose="020B0609020204030204" pitchFamily="49" charset="0"/>
-            </a:endParaRPr>
-          </a:p>
-          <a:p>
-            <a:pPr>
-              <a:lnSpc>
-                <a:spcPts val="1425"/>
-              </a:lnSpc>
-              <a:buNone/>
-            </a:pPr>
-            <a:r>
-              <a:rPr lang="en-US" b="0" dirty="0" err="1">
-                <a:solidFill>
-                  <a:srgbClr val="000000"/>
-                </a:solidFill>
-                <a:effectLst/>
-                <a:latin typeface="Consolas" panose="020B0609020204030204" pitchFamily="49" charset="0"/>
-              </a:rPr>
-              <a:t>normalized_tokens</a:t>
-            </a:r>
-            <a:r>
-              <a:rPr lang="en-US" b="0" dirty="0">
-                <a:solidFill>
-                  <a:srgbClr val="000000"/>
-                </a:solidFill>
-                <a:effectLst/>
-                <a:latin typeface="Consolas" panose="020B0609020204030204" pitchFamily="49" charset="0"/>
-              </a:rPr>
-              <a:t> = [</a:t>
-            </a:r>
-            <a:r>
-              <a:rPr lang="en-US" b="0" dirty="0" err="1">
-                <a:solidFill>
-                  <a:srgbClr val="000000"/>
-                </a:solidFill>
-                <a:effectLst/>
-                <a:latin typeface="Consolas" panose="020B0609020204030204" pitchFamily="49" charset="0"/>
-              </a:rPr>
-              <a:t>token.lower</a:t>
-            </a:r>
-            <a:r>
-              <a:rPr lang="en-US" b="0" dirty="0">
-                <a:solidFill>
-                  <a:srgbClr val="000000"/>
-                </a:solidFill>
-                <a:effectLst/>
-                <a:latin typeface="Consolas" panose="020B0609020204030204" pitchFamily="49" charset="0"/>
-              </a:rPr>
-              <a:t>() </a:t>
-            </a:r>
-            <a:r>
-              <a:rPr lang="en-US" b="0" dirty="0">
-                <a:solidFill>
-                  <a:srgbClr val="0000FF"/>
-                </a:solidFill>
-                <a:effectLst/>
-                <a:latin typeface="Consolas" panose="020B0609020204030204" pitchFamily="49" charset="0"/>
-              </a:rPr>
-              <a:t>for</a:t>
-            </a:r>
-            <a:r>
-              <a:rPr lang="en-US" b="0" dirty="0">
-                <a:solidFill>
-                  <a:srgbClr val="000000"/>
-                </a:solidFill>
-                <a:effectLst/>
-                <a:latin typeface="Consolas" panose="020B0609020204030204" pitchFamily="49" charset="0"/>
-              </a:rPr>
-              <a:t> token </a:t>
-            </a:r>
-            <a:r>
-              <a:rPr lang="en-US" b="0" dirty="0">
-                <a:solidFill>
-                  <a:srgbClr val="0000FF"/>
-                </a:solidFill>
-                <a:effectLst/>
-                <a:latin typeface="Consolas" panose="020B0609020204030204" pitchFamily="49" charset="0"/>
-              </a:rPr>
-              <a:t>in</a:t>
-            </a:r>
-            <a:r>
-              <a:rPr lang="en-US" b="0" dirty="0">
-                <a:solidFill>
-                  <a:srgbClr val="000000"/>
-                </a:solidFill>
-                <a:effectLst/>
-                <a:latin typeface="Consolas" panose="020B0609020204030204" pitchFamily="49" charset="0"/>
-              </a:rPr>
-              <a:t> tokens]</a:t>
-            </a:r>
-          </a:p>
-          <a:p>
-            <a:pPr>
-              <a:lnSpc>
-                <a:spcPts val="1425"/>
-              </a:lnSpc>
-              <a:buNone/>
-            </a:pPr>
-            <a:r>
-              <a:rPr lang="en-US" b="0" dirty="0">
-                <a:solidFill>
-                  <a:srgbClr val="000000"/>
-                </a:solidFill>
-                <a:effectLst/>
-                <a:latin typeface="Consolas" panose="020B0609020204030204" pitchFamily="49" charset="0"/>
-              </a:rPr>
-              <a:t>print(</a:t>
-            </a:r>
-            <a:r>
-              <a:rPr lang="en-US" b="0" dirty="0" err="1">
-                <a:solidFill>
-                  <a:srgbClr val="000000"/>
-                </a:solidFill>
-                <a:effectLst/>
-                <a:latin typeface="Consolas" panose="020B0609020204030204" pitchFamily="49" charset="0"/>
-              </a:rPr>
-              <a:t>normalized_tokens</a:t>
-            </a:r>
-            <a:r>
-              <a:rPr lang="en-US" b="0" dirty="0">
-                <a:solidFill>
-                  <a:srgbClr val="000000"/>
-                </a:solidFill>
-                <a:effectLst/>
-                <a:latin typeface="Consolas" panose="020B0609020204030204" pitchFamily="49" charset="0"/>
-              </a:rPr>
-              <a:t>)</a:t>
-            </a:r>
-          </a:p>
-          <a:p>
-            <a:pPr>
-              <a:lnSpc>
-                <a:spcPts val="1425"/>
-              </a:lnSpc>
-              <a:buNone/>
-            </a:pPr>
-            <a:br>
-              <a:rPr lang="en-US" b="0" dirty="0">
-                <a:solidFill>
-                  <a:srgbClr val="000000"/>
-                </a:solidFill>
-                <a:effectLst/>
-                <a:latin typeface="Consolas" panose="020B0609020204030204" pitchFamily="49" charset="0"/>
-              </a:rPr>
-            </a:br>
-            <a:r>
-              <a:rPr lang="en-US" b="0" dirty="0">
-                <a:solidFill>
-                  <a:srgbClr val="008000"/>
-                </a:solidFill>
-                <a:effectLst/>
-                <a:latin typeface="Consolas" panose="020B0609020204030204" pitchFamily="49" charset="0"/>
-              </a:rPr>
-              <a:t># Removing punctuation</a:t>
-            </a:r>
-            <a:endParaRPr lang="en-US" b="0" dirty="0">
-              <a:solidFill>
-                <a:srgbClr val="000000"/>
-              </a:solidFill>
-              <a:effectLst/>
-              <a:latin typeface="Consolas" panose="020B0609020204030204" pitchFamily="49" charset="0"/>
-            </a:endParaRPr>
-          </a:p>
-          <a:p>
-            <a:pPr>
-              <a:lnSpc>
-                <a:spcPts val="1425"/>
-              </a:lnSpc>
-              <a:buNone/>
-            </a:pPr>
-            <a:r>
-              <a:rPr lang="en-US" b="0" dirty="0">
-                <a:solidFill>
-                  <a:srgbClr val="0000FF"/>
-                </a:solidFill>
-                <a:effectLst/>
-                <a:latin typeface="Consolas" panose="020B0609020204030204" pitchFamily="49" charset="0"/>
-              </a:rPr>
-              <a:t>import</a:t>
-            </a:r>
-            <a:r>
-              <a:rPr lang="en-US" b="0" dirty="0">
-                <a:solidFill>
-                  <a:srgbClr val="000000"/>
-                </a:solidFill>
-                <a:effectLst/>
-                <a:latin typeface="Consolas" panose="020B0609020204030204" pitchFamily="49" charset="0"/>
-              </a:rPr>
-              <a:t> re</a:t>
-            </a:r>
-          </a:p>
-          <a:p>
-            <a:pPr>
-              <a:lnSpc>
-                <a:spcPts val="1425"/>
-              </a:lnSpc>
-              <a:buNone/>
-            </a:pPr>
-            <a:r>
-              <a:rPr lang="en-US" b="0" dirty="0" err="1">
-                <a:solidFill>
-                  <a:srgbClr val="000000"/>
-                </a:solidFill>
-                <a:effectLst/>
-                <a:latin typeface="Consolas" panose="020B0609020204030204" pitchFamily="49" charset="0"/>
-              </a:rPr>
-              <a:t>normalized_tokens</a:t>
-            </a:r>
-            <a:r>
-              <a:rPr lang="en-US" b="0" dirty="0">
-                <a:solidFill>
-                  <a:srgbClr val="000000"/>
-                </a:solidFill>
-                <a:effectLst/>
-                <a:latin typeface="Consolas" panose="020B0609020204030204" pitchFamily="49" charset="0"/>
-              </a:rPr>
-              <a:t> = [</a:t>
-            </a:r>
-            <a:r>
-              <a:rPr lang="en-US" b="0" dirty="0" err="1">
-                <a:solidFill>
-                  <a:srgbClr val="000000"/>
-                </a:solidFill>
-                <a:effectLst/>
-                <a:latin typeface="Consolas" panose="020B0609020204030204" pitchFamily="49" charset="0"/>
-              </a:rPr>
-              <a:t>re.sub</a:t>
-            </a:r>
-            <a:r>
-              <a:rPr lang="en-US" b="0" dirty="0">
-                <a:solidFill>
-                  <a:srgbClr val="000000"/>
-                </a:solidFill>
-                <a:effectLst/>
-                <a:latin typeface="Consolas" panose="020B0609020204030204" pitchFamily="49" charset="0"/>
-              </a:rPr>
-              <a:t>(</a:t>
-            </a:r>
-            <a:r>
-              <a:rPr lang="en-US" b="0" dirty="0">
-                <a:solidFill>
-                  <a:srgbClr val="0000FF"/>
-                </a:solidFill>
-                <a:effectLst/>
-                <a:latin typeface="Consolas" panose="020B0609020204030204" pitchFamily="49" charset="0"/>
-              </a:rPr>
-              <a:t>r</a:t>
-            </a:r>
-            <a:r>
-              <a:rPr lang="en-US" b="0" dirty="0">
-                <a:solidFill>
-                  <a:srgbClr val="811F3F"/>
-                </a:solidFill>
-                <a:effectLst/>
-                <a:latin typeface="Consolas" panose="020B0609020204030204" pitchFamily="49" charset="0"/>
-              </a:rPr>
-              <a:t>'[</a:t>
-            </a:r>
-            <a:r>
-              <a:rPr lang="en-US" b="0" dirty="0">
-                <a:solidFill>
-                  <a:srgbClr val="000000"/>
-                </a:solidFill>
-                <a:effectLst/>
-                <a:latin typeface="Consolas" panose="020B0609020204030204" pitchFamily="49" charset="0"/>
-              </a:rPr>
-              <a:t>^</a:t>
-            </a:r>
-            <a:r>
-              <a:rPr lang="en-US" b="0" dirty="0">
-                <a:solidFill>
-                  <a:srgbClr val="811F3F"/>
-                </a:solidFill>
-                <a:effectLst/>
-                <a:latin typeface="Consolas" panose="020B0609020204030204" pitchFamily="49" charset="0"/>
-              </a:rPr>
-              <a:t>\w\s]'</a:t>
-            </a:r>
-            <a:r>
-              <a:rPr lang="en-US" b="0" dirty="0">
-                <a:solidFill>
-                  <a:srgbClr val="000000"/>
-                </a:solidFill>
-                <a:effectLst/>
-                <a:latin typeface="Consolas" panose="020B0609020204030204" pitchFamily="49" charset="0"/>
-              </a:rPr>
-              <a:t>, </a:t>
-            </a:r>
-            <a:r>
-              <a:rPr lang="en-US" b="0" dirty="0">
-                <a:solidFill>
-                  <a:srgbClr val="A31515"/>
-                </a:solidFill>
-                <a:effectLst/>
-                <a:latin typeface="Consolas" panose="020B0609020204030204" pitchFamily="49" charset="0"/>
-              </a:rPr>
-              <a:t>''</a:t>
-            </a:r>
-            <a:r>
-              <a:rPr lang="en-US" b="0" dirty="0">
-                <a:solidFill>
-                  <a:srgbClr val="000000"/>
-                </a:solidFill>
-                <a:effectLst/>
-                <a:latin typeface="Consolas" panose="020B0609020204030204" pitchFamily="49" charset="0"/>
-              </a:rPr>
-              <a:t>, </a:t>
-            </a:r>
-            <a:r>
-              <a:rPr lang="en-US" b="0" dirty="0" err="1">
-                <a:solidFill>
-                  <a:srgbClr val="000000"/>
-                </a:solidFill>
-                <a:effectLst/>
-                <a:latin typeface="Consolas" panose="020B0609020204030204" pitchFamily="49" charset="0"/>
-              </a:rPr>
-              <a:t>token.lower</a:t>
-            </a:r>
-            <a:r>
-              <a:rPr lang="en-US" b="0" dirty="0">
-                <a:solidFill>
-                  <a:srgbClr val="000000"/>
-                </a:solidFill>
-                <a:effectLst/>
-                <a:latin typeface="Consolas" panose="020B0609020204030204" pitchFamily="49" charset="0"/>
-              </a:rPr>
-              <a:t>()) </a:t>
-            </a:r>
-            <a:r>
-              <a:rPr lang="en-US" b="0" dirty="0">
-                <a:solidFill>
-                  <a:srgbClr val="0000FF"/>
-                </a:solidFill>
-                <a:effectLst/>
-                <a:latin typeface="Consolas" panose="020B0609020204030204" pitchFamily="49" charset="0"/>
-              </a:rPr>
-              <a:t>for</a:t>
-            </a:r>
-            <a:r>
-              <a:rPr lang="en-US" b="0" dirty="0">
-                <a:solidFill>
-                  <a:srgbClr val="000000"/>
-                </a:solidFill>
-                <a:effectLst/>
-                <a:latin typeface="Consolas" panose="020B0609020204030204" pitchFamily="49" charset="0"/>
-              </a:rPr>
-              <a:t> token </a:t>
-            </a:r>
-            <a:r>
-              <a:rPr lang="en-US" b="0" dirty="0">
-                <a:solidFill>
-                  <a:srgbClr val="0000FF"/>
-                </a:solidFill>
-                <a:effectLst/>
-                <a:latin typeface="Consolas" panose="020B0609020204030204" pitchFamily="49" charset="0"/>
-              </a:rPr>
-              <a:t>in</a:t>
-            </a:r>
-            <a:r>
-              <a:rPr lang="en-US" b="0" dirty="0">
-                <a:solidFill>
-                  <a:srgbClr val="000000"/>
-                </a:solidFill>
-                <a:effectLst/>
-                <a:latin typeface="Consolas" panose="020B0609020204030204" pitchFamily="49" charset="0"/>
-              </a:rPr>
-              <a:t> tokens]</a:t>
-            </a:r>
-          </a:p>
-          <a:p>
-            <a:pPr>
-              <a:lnSpc>
-                <a:spcPts val="1425"/>
-              </a:lnSpc>
-            </a:pPr>
-            <a:r>
-              <a:rPr lang="en-US" b="0" dirty="0">
-                <a:solidFill>
-                  <a:srgbClr val="000000"/>
-                </a:solidFill>
-                <a:effectLst/>
-                <a:latin typeface="Consolas" panose="020B0609020204030204" pitchFamily="49" charset="0"/>
-              </a:rPr>
-              <a:t>print(</a:t>
-            </a:r>
-            <a:r>
-              <a:rPr lang="en-US" b="0" dirty="0" err="1">
-                <a:solidFill>
-                  <a:srgbClr val="000000"/>
-                </a:solidFill>
-                <a:effectLst/>
-                <a:latin typeface="Consolas" panose="020B0609020204030204" pitchFamily="49" charset="0"/>
-              </a:rPr>
-              <a:t>normalized_tokens</a:t>
-            </a:r>
-            <a:r>
-              <a:rPr lang="en-US" b="0" dirty="0">
-                <a:solidFill>
-                  <a:srgbClr val="000000"/>
-                </a:solidFill>
-                <a:effectLst/>
-                <a:latin typeface="Consolas" panose="020B0609020204030204" pitchFamily="49" charset="0"/>
-              </a:rPr>
-              <a:t>)</a:t>
-            </a:r>
-          </a:p>
-        </p:txBody>
-      </p:sp>
-      <p:sp>
-        <p:nvSpPr>
-          <p:cNvPr id="1044" name="TextBox 1043">
-            <a:extLst>
-              <a:ext uri="{FF2B5EF4-FFF2-40B4-BE49-F238E27FC236}">
-                <a16:creationId xmlns:a16="http://schemas.microsoft.com/office/drawing/2014/main" id="{75470B80-147E-475F-A4A3-BAFF5796EB38}"/>
-              </a:ext>
-            </a:extLst>
-          </p:cNvPr>
-          <p:cNvSpPr txBox="1"/>
-          <p:nvPr/>
-        </p:nvSpPr>
-        <p:spPr>
-          <a:xfrm>
-            <a:off x="7755147" y="4135860"/>
-            <a:ext cx="3868282" cy="1754326"/>
-          </a:xfrm>
-          <a:prstGeom prst="rect">
-            <a:avLst/>
-          </a:prstGeom>
-          <a:noFill/>
-        </p:spPr>
-        <p:txBody>
-          <a:bodyPr wrap="square">
-            <a:spAutoFit/>
-          </a:bodyPr>
-          <a:lstStyle/>
-          <a:p>
-            <a:r>
-              <a:rPr lang="en-US" dirty="0"/>
-              <a:t>Output:</a:t>
-            </a:r>
-          </a:p>
-          <a:p>
-            <a:r>
-              <a:rPr lang="en-US" dirty="0"/>
-              <a:t>['large', 'language', 'models', 'are', 'revolutionizing', 'business', 'applications', '.']['large', 'language', 'models', 'are', 'revolutionizing', 'business', 'applications', '']</a:t>
-            </a:r>
-          </a:p>
-        </p:txBody>
-      </p:sp>
-      <p:sp>
-        <p:nvSpPr>
-          <p:cNvPr id="8" name="TextBox 7">
-            <a:extLst>
-              <a:ext uri="{FF2B5EF4-FFF2-40B4-BE49-F238E27FC236}">
-                <a16:creationId xmlns:a16="http://schemas.microsoft.com/office/drawing/2014/main" id="{A4BECA11-0014-431F-A8D8-3FFAF66D6978}"/>
-              </a:ext>
-            </a:extLst>
-          </p:cNvPr>
-          <p:cNvSpPr txBox="1"/>
-          <p:nvPr/>
-        </p:nvSpPr>
-        <p:spPr>
-          <a:xfrm>
-            <a:off x="1241853" y="4070073"/>
-            <a:ext cx="6306260" cy="2785378"/>
-          </a:xfrm>
-          <a:prstGeom prst="rect">
-            <a:avLst/>
-          </a:prstGeom>
-          <a:noFill/>
-        </p:spPr>
-        <p:txBody>
-          <a:bodyPr wrap="square" rtlCol="0">
-            <a:spAutoFit/>
-          </a:bodyPr>
-          <a:lstStyle/>
-          <a:p>
-            <a:pPr>
-              <a:lnSpc>
-                <a:spcPts val="1425"/>
-              </a:lnSpc>
-              <a:buNone/>
-            </a:pPr>
-            <a:r>
-              <a:rPr lang="en-US" sz="1200" dirty="0">
-                <a:solidFill>
-                  <a:srgbClr val="000000"/>
-                </a:solidFill>
-                <a:latin typeface="Consolas" panose="020B0609020204030204" pitchFamily="49" charset="0"/>
-              </a:rPr>
-              <a:t>The regular expression r'[^\w\s]' does the following:</a:t>
-            </a:r>
-          </a:p>
-          <a:p>
-            <a:pPr marL="171450" indent="-171450">
-              <a:lnSpc>
-                <a:spcPts val="1425"/>
-              </a:lnSpc>
-              <a:buFont typeface="Arial" panose="020B0604020202020204" pitchFamily="34" charset="0"/>
-              <a:buChar char="•"/>
-            </a:pPr>
-            <a:r>
-              <a:rPr lang="en-US" sz="1200" dirty="0">
-                <a:solidFill>
-                  <a:srgbClr val="000000"/>
-                </a:solidFill>
-                <a:latin typeface="Consolas" panose="020B0609020204030204" pitchFamily="49" charset="0"/>
-              </a:rPr>
-              <a:t>r'...': This denotes a raw string in Python. Raw strings treat backslashes \ as literal characters, which is crucial for regular expressions.</a:t>
-            </a:r>
-          </a:p>
-          <a:p>
-            <a:pPr marL="171450" indent="-171450">
-              <a:lnSpc>
-                <a:spcPts val="1425"/>
-              </a:lnSpc>
-              <a:buFont typeface="Arial" panose="020B0604020202020204" pitchFamily="34" charset="0"/>
-              <a:buChar char="•"/>
-            </a:pPr>
-            <a:r>
-              <a:rPr lang="en-US" sz="1200" dirty="0">
-                <a:solidFill>
-                  <a:srgbClr val="000000"/>
-                </a:solidFill>
-                <a:latin typeface="Consolas" panose="020B0609020204030204" pitchFamily="49" charset="0"/>
-              </a:rPr>
-              <a:t>[...]: This represents a character set.^: Inside a character set, ^ negates the set. It means "match any character not in this set.</a:t>
-            </a:r>
-          </a:p>
-          <a:p>
-            <a:pPr marL="171450" indent="-171450">
-              <a:lnSpc>
-                <a:spcPts val="1425"/>
-              </a:lnSpc>
-              <a:buFont typeface="Arial" panose="020B0604020202020204" pitchFamily="34" charset="0"/>
-              <a:buChar char="•"/>
-            </a:pPr>
-            <a:r>
-              <a:rPr lang="en-US" sz="1200" dirty="0">
-                <a:solidFill>
-                  <a:srgbClr val="000000"/>
-                </a:solidFill>
-                <a:latin typeface="Consolas" panose="020B0609020204030204" pitchFamily="49" charset="0"/>
-              </a:rPr>
-              <a:t>"\w: This matches any word character, which includes alphanumeric characters (letters and digits) and the underscore (_).</a:t>
-            </a:r>
-          </a:p>
-          <a:p>
-            <a:pPr marL="171450" indent="-171450">
-              <a:lnSpc>
-                <a:spcPts val="1425"/>
-              </a:lnSpc>
-              <a:buFont typeface="Arial" panose="020B0604020202020204" pitchFamily="34" charset="0"/>
-              <a:buChar char="•"/>
-            </a:pPr>
-            <a:r>
-              <a:rPr lang="en-US" sz="1200" dirty="0">
-                <a:solidFill>
-                  <a:srgbClr val="000000"/>
-                </a:solidFill>
-                <a:latin typeface="Consolas" panose="020B0609020204030204" pitchFamily="49" charset="0"/>
-              </a:rPr>
-              <a:t>\s: This matches any whitespace character, such as spaces, tabs, and newlines.</a:t>
-            </a:r>
-          </a:p>
-          <a:p>
-            <a:pPr marL="171450" indent="-171450">
-              <a:lnSpc>
-                <a:spcPts val="1425"/>
-              </a:lnSpc>
-              <a:buFont typeface="Arial" panose="020B0604020202020204" pitchFamily="34" charset="0"/>
-              <a:buChar char="•"/>
-            </a:pPr>
-            <a:r>
-              <a:rPr lang="en-US" sz="1200" dirty="0">
-                <a:solidFill>
-                  <a:srgbClr val="000000"/>
-                </a:solidFill>
-                <a:latin typeface="Consolas" panose="020B0609020204030204" pitchFamily="49" charset="0"/>
-              </a:rPr>
-              <a:t>Therefore, r'[^\w\s]' matches any character that is not a word character or a whitespace character. In simpler terms, it matches any non-alphanumeric, non-underscore, and non-whitespace character. This effectively targets punctuation marks, symbols, and other special characters.</a:t>
-            </a:r>
-            <a:endParaRPr lang="en-US" sz="1200" b="0" dirty="0">
-              <a:solidFill>
-                <a:srgbClr val="000000"/>
-              </a:solidFill>
-              <a:effectLst/>
-              <a:latin typeface="Consolas" panose="020B0609020204030204" pitchFamily="49" charset="0"/>
-            </a:endParaRPr>
-          </a:p>
-        </p:txBody>
-      </p:sp>
-    </p:spTree>
-    <p:extLst>
-      <p:ext uri="{BB962C8B-B14F-4D97-AF65-F5344CB8AC3E}">
-        <p14:creationId xmlns:p14="http://schemas.microsoft.com/office/powerpoint/2010/main" val="601496234"/>
       </p:ext>
     </p:extLst>
   </p:cSld>
